--- a/resources/deliverables/AoU_Roadmap_Refresh_Draft_Deck.pptx
+++ b/resources/deliverables/AoU_Roadmap_Refresh_Draft_Deck.pptx
@@ -720,7 +720,7 @@
               <a:rPr sz="1000">
                 <a:latin typeface="Helvetica"/>
               </a:rPr>
-              <a:t>Under-indexed (left chart): multi-omics 1.7% vs UKB 10%, imaging 0.6% vs UKB 8.1%, microbiome 0.8% vs FinnGen 14%, rare disease 3.9% vs UKB 17%, aging 4.2% vs UKB 14.9%.</a:t>
+              <a:t>Under-indexed (left chart): multi-omics 1.7% vs UKB 10%, imaging 0.6% vs UKB 8.0%, microbiome 0.8% vs FinnGen 14%, rare disease 3.8% vs UKB 18%, aging 5.5% vs UKB 15.7%.</a:t>
             </a:r>
           </a:p>
           <a:p>
@@ -728,7 +728,7 @@
               <a:rPr sz="1000">
                 <a:latin typeface="Helvetica"/>
               </a:rPr>
-              <a:t>Over-indexed (right chart): ELSI 21.2× peer median, SDOH 5.1×, PGx 4.6×, methods 3.0×. These are AoU's DEFENSIBLE IDENTITY — distinctive strengths the Refresh must preserve.</a:t>
+              <a:t>Over-indexed (right chart): ELSI 26.3× peer median, SDOH 5.1×, PGx 4.6×, methods 3.0×. These are AoU's DEFENSIBLE IDENTITY — distinctive strengths the Refresh must preserve.</a:t>
             </a:r>
           </a:p>
           <a:p>
@@ -736,7 +736,7 @@
               <a:rPr sz="1000">
                 <a:latin typeface="Helvetica"/>
               </a:rPr>
-              <a:t>Caveats: PubMed-name-search has known undercount (especially MVP); pre-2023 baseline is small (157 AoU pubs); use STATIC SHARE INDEX, not trend differentials. Dermatology 7.8× over-index is an artifact (1-2 prolific groups).</a:t>
+              <a:t>Caveats: PubMed-name-search has known undercount (especially MVP); pre-2023 baseline is small (157 AoU pubs); use STATIC SHARE INDEX, not trend differentials. Dermatology 6.9× over-index is an artifact (1-2 prolific groups).</a:t>
             </a:r>
           </a:p>
         </p:txBody>
@@ -817,7 +817,7 @@
               <a:rPr sz="1000">
                 <a:latin typeface="Helvetica"/>
               </a:rPr>
-              <a:t>Rec 1 (3.71 mean): 'Add a Data, AI &amp; Methods focus area.' 18% corpus orphan; HA4 31 AI pubs; NLM-G1 explicit alignment. Risk: Sci Com may prefer reorganization to addition; defend with the empirical orphan count.</a:t>
+              <a:t>Rec 1 (3.71 mean): 'Add a Data, AI &amp; Methods focus area.' 18% corpus orphan; HA4 33 AI pubs; NLM-G1 explicit alignment. Risk: Sci Com may prefer reorganization to addition; defend with the empirical orphan count.</a:t>
             </a:r>
           </a:p>
           <a:p>
@@ -1213,7 +1213,7 @@
               <a:rPr sz="1000">
                 <a:latin typeface="Helvetica"/>
               </a:rPr>
-              <a:t>Rec 2 (3.60): the four-strength narrative is the MOST EVIDENCE-DRIVEN recommendation in any WG — peer-index numbers are precise from the corpus analysis. Distinctive ≠ growing; the headline rests on these four genuine over-indexes. Dermatology 7.8× over-index is an artifact (rehearsed answer required).</a:t>
+              <a:t>Rec 2 (3.60): the four-strength narrative is the MOST EVIDENCE-DRIVEN recommendation in any WG — peer-index numbers are precise from the corpus analysis. Distinctive ≠ growing; the headline rests on these four genuine over-indexes. Dermatology 6.9× over-index is an artifact (rehearsed answer required).</a:t>
             </a:r>
           </a:p>
           <a:p>
@@ -1310,7 +1310,7 @@
               <a:rPr sz="1000">
                 <a:latin typeface="Helvetica"/>
               </a:rPr>
-              <a:t>CC-5 (Aging/ADRD) is the most important flag because no Top-3 currently owns it. AoU is flat at 4.2% post-2023 while every peer biobank surges in the lecanemab/donanemab era. Structural advantage (EHR + UBR diversity) but under-utilization. NIA engagement workstream is the natural answer; outside any current Top-3.</a:t>
+              <a:t>CC-5 (Aging/ADRD) is a flag because no Top-3 currently owns it. AoU is at 6.0% post-2023 (≈peer median, index 0.84×) and growing (+4.7), but still trailing UKB's +6.9 surge in the lecanemab/donanemab era. Structural advantage (EHR + UBR diversity); the gap is narrowing rather than flat, so this is now a weaker-evidence flag than in the prior draft. NIA engagement workstream is the natural answer; outside any current Top-3.</a:t>
             </a:r>
           </a:p>
         </p:txBody>
@@ -1391,7 +1391,7 @@
               <a:rPr sz="1000">
                 <a:latin typeface="Helvetica"/>
               </a:rPr>
-              <a:t>The dermatology caveat is NON-NEGOTIABLE to include — if Sci Com or external audiences see 'dermatology peer-index 7.8×' without context, they may push to elevate dermatology, which would mislead the Roadmap. Phase 1 README flagged the 1-2-prolific-groups origin; Phase 3b temporal trends show declining share.</a:t>
+              <a:t>The dermatology caveat is NON-NEGOTIABLE to include — if Sci Com or external audiences see 'dermatology peer-index 6.9×' without context, they may push to elevate dermatology, which would mislead the Roadmap. Phase 1 README flagged the 1-2-prolific-groups origin; Phase 3b temporal trends show declining share.</a:t>
             </a:r>
           </a:p>
           <a:p>
@@ -1853,7 +1853,7 @@
               <a:rPr sz="1000">
                 <a:latin typeface="Helvetica"/>
               </a:rPr>
-              <a:t>Theme 3 (Methods/AI) — 251 pubs / 2,389 projects, 18.3% pub share / 18.5% project share — is the single largest orphan in the 19→8 crosswalk. This is the empirical case for the 9th focus area.</a:t>
+              <a:t>Theme 3 (Methods/AI) — 262 pubs / 2,388 projects, 18.4% pub share / 18.5% project share — is the single largest orphan in the 19→8 crosswalk. This is the empirical case for the 9th focus area.</a:t>
             </a:r>
           </a:p>
           <a:p>
@@ -1861,7 +1861,7 @@
               <a:rPr sz="1000">
                 <a:latin typeface="Helvetica"/>
               </a:rPr>
-              <a:t>Theme 12 (Dermatology) at 14.3% share is anomalous and driven by 1–2 prolific groups per Phase 1 README; trend is declining (−3.9). Flagged on slide 18 (Caveats).</a:t>
+              <a:t>Theme 12 (Dermatology) at 13.9% share is anomalous and driven by 1–2 prolific groups per Phase 1 README; trend is declining (−4.4). Flagged on slide 18 (Caveats).</a:t>
             </a:r>
           </a:p>
           <a:p>
@@ -1950,7 +1950,7 @@
               <a:rPr sz="1000">
                 <a:latin typeface="Helvetica"/>
               </a:rPr>
-              <a:t>The crosswalk's Q6 answer in one paragraph: the 8 areas hold for disease anchoring (FA1 73%, FA8 53%, FA7 51%) but three structural problems exist — (a) theme 3 methods/AI orphan, (b) wearables orphan despite being a slide-7 priority, (c) multi-omics + imaging + AI buried in FA8 / theme 3.</a:t>
+              <a:t>The crosswalk's Q6 answer in one paragraph: the 8 areas hold for disease anchoring (FA1 74%, FA8 54%, FA7 50%) but three structural problems exist — (a) theme 3 methods/AI orphan, (b) wearables orphan despite being a slide-7 priority, (c) multi-omics + imaging + AI buried in FA8 / theme 3.</a:t>
             </a:r>
           </a:p>
           <a:p>
@@ -2047,7 +2047,7 @@
               <a:rPr sz="1000">
                 <a:latin typeface="Helvetica"/>
               </a:rPr>
-              <a:t>Wearables specifically: the trend score is +1.0 — flat in relative terms. Wearables have already matured to a permanent place in the work but the framework hasn't caught up. This is a 'recognition gap, not growth gap' — important to surface explicitly so Sci Com doesn't try to invest in something that's already steady-state.</a:t>
+              <a:t>Wearables specifically: the trend score is +0.2 — flat in relative terms. Wearables have already matured to a permanent place in the work but the framework hasn't caught up. This is a 'recognition gap, not growth gap' — important to surface explicitly so Sci Com doesn't try to invest in something that's already steady-state.</a:t>
             </a:r>
           </a:p>
         </p:txBody>
@@ -6828,7 +6828,7 @@
                 </a:solidFill>
                 <a:latin typeface="Helvetica"/>
               </a:rPr>
-              <a:t>Lecanemab/donanemab era  ↔  AoU flat at 4.2%</a:t>
+              <a:t>Lecanemab/donanemab era  ↔  AoU at 6.0% (near peer median)</a:t>
             </a:r>
           </a:p>
         </p:txBody>
@@ -6867,7 +6867,7 @@
                 </a:solidFill>
                 <a:latin typeface="Georgia"/>
               </a:rPr>
-              <a:t>Peer surge (UKB +6.0; MVP +5.7; CKB +5.4 post-2023); AoU has structural advantage but under-utilization.</a:t>
+              <a:t>Peer growth (UKB +6.9; MVP +5.4; CKB +5.1 post-2023); AoU growing (+4.7) but trailing UKB despite structural advantage.</a:t>
             </a:r>
           </a:p>
         </p:txBody>
@@ -7163,7 +7163,7 @@
                 </a:solidFill>
                 <a:latin typeface="Georgia"/>
               </a:rPr>
-              <a:t>Same-tagger keyword search across UK Biobank (5,831 pubs), FinnGen (3,075), MVP (426), and CKB (551).</a:t>
+              <a:t>Same-tagger keyword search across UK Biobank (11,868 pubs), FinnGen (3,152), MVP (438), and CKB (558) — full PubMed census.</a:t>
             </a:r>
           </a:p>
         </p:txBody>
@@ -7331,7 +7331,7 @@
         <p:spPr>
           <a:xfrm>
             <a:off x="6336792" y="1508760"/>
-            <a:ext cx="5806440" cy="2707212"/>
+            <a:ext cx="5806440" cy="2726704"/>
           </a:xfrm>
           <a:prstGeom prst="rect">
             <a:avLst/>
@@ -7926,7 +7926,7 @@
                           </a:solidFill>
                           <a:latin typeface="Georgia"/>
                         </a:rPr>
-                        <a:t>Absorbs theme 3 (18% orphan), wearables (HA2 70 pubs), AI/foundation models (HA4 31 pubs), and imaging-as-data once it flows.</a:t>
+                        <a:t>Absorbs theme 3 (18% orphan), wearables (HA2 75 pubs), AI/foundation models (HA4 33 pubs), and imaging-as-data once it flows.</a:t>
                       </a:r>
                     </a:p>
                   </a:txBody>
@@ -8043,7 +8043,7 @@
                           </a:solidFill>
                           <a:latin typeface="Georgia"/>
                         </a:rPr>
-                        <a:t>Signal that 2026 omics releases (Olink / SomaScan) have a home. UKB 12.8% post-2023 / AoU 1.9% — largest growth differential.</a:t>
+                        <a:t>Signal that 2026 omics releases (Olink / SomaScan) have a home. UKB 12.2% post-2023 / AoU 1.8% — largest growth differential.</a:t>
                       </a:r>
                     </a:p>
                   </a:txBody>
@@ -8973,7 +8973,7 @@
                           </a:solidFill>
                           <a:latin typeface="Georgia"/>
                         </a:rPr>
-                        <a:t>AoU UBR oversample as a citable diversity reference. ELSI 21.2× + SDOH 5.1× are the political-defense argument. FDA Modernization Act 2.0 creates a regulatory window.</a:t>
+                        <a:t>AoU UBR oversample as a citable diversity reference. ELSI 26.3× + SDOH 5.1× are the political-defense argument. FDA Modernization Act 2.0 creates a regulatory window.</a:t>
                       </a:r>
                     </a:p>
                   </a:txBody>
@@ -10060,7 +10060,7 @@
                 </a:solidFill>
                 <a:latin typeface="Georgia"/>
               </a:rPr>
-              <a:t>Lead: Sastry. HA4 already has 31 AI pubs (28 post-2023); the question is what AoU builds, integrates, or governs.</a:t>
+              <a:t>Lead: Sastry. HA4 already has 33 AI pubs (30 post-2023); the question is what AoU builds, integrates, or governs.</a:t>
             </a:r>
           </a:p>
         </p:txBody>
@@ -11132,7 +11132,7 @@
                           </a:solidFill>
                           <a:latin typeface="Georgia"/>
                         </a:rPr>
-                        <a:t>ELSI 21.2× + SDOH 5.1× + PGx 4.6× + methods 3.0×. Anchors the Sci Com ambassador toolkit and IC-PO briefings. "AoU scaled up everything around genomics that genomics needs to work."</a:t>
+                        <a:t>ELSI 26.3× + SDOH 5.1× + PGx 4.6× + methods 3.0×. Anchors the Sci Com ambassador toolkit and IC-PO briefings. "AoU scaled up everything around genomics that genomics needs to work."</a:t>
                       </a:r>
                     </a:p>
                   </a:txBody>
@@ -12606,7 +12606,7 @@
                 </a:solidFill>
                 <a:latin typeface="Georgia"/>
               </a:rPr>
-              <a:t>Real peer-comparative gap (AoU flat 4.2% vs UKB +6.0 / MVP +5.7 / CKB +5.4 post-2023). FLAG for WG leads; consider Tier-2 priority + WG-5 patient story.</a:t>
+              <a:t>Narrowing peer gap (AoU 6.0% post-2023, ~peer median 0.84×, trend +4.7 vs UKB +6.9 / MVP +5.4 / CKB +5.1). FLAG for WG leads; consider Tier-2 priority + WG-5 patient story.</a:t>
             </a:r>
           </a:p>
         </p:txBody>
@@ -13000,7 +13000,7 @@
                 </a:solidFill>
                 <a:latin typeface="Georgia"/>
               </a:rPr>
-              <a:t>Dermatology is 14.3% of the corpus and 7.8× the peer median — but driven by 1–2 prolific groups, not a strategic priority. Trend score −3.9 (declining share). Do NOT elevate dermatology in the Refresh even though the share index suggests it. WG-5 ambassador toolkit must have the artifact answer rehearsed.</a:t>
+              <a:t>Dermatology is 13.9% of the corpus and 6.9× the peer median — but driven by 1–2 prolific groups, not a strategic priority. Trend score −4.4 (declining share). Do NOT elevate dermatology in the Refresh even though the share index suggests it. WG-5 ambassador toolkit must have the artifact answer rehearsed.</a:t>
             </a:r>
           </a:p>
         </p:txBody>
@@ -13132,7 +13132,7 @@
                 </a:solidFill>
                 <a:latin typeface="Georgia"/>
               </a:rPr>
-              <a:t>UKB, FinnGen, MVP, and CKB corpora come from PubMed name-search with same-tagger keyword tagging. Internally consistent across peers but absolute counts under- and over-count differently. USE THE STATIC SHARE INDEX, not trend differentials, for action-relevant comparisons. MVP corpus is small (426); single-MVP signals need a second-peer corroboration.</a:t>
+              <a:t>UKB, FinnGen, MVP, and CKB corpora come from PubMed name-search with same-tagger keyword tagging — now full PubMed censuses (UKB 11,868; FinnGen 3,152; MVP 438; CKB 558). Internally consistent across peers but absolute counts under- and over-count differently. USE THE STATIC SHARE INDEX, not trend differentials, for action-relevant comparisons. MVP corpus is small (438); single-MVP signals need a second-peer corroboration.</a:t>
             </a:r>
           </a:p>
         </p:txBody>
@@ -13264,7 +13264,7 @@
                 </a:solidFill>
                 <a:latin typeface="Georgia"/>
               </a:rPr>
-              <a:t>Any active post-2023 theme will trend positive in AoU's split simply because the corpus grew ~7.8× from pre- to post-2023. Apparent 'growth' on cardiometabolic, mental health, and cancer is largely a small-baseline artifact — read as 'AoU has built a presence here,' not 'AoU is uniquely outpacing the field.' True growth signals come from the peer-comparison panel, not from the AoU-internal pre/post split.</a:t>
+              <a:t>Any active post-2023 theme will trend positive in AoU's split simply because the corpus grew ~8.1× from pre- to post-2023. Apparent 'growth' on cardiometabolic, mental health, and cancer is largely a small-baseline artifact — read as 'AoU has built a presence here,' not 'AoU is uniquely outpacing the field.' True growth signals come from the peer-comparison panel, not from the AoU-internal pre/post split.</a:t>
             </a:r>
           </a:p>
         </p:txBody>
@@ -15239,7 +15239,7 @@
                 </a:solidFill>
                 <a:latin typeface="Georgia"/>
               </a:rPr>
-              <a:t>the AoU corpus — 1,378 substantive publications + 12,899 substantive workspace projects, theme-tagged against a locked 19-theme taxonomy.</a:t>
+              <a:t>the AoU corpus — 1,428 substantive publications + 12,899 substantive workspace projects, theme-tagged against a locked 19-theme taxonomy.</a:t>
             </a:r>
           </a:p>
         </p:txBody>
@@ -16158,7 +16158,7 @@
                 </a:solidFill>
                 <a:latin typeface="Helvetica"/>
               </a:rPr>
-              <a:t>1,378</a:t>
+              <a:t>1,428</a:t>
             </a:r>
           </a:p>
         </p:txBody>
@@ -18002,7 +18002,7 @@
                 </a:solidFill>
                 <a:latin typeface="Helvetica"/>
               </a:rPr>
-              <a:t>27.8%</a:t>
+              <a:t>28.4%</a:t>
             </a:r>
           </a:p>
         </p:txBody>
@@ -18163,7 +18163,7 @@
                 </a:solidFill>
                 <a:latin typeface="Helvetica"/>
               </a:rPr>
-              <a:t>25.3%</a:t>
+              <a:t>24.9%</a:t>
             </a:r>
           </a:p>
         </p:txBody>
@@ -18324,7 +18324,7 @@
                 </a:solidFill>
                 <a:latin typeface="Helvetica"/>
               </a:rPr>
-              <a:t>18.3%</a:t>
+              <a:t>18.4%</a:t>
             </a:r>
           </a:p>
         </p:txBody>
@@ -18485,7 +18485,7 @@
                 </a:solidFill>
                 <a:latin typeface="Helvetica"/>
               </a:rPr>
-              <a:t>18.5%</a:t>
+              <a:t>18.8%</a:t>
             </a:r>
           </a:p>
         </p:txBody>
@@ -18807,7 +18807,7 @@
                 </a:solidFill>
                 <a:latin typeface="Helvetica"/>
               </a:rPr>
-              <a:t>33.3%</a:t>
+              <a:t>32.9%</a:t>
             </a:r>
           </a:p>
         </p:txBody>
@@ -18968,7 +18968,7 @@
                 </a:solidFill>
                 <a:latin typeface="Helvetica"/>
               </a:rPr>
-              <a:t>5.3%</a:t>
+              <a:t>5.4%</a:t>
             </a:r>
           </a:p>
         </p:txBody>
@@ -19129,7 +19129,7 @@
                 </a:solidFill>
                 <a:latin typeface="Helvetica"/>
               </a:rPr>
-              <a:t>5.8%</a:t>
+              <a:t>6.0%</a:t>
             </a:r>
           </a:p>
         </p:txBody>
@@ -19290,7 +19290,7 @@
                 </a:solidFill>
                 <a:latin typeface="Helvetica"/>
               </a:rPr>
-              <a:t>7.8%</a:t>
+              <a:t>7.6%</a:t>
             </a:r>
           </a:p>
         </p:txBody>
@@ -19451,7 +19451,7 @@
                 </a:solidFill>
                 <a:latin typeface="Helvetica"/>
               </a:rPr>
-              <a:t>3.9%</a:t>
+              <a:t>3.8%</a:t>
             </a:r>
           </a:p>
         </p:txBody>
@@ -19773,7 +19773,7 @@
                 </a:solidFill>
                 <a:latin typeface="Helvetica"/>
               </a:rPr>
-              <a:t>14.3%</a:t>
+              <a:t>13.9%</a:t>
             </a:r>
           </a:p>
         </p:txBody>
@@ -19934,7 +19934,7 @@
                 </a:solidFill>
                 <a:latin typeface="Helvetica"/>
               </a:rPr>
-              <a:t>4.3%</a:t>
+              <a:t>4.2%</a:t>
             </a:r>
           </a:p>
         </p:txBody>
@@ -20095,7 +20095,7 @@
                 </a:solidFill>
                 <a:latin typeface="Helvetica"/>
               </a:rPr>
-              <a:t>5.6%</a:t>
+              <a:t>5.7%</a:t>
             </a:r>
           </a:p>
         </p:txBody>
@@ -20417,7 +20417,7 @@
                 </a:solidFill>
                 <a:latin typeface="Helvetica"/>
               </a:rPr>
-              <a:t>2.3%</a:t>
+              <a:t>2.4%</a:t>
             </a:r>
           </a:p>
         </p:txBody>
@@ -20578,7 +20578,7 @@
                 </a:solidFill>
                 <a:latin typeface="Helvetica"/>
               </a:rPr>
-              <a:t>5.0%</a:t>
+              <a:t>4.9%</a:t>
             </a:r>
           </a:p>
         </p:txBody>
@@ -20739,7 +20739,7 @@
                 </a:solidFill>
                 <a:latin typeface="Helvetica"/>
               </a:rPr>
-              <a:t>7.8%</a:t>
+              <a:t>7.6%</a:t>
             </a:r>
           </a:p>
         </p:txBody>
@@ -20900,7 +20900,7 @@
                 </a:solidFill>
                 <a:latin typeface="Helvetica"/>
               </a:rPr>
-              <a:t>0.5%</a:t>
+              <a:t>0.6%</a:t>
             </a:r>
           </a:p>
         </p:txBody>
@@ -21459,7 +21459,7 @@
                 </a:solidFill>
                 <a:latin typeface="Georgia"/>
               </a:rPr>
-              <a:t>18% of substantive pubs (251) and 19% of projects (2,389) have NO clean home in the 8-area framework.</a:t>
+              <a:t>18% of substantive pubs (262) and 19% of projects (2,388) have NO clean home in the 8-area framework.</a:t>
             </a:r>
           </a:p>
           <a:p>
@@ -21487,7 +21487,7 @@
                 </a:solidFill>
                 <a:latin typeface="Georgia"/>
               </a:rPr>
-              <a:t>Includes the AI/foundation-model surge (HA4: 31 pubs, 28 post-2023), workbench tooling, EHR phenotyping, federated learning.</a:t>
+              <a:t>Includes the AI/foundation-model surge (HA4: 33 pubs, 30 post-2023), workbench tooling, EHR phenotyping, federated learning.</a:t>
             </a:r>
           </a:p>
           <a:p>
@@ -21734,7 +21734,7 @@
                 </a:solidFill>
                 <a:latin typeface="Georgia"/>
               </a:rPr>
-              <a:t>70 pubs (5.3% share) — slide-7 priority that has nowhere to live in the 8 areas.</a:t>
+              <a:t>75 pubs (5.4% share) — slide-7 priority that has nowhere to live in the 8 areas.</a:t>
             </a:r>
           </a:p>
           <a:p>
@@ -21762,7 +21762,7 @@
                 </a:solidFill>
                 <a:latin typeface="Georgia"/>
               </a:rPr>
-              <a:t>Trend is flat (+1.0) — wearables have already MATURED, not emerging. Important reframe.</a:t>
+              <a:t>Trend is flat (+0.2) — wearables have already MATURED, not emerging. Important reframe.</a:t>
             </a:r>
           </a:p>
           <a:p>
@@ -22065,7 +22065,7 @@
                 </a:solidFill>
                 <a:latin typeface="Georgia"/>
               </a:rPr>
-              <a:t>Largest peer-comparative growth differential: UKB 12.8% post-2023 vs AoU 1.9%. 2026 omics releases need a NAMED home.</a:t>
+              <a:t>Largest peer-comparative growth differential: UKB 12.2% post-2023 vs AoU 1.8%. 2026 omics releases need a NAMED home.</a:t>
             </a:r>
           </a:p>
         </p:txBody>
@@ -22619,7 +22619,7 @@
                 </a:solidFill>
                 <a:latin typeface="Helvetica"/>
               </a:rPr>
-              <a:t>31 pubs (HA4); 28 post-2023</a:t>
+              <a:t>33 pubs (HA4); 30 post-2023</a:t>
             </a:r>
           </a:p>
         </p:txBody>
@@ -22865,7 +22865,7 @@
                 </a:solidFill>
                 <a:latin typeface="Helvetica"/>
               </a:rPr>
-              <a:t>16 pubs (HA8); 15 post-2023</a:t>
+              <a:t>20 pubs (HA8); 19 post-2023</a:t>
             </a:r>
           </a:p>
         </p:txBody>
@@ -23111,7 +23111,7 @@
                 </a:solidFill>
                 <a:latin typeface="Helvetica"/>
               </a:rPr>
-              <a:t>70 pubs (HA2); 62 post-2023; trend flat</a:t>
+              <a:t>75 pubs (HA2); 67 post-2023; trend flat</a:t>
             </a:r>
           </a:p>
         </p:txBody>
@@ -23357,7 +23357,7 @@
                 </a:solidFill>
                 <a:latin typeface="Helvetica"/>
               </a:rPr>
-              <a:t>10 pubs (HA6); 0 pre-2023</a:t>
+              <a:t>11 pubs (HA6); 0 pre-2023</a:t>
             </a:r>
           </a:p>
         </p:txBody>
@@ -23943,7 +23943,7 @@
                 </a:solidFill>
                 <a:latin typeface="Georgia"/>
               </a:rPr>
-              <a:t>→ UKB 12.8% post-2023 / AoU 1.9% — largest growth differential. 2026 release closes mechanically.</a:t>
+              <a:t>→ UKB 12.2% post-2023 / AoU 1.8% — largest growth differential. 2026 release closes mechanically.</a:t>
             </a:r>
           </a:p>
         </p:txBody>
@@ -24435,7 +24435,7 @@
                 </a:solidFill>
                 <a:latin typeface="Georgia"/>
               </a:rPr>
-              <a:t>→ UKB 10.4% / FinnGen 15.1% post-2023 / AoU 0.8%. Requires sample-collection decision.</a:t>
+              <a:t>→ UKB 11.3% / FinnGen 14.6% post-2023 / AoU 0.8%. Requires sample-collection decision.</a:t>
             </a:r>
           </a:p>
         </p:txBody>
@@ -24603,7 +24603,7 @@
                 </a:solidFill>
                 <a:latin typeface="Helvetica"/>
               </a:rPr>
-              <a:t>12 pubs (HA5); 7 substantive (theme 19)</a:t>
+              <a:t>13 pubs (HA5); 8 substantive (theme 19)</a:t>
             </a:r>
           </a:p>
         </p:txBody>
@@ -25150,7 +25150,7 @@
                           </a:solidFill>
                           <a:latin typeface="Georgia"/>
                         </a:rPr>
-                        <a:t>Goal 7 literally describes the AoU mandate. AoU 33.3% SDOH share; 5.1× peer median.</a:t>
+                        <a:t>Goal 7 literally describes the AoU mandate. AoU 32.9% SDOH share; 5.1× peer median.</a:t>
                       </a:r>
                     </a:p>
                   </a:txBody>
@@ -25221,7 +25221,7 @@
                           </a:solidFill>
                           <a:latin typeface="Georgia"/>
                         </a:rPr>
-                        <a:t>The only IC plan that explicitly names All of Us. Theme 3: 251 pubs, 2,389 projects.</a:t>
+                        <a:t>The only IC plan that explicitly names All of Us. Theme 3: 262 pubs, 2,388 projects.</a:t>
                       </a:r>
                     </a:p>
                   </a:txBody>

--- a/resources/deliverables/AoU_Roadmap_Refresh_Draft_Deck.pptx
+++ b/resources/deliverables/AoU_Roadmap_Refresh_Draft_Deck.pptx
@@ -24,6 +24,7 @@
     <p:sldId id="272" r:id="rId24"/>
     <p:sldId id="273" r:id="rId25"/>
     <p:sldId id="274" r:id="rId26"/>
+    <p:sldId id="275" r:id="rId27"/>
   </p:sldIdLst>
   <p:sldSz cx="12191695" cy="6858000" type="screen4x3"/>
   <p:notesSz cx="6858000" cy="9144000"/>
@@ -547,7 +548,7 @@
               <a:rPr sz="1000">
                 <a:latin typeface="Helvetica"/>
               </a:rPr>
-              <a:t>Companion artifact: AoU_Roadmap_Refresh_Executive_Summary.pdf (one-page Sci Com pre-read).</a:t>
+              <a:t>Companion artifact: AoU_Roadmap_Refresh_Executive_Summary.pdf (Sci Com pre-read).</a:t>
             </a:r>
           </a:p>
         </p:txBody>
@@ -809,7 +810,7 @@
               <a:rPr sz="1000">
                 <a:latin typeface="Helvetica"/>
               </a:rPr>
-              <a:t>Source: phase4-recommendations/wg1_roadmap_refresh.md (Top-3 with full rubric tables).</a:t>
+              <a:t>Source: emerging-trends/emerging_trends_report.md (full method + tiers).</a:t>
             </a:r>
           </a:p>
           <a:p>
@@ -817,7 +818,7 @@
               <a:rPr sz="1000">
                 <a:latin typeface="Helvetica"/>
               </a:rPr>
-              <a:t>Rec 1 (3.71 mean): 'Add a Data, AI &amp; Methods focus area.' 18% corpus orphan; HA4 33 AI pubs; NLM-G1 explicit alignment. Risk: Sci Com may prefer reorganization to addition; defend with the empirical orphan count.</a:t>
+              <a:t>METHOD: open-discovery horizon scan. Pulled 293,979 bioRxiv+medRxiv preprints and 422,565 NIH RePORTER grants (2021-2026). Computed term-acceleration (recent vs prior doc-share), induced ~24 emerging topics via LLM clustering (not the locked 19-theme taxonomy), gap-checked each vs AoU (1,428) + the 4 peer biobanks + published-literature trajectory, then overlaid AoU data-asset feasibility.</a:t>
             </a:r>
           </a:p>
           <a:p>
@@ -825,7 +826,7 @@
               <a:rPr sz="1000">
                 <a:latin typeface="Helvetica"/>
               </a:rPr>
-              <a:t>Rec 2 (3.38 mean): 'Rename FA8 + multi-omics roadmap.' Largest peer-comparative growth differential. The rename without the data is a hollow gesture; the data without the rename buries the work — recommendation explicitly pairs them.</a:t>
+              <a:t>WHY THIS MATTERS: preprints/grants lead published work by 1-2 years, so this is the leading edge. AoU is &lt;0.3% on essentially every fast-rising AI/ML topic. The Tier-1 table is filtered to what AoU CAN do; Tier-2 (single-cell/spatial/protein-structure) is flagged as outside AoU's data model on purpose.</a:t>
             </a:r>
           </a:p>
           <a:p>
@@ -833,7 +834,7 @@
               <a:rPr sz="1000">
                 <a:latin typeface="Helvetica"/>
               </a:rPr>
-              <a:t>Rec 3 (3.00 mean): three small structural fixes bundled. FA4 toward ROR implementation (well-evidenced; theme 17 ELSI −12.3); FA2 → 'Maternal Health' (judgment about naming accuracy; politically sensitive — frame as accuracy not deprioritization); FA6 environmental linkage (largest demand-supply gap; engineering not data acquisition).</a:t>
+              <a:t>CAVEAT: some grant growth multipliers are inflated by RePORTER controlled-vocabulary onsets (e.g. 'anti-viral agents' prior=0); the AI findings rest on named tools in author-written preprint text (AlphaFold3, GPT-4o/5, DeepSeek, Boltz-2), which are trustworthy. Keyword coverage is substring-based, so AoU % are directional — but order-of-magnitude gaps (0.x% vs a 47× field) are robust.</a:t>
             </a:r>
           </a:p>
         </p:txBody>
@@ -906,7 +907,7 @@
               <a:rPr sz="1000">
                 <a:latin typeface="Helvetica"/>
               </a:rPr>
-              <a:t>Source: phase4-recommendations/wg2_translational.md.</a:t>
+              <a:t>Source: phase4-recommendations/wg1_roadmap_refresh.md (Top-3 with full rubric tables).</a:t>
             </a:r>
           </a:p>
           <a:p>
@@ -914,7 +915,7 @@
               <a:rPr sz="1000">
                 <a:latin typeface="Helvetica"/>
               </a:rPr>
-              <a:t>Rec 1 (3.50): TSBM = Translational Science Benefits Model (Luke et al., Eval Program Plan 2018). Citation/altmetric/RePORTER/NCT APIs all exist; curation and editorial work is new.</a:t>
+              <a:t>Rec 1 (3.71 mean): 'Add a Data, AI &amp; Methods focus area.' 18% corpus orphan; HA4 33 AI pubs; NLM-G1 explicit alignment. EXTERNAL EVIDENCE (slide 12 horizon scan): the two fastest-rising, AoU-feasible white-space gaps in the entire biomedical literature — genomic foundation models and LLMs/agentic AI — are precisely this focus area's content, and AoU is &lt;0.3% present in both. The field has already moved here; the framework hasn't. Risk: Sci Com may prefer reorganization to addition; defend with the empirical orphan count + the horizon scan.</a:t>
             </a:r>
           </a:p>
           <a:p>
@@ -922,7 +923,7 @@
               <a:rPr sz="1000">
                 <a:latin typeface="Helvetica"/>
               </a:rPr>
-              <a:t>Rec 2 (3.38): the named portfolio is the canonical translational-WG deliverable. PGx is the highest peer-index AoU-distinctive use case (4.6×); cardiometabolic+SDOH is the largest combined volume (382 disease pubs + 458 SDOH).</a:t>
+              <a:t>Rec 2 (3.38 mean): 'Rename FA8 + multi-omics roadmap.' Largest peer-comparative growth differential. The rename without the data is a hollow gesture; the data without the rename buries the work — recommendation explicitly pairs them.</a:t>
             </a:r>
           </a:p>
           <a:p>
@@ -930,7 +931,7 @@
               <a:rPr sz="1000">
                 <a:latin typeface="Helvetica"/>
               </a:rPr>
-              <a:t>Rec 3 (3.75 — highest WG-2 score): the bias framework is the keystone of the cross-WG hierarchy (WG-2 normative → WG-3 imaging → WG-4 AI). Sets the AoU bias-reporting standard.</a:t>
+              <a:t>Rec 3 (3.00 mean): three small structural fixes bundled. FA4 toward ROR implementation (well-evidenced; theme 17 ELSI −12.3); FA2 → 'Maternal Health' (judgment about naming accuracy; politically sensitive — frame as accuracy not deprioritization); FA6 environmental linkage (largest demand-supply gap; engineering not data acquisition).</a:t>
             </a:r>
           </a:p>
         </p:txBody>
@@ -1003,7 +1004,7 @@
               <a:rPr sz="1000">
                 <a:latin typeface="Helvetica"/>
               </a:rPr>
-              <a:t>Source: phase4-recommendations/wg3_imaging.md.</a:t>
+              <a:t>Source: phase4-recommendations/wg2_translational.md.</a:t>
             </a:r>
           </a:p>
           <a:p>
@@ -1011,7 +1012,7 @@
               <a:rPr sz="1000">
                 <a:latin typeface="Helvetica"/>
               </a:rPr>
-              <a:t>Rec 2 (3.88 — highest WG-3 score): DICOM + FHIR + phecode crosswalk is the highest-leverage standards decision because it anchors imaging to existing AoU analytic infrastructure rather than fragmenting the user base.</a:t>
+              <a:t>Rec 1 (3.50): TSBM = Translational Science Benefits Model (Luke et al., Eval Program Plan 2018). Citation/altmetric/RePORTER/NCT APIs all exist; curation and editorial work is new.</a:t>
             </a:r>
           </a:p>
           <a:p>
@@ -1019,7 +1020,7 @@
               <a:rPr sz="1000">
                 <a:latin typeface="Helvetica"/>
               </a:rPr>
-              <a:t>Cost reality: imaging is the single most expensive recommendation across all 5 WGs. Tier 1 is engineering; Tier 2 is governance; Tier 3 is the actual cost-bearing decision. Defend the staged approach.</a:t>
+              <a:t>Rec 2 (3.38): the named portfolio is the canonical translational-WG deliverable. PGx is the highest peer-index AoU-distinctive use case (4.6×); cardiometabolic+SDOH is the largest combined volume (382 disease pubs + 458 SDOH).</a:t>
             </a:r>
           </a:p>
           <a:p>
@@ -1027,7 +1028,7 @@
               <a:rPr sz="1000">
                 <a:latin typeface="Helvetica"/>
               </a:rPr>
-              <a:t>Also-considered: AI-radiomics pilot funding (hand to WG-4); UKB/NIH-IDC partnership (flag as cross-cohort validation pathway under Rec 1 Tier 1).</a:t>
+              <a:t>Rec 3 (3.75 — highest WG-2 score): the bias framework is the keystone of the cross-WG hierarchy (WG-2 normative → WG-3 imaging → WG-4 AI). Sets the AoU bias-reporting standard.</a:t>
             </a:r>
           </a:p>
         </p:txBody>
@@ -1100,7 +1101,7 @@
               <a:rPr sz="1000">
                 <a:latin typeface="Helvetica"/>
               </a:rPr>
-              <a:t>Source: phase4-recommendations/wg4_ai_strategies.md.</a:t>
+              <a:t>Source: phase4-recommendations/wg3_imaging.md.</a:t>
             </a:r>
           </a:p>
           <a:p>
@@ -1108,7 +1109,7 @@
               <a:rPr sz="1000">
                 <a:latin typeface="Helvetica"/>
               </a:rPr>
-              <a:t>Rec 1 (3.88): highest rubric mean in the entire set. The AI co-scientist is the single most-leveraged researcher-facing investment. Defends against 'hallucinations' risk via explicit-provenance design (every cohort/code block links back to source vocabulary entry). 'Build vs buy' answer: build AoU-specific scaffolding on existing foundation model, not the model itself.</a:t>
+              <a:t>Rec 2 (3.88 — highest WG-3 score): DICOM + FHIR + phecode crosswalk is the highest-leverage standards decision because it anchors imaging to existing AoU analytic infrastructure rather than fragmenting the user base.</a:t>
             </a:r>
           </a:p>
           <a:p>
@@ -1116,7 +1117,7 @@
               <a:rPr sz="1000">
                 <a:latin typeface="Helvetica"/>
               </a:rPr>
-              <a:t>Rec 2 (3.50): inherits normative frame from WG-2's bias-in-translation framework. AI-specific failure modes (fairness-through-unawareness, label noise, miscalibration across subgroups, distribution shift) need AI-WG technical expertise.</a:t>
+              <a:t>Cost reality: imaging is the single most expensive recommendation across all 5 WGs. Tier 1 is engineering; Tier 2 is governance; Tier 3 is the actual cost-bearing decision. Defend the staged approach.</a:t>
             </a:r>
           </a:p>
           <a:p>
@@ -1124,7 +1125,7 @@
               <a:rPr sz="1000">
                 <a:latin typeface="Helvetica"/>
               </a:rPr>
-              <a:t>Rec 3 (3.50): evaluate, don't build. The field is moving so fast that any premature build will be obsolete on delivery. 2027 decision-deadline.</a:t>
+              <a:t>Also-considered: AI-radiomics pilot funding (hand to WG-4); UKB/NIH-IDC partnership (flag as cross-cohort validation pathway under Rec 1 Tier 1).</a:t>
             </a:r>
           </a:p>
         </p:txBody>
@@ -1197,7 +1198,7 @@
               <a:rPr sz="1000">
                 <a:latin typeface="Helvetica"/>
               </a:rPr>
-              <a:t>Source: phase4-recommendations/wg5_communications.md.</a:t>
+              <a:t>Source: phase4-recommendations/wg4_ai_strategies.md.</a:t>
             </a:r>
           </a:p>
           <a:p>
@@ -1205,7 +1206,7 @@
               <a:rPr sz="1000">
                 <a:latin typeface="Helvetica"/>
               </a:rPr>
-              <a:t>Rec 1 (3.57): Impact Report v1 within 12 months. WG-2 defines metrics; WG-5 produces the report. NIH precedent: BD2K, BRAIN Initiative, Cancer Moonshot all publish annual impact products.</a:t>
+              <a:t>Rec 1 (3.88): highest rubric mean in the entire set. The AI co-scientist is the single most-leveraged researcher-facing investment. Defends against 'hallucinations' risk via explicit-provenance design (every cohort/code block links back to source vocabulary entry). 'Build vs buy' answer: build AoU-specific scaffolding on existing foundation model, not the model itself.</a:t>
             </a:r>
           </a:p>
           <a:p>
@@ -1213,7 +1214,7 @@
               <a:rPr sz="1000">
                 <a:latin typeface="Helvetica"/>
               </a:rPr>
-              <a:t>Rec 2 (3.60): the four-strength narrative is the MOST EVIDENCE-DRIVEN recommendation in any WG — peer-index numbers are precise from the corpus analysis. Distinctive ≠ growing; the headline rests on these four genuine over-indexes. Dermatology 6.9× over-index is an artifact (rehearsed answer required).</a:t>
+              <a:t>Rec 2 (3.50): inherits normative frame from WG-2's bias-in-translation framework. AI-specific failure modes (fairness-through-unawareness, label noise, miscalibration across subgroups, distribution shift) need AI-WG technical expertise.</a:t>
             </a:r>
           </a:p>
           <a:p>
@@ -1221,7 +1222,15 @@
               <a:rPr sz="1000">
                 <a:latin typeface="Helvetica"/>
               </a:rPr>
-              <a:t>Rec 3 (3.60): the 21 per-IC briefs in aou-ic-alignment/per_ic_briefs/ are mostly drafted. Productize them rather than rebuilding.</a:t>
+              <a:t>Rec 3 (3.50): evaluate, don't build. The field is moving so fast that any premature build will be obsolete on delivery. 2027 decision-deadline.</a:t>
+            </a:r>
+          </a:p>
+          <a:p>
+            <a:r>
+              <a:rPr sz="1000">
+                <a:latin typeface="Helvetica"/>
+              </a:rPr>
+              <a:t>HORIZON-SCAN BACKING (slide 12): the external scan ranks LLMs/agentic AI as the #2 actionable white-space gap (published LLM-in-medicine work up 47× 2021→2025; AoU at 0.2%) and genomic foundation models #1 — strengthening Rec 1 (co-scientist) and Rec 3 (FM evaluation). It also bounds scope: single-cell/spatial/protein-structure foundation models are real but outside AoU's data model — AoU should evaluate genomic + EHR FMs, not chase those.</a:t>
             </a:r>
           </a:p>
         </p:txBody>
@@ -1294,7 +1303,7 @@
               <a:rPr sz="1000">
                 <a:latin typeface="Helvetica"/>
               </a:rPr>
-              <a:t>Source: phase4-recommendations/cross_cutting_synthesis.md §1.</a:t>
+              <a:t>Source: phase4-recommendations/wg5_communications.md.</a:t>
             </a:r>
           </a:p>
           <a:p>
@@ -1302,7 +1311,7 @@
               <a:rPr sz="1000">
                 <a:latin typeface="Helvetica"/>
               </a:rPr>
-              <a:t>The five interlocks should be in the Sci Com's awareness because they determine whether the WGs ship semi-aligned outputs that compete or genuinely-aligned outputs that compound.</a:t>
+              <a:t>Rec 1 (3.57): Impact Report v1 within 12 months. WG-2 defines metrics; WG-5 produces the report. NIH precedent: BD2K, BRAIN Initiative, Cancer Moonshot all publish annual impact products.</a:t>
             </a:r>
           </a:p>
           <a:p>
@@ -1310,7 +1319,15 @@
               <a:rPr sz="1000">
                 <a:latin typeface="Helvetica"/>
               </a:rPr>
-              <a:t>CC-5 (Aging/ADRD) is a flag because no Top-3 currently owns it. AoU is at 6.0% post-2023 (≈peer median, index 0.84×) and growing (+4.7), but still trailing UKB's +6.9 surge in the lecanemab/donanemab era. Structural advantage (EHR + UBR diversity); the gap is narrowing rather than flat, so this is now a weaker-evidence flag than in the prior draft. NIA engagement workstream is the natural answer; outside any current Top-3.</a:t>
+              <a:t>Rec 2 (3.60): the four-strength narrative is the MOST EVIDENCE-DRIVEN recommendation in any WG — peer-index numbers are precise from the corpus analysis. Distinctive ≠ growing; the headline rests on these four genuine over-indexes. Dermatology 6.9× over-index is an artifact (rehearsed answer required).</a:t>
+            </a:r>
+          </a:p>
+          <a:p>
+            <a:r>
+              <a:rPr sz="1000">
+                <a:latin typeface="Helvetica"/>
+              </a:rPr>
+              <a:t>Rec 3 (3.60): the 21 per-IC briefs in aou-ic-alignment/per_ic_briefs/ are mostly drafted. Productize them rather than rebuilding.</a:t>
             </a:r>
           </a:p>
         </p:txBody>
@@ -1383,7 +1400,7 @@
               <a:rPr sz="1000">
                 <a:latin typeface="Helvetica"/>
               </a:rPr>
-              <a:t>Source: aou-research-landscape/README.md; peer-biobanks/emerging_themes.md §caveats; phase4-recommendations/README.md.</a:t>
+              <a:t>Source: phase4-recommendations/cross_cutting_synthesis.md §1.</a:t>
             </a:r>
           </a:p>
           <a:p>
@@ -1391,7 +1408,7 @@
               <a:rPr sz="1000">
                 <a:latin typeface="Helvetica"/>
               </a:rPr>
-              <a:t>The dermatology caveat is NON-NEGOTIABLE to include — if Sci Com or external audiences see 'dermatology peer-index 6.9×' without context, they may push to elevate dermatology, which would mislead the Roadmap. Phase 1 README flagged the 1-2-prolific-groups origin; Phase 3b temporal trends show declining share.</a:t>
+              <a:t>The five interlocks should be in the Sci Com's awareness because they determine whether the WGs ship semi-aligned outputs that compete or genuinely-aligned outputs that compound.</a:t>
             </a:r>
           </a:p>
           <a:p>
@@ -1399,15 +1416,7 @@
               <a:rPr sz="1000">
                 <a:latin typeface="Helvetica"/>
               </a:rPr>
-              <a:t>The peer-biobank fallback caveat protects against over-reading single-peer trend differentials. The static share index is what we ranked recommendations on.</a:t>
-            </a:r>
-          </a:p>
-          <a:p>
-            <a:r>
-              <a:rPr sz="1000">
-                <a:latin typeface="Helvetica"/>
-              </a:rPr>
-              <a:t>The pre-2023 baseline caveat is why we don't use AoU-internal pre/post trends as the headline growth metric — we use the peer-comparative gap analysis instead.</a:t>
+              <a:t>CC-5 (Aging/ADRD) is a flag because no Top-3 currently owns it. AoU is at 6.0% post-2023 (≈peer median, index 0.84×) and growing (+4.7), but still trailing UKB's +6.9 surge in the lecanemab/donanemab era. Structural advantage (EHR + UBR diversity); the gap is narrowing rather than flat, so this is now a weaker-evidence flag than in the prior draft. NIA engagement workstream is the natural answer; outside any current Top-3.</a:t>
             </a:r>
           </a:p>
         </p:txBody>
@@ -1480,7 +1489,7 @@
               <a:rPr sz="1000">
                 <a:latin typeface="Helvetica"/>
               </a:rPr>
-              <a:t>The four explicit asks the Sci Com should take action on:</a:t>
+              <a:t>Source: aou-research-landscape/README.md; peer-biobanks/emerging_themes.md §caveats; phase4-recommendations/README.md.</a:t>
             </a:r>
           </a:p>
           <a:p>
@@ -1488,10 +1497,7 @@
               <a:rPr sz="1000">
                 <a:latin typeface="Helvetica"/>
               </a:rPr>
-              <a:t>(1) ENDORSE the 9th focus area — frame-defining; can only be done by this WG.
-(2) ENDORSE the FA8 rename + commission the proteomics roadmap — pair the structural signal with the data investment.
-(3) COMMISSION the cross-WG bias framework hierarchy — WG-2 (Sanchez &amp; Cohn) convenes WG-3 + WG-4.
-(4) ALLOCATE time at the next Sci Com for the structural-framework vote — sequence WG-1 decisions BEFORE the other four WGs' Top-3 are finalized.</a:t>
+              <a:t>The dermatology caveat is NON-NEGOTIABLE to include — if Sci Com or external audiences see 'dermatology peer-index 6.9×' without context, they may push to elevate dermatology, which would mislead the Roadmap. Phase 1 README flagged the 1-2-prolific-groups origin; Phase 3b temporal trends show declining share.</a:t>
             </a:r>
           </a:p>
           <a:p>
@@ -1499,7 +1505,7 @@
               <a:rPr sz="1000">
                 <a:latin typeface="Helvetica"/>
               </a:rPr>
-              <a:t>Smaller asks tucked in: surface Aging/ADRD as a Tier-2 priority for WG-5 patient-facing story.</a:t>
+              <a:t>The peer-biobank fallback caveat protects against over-reading single-peer trend differentials. The static share index is what we ranked recommendations on.</a:t>
             </a:r>
           </a:p>
           <a:p>
@@ -1507,7 +1513,7 @@
               <a:rPr sz="1000">
                 <a:latin typeface="Helvetica"/>
               </a:rPr>
-              <a:t>If Sci Com only takes one action: endorse the 9th focus area. It's the structural prerequisite for everything else.</a:t>
+              <a:t>The pre-2023 baseline caveat is why we don't use AoU-internal pre/post trends as the headline growth metric — we use the peer-comparative gap analysis instead.</a:t>
             </a:r>
           </a:p>
         </p:txBody>
@@ -1597,6 +1603,106 @@
                 <a:latin typeface="Helvetica"/>
               </a:rPr>
               <a:t>The other five questions don't disappear; they get folded into the evidence base.</a:t>
+            </a:r>
+          </a:p>
+        </p:txBody>
+      </p:sp>
+      <p:sp>
+        <p:nvSpPr>
+          <p:cNvPr id="4" name="Slide Number Placeholder 3"/>
+          <p:cNvSpPr>
+            <a:spLocks noGrp="1"/>
+          </p:cNvSpPr>
+          <p:nvPr>
+            <p:ph type="sldNum" idx="5" sz="quarter"/>
+          </p:nvPr>
+        </p:nvSpPr>
+        <p:spPr/>
+      </p:sp>
+    </p:spTree>
+  </p:cSld>
+  <p:clrMapOvr>
+    <a:masterClrMapping/>
+  </p:clrMapOvr>
+</p:notes>
+</file>
+
+<file path=ppt/notesSlides/notesSlide20.xml><?xml version="1.0" encoding="utf-8"?>
+<p:notes xmlns:a="http://schemas.openxmlformats.org/drawingml/2006/main" xmlns:p="http://schemas.openxmlformats.org/presentationml/2006/main" xmlns:r="http://schemas.openxmlformats.org/officeDocument/2006/relationships">
+  <p:cSld>
+    <p:spTree>
+      <p:nvGrpSpPr>
+        <p:cNvPr id="1" name=""/>
+        <p:cNvGrpSpPr/>
+        <p:nvPr/>
+      </p:nvGrpSpPr>
+      <p:grpSpPr>
+        <a:xfrm>
+          <a:off x="0" y="0"/>
+          <a:ext cx="0" cy="0"/>
+          <a:chOff x="0" y="0"/>
+          <a:chExt cx="0" cy="0"/>
+        </a:xfrm>
+      </p:grpSpPr>
+      <p:sp>
+        <p:nvSpPr>
+          <p:cNvPr id="2" name="Slide Image Placeholder 1"/>
+          <p:cNvSpPr>
+            <a:spLocks noGrp="1"/>
+          </p:cNvSpPr>
+          <p:nvPr>
+            <p:ph type="sldImg" idx="2"/>
+          </p:nvPr>
+        </p:nvSpPr>
+        <p:spPr/>
+      </p:sp>
+      <p:sp>
+        <p:nvSpPr>
+          <p:cNvPr id="3" name="Notes Placeholder 2"/>
+          <p:cNvSpPr>
+            <a:spLocks noGrp="1"/>
+          </p:cNvSpPr>
+          <p:nvPr>
+            <p:ph type="body" idx="3" sz="quarter"/>
+          </p:nvPr>
+        </p:nvSpPr>
+        <p:spPr/>
+        <p:txBody>
+          <a:bodyPr/>
+          <a:lstStyle/>
+          <a:p>
+            <a:r>
+              <a:rPr sz="1000">
+                <a:latin typeface="Helvetica"/>
+              </a:rPr>
+              <a:t>The four explicit asks the Sci Com should take action on:</a:t>
+            </a:r>
+          </a:p>
+          <a:p>
+            <a:r>
+              <a:rPr sz="1000">
+                <a:latin typeface="Helvetica"/>
+              </a:rPr>
+              <a:t>(1) ENDORSE the 9th focus area — frame-defining; can only be done by this WG.
+(2) ENDORSE the FA8 rename + commission the proteomics roadmap — pair the structural signal with the data investment.
+(3) COMMISSION the cross-WG bias framework hierarchy — WG-2 (Sanchez &amp; Cohn) convenes WG-3 + WG-4.
+(4) ALLOCATE time at the next Sci Com for the structural-framework vote — sequence WG-1 decisions BEFORE the other four WGs' Top-3 are finalized.</a:t>
+            </a:r>
+          </a:p>
+          <a:p>
+            <a:r>
+              <a:rPr sz="1000">
+                <a:latin typeface="Helvetica"/>
+              </a:rPr>
+              <a:t>Smaller asks tucked in: surface Aging/ADRD as a Tier-2 priority for WG-5 patient-facing story.</a:t>
+            </a:r>
+          </a:p>
+          <a:p>
+            <a:r>
+              <a:rPr sz="1000">
+                <a:latin typeface="Helvetica"/>
+              </a:rPr>
+              <a:t>If Sci Com only takes one action: endorse the 9th focus area. It's the structural prerequisite for everything else.</a:t>
             </a:r>
           </a:p>
         </p:txBody>
@@ -7023,7 +7129,7 @@
                 </a:solidFill>
                 <a:latin typeface="Georgia"/>
               </a:rPr>
-              <a:t>10 / 19</a:t>
+              <a:t>10 / 20</a:t>
             </a:r>
           </a:p>
         </p:txBody>
@@ -7535,7 +7641,7 @@
                 </a:solidFill>
                 <a:latin typeface="Georgia"/>
               </a:rPr>
-              <a:t>11 / 19</a:t>
+              <a:t>11 / 20</a:t>
             </a:r>
           </a:p>
         </p:txBody>
@@ -7549,6 +7655,1162 @@
 </file>
 
 <file path=ppt/slides/slide12.xml><?xml version="1.0" encoding="utf-8"?>
+<p:sld xmlns:a="http://schemas.openxmlformats.org/drawingml/2006/main" xmlns:p="http://schemas.openxmlformats.org/presentationml/2006/main" xmlns:r="http://schemas.openxmlformats.org/officeDocument/2006/relationships">
+  <p:cSld>
+    <p:spTree>
+      <p:nvGrpSpPr>
+        <p:cNvPr id="1" name=""/>
+        <p:cNvGrpSpPr/>
+        <p:nvPr/>
+      </p:nvGrpSpPr>
+      <p:grpSpPr/>
+      <p:sp>
+        <p:nvSpPr>
+          <p:cNvPr id="2" name="Rectangle 1"/>
+          <p:cNvSpPr/>
+          <p:nvPr/>
+        </p:nvSpPr>
+        <p:spPr>
+          <a:xfrm>
+            <a:off x="0" y="0"/>
+            <a:ext cx="12191695" cy="73152"/>
+          </a:xfrm>
+          <a:prstGeom prst="rect">
+            <a:avLst/>
+          </a:prstGeom>
+          <a:solidFill>
+            <a:srgbClr val="1A3A6B"/>
+          </a:solidFill>
+          <a:ln>
+            <a:noFill/>
+          </a:ln>
+          <a:effectLst/>
+        </p:spPr>
+        <p:style>
+          <a:lnRef idx="1">
+            <a:schemeClr val="accent1"/>
+          </a:lnRef>
+          <a:fillRef idx="3">
+            <a:schemeClr val="accent1"/>
+          </a:fillRef>
+          <a:effectRef idx="2">
+            <a:schemeClr val="accent1"/>
+          </a:effectRef>
+          <a:fontRef idx="minor">
+            <a:schemeClr val="lt1"/>
+          </a:fontRef>
+        </p:style>
+        <p:txBody>
+          <a:bodyPr rtlCol="0" anchor="ctr"/>
+          <a:lstStyle/>
+          <a:p>
+            <a:pPr algn="ctr"/>
+          </a:p>
+        </p:txBody>
+      </p:sp>
+      <p:sp>
+        <p:nvSpPr>
+          <p:cNvPr id="3" name="TextBox 2"/>
+          <p:cNvSpPr txBox="1"/>
+          <p:nvPr/>
+        </p:nvSpPr>
+        <p:spPr>
+          <a:xfrm>
+            <a:off x="457200" y="164592"/>
+            <a:ext cx="11247120" cy="502920"/>
+          </a:xfrm>
+          <a:prstGeom prst="rect">
+            <a:avLst/>
+          </a:prstGeom>
+          <a:noFill/>
+        </p:spPr>
+        <p:txBody>
+          <a:bodyPr wrap="square" lIns="36576" rIns="36576" tIns="18288" bIns="18288" anchor="t">
+            <a:spAutoFit/>
+          </a:bodyPr>
+          <a:lstStyle/>
+          <a:p>
+            <a:pPr algn="l">
+              <a:lnSpc>
+                <a:spcPct val="105000"/>
+              </a:lnSpc>
+            </a:pPr>
+            <a:r>
+              <a:rPr sz="2200" b="1" i="0">
+                <a:solidFill>
+                  <a:srgbClr val="1A3A6B"/>
+                </a:solidFill>
+                <a:latin typeface="Helvetica"/>
+              </a:rPr>
+              <a:t>Horizon scan: emerging science AoU has not yet claimed</a:t>
+            </a:r>
+          </a:p>
+        </p:txBody>
+      </p:sp>
+      <p:sp>
+        <p:nvSpPr>
+          <p:cNvPr id="4" name="TextBox 3"/>
+          <p:cNvSpPr txBox="1"/>
+          <p:nvPr/>
+        </p:nvSpPr>
+        <p:spPr>
+          <a:xfrm>
+            <a:off x="457200" y="685800"/>
+            <a:ext cx="11247120" cy="292608"/>
+          </a:xfrm>
+          <a:prstGeom prst="rect">
+            <a:avLst/>
+          </a:prstGeom>
+          <a:noFill/>
+        </p:spPr>
+        <p:txBody>
+          <a:bodyPr wrap="square" lIns="36576" rIns="36576" tIns="18288" bIns="18288" anchor="t">
+            <a:spAutoFit/>
+          </a:bodyPr>
+          <a:lstStyle/>
+          <a:p>
+            <a:pPr algn="l">
+              <a:lnSpc>
+                <a:spcPct val="110000"/>
+              </a:lnSpc>
+            </a:pPr>
+            <a:r>
+              <a:rPr sz="1200" b="0" i="1">
+                <a:solidFill>
+                  <a:srgbClr val="666666"/>
+                </a:solidFill>
+                <a:latin typeface="Georgia"/>
+              </a:rPr>
+              <a:t>Open-discovery scan of 294k preprints + 423k NIH grants (2021-26): trends accelerating fastest that are near-absent in AoU — filtered to what AoU's data can support.</a:t>
+            </a:r>
+          </a:p>
+        </p:txBody>
+      </p:sp>
+      <p:sp>
+        <p:nvSpPr>
+          <p:cNvPr id="5" name="Rectangle 4"/>
+          <p:cNvSpPr/>
+          <p:nvPr/>
+        </p:nvSpPr>
+        <p:spPr>
+          <a:xfrm>
+            <a:off x="457200" y="1005840"/>
+            <a:ext cx="11247120" cy="9525"/>
+          </a:xfrm>
+          <a:prstGeom prst="rect">
+            <a:avLst/>
+          </a:prstGeom>
+          <a:solidFill>
+            <a:srgbClr val="C8C8C8"/>
+          </a:solidFill>
+          <a:ln>
+            <a:noFill/>
+          </a:ln>
+          <a:effectLst/>
+        </p:spPr>
+        <p:style>
+          <a:lnRef idx="1">
+            <a:schemeClr val="accent1"/>
+          </a:lnRef>
+          <a:fillRef idx="3">
+            <a:schemeClr val="accent1"/>
+          </a:fillRef>
+          <a:effectRef idx="2">
+            <a:schemeClr val="accent1"/>
+          </a:effectRef>
+          <a:fontRef idx="minor">
+            <a:schemeClr val="lt1"/>
+          </a:fontRef>
+        </p:style>
+        <p:txBody>
+          <a:bodyPr rtlCol="0" anchor="ctr"/>
+          <a:lstStyle/>
+          <a:p>
+            <a:pPr algn="ctr"/>
+          </a:p>
+        </p:txBody>
+      </p:sp>
+      <p:graphicFrame>
+        <p:nvGraphicFramePr>
+          <p:cNvPr id="6" name="Table 5"/>
+          <p:cNvGraphicFramePr>
+            <a:graphicFrameLocks noGrp="1"/>
+          </p:cNvGraphicFramePr>
+          <p:nvPr/>
+        </p:nvGraphicFramePr>
+        <p:xfrm>
+          <a:off x="502920" y="1417320"/>
+          <a:ext cx="11201400" cy="3474720"/>
+        </p:xfrm>
+        <a:graphic>
+          <a:graphicData uri="http://schemas.openxmlformats.org/drawingml/2006/table">
+            <a:tbl>
+              <a:tblPr firstRow="1" bandRow="1">
+                <a:tableStyleId>{5C22544A-7EE6-4342-B048-85BDC9FD1C3A}</a:tableStyleId>
+              </a:tblPr>
+              <a:tblGrid>
+                <a:gridCol w="2016252"/>
+                <a:gridCol w="2912364"/>
+                <a:gridCol w="784098"/>
+                <a:gridCol w="784098"/>
+                <a:gridCol w="4704588"/>
+              </a:tblGrid>
+              <a:tr h="365760">
+                <a:tc>
+                  <a:txBody>
+                    <a:bodyPr lIns="54864" rIns="54864" tIns="36576" bIns="36576"/>
+                    <a:lstStyle/>
+                    <a:p>
+                      <a:pPr algn="l"/>
+                      <a:r>
+                        <a:rPr sz="1200" b="1">
+                          <a:solidFill>
+                            <a:srgbClr val="FFFFFF"/>
+                          </a:solidFill>
+                          <a:latin typeface="Helvetica"/>
+                        </a:rPr>
+                        <a:t>Emerging trend</a:t>
+                      </a:r>
+                    </a:p>
+                  </a:txBody>
+                  <a:tcPr>
+                    <a:solidFill>
+                      <a:srgbClr val="1A3A6B"/>
+                    </a:solidFill>
+                  </a:tcPr>
+                </a:tc>
+                <a:tc>
+                  <a:txBody>
+                    <a:bodyPr lIns="54864" rIns="54864" tIns="36576" bIns="36576"/>
+                    <a:lstStyle/>
+                    <a:p>
+                      <a:pPr algn="l"/>
+                      <a:r>
+                        <a:rPr sz="1200" b="1">
+                          <a:solidFill>
+                            <a:srgbClr val="FFFFFF"/>
+                          </a:solidFill>
+                          <a:latin typeface="Helvetica"/>
+                        </a:rPr>
+                        <a:t>Field signal</a:t>
+                      </a:r>
+                    </a:p>
+                  </a:txBody>
+                  <a:tcPr>
+                    <a:solidFill>
+                      <a:srgbClr val="1A3A6B"/>
+                    </a:solidFill>
+                  </a:tcPr>
+                </a:tc>
+                <a:tc>
+                  <a:txBody>
+                    <a:bodyPr lIns="54864" rIns="54864" tIns="36576" bIns="36576"/>
+                    <a:lstStyle/>
+                    <a:p>
+                      <a:pPr algn="l"/>
+                      <a:r>
+                        <a:rPr sz="1200" b="1">
+                          <a:solidFill>
+                            <a:srgbClr val="FFFFFF"/>
+                          </a:solidFill>
+                          <a:latin typeface="Helvetica"/>
+                        </a:rPr>
+                        <a:t>AoU now</a:t>
+                      </a:r>
+                    </a:p>
+                  </a:txBody>
+                  <a:tcPr>
+                    <a:solidFill>
+                      <a:srgbClr val="1A3A6B"/>
+                    </a:solidFill>
+                  </a:tcPr>
+                </a:tc>
+                <a:tc>
+                  <a:txBody>
+                    <a:bodyPr lIns="54864" rIns="54864" tIns="36576" bIns="36576"/>
+                    <a:lstStyle/>
+                    <a:p>
+                      <a:pPr algn="l"/>
+                      <a:r>
+                        <a:rPr sz="1200" b="1">
+                          <a:solidFill>
+                            <a:srgbClr val="FFFFFF"/>
+                          </a:solidFill>
+                          <a:latin typeface="Helvetica"/>
+                        </a:rPr>
+                        <a:t>AoU fit</a:t>
+                      </a:r>
+                    </a:p>
+                  </a:txBody>
+                  <a:tcPr>
+                    <a:solidFill>
+                      <a:srgbClr val="1A3A6B"/>
+                    </a:solidFill>
+                  </a:tcPr>
+                </a:tc>
+                <a:tc>
+                  <a:txBody>
+                    <a:bodyPr lIns="54864" rIns="54864" tIns="36576" bIns="36576"/>
+                    <a:lstStyle/>
+                    <a:p>
+                      <a:pPr algn="l"/>
+                      <a:r>
+                        <a:rPr sz="1200" b="1">
+                          <a:solidFill>
+                            <a:srgbClr val="FFFFFF"/>
+                          </a:solidFill>
+                          <a:latin typeface="Helvetica"/>
+                        </a:rPr>
+                        <a:t>What AoU should do</a:t>
+                      </a:r>
+                    </a:p>
+                  </a:txBody>
+                  <a:tcPr>
+                    <a:solidFill>
+                      <a:srgbClr val="1A3A6B"/>
+                    </a:solidFill>
+                  </a:tcPr>
+                </a:tc>
+              </a:tr>
+              <a:tr h="621792">
+                <a:tc>
+                  <a:txBody>
+                    <a:bodyPr wrap="square" lIns="54864" rIns="54864" tIns="27432" bIns="27432"/>
+                    <a:lstStyle/>
+                    <a:p>
+                      <a:pPr algn="l"/>
+                      <a:r>
+                        <a:rPr sz="1050" b="1">
+                          <a:solidFill>
+                            <a:srgbClr val="1A3A6B"/>
+                          </a:solidFill>
+                          <a:latin typeface="Georgia"/>
+                        </a:rPr>
+                        <a:t>Genomic foundation models</a:t>
+                      </a:r>
+                    </a:p>
+                  </a:txBody>
+                  <a:tcPr>
+                    <a:solidFill>
+                      <a:srgbClr val="EAF0FA"/>
+                    </a:solidFill>
+                  </a:tcPr>
+                </a:tc>
+                <a:tc>
+                  <a:txBody>
+                    <a:bodyPr wrap="square" lIns="54864" rIns="54864" tIns="27432" bIns="27432"/>
+                    <a:lstStyle/>
+                    <a:p>
+                      <a:pPr algn="l"/>
+                      <a:r>
+                        <a:rPr sz="1050">
+                          <a:solidFill>
+                            <a:srgbClr val="333333"/>
+                          </a:solidFill>
+                          <a:latin typeface="Georgia"/>
+                        </a:rPr>
+                        <a:t>DNA language models; ~11k pubs in 2025 (4× since 2021)</a:t>
+                      </a:r>
+                    </a:p>
+                  </a:txBody>
+                  <a:tcPr>
+                    <a:solidFill>
+                      <a:srgbClr val="EAF0FA"/>
+                    </a:solidFill>
+                  </a:tcPr>
+                </a:tc>
+                <a:tc>
+                  <a:txBody>
+                    <a:bodyPr wrap="square" lIns="54864" rIns="54864" tIns="27432" bIns="27432"/>
+                    <a:lstStyle/>
+                    <a:p>
+                      <a:pPr algn="l"/>
+                      <a:r>
+                        <a:rPr sz="1050">
+                          <a:solidFill>
+                            <a:srgbClr val="333333"/>
+                          </a:solidFill>
+                          <a:latin typeface="Georgia"/>
+                        </a:rPr>
+                        <a:t>0.1%</a:t>
+                      </a:r>
+                    </a:p>
+                  </a:txBody>
+                  <a:tcPr>
+                    <a:solidFill>
+                      <a:srgbClr val="EAF0FA"/>
+                    </a:solidFill>
+                  </a:tcPr>
+                </a:tc>
+                <a:tc>
+                  <a:txBody>
+                    <a:bodyPr wrap="square" lIns="54864" rIns="54864" tIns="27432" bIns="27432"/>
+                    <a:lstStyle/>
+                    <a:p>
+                      <a:pPr algn="l"/>
+                      <a:r>
+                        <a:rPr sz="1050">
+                          <a:solidFill>
+                            <a:srgbClr val="333333"/>
+                          </a:solidFill>
+                          <a:latin typeface="Georgia"/>
+                        </a:rPr>
+                        <a:t>HIGH</a:t>
+                      </a:r>
+                    </a:p>
+                  </a:txBody>
+                  <a:tcPr>
+                    <a:solidFill>
+                      <a:srgbClr val="EAF0FA"/>
+                    </a:solidFill>
+                  </a:tcPr>
+                </a:tc>
+                <a:tc>
+                  <a:txBody>
+                    <a:bodyPr wrap="square" lIns="54864" rIns="54864" tIns="27432" bIns="27432"/>
+                    <a:lstStyle/>
+                    <a:p>
+                      <a:pPr algn="ctr"/>
+                      <a:r>
+                        <a:rPr sz="1050" b="1">
+                          <a:solidFill>
+                            <a:srgbClr val="1A3A6B"/>
+                          </a:solidFill>
+                          <a:latin typeface="Georgia"/>
+                        </a:rPr>
+                        <a:t>Build/benchmark ancestry-fair genomic FMs on AoU's diverse WGS + EHR — a substrate no peer matches</a:t>
+                      </a:r>
+                    </a:p>
+                  </a:txBody>
+                  <a:tcPr>
+                    <a:solidFill>
+                      <a:srgbClr val="EAF0FA"/>
+                    </a:solidFill>
+                  </a:tcPr>
+                </a:tc>
+              </a:tr>
+              <a:tr h="621792">
+                <a:tc>
+                  <a:txBody>
+                    <a:bodyPr wrap="square" lIns="54864" rIns="54864" tIns="27432" bIns="27432"/>
+                    <a:lstStyle/>
+                    <a:p>
+                      <a:pPr algn="l"/>
+                      <a:r>
+                        <a:rPr sz="1050" b="1">
+                          <a:solidFill>
+                            <a:srgbClr val="1A3A6B"/>
+                          </a:solidFill>
+                          <a:latin typeface="Georgia"/>
+                        </a:rPr>
+                        <a:t>LLMs + agentic AI on EHR</a:t>
+                      </a:r>
+                    </a:p>
+                  </a:txBody>
+                  <a:tcPr>
+                    <a:solidFill>
+                      <a:srgbClr val="FFFFFF"/>
+                    </a:solidFill>
+                  </a:tcPr>
+                </a:tc>
+                <a:tc>
+                  <a:txBody>
+                    <a:bodyPr wrap="square" lIns="54864" rIns="54864" tIns="27432" bIns="27432"/>
+                    <a:lstStyle/>
+                    <a:p>
+                      <a:pPr algn="l"/>
+                      <a:r>
+                        <a:rPr sz="1050">
+                          <a:solidFill>
+                            <a:srgbClr val="333333"/>
+                          </a:solidFill>
+                          <a:latin typeface="Georgia"/>
+                        </a:rPr>
+                        <a:t>LLM-in-medicine pubs up 47× (2021→2025); agentic AI 19×</a:t>
+                      </a:r>
+                    </a:p>
+                  </a:txBody>
+                  <a:tcPr>
+                    <a:solidFill>
+                      <a:srgbClr val="FFFFFF"/>
+                    </a:solidFill>
+                  </a:tcPr>
+                </a:tc>
+                <a:tc>
+                  <a:txBody>
+                    <a:bodyPr wrap="square" lIns="54864" rIns="54864" tIns="27432" bIns="27432"/>
+                    <a:lstStyle/>
+                    <a:p>
+                      <a:pPr algn="l"/>
+                      <a:r>
+                        <a:rPr sz="1050">
+                          <a:solidFill>
+                            <a:srgbClr val="333333"/>
+                          </a:solidFill>
+                          <a:latin typeface="Georgia"/>
+                        </a:rPr>
+                        <a:t>0.2%</a:t>
+                      </a:r>
+                    </a:p>
+                  </a:txBody>
+                  <a:tcPr>
+                    <a:solidFill>
+                      <a:srgbClr val="FFFFFF"/>
+                    </a:solidFill>
+                  </a:tcPr>
+                </a:tc>
+                <a:tc>
+                  <a:txBody>
+                    <a:bodyPr wrap="square" lIns="54864" rIns="54864" tIns="27432" bIns="27432"/>
+                    <a:lstStyle/>
+                    <a:p>
+                      <a:pPr algn="l"/>
+                      <a:r>
+                        <a:rPr sz="1050">
+                          <a:solidFill>
+                            <a:srgbClr val="333333"/>
+                          </a:solidFill>
+                          <a:latin typeface="Georgia"/>
+                        </a:rPr>
+                        <a:t>HIGH</a:t>
+                      </a:r>
+                    </a:p>
+                  </a:txBody>
+                  <a:tcPr>
+                    <a:solidFill>
+                      <a:srgbClr val="FFFFFF"/>
+                    </a:solidFill>
+                  </a:tcPr>
+                </a:tc>
+                <a:tc>
+                  <a:txBody>
+                    <a:bodyPr wrap="square" lIns="54864" rIns="54864" tIns="27432" bIns="27432"/>
+                    <a:lstStyle/>
+                    <a:p>
+                      <a:pPr algn="ctr"/>
+                      <a:r>
+                        <a:rPr sz="1050" b="1">
+                          <a:solidFill>
+                            <a:srgbClr val="1A3A6B"/>
+                          </a:solidFill>
+                          <a:latin typeface="Georgia"/>
+                        </a:rPr>
+                        <a:t>Workbench AI co-scientist + RAG over AoU data/dictionary (directly powers WG-4 Rec)</a:t>
+                      </a:r>
+                    </a:p>
+                  </a:txBody>
+                  <a:tcPr>
+                    <a:solidFill>
+                      <a:srgbClr val="FFFFFF"/>
+                    </a:solidFill>
+                  </a:tcPr>
+                </a:tc>
+              </a:tr>
+              <a:tr h="621792">
+                <a:tc>
+                  <a:txBody>
+                    <a:bodyPr wrap="square" lIns="54864" rIns="54864" tIns="27432" bIns="27432"/>
+                    <a:lstStyle/>
+                    <a:p>
+                      <a:pPr algn="l"/>
+                      <a:r>
+                        <a:rPr sz="1050" b="1">
+                          <a:solidFill>
+                            <a:srgbClr val="1A3A6B"/>
+                          </a:solidFill>
+                          <a:latin typeface="Georgia"/>
+                        </a:rPr>
+                        <a:t>MASLD / MASH (steatotic liver)</a:t>
+                      </a:r>
+                    </a:p>
+                  </a:txBody>
+                  <a:tcPr>
+                    <a:solidFill>
+                      <a:srgbClr val="EAF0FA"/>
+                    </a:solidFill>
+                  </a:tcPr>
+                </a:tc>
+                <a:tc>
+                  <a:txBody>
+                    <a:bodyPr wrap="square" lIns="54864" rIns="54864" tIns="27432" bIns="27432"/>
+                    <a:lstStyle/>
+                    <a:p>
+                      <a:pPr algn="l"/>
+                      <a:r>
+                        <a:rPr sz="1050">
+                          <a:solidFill>
+                            <a:srgbClr val="333333"/>
+                          </a:solidFill>
+                          <a:latin typeface="Georgia"/>
+                        </a:rPr>
+                        <a:t>2023 NAFLD→MASLD renaming now standard; ~19k pubs/2025</a:t>
+                      </a:r>
+                    </a:p>
+                  </a:txBody>
+                  <a:tcPr>
+                    <a:solidFill>
+                      <a:srgbClr val="EAF0FA"/>
+                    </a:solidFill>
+                  </a:tcPr>
+                </a:tc>
+                <a:tc>
+                  <a:txBody>
+                    <a:bodyPr wrap="square" lIns="54864" rIns="54864" tIns="27432" bIns="27432"/>
+                    <a:lstStyle/>
+                    <a:p>
+                      <a:pPr algn="l"/>
+                      <a:r>
+                        <a:rPr sz="1050">
+                          <a:solidFill>
+                            <a:srgbClr val="333333"/>
+                          </a:solidFill>
+                          <a:latin typeface="Georgia"/>
+                        </a:rPr>
+                        <a:t>0.7%</a:t>
+                      </a:r>
+                    </a:p>
+                  </a:txBody>
+                  <a:tcPr>
+                    <a:solidFill>
+                      <a:srgbClr val="EAF0FA"/>
+                    </a:solidFill>
+                  </a:tcPr>
+                </a:tc>
+                <a:tc>
+                  <a:txBody>
+                    <a:bodyPr wrap="square" lIns="54864" rIns="54864" tIns="27432" bIns="27432"/>
+                    <a:lstStyle/>
+                    <a:p>
+                      <a:pPr algn="l"/>
+                      <a:r>
+                        <a:rPr sz="1050">
+                          <a:solidFill>
+                            <a:srgbClr val="333333"/>
+                          </a:solidFill>
+                          <a:latin typeface="Georgia"/>
+                        </a:rPr>
+                        <a:t>HIGH</a:t>
+                      </a:r>
+                    </a:p>
+                  </a:txBody>
+                  <a:tcPr>
+                    <a:solidFill>
+                      <a:srgbClr val="EAF0FA"/>
+                    </a:solidFill>
+                  </a:tcPr>
+                </a:tc>
+                <a:tc>
+                  <a:txBody>
+                    <a:bodyPr wrap="square" lIns="54864" rIns="54864" tIns="27432" bIns="27432"/>
+                    <a:lstStyle/>
+                    <a:p>
+                      <a:pPr algn="ctr"/>
+                      <a:r>
+                        <a:rPr sz="1050" b="1">
+                          <a:solidFill>
+                            <a:srgbClr val="1A3A6B"/>
+                          </a:solidFill>
+                          <a:latin typeface="Georgia"/>
+                        </a:rPr>
+                        <a:t>Adopt MASLD as a curated EHR+labs phenotype — low effort, high credibility</a:t>
+                      </a:r>
+                    </a:p>
+                  </a:txBody>
+                  <a:tcPr>
+                    <a:solidFill>
+                      <a:srgbClr val="EAF0FA"/>
+                    </a:solidFill>
+                  </a:tcPr>
+                </a:tc>
+              </a:tr>
+              <a:tr h="621792">
+                <a:tc>
+                  <a:txBody>
+                    <a:bodyPr wrap="square" lIns="54864" rIns="54864" tIns="27432" bIns="27432"/>
+                    <a:lstStyle/>
+                    <a:p>
+                      <a:pPr algn="l"/>
+                      <a:r>
+                        <a:rPr sz="1050" b="1">
+                          <a:solidFill>
+                            <a:srgbClr val="1A3A6B"/>
+                          </a:solidFill>
+                          <a:latin typeface="Georgia"/>
+                        </a:rPr>
+                        <a:t>Aging epidemiology (not bench senescence)</a:t>
+                      </a:r>
+                    </a:p>
+                  </a:txBody>
+                  <a:tcPr>
+                    <a:solidFill>
+                      <a:srgbClr val="FFFFFF"/>
+                    </a:solidFill>
+                  </a:tcPr>
+                </a:tc>
+                <a:tc>
+                  <a:txBody>
+                    <a:bodyPr wrap="square" lIns="54864" rIns="54864" tIns="27432" bIns="27432"/>
+                    <a:lstStyle/>
+                    <a:p>
+                      <a:pPr algn="l"/>
+                      <a:r>
+                        <a:rPr sz="1050">
+                          <a:solidFill>
+                            <a:srgbClr val="333333"/>
+                          </a:solidFill>
+                          <a:latin typeface="Georgia"/>
+                        </a:rPr>
+                        <a:t>Aging-biology surge; ~51k pubs/2025</a:t>
+                      </a:r>
+                    </a:p>
+                  </a:txBody>
+                  <a:tcPr>
+                    <a:solidFill>
+                      <a:srgbClr val="FFFFFF"/>
+                    </a:solidFill>
+                  </a:tcPr>
+                </a:tc>
+                <a:tc>
+                  <a:txBody>
+                    <a:bodyPr wrap="square" lIns="54864" rIns="54864" tIns="27432" bIns="27432"/>
+                    <a:lstStyle/>
+                    <a:p>
+                      <a:pPr algn="l"/>
+                      <a:r>
+                        <a:rPr sz="1050">
+                          <a:solidFill>
+                            <a:srgbClr val="333333"/>
+                          </a:solidFill>
+                          <a:latin typeface="Georgia"/>
+                        </a:rPr>
+                        <a:t>~0%</a:t>
+                      </a:r>
+                    </a:p>
+                  </a:txBody>
+                  <a:tcPr>
+                    <a:solidFill>
+                      <a:srgbClr val="FFFFFF"/>
+                    </a:solidFill>
+                  </a:tcPr>
+                </a:tc>
+                <a:tc>
+                  <a:txBody>
+                    <a:bodyPr wrap="square" lIns="54864" rIns="54864" tIns="27432" bIns="27432"/>
+                    <a:lstStyle/>
+                    <a:p>
+                      <a:pPr algn="l"/>
+                      <a:r>
+                        <a:rPr sz="1050">
+                          <a:solidFill>
+                            <a:srgbClr val="333333"/>
+                          </a:solidFill>
+                          <a:latin typeface="Georgia"/>
+                        </a:rPr>
+                        <a:t>MED</a:t>
+                      </a:r>
+                    </a:p>
+                  </a:txBody>
+                  <a:tcPr>
+                    <a:solidFill>
+                      <a:srgbClr val="FFFFFF"/>
+                    </a:solidFill>
+                  </a:tcPr>
+                </a:tc>
+                <a:tc>
+                  <a:txBody>
+                    <a:bodyPr wrap="square" lIns="54864" rIns="54864" tIns="27432" bIns="27432"/>
+                    <a:lstStyle/>
+                    <a:p>
+                      <a:pPr algn="ctr"/>
+                      <a:r>
+                        <a:rPr sz="1050" b="1">
+                          <a:solidFill>
+                            <a:srgbClr val="1A3A6B"/>
+                          </a:solidFill>
+                          <a:latin typeface="Georgia"/>
+                        </a:rPr>
+                        <a:t>EHR + biomarker studies of aging; the cellular-senescence biology is out of scope</a:t>
+                      </a:r>
+                    </a:p>
+                  </a:txBody>
+                  <a:tcPr>
+                    <a:solidFill>
+                      <a:srgbClr val="FFFFFF"/>
+                    </a:solidFill>
+                  </a:tcPr>
+                </a:tc>
+              </a:tr>
+              <a:tr h="621792">
+                <a:tc>
+                  <a:txBody>
+                    <a:bodyPr wrap="square" lIns="54864" rIns="54864" tIns="27432" bIns="27432"/>
+                    <a:lstStyle/>
+                    <a:p>
+                      <a:pPr algn="l"/>
+                      <a:r>
+                        <a:rPr sz="1050" b="1">
+                          <a:solidFill>
+                            <a:srgbClr val="1A3A6B"/>
+                          </a:solidFill>
+                          <a:latin typeface="Georgia"/>
+                        </a:rPr>
+                        <a:t>Digital health / wearables AI</a:t>
+                      </a:r>
+                    </a:p>
+                  </a:txBody>
+                  <a:tcPr>
+                    <a:solidFill>
+                      <a:srgbClr val="EAF0FA"/>
+                    </a:solidFill>
+                  </a:tcPr>
+                </a:tc>
+                <a:tc>
+                  <a:txBody>
+                    <a:bodyPr wrap="square" lIns="54864" rIns="54864" tIns="27432" bIns="27432"/>
+                    <a:lstStyle/>
+                    <a:p>
+                      <a:pPr algn="l"/>
+                      <a:r>
+                        <a:rPr sz="1050">
+                          <a:solidFill>
+                            <a:srgbClr val="333333"/>
+                          </a:solidFill>
+                          <a:latin typeface="Georgia"/>
+                        </a:rPr>
+                        <a:t>mHealth interventions rising; AoU already has Fitbit data</a:t>
+                      </a:r>
+                    </a:p>
+                  </a:txBody>
+                  <a:tcPr>
+                    <a:solidFill>
+                      <a:srgbClr val="EAF0FA"/>
+                    </a:solidFill>
+                  </a:tcPr>
+                </a:tc>
+                <a:tc>
+                  <a:txBody>
+                    <a:bodyPr wrap="square" lIns="54864" rIns="54864" tIns="27432" bIns="27432"/>
+                    <a:lstStyle/>
+                    <a:p>
+                      <a:pPr algn="l"/>
+                      <a:r>
+                        <a:rPr sz="1050">
+                          <a:solidFill>
+                            <a:srgbClr val="333333"/>
+                          </a:solidFill>
+                          <a:latin typeface="Georgia"/>
+                        </a:rPr>
+                        <a:t>0.7%</a:t>
+                      </a:r>
+                    </a:p>
+                  </a:txBody>
+                  <a:tcPr>
+                    <a:solidFill>
+                      <a:srgbClr val="EAF0FA"/>
+                    </a:solidFill>
+                  </a:tcPr>
+                </a:tc>
+                <a:tc>
+                  <a:txBody>
+                    <a:bodyPr wrap="square" lIns="54864" rIns="54864" tIns="27432" bIns="27432"/>
+                    <a:lstStyle/>
+                    <a:p>
+                      <a:pPr algn="l"/>
+                      <a:r>
+                        <a:rPr sz="1050">
+                          <a:solidFill>
+                            <a:srgbClr val="333333"/>
+                          </a:solidFill>
+                          <a:latin typeface="Georgia"/>
+                        </a:rPr>
+                        <a:t>MED</a:t>
+                      </a:r>
+                    </a:p>
+                  </a:txBody>
+                  <a:tcPr>
+                    <a:solidFill>
+                      <a:srgbClr val="EAF0FA"/>
+                    </a:solidFill>
+                  </a:tcPr>
+                </a:tc>
+                <a:tc>
+                  <a:txBody>
+                    <a:bodyPr wrap="square" lIns="54864" rIns="54864" tIns="27432" bIns="27432"/>
+                    <a:lstStyle/>
+                    <a:p>
+                      <a:pPr algn="ctr"/>
+                      <a:r>
+                        <a:rPr sz="1050" b="1">
+                          <a:solidFill>
+                            <a:srgbClr val="1A3A6B"/>
+                          </a:solidFill>
+                          <a:latin typeface="Georgia"/>
+                        </a:rPr>
+                        <a:t>Wearable-derived phenotypes + multimodal EHR+wearable models</a:t>
+                      </a:r>
+                    </a:p>
+                  </a:txBody>
+                  <a:tcPr>
+                    <a:solidFill>
+                      <a:srgbClr val="EAF0FA"/>
+                    </a:solidFill>
+                  </a:tcPr>
+                </a:tc>
+              </a:tr>
+            </a:tbl>
+          </a:graphicData>
+        </a:graphic>
+      </p:graphicFrame>
+      <p:sp>
+        <p:nvSpPr>
+          <p:cNvPr id="7" name="Rectangle 6"/>
+          <p:cNvSpPr/>
+          <p:nvPr/>
+        </p:nvSpPr>
+        <p:spPr>
+          <a:xfrm>
+            <a:off x="502920" y="5257800"/>
+            <a:ext cx="11201400" cy="713232"/>
+          </a:xfrm>
+          <a:prstGeom prst="rect">
+            <a:avLst/>
+          </a:prstGeom>
+          <a:solidFill>
+            <a:srgbClr val="EAF0FA"/>
+          </a:solidFill>
+          <a:ln w="6350">
+            <a:solidFill>
+              <a:srgbClr val="666666"/>
+            </a:solidFill>
+          </a:ln>
+          <a:effectLst/>
+        </p:spPr>
+        <p:style>
+          <a:lnRef idx="1">
+            <a:schemeClr val="accent1"/>
+          </a:lnRef>
+          <a:fillRef idx="3">
+            <a:schemeClr val="accent1"/>
+          </a:fillRef>
+          <a:effectRef idx="2">
+            <a:schemeClr val="accent1"/>
+          </a:effectRef>
+          <a:fontRef idx="minor">
+            <a:schemeClr val="lt1"/>
+          </a:fontRef>
+        </p:style>
+        <p:txBody>
+          <a:bodyPr rtlCol="0" anchor="ctr"/>
+          <a:lstStyle/>
+          <a:p>
+            <a:pPr algn="ctr"/>
+          </a:p>
+        </p:txBody>
+      </p:sp>
+      <p:sp>
+        <p:nvSpPr>
+          <p:cNvPr id="8" name="TextBox 7"/>
+          <p:cNvSpPr txBox="1"/>
+          <p:nvPr/>
+        </p:nvSpPr>
+        <p:spPr>
+          <a:xfrm>
+            <a:off x="658368" y="5321808"/>
+            <a:ext cx="10881360" cy="320040"/>
+          </a:xfrm>
+          <a:prstGeom prst="rect">
+            <a:avLst/>
+          </a:prstGeom>
+          <a:noFill/>
+        </p:spPr>
+        <p:txBody>
+          <a:bodyPr wrap="square" lIns="36576" rIns="36576" tIns="18288" bIns="18288" anchor="t">
+            <a:spAutoFit/>
+          </a:bodyPr>
+          <a:lstStyle/>
+          <a:p>
+            <a:pPr algn="l">
+              <a:lnSpc>
+                <a:spcPct val="115000"/>
+              </a:lnSpc>
+            </a:pPr>
+            <a:r>
+              <a:rPr sz="1150" b="1" i="0">
+                <a:solidFill>
+                  <a:srgbClr val="1A3A6B"/>
+                </a:solidFill>
+                <a:latin typeface="Helvetica"/>
+              </a:rPr>
+              <a:t>Watch, don't build — real frontiers OUTSIDE AoU's data model:</a:t>
+            </a:r>
+          </a:p>
+        </p:txBody>
+      </p:sp>
+      <p:sp>
+        <p:nvSpPr>
+          <p:cNvPr id="9" name="TextBox 8"/>
+          <p:cNvSpPr txBox="1"/>
+          <p:nvPr/>
+        </p:nvSpPr>
+        <p:spPr>
+          <a:xfrm>
+            <a:off x="658368" y="5596128"/>
+            <a:ext cx="10881360" cy="365760"/>
+          </a:xfrm>
+          <a:prstGeom prst="rect">
+            <a:avLst/>
+          </a:prstGeom>
+          <a:noFill/>
+        </p:spPr>
+        <p:txBody>
+          <a:bodyPr wrap="square" lIns="36576" rIns="36576" tIns="18288" bIns="18288" anchor="t">
+            <a:spAutoFit/>
+          </a:bodyPr>
+          <a:lstStyle/>
+          <a:p>
+            <a:pPr algn="l">
+              <a:lnSpc>
+                <a:spcPct val="118000"/>
+              </a:lnSpc>
+            </a:pPr>
+            <a:r>
+              <a:rPr sz="1050" b="0" i="1">
+                <a:solidFill>
+                  <a:srgbClr val="333333"/>
+                </a:solidFill>
+                <a:latin typeface="Georgia"/>
+              </a:rPr>
+              <a:t>Single-cell &amp; spatial tissue omics · AI protein structure (AlphaFold3/Boltz) · iPSC models · gene-editing wet-lab. Exploding in the literature, but AoU collects none of the underlying assays — partner, don't chase.</a:t>
+            </a:r>
+          </a:p>
+        </p:txBody>
+      </p:sp>
+      <p:sp>
+        <p:nvSpPr>
+          <p:cNvPr id="10" name="TextBox 9"/>
+          <p:cNvSpPr txBox="1"/>
+          <p:nvPr/>
+        </p:nvSpPr>
+        <p:spPr>
+          <a:xfrm>
+            <a:off x="502920" y="6053328"/>
+            <a:ext cx="11201400" cy="365760"/>
+          </a:xfrm>
+          <a:prstGeom prst="rect">
+            <a:avLst/>
+          </a:prstGeom>
+          <a:noFill/>
+        </p:spPr>
+        <p:txBody>
+          <a:bodyPr wrap="square" lIns="36576" rIns="36576" tIns="18288" bIns="18288" anchor="t">
+            <a:spAutoFit/>
+          </a:bodyPr>
+          <a:lstStyle/>
+          <a:p>
+            <a:pPr algn="l">
+              <a:lnSpc>
+                <a:spcPct val="115000"/>
+              </a:lnSpc>
+            </a:pPr>
+            <a:r>
+              <a:rPr sz="1100" b="1" i="1">
+                <a:solidFill>
+                  <a:srgbClr val="B35900"/>
+                </a:solidFill>
+                <a:latin typeface="Georgia"/>
+              </a:rPr>
+              <a:t>The top two gaps ARE the proposed 9th focus area (Data, AI &amp; Methods) and the Workbench AI co-scientist — external evidence those recommendations point at the field's leading edge.</a:t>
+            </a:r>
+          </a:p>
+        </p:txBody>
+      </p:sp>
+      <p:sp>
+        <p:nvSpPr>
+          <p:cNvPr id="11" name="TextBox 10"/>
+          <p:cNvSpPr txBox="1"/>
+          <p:nvPr/>
+        </p:nvSpPr>
+        <p:spPr>
+          <a:xfrm>
+            <a:off x="457200" y="6492240"/>
+            <a:ext cx="7315200" cy="274320"/>
+          </a:xfrm>
+          <a:prstGeom prst="rect">
+            <a:avLst/>
+          </a:prstGeom>
+          <a:noFill/>
+        </p:spPr>
+        <p:txBody>
+          <a:bodyPr wrap="square" lIns="36576" rIns="36576" tIns="18288" bIns="18288" anchor="t">
+            <a:spAutoFit/>
+          </a:bodyPr>
+          <a:lstStyle/>
+          <a:p>
+            <a:pPr algn="l">
+              <a:lnSpc>
+                <a:spcPct val="115000"/>
+              </a:lnSpc>
+            </a:pPr>
+            <a:r>
+              <a:rPr sz="850" b="0" i="1">
+                <a:solidFill>
+                  <a:srgbClr val="666666"/>
+                </a:solidFill>
+                <a:latin typeface="Georgia"/>
+              </a:rPr>
+              <a:t>All of Us Scientific Roadmap Refresh  •  WG-1 Draft  •  Smoller &amp; Haendel  •  2026-06-02</a:t>
+            </a:r>
+          </a:p>
+        </p:txBody>
+      </p:sp>
+      <p:sp>
+        <p:nvSpPr>
+          <p:cNvPr id="12" name="TextBox 11"/>
+          <p:cNvSpPr txBox="1"/>
+          <p:nvPr/>
+        </p:nvSpPr>
+        <p:spPr>
+          <a:xfrm>
+            <a:off x="10515600" y="6492240"/>
+            <a:ext cx="1188720" cy="274320"/>
+          </a:xfrm>
+          <a:prstGeom prst="rect">
+            <a:avLst/>
+          </a:prstGeom>
+          <a:noFill/>
+        </p:spPr>
+        <p:txBody>
+          <a:bodyPr wrap="square" lIns="36576" rIns="36576" tIns="18288" bIns="18288" anchor="t">
+            <a:spAutoFit/>
+          </a:bodyPr>
+          <a:lstStyle/>
+          <a:p>
+            <a:pPr algn="r">
+              <a:lnSpc>
+                <a:spcPct val="115000"/>
+              </a:lnSpc>
+            </a:pPr>
+            <a:r>
+              <a:rPr sz="850" b="0" i="1">
+                <a:solidFill>
+                  <a:srgbClr val="666666"/>
+                </a:solidFill>
+                <a:latin typeface="Georgia"/>
+              </a:rPr>
+              <a:t>12 / 20</a:t>
+            </a:r>
+          </a:p>
+        </p:txBody>
+      </p:sp>
+    </p:spTree>
+  </p:cSld>
+  <p:clrMapOvr>
+    <a:masterClrMapping/>
+  </p:clrMapOvr>
+</p:sld>
+</file>
+
+<file path=ppt/slides/slide13.xml><?xml version="1.0" encoding="utf-8"?>
 <p:sld xmlns:a="http://schemas.openxmlformats.org/drawingml/2006/main" xmlns:p="http://schemas.openxmlformats.org/presentationml/2006/main" xmlns:r="http://schemas.openxmlformats.org/officeDocument/2006/relationships">
   <p:cSld>
     <p:spTree>
@@ -8418,7 +9680,7 @@
                 </a:solidFill>
                 <a:latin typeface="Georgia"/>
               </a:rPr>
-              <a:t>12 / 19</a:t>
+              <a:t>13 / 20</a:t>
             </a:r>
           </a:p>
         </p:txBody>
@@ -8431,7 +9693,7 @@
 </p:sld>
 </file>
 
-<file path=ppt/slides/slide13.xml><?xml version="1.0" encoding="utf-8"?>
+<file path=ppt/slides/slide14.xml><?xml version="1.0" encoding="utf-8"?>
 <p:sld xmlns:a="http://schemas.openxmlformats.org/drawingml/2006/main" xmlns:p="http://schemas.openxmlformats.org/presentationml/2006/main" xmlns:r="http://schemas.openxmlformats.org/officeDocument/2006/relationships">
   <p:cSld>
     <p:spTree>
@@ -9169,7 +10431,7 @@
                 </a:solidFill>
                 <a:latin typeface="Georgia"/>
               </a:rPr>
-              <a:t>13 / 19</a:t>
+              <a:t>14 / 20</a:t>
             </a:r>
           </a:p>
         </p:txBody>
@@ -9182,7 +10444,7 @@
 </p:sld>
 </file>
 
-<file path=ppt/slides/slide14.xml><?xml version="1.0" encoding="utf-8"?>
+<file path=ppt/slides/slide15.xml><?xml version="1.0" encoding="utf-8"?>
 <p:sld xmlns:a="http://schemas.openxmlformats.org/drawingml/2006/main" xmlns:p="http://schemas.openxmlformats.org/presentationml/2006/main" xmlns:r="http://schemas.openxmlformats.org/officeDocument/2006/relationships">
   <p:cSld>
     <p:spTree>
@@ -9920,7 +11182,7 @@
                 </a:solidFill>
                 <a:latin typeface="Georgia"/>
               </a:rPr>
-              <a:t>14 / 19</a:t>
+              <a:t>15 / 20</a:t>
             </a:r>
           </a:p>
         </p:txBody>
@@ -9933,7 +11195,7 @@
 </p:sld>
 </file>
 
-<file path=ppt/slides/slide15.xml><?xml version="1.0" encoding="utf-8"?>
+<file path=ppt/slides/slide16.xml><?xml version="1.0" encoding="utf-8"?>
 <p:sld xmlns:a="http://schemas.openxmlformats.org/drawingml/2006/main" xmlns:p="http://schemas.openxmlformats.org/presentationml/2006/main" xmlns:r="http://schemas.openxmlformats.org/officeDocument/2006/relationships">
   <p:cSld>
     <p:spTree>
@@ -10671,7 +11933,7 @@
                 </a:solidFill>
                 <a:latin typeface="Georgia"/>
               </a:rPr>
-              <a:t>15 / 19</a:t>
+              <a:t>16 / 20</a:t>
             </a:r>
           </a:p>
         </p:txBody>
@@ -10684,7 +11946,7 @@
 </p:sld>
 </file>
 
-<file path=ppt/slides/slide16.xml><?xml version="1.0" encoding="utf-8"?>
+<file path=ppt/slides/slide17.xml><?xml version="1.0" encoding="utf-8"?>
 <p:sld xmlns:a="http://schemas.openxmlformats.org/drawingml/2006/main" xmlns:p="http://schemas.openxmlformats.org/presentationml/2006/main" xmlns:r="http://schemas.openxmlformats.org/officeDocument/2006/relationships">
   <p:cSld>
     <p:spTree>
@@ -11422,1269 +12684,7 @@
                 </a:solidFill>
                 <a:latin typeface="Georgia"/>
               </a:rPr>
-              <a:t>16 / 19</a:t>
-            </a:r>
-          </a:p>
-        </p:txBody>
-      </p:sp>
-    </p:spTree>
-  </p:cSld>
-  <p:clrMapOvr>
-    <a:masterClrMapping/>
-  </p:clrMapOvr>
-</p:sld>
-</file>
-
-<file path=ppt/slides/slide17.xml><?xml version="1.0" encoding="utf-8"?>
-<p:sld xmlns:a="http://schemas.openxmlformats.org/drawingml/2006/main" xmlns:p="http://schemas.openxmlformats.org/presentationml/2006/main" xmlns:r="http://schemas.openxmlformats.org/officeDocument/2006/relationships">
-  <p:cSld>
-    <p:spTree>
-      <p:nvGrpSpPr>
-        <p:cNvPr id="1" name=""/>
-        <p:cNvGrpSpPr/>
-        <p:nvPr/>
-      </p:nvGrpSpPr>
-      <p:grpSpPr/>
-      <p:sp>
-        <p:nvSpPr>
-          <p:cNvPr id="2" name="Rectangle 1"/>
-          <p:cNvSpPr/>
-          <p:nvPr/>
-        </p:nvSpPr>
-        <p:spPr>
-          <a:xfrm>
-            <a:off x="0" y="0"/>
-            <a:ext cx="12191695" cy="73152"/>
-          </a:xfrm>
-          <a:prstGeom prst="rect">
-            <a:avLst/>
-          </a:prstGeom>
-          <a:solidFill>
-            <a:srgbClr val="1A3A6B"/>
-          </a:solidFill>
-          <a:ln>
-            <a:noFill/>
-          </a:ln>
-          <a:effectLst/>
-        </p:spPr>
-        <p:style>
-          <a:lnRef idx="1">
-            <a:schemeClr val="accent1"/>
-          </a:lnRef>
-          <a:fillRef idx="3">
-            <a:schemeClr val="accent1"/>
-          </a:fillRef>
-          <a:effectRef idx="2">
-            <a:schemeClr val="accent1"/>
-          </a:effectRef>
-          <a:fontRef idx="minor">
-            <a:schemeClr val="lt1"/>
-          </a:fontRef>
-        </p:style>
-        <p:txBody>
-          <a:bodyPr rtlCol="0" anchor="ctr"/>
-          <a:lstStyle/>
-          <a:p>
-            <a:pPr algn="ctr"/>
-          </a:p>
-        </p:txBody>
-      </p:sp>
-      <p:sp>
-        <p:nvSpPr>
-          <p:cNvPr id="3" name="TextBox 2"/>
-          <p:cNvSpPr txBox="1"/>
-          <p:nvPr/>
-        </p:nvSpPr>
-        <p:spPr>
-          <a:xfrm>
-            <a:off x="457200" y="164592"/>
-            <a:ext cx="11247120" cy="502920"/>
-          </a:xfrm>
-          <a:prstGeom prst="rect">
-            <a:avLst/>
-          </a:prstGeom>
-          <a:noFill/>
-        </p:spPr>
-        <p:txBody>
-          <a:bodyPr wrap="square" lIns="36576" rIns="36576" tIns="18288" bIns="18288" anchor="t">
-            <a:spAutoFit/>
-          </a:bodyPr>
-          <a:lstStyle/>
-          <a:p>
-            <a:pPr algn="l">
-              <a:lnSpc>
-                <a:spcPct val="105000"/>
-              </a:lnSpc>
-            </a:pPr>
-            <a:r>
-              <a:rPr sz="2200" b="1" i="0">
-                <a:solidFill>
-                  <a:srgbClr val="1A3A6B"/>
-                </a:solidFill>
-                <a:latin typeface="Helvetica"/>
-              </a:rPr>
-              <a:t>Five cross-WG dependencies the Sci Com should coordinate</a:t>
-            </a:r>
-          </a:p>
-        </p:txBody>
-      </p:sp>
-      <p:sp>
-        <p:nvSpPr>
-          <p:cNvPr id="4" name="TextBox 3"/>
-          <p:cNvSpPr txBox="1"/>
-          <p:nvPr/>
-        </p:nvSpPr>
-        <p:spPr>
-          <a:xfrm>
-            <a:off x="457200" y="685800"/>
-            <a:ext cx="11247120" cy="292608"/>
-          </a:xfrm>
-          <a:prstGeom prst="rect">
-            <a:avLst/>
-          </a:prstGeom>
-          <a:noFill/>
-        </p:spPr>
-        <p:txBody>
-          <a:bodyPr wrap="square" lIns="36576" rIns="36576" tIns="18288" bIns="18288" anchor="t">
-            <a:spAutoFit/>
-          </a:bodyPr>
-          <a:lstStyle/>
-          <a:p>
-            <a:pPr algn="l">
-              <a:lnSpc>
-                <a:spcPct val="110000"/>
-              </a:lnSpc>
-            </a:pPr>
-            <a:r>
-              <a:rPr sz="1200" b="0" i="1">
-                <a:solidFill>
-                  <a:srgbClr val="666666"/>
-                </a:solidFill>
-                <a:latin typeface="Georgia"/>
-              </a:rPr>
-              <a:t>Without these handshakes the WGs ship semi-aligned outputs that compete instead of compounding.</a:t>
-            </a:r>
-          </a:p>
-        </p:txBody>
-      </p:sp>
-      <p:sp>
-        <p:nvSpPr>
-          <p:cNvPr id="5" name="Rectangle 4"/>
-          <p:cNvSpPr/>
-          <p:nvPr/>
-        </p:nvSpPr>
-        <p:spPr>
-          <a:xfrm>
-            <a:off x="457200" y="1005840"/>
-            <a:ext cx="11247120" cy="9525"/>
-          </a:xfrm>
-          <a:prstGeom prst="rect">
-            <a:avLst/>
-          </a:prstGeom>
-          <a:solidFill>
-            <a:srgbClr val="C8C8C8"/>
-          </a:solidFill>
-          <a:ln>
-            <a:noFill/>
-          </a:ln>
-          <a:effectLst/>
-        </p:spPr>
-        <p:style>
-          <a:lnRef idx="1">
-            <a:schemeClr val="accent1"/>
-          </a:lnRef>
-          <a:fillRef idx="3">
-            <a:schemeClr val="accent1"/>
-          </a:fillRef>
-          <a:effectRef idx="2">
-            <a:schemeClr val="accent1"/>
-          </a:effectRef>
-          <a:fontRef idx="minor">
-            <a:schemeClr val="lt1"/>
-          </a:fontRef>
-        </p:style>
-        <p:txBody>
-          <a:bodyPr rtlCol="0" anchor="ctr"/>
-          <a:lstStyle/>
-          <a:p>
-            <a:pPr algn="ctr"/>
-          </a:p>
-        </p:txBody>
-      </p:sp>
-      <p:sp>
-        <p:nvSpPr>
-          <p:cNvPr id="6" name="Rectangle 5"/>
-          <p:cNvSpPr/>
-          <p:nvPr/>
-        </p:nvSpPr>
-        <p:spPr>
-          <a:xfrm>
-            <a:off x="502920" y="1298448"/>
-            <a:ext cx="1005840" cy="868680"/>
-          </a:xfrm>
-          <a:prstGeom prst="rect">
-            <a:avLst/>
-          </a:prstGeom>
-          <a:solidFill>
-            <a:srgbClr val="1A3A6B"/>
-          </a:solidFill>
-          <a:ln>
-            <a:noFill/>
-          </a:ln>
-          <a:effectLst/>
-        </p:spPr>
-        <p:style>
-          <a:lnRef idx="1">
-            <a:schemeClr val="accent1"/>
-          </a:lnRef>
-          <a:fillRef idx="3">
-            <a:schemeClr val="accent1"/>
-          </a:fillRef>
-          <a:effectRef idx="2">
-            <a:schemeClr val="accent1"/>
-          </a:effectRef>
-          <a:fontRef idx="minor">
-            <a:schemeClr val="lt1"/>
-          </a:fontRef>
-        </p:style>
-        <p:txBody>
-          <a:bodyPr rtlCol="0" anchor="ctr"/>
-          <a:lstStyle/>
-          <a:p>
-            <a:pPr algn="ctr"/>
-          </a:p>
-        </p:txBody>
-      </p:sp>
-      <p:sp>
-        <p:nvSpPr>
-          <p:cNvPr id="7" name="TextBox 6"/>
-          <p:cNvSpPr txBox="1"/>
-          <p:nvPr/>
-        </p:nvSpPr>
-        <p:spPr>
-          <a:xfrm>
-            <a:off x="502920" y="1344168"/>
-            <a:ext cx="1005840" cy="365760"/>
-          </a:xfrm>
-          <a:prstGeom prst="rect">
-            <a:avLst/>
-          </a:prstGeom>
-          <a:noFill/>
-        </p:spPr>
-        <p:txBody>
-          <a:bodyPr wrap="square" lIns="36576" rIns="36576" tIns="18288" bIns="18288" anchor="t">
-            <a:spAutoFit/>
-          </a:bodyPr>
-          <a:lstStyle/>
-          <a:p>
-            <a:pPr algn="ctr">
-              <a:lnSpc>
-                <a:spcPct val="115000"/>
-              </a:lnSpc>
-            </a:pPr>
-            <a:r>
-              <a:rPr sz="1500" b="1" i="0">
-                <a:solidFill>
-                  <a:srgbClr val="FFFFFF"/>
-                </a:solidFill>
-                <a:latin typeface="Helvetica"/>
-              </a:rPr>
-              <a:t>CC-1</a:t>
-            </a:r>
-          </a:p>
-        </p:txBody>
-      </p:sp>
-      <p:sp>
-        <p:nvSpPr>
-          <p:cNvPr id="8" name="TextBox 7"/>
-          <p:cNvSpPr txBox="1"/>
-          <p:nvPr/>
-        </p:nvSpPr>
-        <p:spPr>
-          <a:xfrm>
-            <a:off x="502920" y="1709928"/>
-            <a:ext cx="1005840" cy="457200"/>
-          </a:xfrm>
-          <a:prstGeom prst="rect">
-            <a:avLst/>
-          </a:prstGeom>
-          <a:noFill/>
-        </p:spPr>
-        <p:txBody>
-          <a:bodyPr wrap="square" lIns="36576" rIns="36576" tIns="18288" bIns="18288" anchor="t">
-            <a:spAutoFit/>
-          </a:bodyPr>
-          <a:lstStyle/>
-          <a:p>
-            <a:pPr algn="ctr">
-              <a:lnSpc>
-                <a:spcPct val="115000"/>
-              </a:lnSpc>
-            </a:pPr>
-            <a:r>
-              <a:rPr sz="800" b="0" i="1">
-                <a:solidFill>
-                  <a:srgbClr val="FFFFFF"/>
-                </a:solidFill>
-                <a:latin typeface="Georgia"/>
-              </a:rPr>
-              <a:t>interlock</a:t>
-            </a:r>
-          </a:p>
-        </p:txBody>
-      </p:sp>
-      <p:sp>
-        <p:nvSpPr>
-          <p:cNvPr id="9" name="TextBox 8"/>
-          <p:cNvSpPr txBox="1"/>
-          <p:nvPr/>
-        </p:nvSpPr>
-        <p:spPr>
-          <a:xfrm>
-            <a:off x="1691640" y="1316736"/>
-            <a:ext cx="10012680" cy="365760"/>
-          </a:xfrm>
-          <a:prstGeom prst="rect">
-            <a:avLst/>
-          </a:prstGeom>
-          <a:noFill/>
-        </p:spPr>
-        <p:txBody>
-          <a:bodyPr wrap="square" lIns="36576" rIns="36576" tIns="18288" bIns="18288" anchor="t">
-            <a:spAutoFit/>
-          </a:bodyPr>
-          <a:lstStyle/>
-          <a:p>
-            <a:pPr algn="l">
-              <a:lnSpc>
-                <a:spcPct val="115000"/>
-              </a:lnSpc>
-            </a:pPr>
-            <a:r>
-              <a:rPr sz="1400" b="1" i="0">
-                <a:solidFill>
-                  <a:srgbClr val="1A3A6B"/>
-                </a:solidFill>
-                <a:latin typeface="Helvetica"/>
-              </a:rPr>
-              <a:t>9th focus area enables WG-3 + WG-4</a:t>
-            </a:r>
-          </a:p>
-        </p:txBody>
-      </p:sp>
-      <p:sp>
-        <p:nvSpPr>
-          <p:cNvPr id="10" name="TextBox 9"/>
-          <p:cNvSpPr txBox="1"/>
-          <p:nvPr/>
-        </p:nvSpPr>
-        <p:spPr>
-          <a:xfrm>
-            <a:off x="1691640" y="1682496"/>
-            <a:ext cx="10012680" cy="548640"/>
-          </a:xfrm>
-          <a:prstGeom prst="rect">
-            <a:avLst/>
-          </a:prstGeom>
-          <a:noFill/>
-        </p:spPr>
-        <p:txBody>
-          <a:bodyPr wrap="square" lIns="36576" rIns="36576" tIns="18288" bIns="18288" anchor="t">
-            <a:spAutoFit/>
-          </a:bodyPr>
-          <a:lstStyle/>
-          <a:p>
-            <a:pPr algn="l">
-              <a:lnSpc>
-                <a:spcPct val="125000"/>
-              </a:lnSpc>
-            </a:pPr>
-            <a:r>
-              <a:rPr sz="1150" b="0" i="0">
-                <a:solidFill>
-                  <a:srgbClr val="333333"/>
-                </a:solidFill>
-                <a:latin typeface="Georgia"/>
-              </a:rPr>
-              <a:t>WG-1's framework change is the structural prerequisite for both Imaging and AI work to have a coherent home.</a:t>
-            </a:r>
-          </a:p>
-        </p:txBody>
-      </p:sp>
-      <p:sp>
-        <p:nvSpPr>
-          <p:cNvPr id="11" name="Rectangle 10"/>
-          <p:cNvSpPr/>
-          <p:nvPr/>
-        </p:nvSpPr>
-        <p:spPr>
-          <a:xfrm>
-            <a:off x="502920" y="2286000"/>
-            <a:ext cx="1005840" cy="868680"/>
-          </a:xfrm>
-          <a:prstGeom prst="rect">
-            <a:avLst/>
-          </a:prstGeom>
-          <a:solidFill>
-            <a:srgbClr val="1A3A6B"/>
-          </a:solidFill>
-          <a:ln>
-            <a:noFill/>
-          </a:ln>
-          <a:effectLst/>
-        </p:spPr>
-        <p:style>
-          <a:lnRef idx="1">
-            <a:schemeClr val="accent1"/>
-          </a:lnRef>
-          <a:fillRef idx="3">
-            <a:schemeClr val="accent1"/>
-          </a:fillRef>
-          <a:effectRef idx="2">
-            <a:schemeClr val="accent1"/>
-          </a:effectRef>
-          <a:fontRef idx="minor">
-            <a:schemeClr val="lt1"/>
-          </a:fontRef>
-        </p:style>
-        <p:txBody>
-          <a:bodyPr rtlCol="0" anchor="ctr"/>
-          <a:lstStyle/>
-          <a:p>
-            <a:pPr algn="ctr"/>
-          </a:p>
-        </p:txBody>
-      </p:sp>
-      <p:sp>
-        <p:nvSpPr>
-          <p:cNvPr id="12" name="TextBox 11"/>
-          <p:cNvSpPr txBox="1"/>
-          <p:nvPr/>
-        </p:nvSpPr>
-        <p:spPr>
-          <a:xfrm>
-            <a:off x="502920" y="2331720"/>
-            <a:ext cx="1005840" cy="365760"/>
-          </a:xfrm>
-          <a:prstGeom prst="rect">
-            <a:avLst/>
-          </a:prstGeom>
-          <a:noFill/>
-        </p:spPr>
-        <p:txBody>
-          <a:bodyPr wrap="square" lIns="36576" rIns="36576" tIns="18288" bIns="18288" anchor="t">
-            <a:spAutoFit/>
-          </a:bodyPr>
-          <a:lstStyle/>
-          <a:p>
-            <a:pPr algn="ctr">
-              <a:lnSpc>
-                <a:spcPct val="115000"/>
-              </a:lnSpc>
-            </a:pPr>
-            <a:r>
-              <a:rPr sz="1500" b="1" i="0">
-                <a:solidFill>
-                  <a:srgbClr val="FFFFFF"/>
-                </a:solidFill>
-                <a:latin typeface="Helvetica"/>
-              </a:rPr>
-              <a:t>CC-2</a:t>
-            </a:r>
-          </a:p>
-        </p:txBody>
-      </p:sp>
-      <p:sp>
-        <p:nvSpPr>
-          <p:cNvPr id="13" name="TextBox 12"/>
-          <p:cNvSpPr txBox="1"/>
-          <p:nvPr/>
-        </p:nvSpPr>
-        <p:spPr>
-          <a:xfrm>
-            <a:off x="502920" y="2697480"/>
-            <a:ext cx="1005840" cy="457200"/>
-          </a:xfrm>
-          <a:prstGeom prst="rect">
-            <a:avLst/>
-          </a:prstGeom>
-          <a:noFill/>
-        </p:spPr>
-        <p:txBody>
-          <a:bodyPr wrap="square" lIns="36576" rIns="36576" tIns="18288" bIns="18288" anchor="t">
-            <a:spAutoFit/>
-          </a:bodyPr>
-          <a:lstStyle/>
-          <a:p>
-            <a:pPr algn="ctr">
-              <a:lnSpc>
-                <a:spcPct val="115000"/>
-              </a:lnSpc>
-            </a:pPr>
-            <a:r>
-              <a:rPr sz="800" b="0" i="1">
-                <a:solidFill>
-                  <a:srgbClr val="FFFFFF"/>
-                </a:solidFill>
-                <a:latin typeface="Georgia"/>
-              </a:rPr>
-              <a:t>interlock</a:t>
-            </a:r>
-          </a:p>
-        </p:txBody>
-      </p:sp>
-      <p:sp>
-        <p:nvSpPr>
-          <p:cNvPr id="14" name="TextBox 13"/>
-          <p:cNvSpPr txBox="1"/>
-          <p:nvPr/>
-        </p:nvSpPr>
-        <p:spPr>
-          <a:xfrm>
-            <a:off x="1691640" y="2304288"/>
-            <a:ext cx="10012680" cy="365760"/>
-          </a:xfrm>
-          <a:prstGeom prst="rect">
-            <a:avLst/>
-          </a:prstGeom>
-          <a:noFill/>
-        </p:spPr>
-        <p:txBody>
-          <a:bodyPr wrap="square" lIns="36576" rIns="36576" tIns="18288" bIns="18288" anchor="t">
-            <a:spAutoFit/>
-          </a:bodyPr>
-          <a:lstStyle/>
-          <a:p>
-            <a:pPr algn="l">
-              <a:lnSpc>
-                <a:spcPct val="115000"/>
-              </a:lnSpc>
-            </a:pPr>
-            <a:r>
-              <a:rPr sz="1400" b="1" i="0">
-                <a:solidFill>
-                  <a:srgbClr val="1A3A6B"/>
-                </a:solidFill>
-                <a:latin typeface="Helvetica"/>
-              </a:rPr>
-              <a:t>Bias-framework hierarchy across WG-2 / WG-3 / WG-4</a:t>
-            </a:r>
-          </a:p>
-        </p:txBody>
-      </p:sp>
-      <p:sp>
-        <p:nvSpPr>
-          <p:cNvPr id="15" name="TextBox 14"/>
-          <p:cNvSpPr txBox="1"/>
-          <p:nvPr/>
-        </p:nvSpPr>
-        <p:spPr>
-          <a:xfrm>
-            <a:off x="1691640" y="2670048"/>
-            <a:ext cx="10012680" cy="548640"/>
-          </a:xfrm>
-          <a:prstGeom prst="rect">
-            <a:avLst/>
-          </a:prstGeom>
-          <a:noFill/>
-        </p:spPr>
-        <p:txBody>
-          <a:bodyPr wrap="square" lIns="36576" rIns="36576" tIns="18288" bIns="18288" anchor="t">
-            <a:spAutoFit/>
-          </a:bodyPr>
-          <a:lstStyle/>
-          <a:p>
-            <a:pPr algn="l">
-              <a:lnSpc>
-                <a:spcPct val="125000"/>
-              </a:lnSpc>
-            </a:pPr>
-            <a:r>
-              <a:rPr sz="1150" b="0" i="0">
-                <a:solidFill>
-                  <a:srgbClr val="333333"/>
-                </a:solidFill>
-                <a:latin typeface="Georgia"/>
-              </a:rPr>
-              <a:t>WG-2 normative framework → WG-3 imaging audit → WG-4 AI audit. Three WGs should align on a SINGLE AoU bias-reporting standard.</a:t>
-            </a:r>
-          </a:p>
-        </p:txBody>
-      </p:sp>
-      <p:sp>
-        <p:nvSpPr>
-          <p:cNvPr id="16" name="Rectangle 15"/>
-          <p:cNvSpPr/>
-          <p:nvPr/>
-        </p:nvSpPr>
-        <p:spPr>
-          <a:xfrm>
-            <a:off x="502920" y="3273552"/>
-            <a:ext cx="1005840" cy="868680"/>
-          </a:xfrm>
-          <a:prstGeom prst="rect">
-            <a:avLst/>
-          </a:prstGeom>
-          <a:solidFill>
-            <a:srgbClr val="1A3A6B"/>
-          </a:solidFill>
-          <a:ln>
-            <a:noFill/>
-          </a:ln>
-          <a:effectLst/>
-        </p:spPr>
-        <p:style>
-          <a:lnRef idx="1">
-            <a:schemeClr val="accent1"/>
-          </a:lnRef>
-          <a:fillRef idx="3">
-            <a:schemeClr val="accent1"/>
-          </a:fillRef>
-          <a:effectRef idx="2">
-            <a:schemeClr val="accent1"/>
-          </a:effectRef>
-          <a:fontRef idx="minor">
-            <a:schemeClr val="lt1"/>
-          </a:fontRef>
-        </p:style>
-        <p:txBody>
-          <a:bodyPr rtlCol="0" anchor="ctr"/>
-          <a:lstStyle/>
-          <a:p>
-            <a:pPr algn="ctr"/>
-          </a:p>
-        </p:txBody>
-      </p:sp>
-      <p:sp>
-        <p:nvSpPr>
-          <p:cNvPr id="17" name="TextBox 16"/>
-          <p:cNvSpPr txBox="1"/>
-          <p:nvPr/>
-        </p:nvSpPr>
-        <p:spPr>
-          <a:xfrm>
-            <a:off x="502920" y="3319272"/>
-            <a:ext cx="1005840" cy="365760"/>
-          </a:xfrm>
-          <a:prstGeom prst="rect">
-            <a:avLst/>
-          </a:prstGeom>
-          <a:noFill/>
-        </p:spPr>
-        <p:txBody>
-          <a:bodyPr wrap="square" lIns="36576" rIns="36576" tIns="18288" bIns="18288" anchor="t">
-            <a:spAutoFit/>
-          </a:bodyPr>
-          <a:lstStyle/>
-          <a:p>
-            <a:pPr algn="ctr">
-              <a:lnSpc>
-                <a:spcPct val="115000"/>
-              </a:lnSpc>
-            </a:pPr>
-            <a:r>
-              <a:rPr sz="1500" b="1" i="0">
-                <a:solidFill>
-                  <a:srgbClr val="FFFFFF"/>
-                </a:solidFill>
-                <a:latin typeface="Helvetica"/>
-              </a:rPr>
-              <a:t>CC-3</a:t>
-            </a:r>
-          </a:p>
-        </p:txBody>
-      </p:sp>
-      <p:sp>
-        <p:nvSpPr>
-          <p:cNvPr id="18" name="TextBox 17"/>
-          <p:cNvSpPr txBox="1"/>
-          <p:nvPr/>
-        </p:nvSpPr>
-        <p:spPr>
-          <a:xfrm>
-            <a:off x="502920" y="3685032"/>
-            <a:ext cx="1005840" cy="457200"/>
-          </a:xfrm>
-          <a:prstGeom prst="rect">
-            <a:avLst/>
-          </a:prstGeom>
-          <a:noFill/>
-        </p:spPr>
-        <p:txBody>
-          <a:bodyPr wrap="square" lIns="36576" rIns="36576" tIns="18288" bIns="18288" anchor="t">
-            <a:spAutoFit/>
-          </a:bodyPr>
-          <a:lstStyle/>
-          <a:p>
-            <a:pPr algn="ctr">
-              <a:lnSpc>
-                <a:spcPct val="115000"/>
-              </a:lnSpc>
-            </a:pPr>
-            <a:r>
-              <a:rPr sz="800" b="0" i="1">
-                <a:solidFill>
-                  <a:srgbClr val="FFFFFF"/>
-                </a:solidFill>
-                <a:latin typeface="Georgia"/>
-              </a:rPr>
-              <a:t>interlock</a:t>
-            </a:r>
-          </a:p>
-        </p:txBody>
-      </p:sp>
-      <p:sp>
-        <p:nvSpPr>
-          <p:cNvPr id="19" name="TextBox 18"/>
-          <p:cNvSpPr txBox="1"/>
-          <p:nvPr/>
-        </p:nvSpPr>
-        <p:spPr>
-          <a:xfrm>
-            <a:off x="1691640" y="3291840"/>
-            <a:ext cx="10012680" cy="365760"/>
-          </a:xfrm>
-          <a:prstGeom prst="rect">
-            <a:avLst/>
-          </a:prstGeom>
-          <a:noFill/>
-        </p:spPr>
-        <p:txBody>
-          <a:bodyPr wrap="square" lIns="36576" rIns="36576" tIns="18288" bIns="18288" anchor="t">
-            <a:spAutoFit/>
-          </a:bodyPr>
-          <a:lstStyle/>
-          <a:p>
-            <a:pPr algn="l">
-              <a:lnSpc>
-                <a:spcPct val="115000"/>
-              </a:lnSpc>
-            </a:pPr>
-            <a:r>
-              <a:rPr sz="1400" b="1" i="0">
-                <a:solidFill>
-                  <a:srgbClr val="1A3A6B"/>
-                </a:solidFill>
-                <a:latin typeface="Helvetica"/>
-              </a:rPr>
-              <a:t>WG-2 metrics feed WG-5 Impact Report</a:t>
-            </a:r>
-          </a:p>
-        </p:txBody>
-      </p:sp>
-      <p:sp>
-        <p:nvSpPr>
-          <p:cNvPr id="20" name="TextBox 19"/>
-          <p:cNvSpPr txBox="1"/>
-          <p:nvPr/>
-        </p:nvSpPr>
-        <p:spPr>
-          <a:xfrm>
-            <a:off x="1691640" y="3657600"/>
-            <a:ext cx="10012680" cy="548640"/>
-          </a:xfrm>
-          <a:prstGeom prst="rect">
-            <a:avLst/>
-          </a:prstGeom>
-          <a:noFill/>
-        </p:spPr>
-        <p:txBody>
-          <a:bodyPr wrap="square" lIns="36576" rIns="36576" tIns="18288" bIns="18288" anchor="t">
-            <a:spAutoFit/>
-          </a:bodyPr>
-          <a:lstStyle/>
-          <a:p>
-            <a:pPr algn="l">
-              <a:lnSpc>
-                <a:spcPct val="125000"/>
-              </a:lnSpc>
-            </a:pPr>
-            <a:r>
-              <a:rPr sz="1150" b="0" i="0">
-                <a:solidFill>
-                  <a:srgbClr val="333333"/>
-                </a:solidFill>
-                <a:latin typeface="Georgia"/>
-              </a:rPr>
-              <a:t>WG-2 defines TSBM metrics; WG-5 produces the annual Report. Coordinate cadence so Report v1 ships within 12 months.</a:t>
-            </a:r>
-          </a:p>
-        </p:txBody>
-      </p:sp>
-      <p:sp>
-        <p:nvSpPr>
-          <p:cNvPr id="21" name="Rectangle 20"/>
-          <p:cNvSpPr/>
-          <p:nvPr/>
-        </p:nvSpPr>
-        <p:spPr>
-          <a:xfrm>
-            <a:off x="502920" y="4261104"/>
-            <a:ext cx="1005840" cy="868680"/>
-          </a:xfrm>
-          <a:prstGeom prst="rect">
-            <a:avLst/>
-          </a:prstGeom>
-          <a:solidFill>
-            <a:srgbClr val="1A3A6B"/>
-          </a:solidFill>
-          <a:ln>
-            <a:noFill/>
-          </a:ln>
-          <a:effectLst/>
-        </p:spPr>
-        <p:style>
-          <a:lnRef idx="1">
-            <a:schemeClr val="accent1"/>
-          </a:lnRef>
-          <a:fillRef idx="3">
-            <a:schemeClr val="accent1"/>
-          </a:fillRef>
-          <a:effectRef idx="2">
-            <a:schemeClr val="accent1"/>
-          </a:effectRef>
-          <a:fontRef idx="minor">
-            <a:schemeClr val="lt1"/>
-          </a:fontRef>
-        </p:style>
-        <p:txBody>
-          <a:bodyPr rtlCol="0" anchor="ctr"/>
-          <a:lstStyle/>
-          <a:p>
-            <a:pPr algn="ctr"/>
-          </a:p>
-        </p:txBody>
-      </p:sp>
-      <p:sp>
-        <p:nvSpPr>
-          <p:cNvPr id="22" name="TextBox 21"/>
-          <p:cNvSpPr txBox="1"/>
-          <p:nvPr/>
-        </p:nvSpPr>
-        <p:spPr>
-          <a:xfrm>
-            <a:off x="502920" y="4306824"/>
-            <a:ext cx="1005840" cy="365760"/>
-          </a:xfrm>
-          <a:prstGeom prst="rect">
-            <a:avLst/>
-          </a:prstGeom>
-          <a:noFill/>
-        </p:spPr>
-        <p:txBody>
-          <a:bodyPr wrap="square" lIns="36576" rIns="36576" tIns="18288" bIns="18288" anchor="t">
-            <a:spAutoFit/>
-          </a:bodyPr>
-          <a:lstStyle/>
-          <a:p>
-            <a:pPr algn="ctr">
-              <a:lnSpc>
-                <a:spcPct val="115000"/>
-              </a:lnSpc>
-            </a:pPr>
-            <a:r>
-              <a:rPr sz="1500" b="1" i="0">
-                <a:solidFill>
-                  <a:srgbClr val="FFFFFF"/>
-                </a:solidFill>
-                <a:latin typeface="Helvetica"/>
-              </a:rPr>
-              <a:t>CC-4</a:t>
-            </a:r>
-          </a:p>
-        </p:txBody>
-      </p:sp>
-      <p:sp>
-        <p:nvSpPr>
-          <p:cNvPr id="23" name="TextBox 22"/>
-          <p:cNvSpPr txBox="1"/>
-          <p:nvPr/>
-        </p:nvSpPr>
-        <p:spPr>
-          <a:xfrm>
-            <a:off x="502920" y="4672584"/>
-            <a:ext cx="1005840" cy="457200"/>
-          </a:xfrm>
-          <a:prstGeom prst="rect">
-            <a:avLst/>
-          </a:prstGeom>
-          <a:noFill/>
-        </p:spPr>
-        <p:txBody>
-          <a:bodyPr wrap="square" lIns="36576" rIns="36576" tIns="18288" bIns="18288" anchor="t">
-            <a:spAutoFit/>
-          </a:bodyPr>
-          <a:lstStyle/>
-          <a:p>
-            <a:pPr algn="ctr">
-              <a:lnSpc>
-                <a:spcPct val="115000"/>
-              </a:lnSpc>
-            </a:pPr>
-            <a:r>
-              <a:rPr sz="800" b="0" i="1">
-                <a:solidFill>
-                  <a:srgbClr val="FFFFFF"/>
-                </a:solidFill>
-                <a:latin typeface="Georgia"/>
-              </a:rPr>
-              <a:t>interlock</a:t>
-            </a:r>
-          </a:p>
-        </p:txBody>
-      </p:sp>
-      <p:sp>
-        <p:nvSpPr>
-          <p:cNvPr id="24" name="TextBox 23"/>
-          <p:cNvSpPr txBox="1"/>
-          <p:nvPr/>
-        </p:nvSpPr>
-        <p:spPr>
-          <a:xfrm>
-            <a:off x="1691640" y="4279392"/>
-            <a:ext cx="10012680" cy="365760"/>
-          </a:xfrm>
-          <a:prstGeom prst="rect">
-            <a:avLst/>
-          </a:prstGeom>
-          <a:noFill/>
-        </p:spPr>
-        <p:txBody>
-          <a:bodyPr wrap="square" lIns="36576" rIns="36576" tIns="18288" bIns="18288" anchor="t">
-            <a:spAutoFit/>
-          </a:bodyPr>
-          <a:lstStyle/>
-          <a:p>
-            <a:pPr algn="l">
-              <a:lnSpc>
-                <a:spcPct val="115000"/>
-              </a:lnSpc>
-            </a:pPr>
-            <a:r>
-              <a:rPr sz="1400" b="1" i="0">
-                <a:solidFill>
-                  <a:srgbClr val="1A3A6B"/>
-                </a:solidFill>
-                <a:latin typeface="Helvetica"/>
-              </a:rPr>
-              <a:t>WG-5 narrative requires WG-1 framework</a:t>
-            </a:r>
-          </a:p>
-        </p:txBody>
-      </p:sp>
-      <p:sp>
-        <p:nvSpPr>
-          <p:cNvPr id="25" name="TextBox 24"/>
-          <p:cNvSpPr txBox="1"/>
-          <p:nvPr/>
-        </p:nvSpPr>
-        <p:spPr>
-          <a:xfrm>
-            <a:off x="1691640" y="4645152"/>
-            <a:ext cx="10012680" cy="548640"/>
-          </a:xfrm>
-          <a:prstGeom prst="rect">
-            <a:avLst/>
-          </a:prstGeom>
-          <a:noFill/>
-        </p:spPr>
-        <p:txBody>
-          <a:bodyPr wrap="square" lIns="36576" rIns="36576" tIns="18288" bIns="18288" anchor="t">
-            <a:spAutoFit/>
-          </a:bodyPr>
-          <a:lstStyle/>
-          <a:p>
-            <a:pPr algn="l">
-              <a:lnSpc>
-                <a:spcPct val="125000"/>
-              </a:lnSpc>
-            </a:pPr>
-            <a:r>
-              <a:rPr sz="1150" b="0" i="0">
-                <a:solidFill>
-                  <a:srgbClr val="333333"/>
-                </a:solidFill>
-                <a:latin typeface="Georgia"/>
-              </a:rPr>
-              <a:t>The distinctive-evidence narrative depends on framework being settled. Pre-Sci Com circulation should sequence WG-1 → WG-5.</a:t>
-            </a:r>
-          </a:p>
-        </p:txBody>
-      </p:sp>
-      <p:sp>
-        <p:nvSpPr>
-          <p:cNvPr id="26" name="Rectangle 25"/>
-          <p:cNvSpPr/>
-          <p:nvPr/>
-        </p:nvSpPr>
-        <p:spPr>
-          <a:xfrm>
-            <a:off x="502920" y="5248656"/>
-            <a:ext cx="1005840" cy="868680"/>
-          </a:xfrm>
-          <a:prstGeom prst="rect">
-            <a:avLst/>
-          </a:prstGeom>
-          <a:solidFill>
-            <a:srgbClr val="1A3A6B"/>
-          </a:solidFill>
-          <a:ln>
-            <a:noFill/>
-          </a:ln>
-          <a:effectLst/>
-        </p:spPr>
-        <p:style>
-          <a:lnRef idx="1">
-            <a:schemeClr val="accent1"/>
-          </a:lnRef>
-          <a:fillRef idx="3">
-            <a:schemeClr val="accent1"/>
-          </a:fillRef>
-          <a:effectRef idx="2">
-            <a:schemeClr val="accent1"/>
-          </a:effectRef>
-          <a:fontRef idx="minor">
-            <a:schemeClr val="lt1"/>
-          </a:fontRef>
-        </p:style>
-        <p:txBody>
-          <a:bodyPr rtlCol="0" anchor="ctr"/>
-          <a:lstStyle/>
-          <a:p>
-            <a:pPr algn="ctr"/>
-          </a:p>
-        </p:txBody>
-      </p:sp>
-      <p:sp>
-        <p:nvSpPr>
-          <p:cNvPr id="27" name="TextBox 26"/>
-          <p:cNvSpPr txBox="1"/>
-          <p:nvPr/>
-        </p:nvSpPr>
-        <p:spPr>
-          <a:xfrm>
-            <a:off x="502920" y="5294376"/>
-            <a:ext cx="1005840" cy="365760"/>
-          </a:xfrm>
-          <a:prstGeom prst="rect">
-            <a:avLst/>
-          </a:prstGeom>
-          <a:noFill/>
-        </p:spPr>
-        <p:txBody>
-          <a:bodyPr wrap="square" lIns="36576" rIns="36576" tIns="18288" bIns="18288" anchor="t">
-            <a:spAutoFit/>
-          </a:bodyPr>
-          <a:lstStyle/>
-          <a:p>
-            <a:pPr algn="ctr">
-              <a:lnSpc>
-                <a:spcPct val="115000"/>
-              </a:lnSpc>
-            </a:pPr>
-            <a:r>
-              <a:rPr sz="1500" b="1" i="0">
-                <a:solidFill>
-                  <a:srgbClr val="FFFFFF"/>
-                </a:solidFill>
-                <a:latin typeface="Helvetica"/>
-              </a:rPr>
-              <a:t>CC-5</a:t>
-            </a:r>
-          </a:p>
-        </p:txBody>
-      </p:sp>
-      <p:sp>
-        <p:nvSpPr>
-          <p:cNvPr id="28" name="TextBox 27"/>
-          <p:cNvSpPr txBox="1"/>
-          <p:nvPr/>
-        </p:nvSpPr>
-        <p:spPr>
-          <a:xfrm>
-            <a:off x="502920" y="5660136"/>
-            <a:ext cx="1005840" cy="457200"/>
-          </a:xfrm>
-          <a:prstGeom prst="rect">
-            <a:avLst/>
-          </a:prstGeom>
-          <a:noFill/>
-        </p:spPr>
-        <p:txBody>
-          <a:bodyPr wrap="square" lIns="36576" rIns="36576" tIns="18288" bIns="18288" anchor="t">
-            <a:spAutoFit/>
-          </a:bodyPr>
-          <a:lstStyle/>
-          <a:p>
-            <a:pPr algn="ctr">
-              <a:lnSpc>
-                <a:spcPct val="115000"/>
-              </a:lnSpc>
-            </a:pPr>
-            <a:r>
-              <a:rPr sz="800" b="0" i="1">
-                <a:solidFill>
-                  <a:srgbClr val="FFFFFF"/>
-                </a:solidFill>
-                <a:latin typeface="Georgia"/>
-              </a:rPr>
-              <a:t>interlock</a:t>
-            </a:r>
-          </a:p>
-        </p:txBody>
-      </p:sp>
-      <p:sp>
-        <p:nvSpPr>
-          <p:cNvPr id="29" name="TextBox 28"/>
-          <p:cNvSpPr txBox="1"/>
-          <p:nvPr/>
-        </p:nvSpPr>
-        <p:spPr>
-          <a:xfrm>
-            <a:off x="1691640" y="5266944"/>
-            <a:ext cx="10012680" cy="365760"/>
-          </a:xfrm>
-          <a:prstGeom prst="rect">
-            <a:avLst/>
-          </a:prstGeom>
-          <a:noFill/>
-        </p:spPr>
-        <p:txBody>
-          <a:bodyPr wrap="square" lIns="36576" rIns="36576" tIns="18288" bIns="18288" anchor="t">
-            <a:spAutoFit/>
-          </a:bodyPr>
-          <a:lstStyle/>
-          <a:p>
-            <a:pPr algn="l">
-              <a:lnSpc>
-                <a:spcPct val="115000"/>
-              </a:lnSpc>
-            </a:pPr>
-            <a:r>
-              <a:rPr sz="1400" b="1" i="0">
-                <a:solidFill>
-                  <a:srgbClr val="1A3A6B"/>
-                </a:solidFill>
-                <a:latin typeface="Helvetica"/>
-              </a:rPr>
-              <a:t>Aging/ADRD — no WG owns it cleanly</a:t>
-            </a:r>
-          </a:p>
-        </p:txBody>
-      </p:sp>
-      <p:sp>
-        <p:nvSpPr>
-          <p:cNvPr id="30" name="TextBox 29"/>
-          <p:cNvSpPr txBox="1"/>
-          <p:nvPr/>
-        </p:nvSpPr>
-        <p:spPr>
-          <a:xfrm>
-            <a:off x="1691640" y="5632704"/>
-            <a:ext cx="10012680" cy="548640"/>
-          </a:xfrm>
-          <a:prstGeom prst="rect">
-            <a:avLst/>
-          </a:prstGeom>
-          <a:noFill/>
-        </p:spPr>
-        <p:txBody>
-          <a:bodyPr wrap="square" lIns="36576" rIns="36576" tIns="18288" bIns="18288" anchor="t">
-            <a:spAutoFit/>
-          </a:bodyPr>
-          <a:lstStyle/>
-          <a:p>
-            <a:pPr algn="l">
-              <a:lnSpc>
-                <a:spcPct val="125000"/>
-              </a:lnSpc>
-            </a:pPr>
-            <a:r>
-              <a:rPr sz="1150" b="0" i="0">
-                <a:solidFill>
-                  <a:srgbClr val="333333"/>
-                </a:solidFill>
-                <a:latin typeface="Georgia"/>
-              </a:rPr>
-              <a:t>Narrowing peer gap (AoU 6.0% post-2023, ~peer median 0.84×, trend +4.7 vs UKB +6.9 / MVP +5.4 / CKB +5.1). FLAG for WG leads; consider Tier-2 priority + WG-5 patient story.</a:t>
-            </a:r>
-          </a:p>
-        </p:txBody>
-      </p:sp>
-      <p:sp>
-        <p:nvSpPr>
-          <p:cNvPr id="31" name="TextBox 30"/>
-          <p:cNvSpPr txBox="1"/>
-          <p:nvPr/>
-        </p:nvSpPr>
-        <p:spPr>
-          <a:xfrm>
-            <a:off x="457200" y="6492240"/>
-            <a:ext cx="7315200" cy="274320"/>
-          </a:xfrm>
-          <a:prstGeom prst="rect">
-            <a:avLst/>
-          </a:prstGeom>
-          <a:noFill/>
-        </p:spPr>
-        <p:txBody>
-          <a:bodyPr wrap="square" lIns="36576" rIns="36576" tIns="18288" bIns="18288" anchor="t">
-            <a:spAutoFit/>
-          </a:bodyPr>
-          <a:lstStyle/>
-          <a:p>
-            <a:pPr algn="l">
-              <a:lnSpc>
-                <a:spcPct val="115000"/>
-              </a:lnSpc>
-            </a:pPr>
-            <a:r>
-              <a:rPr sz="850" b="0" i="1">
-                <a:solidFill>
-                  <a:srgbClr val="666666"/>
-                </a:solidFill>
-                <a:latin typeface="Georgia"/>
-              </a:rPr>
-              <a:t>All of Us Scientific Roadmap Refresh  •  WG-1 Draft  •  Smoller &amp; Haendel  •  2026-06-02</a:t>
-            </a:r>
-          </a:p>
-        </p:txBody>
-      </p:sp>
-      <p:sp>
-        <p:nvSpPr>
-          <p:cNvPr id="32" name="TextBox 31"/>
-          <p:cNvSpPr txBox="1"/>
-          <p:nvPr/>
-        </p:nvSpPr>
-        <p:spPr>
-          <a:xfrm>
-            <a:off x="10515600" y="6492240"/>
-            <a:ext cx="1188720" cy="274320"/>
-          </a:xfrm>
-          <a:prstGeom prst="rect">
-            <a:avLst/>
-          </a:prstGeom>
-          <a:noFill/>
-        </p:spPr>
-        <p:txBody>
-          <a:bodyPr wrap="square" lIns="36576" rIns="36576" tIns="18288" bIns="18288" anchor="t">
-            <a:spAutoFit/>
-          </a:bodyPr>
-          <a:lstStyle/>
-          <a:p>
-            <a:pPr algn="r">
-              <a:lnSpc>
-                <a:spcPct val="115000"/>
-              </a:lnSpc>
-            </a:pPr>
-            <a:r>
-              <a:rPr sz="850" b="0" i="1">
-                <a:solidFill>
-                  <a:srgbClr val="666666"/>
-                </a:solidFill>
-                <a:latin typeface="Georgia"/>
-              </a:rPr>
-              <a:t>17 / 19</a:t>
+              <a:t>17 / 20</a:t>
             </a:r>
           </a:p>
         </p:txBody>
@@ -12785,7 +12785,7 @@
                 </a:solidFill>
                 <a:latin typeface="Helvetica"/>
               </a:rPr>
-              <a:t>Caveats — three things the Sci Com should know before acting</a:t>
+              <a:t>Five cross-WG dependencies the Sci Com should coordinate</a:t>
             </a:r>
           </a:p>
         </p:txBody>
@@ -12824,7 +12824,7 @@
                 </a:solidFill>
                 <a:latin typeface="Georgia"/>
               </a:rPr>
-              <a:t>Each caveat is a reason to be careful, not a reason to discount the analysis.</a:t>
+              <a:t>Without these handshakes the WGs ship semi-aligned outputs that compete instead of compounding.</a:t>
             </a:r>
           </a:p>
         </p:txBody>
@@ -12875,26 +12875,25 @@
       </p:sp>
       <p:sp>
         <p:nvSpPr>
-          <p:cNvPr id="6" name="Oval 5"/>
+          <p:cNvPr id="6" name="Rectangle 5"/>
           <p:cNvSpPr/>
           <p:nvPr/>
         </p:nvSpPr>
         <p:spPr>
           <a:xfrm>
-            <a:off x="548640" y="1280160"/>
-            <a:ext cx="713232" cy="713232"/>
-          </a:xfrm>
-          <a:prstGeom prst="ellipse">
+            <a:off x="502920" y="1298448"/>
+            <a:ext cx="1005840" cy="868680"/>
+          </a:xfrm>
+          <a:prstGeom prst="rect">
             <a:avLst/>
           </a:prstGeom>
           <a:solidFill>
-            <a:srgbClr val="B35900"/>
+            <a:srgbClr val="1A3A6B"/>
           </a:solidFill>
           <a:ln>
-            <a:solidFill>
-              <a:srgbClr val="B35900"/>
-            </a:solidFill>
+            <a:noFill/>
           </a:ln>
+          <a:effectLst/>
         </p:spPr>
         <p:style>
           <a:lnRef idx="1">
@@ -12911,32 +12910,62 @@
           </a:fontRef>
         </p:style>
         <p:txBody>
-          <a:bodyPr rtlCol="0" anchor="ctr" lIns="0" rIns="0"/>
+          <a:bodyPr rtlCol="0" anchor="ctr"/>
           <a:lstStyle/>
           <a:p>
             <a:pPr algn="ctr"/>
-            <a:r>
-              <a:rPr b="1" sz="2000">
+          </a:p>
+        </p:txBody>
+      </p:sp>
+      <p:sp>
+        <p:nvSpPr>
+          <p:cNvPr id="7" name="TextBox 6"/>
+          <p:cNvSpPr txBox="1"/>
+          <p:nvPr/>
+        </p:nvSpPr>
+        <p:spPr>
+          <a:xfrm>
+            <a:off x="502920" y="1344168"/>
+            <a:ext cx="1005840" cy="365760"/>
+          </a:xfrm>
+          <a:prstGeom prst="rect">
+            <a:avLst/>
+          </a:prstGeom>
+          <a:noFill/>
+        </p:spPr>
+        <p:txBody>
+          <a:bodyPr wrap="square" lIns="36576" rIns="36576" tIns="18288" bIns="18288" anchor="t">
+            <a:spAutoFit/>
+          </a:bodyPr>
+          <a:lstStyle/>
+          <a:p>
+            <a:pPr algn="ctr">
+              <a:lnSpc>
+                <a:spcPct val="115000"/>
+              </a:lnSpc>
+            </a:pPr>
+            <a:r>
+              <a:rPr sz="1500" b="1" i="0">
                 <a:solidFill>
                   <a:srgbClr val="FFFFFF"/>
                 </a:solidFill>
                 <a:latin typeface="Helvetica"/>
               </a:rPr>
-              <a:t>1</a:t>
-            </a:r>
-          </a:p>
-        </p:txBody>
-      </p:sp>
-      <p:sp>
-        <p:nvSpPr>
-          <p:cNvPr id="7" name="TextBox 6"/>
-          <p:cNvSpPr txBox="1"/>
-          <p:nvPr/>
-        </p:nvSpPr>
-        <p:spPr>
-          <a:xfrm>
-            <a:off x="1463040" y="1298448"/>
-            <a:ext cx="10241280" cy="384048"/>
+              <a:t>CC-1</a:t>
+            </a:r>
+          </a:p>
+        </p:txBody>
+      </p:sp>
+      <p:sp>
+        <p:nvSpPr>
+          <p:cNvPr id="8" name="TextBox 7"/>
+          <p:cNvSpPr txBox="1"/>
+          <p:nvPr/>
+        </p:nvSpPr>
+        <p:spPr>
+          <a:xfrm>
+            <a:off x="502920" y="1709928"/>
+            <a:ext cx="1005840" cy="457200"/>
           </a:xfrm>
           <a:prstGeom prst="rect">
             <a:avLst/>
@@ -12949,33 +12978,72 @@
           </a:bodyPr>
           <a:lstStyle/>
           <a:p>
+            <a:pPr algn="ctr">
+              <a:lnSpc>
+                <a:spcPct val="115000"/>
+              </a:lnSpc>
+            </a:pPr>
+            <a:r>
+              <a:rPr sz="800" b="0" i="1">
+                <a:solidFill>
+                  <a:srgbClr val="FFFFFF"/>
+                </a:solidFill>
+                <a:latin typeface="Georgia"/>
+              </a:rPr>
+              <a:t>interlock</a:t>
+            </a:r>
+          </a:p>
+        </p:txBody>
+      </p:sp>
+      <p:sp>
+        <p:nvSpPr>
+          <p:cNvPr id="9" name="TextBox 8"/>
+          <p:cNvSpPr txBox="1"/>
+          <p:nvPr/>
+        </p:nvSpPr>
+        <p:spPr>
+          <a:xfrm>
+            <a:off x="1691640" y="1316736"/>
+            <a:ext cx="10012680" cy="365760"/>
+          </a:xfrm>
+          <a:prstGeom prst="rect">
+            <a:avLst/>
+          </a:prstGeom>
+          <a:noFill/>
+        </p:spPr>
+        <p:txBody>
+          <a:bodyPr wrap="square" lIns="36576" rIns="36576" tIns="18288" bIns="18288" anchor="t">
+            <a:spAutoFit/>
+          </a:bodyPr>
+          <a:lstStyle/>
+          <a:p>
             <a:pPr algn="l">
               <a:lnSpc>
-                <a:spcPct val="110000"/>
-              </a:lnSpc>
-            </a:pPr>
-            <a:r>
-              <a:rPr sz="1550" b="1" i="0">
-                <a:solidFill>
-                  <a:srgbClr val="B35900"/>
+                <a:spcPct val="115000"/>
+              </a:lnSpc>
+            </a:pPr>
+            <a:r>
+              <a:rPr sz="1400" b="1" i="0">
+                <a:solidFill>
+                  <a:srgbClr val="1A3A6B"/>
                 </a:solidFill>
                 <a:latin typeface="Helvetica"/>
               </a:rPr>
-              <a:t>Dermatology over-representation is an ARTIFACT</a:t>
-            </a:r>
-          </a:p>
-        </p:txBody>
-      </p:sp>
-      <p:sp>
-        <p:nvSpPr>
-          <p:cNvPr id="8" name="TextBox 7"/>
-          <p:cNvSpPr txBox="1"/>
-          <p:nvPr/>
-        </p:nvSpPr>
-        <p:spPr>
-          <a:xfrm>
-            <a:off x="1463040" y="1691640"/>
-            <a:ext cx="10241280" cy="1188720"/>
+              <a:t>9th focus area enables WG-3 + WG-4</a:t>
+            </a:r>
+          </a:p>
+        </p:txBody>
+      </p:sp>
+      <p:sp>
+        <p:nvSpPr>
+          <p:cNvPr id="10" name="TextBox 9"/>
+          <p:cNvSpPr txBox="1"/>
+          <p:nvPr/>
+        </p:nvSpPr>
+        <p:spPr>
+          <a:xfrm>
+            <a:off x="1691640" y="1682496"/>
+            <a:ext cx="10012680" cy="548640"/>
           </a:xfrm>
           <a:prstGeom prst="rect">
             <a:avLst/>
@@ -12990,7 +13058,7 @@
           <a:p>
             <a:pPr algn="l">
               <a:lnSpc>
-                <a:spcPct val="130000"/>
+                <a:spcPct val="125000"/>
               </a:lnSpc>
             </a:pPr>
             <a:r>
@@ -13000,33 +13068,32 @@
                 </a:solidFill>
                 <a:latin typeface="Georgia"/>
               </a:rPr>
-              <a:t>Dermatology is 13.9% of the corpus and 6.9× the peer median — but driven by 1–2 prolific groups, not a strategic priority. Trend score −4.4 (declining share). Do NOT elevate dermatology in the Refresh even though the share index suggests it. WG-5 ambassador toolkit must have the artifact answer rehearsed.</a:t>
-            </a:r>
-          </a:p>
-        </p:txBody>
-      </p:sp>
-      <p:sp>
-        <p:nvSpPr>
-          <p:cNvPr id="9" name="Oval 8"/>
+              <a:t>WG-1's framework change is the structural prerequisite for both Imaging and AI work to have a coherent home.</a:t>
+            </a:r>
+          </a:p>
+        </p:txBody>
+      </p:sp>
+      <p:sp>
+        <p:nvSpPr>
+          <p:cNvPr id="11" name="Rectangle 10"/>
           <p:cNvSpPr/>
           <p:nvPr/>
         </p:nvSpPr>
         <p:spPr>
           <a:xfrm>
-            <a:off x="548640" y="2907792"/>
-            <a:ext cx="713232" cy="713232"/>
-          </a:xfrm>
-          <a:prstGeom prst="ellipse">
+            <a:off x="502920" y="2286000"/>
+            <a:ext cx="1005840" cy="868680"/>
+          </a:xfrm>
+          <a:prstGeom prst="rect">
             <a:avLst/>
           </a:prstGeom>
           <a:solidFill>
-            <a:srgbClr val="B35900"/>
+            <a:srgbClr val="1A3A6B"/>
           </a:solidFill>
           <a:ln>
-            <a:solidFill>
-              <a:srgbClr val="B35900"/>
-            </a:solidFill>
+            <a:noFill/>
           </a:ln>
+          <a:effectLst/>
         </p:spPr>
         <p:style>
           <a:lnRef idx="1">
@@ -13043,32 +13110,62 @@
           </a:fontRef>
         </p:style>
         <p:txBody>
-          <a:bodyPr rtlCol="0" anchor="ctr" lIns="0" rIns="0"/>
+          <a:bodyPr rtlCol="0" anchor="ctr"/>
           <a:lstStyle/>
           <a:p>
             <a:pPr algn="ctr"/>
-            <a:r>
-              <a:rPr b="1" sz="2000">
+          </a:p>
+        </p:txBody>
+      </p:sp>
+      <p:sp>
+        <p:nvSpPr>
+          <p:cNvPr id="12" name="TextBox 11"/>
+          <p:cNvSpPr txBox="1"/>
+          <p:nvPr/>
+        </p:nvSpPr>
+        <p:spPr>
+          <a:xfrm>
+            <a:off x="502920" y="2331720"/>
+            <a:ext cx="1005840" cy="365760"/>
+          </a:xfrm>
+          <a:prstGeom prst="rect">
+            <a:avLst/>
+          </a:prstGeom>
+          <a:noFill/>
+        </p:spPr>
+        <p:txBody>
+          <a:bodyPr wrap="square" lIns="36576" rIns="36576" tIns="18288" bIns="18288" anchor="t">
+            <a:spAutoFit/>
+          </a:bodyPr>
+          <a:lstStyle/>
+          <a:p>
+            <a:pPr algn="ctr">
+              <a:lnSpc>
+                <a:spcPct val="115000"/>
+              </a:lnSpc>
+            </a:pPr>
+            <a:r>
+              <a:rPr sz="1500" b="1" i="0">
                 <a:solidFill>
                   <a:srgbClr val="FFFFFF"/>
                 </a:solidFill>
                 <a:latin typeface="Helvetica"/>
               </a:rPr>
-              <a:t>2</a:t>
-            </a:r>
-          </a:p>
-        </p:txBody>
-      </p:sp>
-      <p:sp>
-        <p:nvSpPr>
-          <p:cNvPr id="10" name="TextBox 9"/>
-          <p:cNvSpPr txBox="1"/>
-          <p:nvPr/>
-        </p:nvSpPr>
-        <p:spPr>
-          <a:xfrm>
-            <a:off x="1463040" y="2926080"/>
-            <a:ext cx="10241280" cy="384048"/>
+              <a:t>CC-2</a:t>
+            </a:r>
+          </a:p>
+        </p:txBody>
+      </p:sp>
+      <p:sp>
+        <p:nvSpPr>
+          <p:cNvPr id="13" name="TextBox 12"/>
+          <p:cNvSpPr txBox="1"/>
+          <p:nvPr/>
+        </p:nvSpPr>
+        <p:spPr>
+          <a:xfrm>
+            <a:off x="502920" y="2697480"/>
+            <a:ext cx="1005840" cy="457200"/>
           </a:xfrm>
           <a:prstGeom prst="rect">
             <a:avLst/>
@@ -13081,33 +13178,72 @@
           </a:bodyPr>
           <a:lstStyle/>
           <a:p>
+            <a:pPr algn="ctr">
+              <a:lnSpc>
+                <a:spcPct val="115000"/>
+              </a:lnSpc>
+            </a:pPr>
+            <a:r>
+              <a:rPr sz="800" b="0" i="1">
+                <a:solidFill>
+                  <a:srgbClr val="FFFFFF"/>
+                </a:solidFill>
+                <a:latin typeface="Georgia"/>
+              </a:rPr>
+              <a:t>interlock</a:t>
+            </a:r>
+          </a:p>
+        </p:txBody>
+      </p:sp>
+      <p:sp>
+        <p:nvSpPr>
+          <p:cNvPr id="14" name="TextBox 13"/>
+          <p:cNvSpPr txBox="1"/>
+          <p:nvPr/>
+        </p:nvSpPr>
+        <p:spPr>
+          <a:xfrm>
+            <a:off x="1691640" y="2304288"/>
+            <a:ext cx="10012680" cy="365760"/>
+          </a:xfrm>
+          <a:prstGeom prst="rect">
+            <a:avLst/>
+          </a:prstGeom>
+          <a:noFill/>
+        </p:spPr>
+        <p:txBody>
+          <a:bodyPr wrap="square" lIns="36576" rIns="36576" tIns="18288" bIns="18288" anchor="t">
+            <a:spAutoFit/>
+          </a:bodyPr>
+          <a:lstStyle/>
+          <a:p>
             <a:pPr algn="l">
               <a:lnSpc>
-                <a:spcPct val="110000"/>
-              </a:lnSpc>
-            </a:pPr>
-            <a:r>
-              <a:rPr sz="1550" b="1" i="0">
-                <a:solidFill>
-                  <a:srgbClr val="B35900"/>
+                <a:spcPct val="115000"/>
+              </a:lnSpc>
+            </a:pPr>
+            <a:r>
+              <a:rPr sz="1400" b="1" i="0">
+                <a:solidFill>
+                  <a:srgbClr val="1A3A6B"/>
                 </a:solidFill>
                 <a:latin typeface="Helvetica"/>
               </a:rPr>
-              <a:t>Peer-biobank counts use PubMed name-search fallback</a:t>
-            </a:r>
-          </a:p>
-        </p:txBody>
-      </p:sp>
-      <p:sp>
-        <p:nvSpPr>
-          <p:cNvPr id="11" name="TextBox 10"/>
-          <p:cNvSpPr txBox="1"/>
-          <p:nvPr/>
-        </p:nvSpPr>
-        <p:spPr>
-          <a:xfrm>
-            <a:off x="1463040" y="3319272"/>
-            <a:ext cx="10241280" cy="1188720"/>
+              <a:t>Bias-framework hierarchy across WG-2 / WG-3 / WG-4</a:t>
+            </a:r>
+          </a:p>
+        </p:txBody>
+      </p:sp>
+      <p:sp>
+        <p:nvSpPr>
+          <p:cNvPr id="15" name="TextBox 14"/>
+          <p:cNvSpPr txBox="1"/>
+          <p:nvPr/>
+        </p:nvSpPr>
+        <p:spPr>
+          <a:xfrm>
+            <a:off x="1691640" y="2670048"/>
+            <a:ext cx="10012680" cy="548640"/>
           </a:xfrm>
           <a:prstGeom prst="rect">
             <a:avLst/>
@@ -13122,7 +13258,7 @@
           <a:p>
             <a:pPr algn="l">
               <a:lnSpc>
-                <a:spcPct val="130000"/>
+                <a:spcPct val="125000"/>
               </a:lnSpc>
             </a:pPr>
             <a:r>
@@ -13132,33 +13268,32 @@
                 </a:solidFill>
                 <a:latin typeface="Georgia"/>
               </a:rPr>
-              <a:t>UKB, FinnGen, MVP, and CKB corpora come from PubMed name-search with same-tagger keyword tagging — now full PubMed censuses (UKB 11,868; FinnGen 3,152; MVP 438; CKB 558). Internally consistent across peers but absolute counts under- and over-count differently. USE THE STATIC SHARE INDEX, not trend differentials, for action-relevant comparisons. MVP corpus is small (438); single-MVP signals need a second-peer corroboration.</a:t>
-            </a:r>
-          </a:p>
-        </p:txBody>
-      </p:sp>
-      <p:sp>
-        <p:nvSpPr>
-          <p:cNvPr id="12" name="Oval 11"/>
+              <a:t>WG-2 normative framework → WG-3 imaging audit → WG-4 AI audit. Three WGs should align on a SINGLE AoU bias-reporting standard.</a:t>
+            </a:r>
+          </a:p>
+        </p:txBody>
+      </p:sp>
+      <p:sp>
+        <p:nvSpPr>
+          <p:cNvPr id="16" name="Rectangle 15"/>
           <p:cNvSpPr/>
           <p:nvPr/>
         </p:nvSpPr>
         <p:spPr>
           <a:xfrm>
-            <a:off x="548640" y="4535424"/>
-            <a:ext cx="713232" cy="713232"/>
-          </a:xfrm>
-          <a:prstGeom prst="ellipse">
+            <a:off x="502920" y="3273552"/>
+            <a:ext cx="1005840" cy="868680"/>
+          </a:xfrm>
+          <a:prstGeom prst="rect">
             <a:avLst/>
           </a:prstGeom>
           <a:solidFill>
-            <a:srgbClr val="B35900"/>
+            <a:srgbClr val="1A3A6B"/>
           </a:solidFill>
           <a:ln>
-            <a:solidFill>
-              <a:srgbClr val="B35900"/>
-            </a:solidFill>
+            <a:noFill/>
           </a:ln>
+          <a:effectLst/>
         </p:spPr>
         <p:style>
           <a:lnRef idx="1">
@@ -13175,32 +13310,62 @@
           </a:fontRef>
         </p:style>
         <p:txBody>
-          <a:bodyPr rtlCol="0" anchor="ctr" lIns="0" rIns="0"/>
+          <a:bodyPr rtlCol="0" anchor="ctr"/>
           <a:lstStyle/>
           <a:p>
             <a:pPr algn="ctr"/>
-            <a:r>
-              <a:rPr b="1" sz="2000">
+          </a:p>
+        </p:txBody>
+      </p:sp>
+      <p:sp>
+        <p:nvSpPr>
+          <p:cNvPr id="17" name="TextBox 16"/>
+          <p:cNvSpPr txBox="1"/>
+          <p:nvPr/>
+        </p:nvSpPr>
+        <p:spPr>
+          <a:xfrm>
+            <a:off x="502920" y="3319272"/>
+            <a:ext cx="1005840" cy="365760"/>
+          </a:xfrm>
+          <a:prstGeom prst="rect">
+            <a:avLst/>
+          </a:prstGeom>
+          <a:noFill/>
+        </p:spPr>
+        <p:txBody>
+          <a:bodyPr wrap="square" lIns="36576" rIns="36576" tIns="18288" bIns="18288" anchor="t">
+            <a:spAutoFit/>
+          </a:bodyPr>
+          <a:lstStyle/>
+          <a:p>
+            <a:pPr algn="ctr">
+              <a:lnSpc>
+                <a:spcPct val="115000"/>
+              </a:lnSpc>
+            </a:pPr>
+            <a:r>
+              <a:rPr sz="1500" b="1" i="0">
                 <a:solidFill>
                   <a:srgbClr val="FFFFFF"/>
                 </a:solidFill>
                 <a:latin typeface="Helvetica"/>
               </a:rPr>
-              <a:t>3</a:t>
-            </a:r>
-          </a:p>
-        </p:txBody>
-      </p:sp>
-      <p:sp>
-        <p:nvSpPr>
-          <p:cNvPr id="13" name="TextBox 12"/>
-          <p:cNvSpPr txBox="1"/>
-          <p:nvPr/>
-        </p:nvSpPr>
-        <p:spPr>
-          <a:xfrm>
-            <a:off x="1463040" y="4553712"/>
-            <a:ext cx="10241280" cy="384048"/>
+              <a:t>CC-3</a:t>
+            </a:r>
+          </a:p>
+        </p:txBody>
+      </p:sp>
+      <p:sp>
+        <p:nvSpPr>
+          <p:cNvPr id="18" name="TextBox 17"/>
+          <p:cNvSpPr txBox="1"/>
+          <p:nvPr/>
+        </p:nvSpPr>
+        <p:spPr>
+          <a:xfrm>
+            <a:off x="502920" y="3685032"/>
+            <a:ext cx="1005840" cy="457200"/>
           </a:xfrm>
           <a:prstGeom prst="rect">
             <a:avLst/>
@@ -13213,33 +13378,72 @@
           </a:bodyPr>
           <a:lstStyle/>
           <a:p>
+            <a:pPr algn="ctr">
+              <a:lnSpc>
+                <a:spcPct val="115000"/>
+              </a:lnSpc>
+            </a:pPr>
+            <a:r>
+              <a:rPr sz="800" b="0" i="1">
+                <a:solidFill>
+                  <a:srgbClr val="FFFFFF"/>
+                </a:solidFill>
+                <a:latin typeface="Georgia"/>
+              </a:rPr>
+              <a:t>interlock</a:t>
+            </a:r>
+          </a:p>
+        </p:txBody>
+      </p:sp>
+      <p:sp>
+        <p:nvSpPr>
+          <p:cNvPr id="19" name="TextBox 18"/>
+          <p:cNvSpPr txBox="1"/>
+          <p:nvPr/>
+        </p:nvSpPr>
+        <p:spPr>
+          <a:xfrm>
+            <a:off x="1691640" y="3291840"/>
+            <a:ext cx="10012680" cy="365760"/>
+          </a:xfrm>
+          <a:prstGeom prst="rect">
+            <a:avLst/>
+          </a:prstGeom>
+          <a:noFill/>
+        </p:spPr>
+        <p:txBody>
+          <a:bodyPr wrap="square" lIns="36576" rIns="36576" tIns="18288" bIns="18288" anchor="t">
+            <a:spAutoFit/>
+          </a:bodyPr>
+          <a:lstStyle/>
+          <a:p>
             <a:pPr algn="l">
               <a:lnSpc>
-                <a:spcPct val="110000"/>
-              </a:lnSpc>
-            </a:pPr>
-            <a:r>
-              <a:rPr sz="1550" b="1" i="0">
-                <a:solidFill>
-                  <a:srgbClr val="B35900"/>
+                <a:spcPct val="115000"/>
+              </a:lnSpc>
+            </a:pPr>
+            <a:r>
+              <a:rPr sz="1400" b="1" i="0">
+                <a:solidFill>
+                  <a:srgbClr val="1A3A6B"/>
                 </a:solidFill>
                 <a:latin typeface="Helvetica"/>
               </a:rPr>
-              <a:t>AoU pre-2023 baseline is tiny (157 pubs)</a:t>
-            </a:r>
-          </a:p>
-        </p:txBody>
-      </p:sp>
-      <p:sp>
-        <p:nvSpPr>
-          <p:cNvPr id="14" name="TextBox 13"/>
-          <p:cNvSpPr txBox="1"/>
-          <p:nvPr/>
-        </p:nvSpPr>
-        <p:spPr>
-          <a:xfrm>
-            <a:off x="1463040" y="4946904"/>
-            <a:ext cx="10241280" cy="1188720"/>
+              <a:t>WG-2 metrics feed WG-5 Impact Report</a:t>
+            </a:r>
+          </a:p>
+        </p:txBody>
+      </p:sp>
+      <p:sp>
+        <p:nvSpPr>
+          <p:cNvPr id="20" name="TextBox 19"/>
+          <p:cNvSpPr txBox="1"/>
+          <p:nvPr/>
+        </p:nvSpPr>
+        <p:spPr>
+          <a:xfrm>
+            <a:off x="1691640" y="3657600"/>
+            <a:ext cx="10012680" cy="548640"/>
           </a:xfrm>
           <a:prstGeom prst="rect">
             <a:avLst/>
@@ -13254,7 +13458,7 @@
           <a:p>
             <a:pPr algn="l">
               <a:lnSpc>
-                <a:spcPct val="130000"/>
+                <a:spcPct val="125000"/>
               </a:lnSpc>
             </a:pPr>
             <a:r>
@@ -13264,14 +13468,414 @@
                 </a:solidFill>
                 <a:latin typeface="Georgia"/>
               </a:rPr>
-              <a:t>Any active post-2023 theme will trend positive in AoU's split simply because the corpus grew ~8.1× from pre- to post-2023. Apparent 'growth' on cardiometabolic, mental health, and cancer is largely a small-baseline artifact — read as 'AoU has built a presence here,' not 'AoU is uniquely outpacing the field.' True growth signals come from the peer-comparison panel, not from the AoU-internal pre/post split.</a:t>
-            </a:r>
-          </a:p>
-        </p:txBody>
-      </p:sp>
-      <p:sp>
-        <p:nvSpPr>
-          <p:cNvPr id="15" name="TextBox 14"/>
+              <a:t>WG-2 defines TSBM metrics; WG-5 produces the annual Report. Coordinate cadence so Report v1 ships within 12 months.</a:t>
+            </a:r>
+          </a:p>
+        </p:txBody>
+      </p:sp>
+      <p:sp>
+        <p:nvSpPr>
+          <p:cNvPr id="21" name="Rectangle 20"/>
+          <p:cNvSpPr/>
+          <p:nvPr/>
+        </p:nvSpPr>
+        <p:spPr>
+          <a:xfrm>
+            <a:off x="502920" y="4261104"/>
+            <a:ext cx="1005840" cy="868680"/>
+          </a:xfrm>
+          <a:prstGeom prst="rect">
+            <a:avLst/>
+          </a:prstGeom>
+          <a:solidFill>
+            <a:srgbClr val="1A3A6B"/>
+          </a:solidFill>
+          <a:ln>
+            <a:noFill/>
+          </a:ln>
+          <a:effectLst/>
+        </p:spPr>
+        <p:style>
+          <a:lnRef idx="1">
+            <a:schemeClr val="accent1"/>
+          </a:lnRef>
+          <a:fillRef idx="3">
+            <a:schemeClr val="accent1"/>
+          </a:fillRef>
+          <a:effectRef idx="2">
+            <a:schemeClr val="accent1"/>
+          </a:effectRef>
+          <a:fontRef idx="minor">
+            <a:schemeClr val="lt1"/>
+          </a:fontRef>
+        </p:style>
+        <p:txBody>
+          <a:bodyPr rtlCol="0" anchor="ctr"/>
+          <a:lstStyle/>
+          <a:p>
+            <a:pPr algn="ctr"/>
+          </a:p>
+        </p:txBody>
+      </p:sp>
+      <p:sp>
+        <p:nvSpPr>
+          <p:cNvPr id="22" name="TextBox 21"/>
+          <p:cNvSpPr txBox="1"/>
+          <p:nvPr/>
+        </p:nvSpPr>
+        <p:spPr>
+          <a:xfrm>
+            <a:off x="502920" y="4306824"/>
+            <a:ext cx="1005840" cy="365760"/>
+          </a:xfrm>
+          <a:prstGeom prst="rect">
+            <a:avLst/>
+          </a:prstGeom>
+          <a:noFill/>
+        </p:spPr>
+        <p:txBody>
+          <a:bodyPr wrap="square" lIns="36576" rIns="36576" tIns="18288" bIns="18288" anchor="t">
+            <a:spAutoFit/>
+          </a:bodyPr>
+          <a:lstStyle/>
+          <a:p>
+            <a:pPr algn="ctr">
+              <a:lnSpc>
+                <a:spcPct val="115000"/>
+              </a:lnSpc>
+            </a:pPr>
+            <a:r>
+              <a:rPr sz="1500" b="1" i="0">
+                <a:solidFill>
+                  <a:srgbClr val="FFFFFF"/>
+                </a:solidFill>
+                <a:latin typeface="Helvetica"/>
+              </a:rPr>
+              <a:t>CC-4</a:t>
+            </a:r>
+          </a:p>
+        </p:txBody>
+      </p:sp>
+      <p:sp>
+        <p:nvSpPr>
+          <p:cNvPr id="23" name="TextBox 22"/>
+          <p:cNvSpPr txBox="1"/>
+          <p:nvPr/>
+        </p:nvSpPr>
+        <p:spPr>
+          <a:xfrm>
+            <a:off x="502920" y="4672584"/>
+            <a:ext cx="1005840" cy="457200"/>
+          </a:xfrm>
+          <a:prstGeom prst="rect">
+            <a:avLst/>
+          </a:prstGeom>
+          <a:noFill/>
+        </p:spPr>
+        <p:txBody>
+          <a:bodyPr wrap="square" lIns="36576" rIns="36576" tIns="18288" bIns="18288" anchor="t">
+            <a:spAutoFit/>
+          </a:bodyPr>
+          <a:lstStyle/>
+          <a:p>
+            <a:pPr algn="ctr">
+              <a:lnSpc>
+                <a:spcPct val="115000"/>
+              </a:lnSpc>
+            </a:pPr>
+            <a:r>
+              <a:rPr sz="800" b="0" i="1">
+                <a:solidFill>
+                  <a:srgbClr val="FFFFFF"/>
+                </a:solidFill>
+                <a:latin typeface="Georgia"/>
+              </a:rPr>
+              <a:t>interlock</a:t>
+            </a:r>
+          </a:p>
+        </p:txBody>
+      </p:sp>
+      <p:sp>
+        <p:nvSpPr>
+          <p:cNvPr id="24" name="TextBox 23"/>
+          <p:cNvSpPr txBox="1"/>
+          <p:nvPr/>
+        </p:nvSpPr>
+        <p:spPr>
+          <a:xfrm>
+            <a:off x="1691640" y="4279392"/>
+            <a:ext cx="10012680" cy="365760"/>
+          </a:xfrm>
+          <a:prstGeom prst="rect">
+            <a:avLst/>
+          </a:prstGeom>
+          <a:noFill/>
+        </p:spPr>
+        <p:txBody>
+          <a:bodyPr wrap="square" lIns="36576" rIns="36576" tIns="18288" bIns="18288" anchor="t">
+            <a:spAutoFit/>
+          </a:bodyPr>
+          <a:lstStyle/>
+          <a:p>
+            <a:pPr algn="l">
+              <a:lnSpc>
+                <a:spcPct val="115000"/>
+              </a:lnSpc>
+            </a:pPr>
+            <a:r>
+              <a:rPr sz="1400" b="1" i="0">
+                <a:solidFill>
+                  <a:srgbClr val="1A3A6B"/>
+                </a:solidFill>
+                <a:latin typeface="Helvetica"/>
+              </a:rPr>
+              <a:t>WG-5 narrative requires WG-1 framework</a:t>
+            </a:r>
+          </a:p>
+        </p:txBody>
+      </p:sp>
+      <p:sp>
+        <p:nvSpPr>
+          <p:cNvPr id="25" name="TextBox 24"/>
+          <p:cNvSpPr txBox="1"/>
+          <p:nvPr/>
+        </p:nvSpPr>
+        <p:spPr>
+          <a:xfrm>
+            <a:off x="1691640" y="4645152"/>
+            <a:ext cx="10012680" cy="548640"/>
+          </a:xfrm>
+          <a:prstGeom prst="rect">
+            <a:avLst/>
+          </a:prstGeom>
+          <a:noFill/>
+        </p:spPr>
+        <p:txBody>
+          <a:bodyPr wrap="square" lIns="36576" rIns="36576" tIns="18288" bIns="18288" anchor="t">
+            <a:spAutoFit/>
+          </a:bodyPr>
+          <a:lstStyle/>
+          <a:p>
+            <a:pPr algn="l">
+              <a:lnSpc>
+                <a:spcPct val="125000"/>
+              </a:lnSpc>
+            </a:pPr>
+            <a:r>
+              <a:rPr sz="1150" b="0" i="0">
+                <a:solidFill>
+                  <a:srgbClr val="333333"/>
+                </a:solidFill>
+                <a:latin typeface="Georgia"/>
+              </a:rPr>
+              <a:t>The distinctive-evidence narrative depends on framework being settled. Pre-Sci Com circulation should sequence WG-1 → WG-5.</a:t>
+            </a:r>
+          </a:p>
+        </p:txBody>
+      </p:sp>
+      <p:sp>
+        <p:nvSpPr>
+          <p:cNvPr id="26" name="Rectangle 25"/>
+          <p:cNvSpPr/>
+          <p:nvPr/>
+        </p:nvSpPr>
+        <p:spPr>
+          <a:xfrm>
+            <a:off x="502920" y="5248656"/>
+            <a:ext cx="1005840" cy="868680"/>
+          </a:xfrm>
+          <a:prstGeom prst="rect">
+            <a:avLst/>
+          </a:prstGeom>
+          <a:solidFill>
+            <a:srgbClr val="1A3A6B"/>
+          </a:solidFill>
+          <a:ln>
+            <a:noFill/>
+          </a:ln>
+          <a:effectLst/>
+        </p:spPr>
+        <p:style>
+          <a:lnRef idx="1">
+            <a:schemeClr val="accent1"/>
+          </a:lnRef>
+          <a:fillRef idx="3">
+            <a:schemeClr val="accent1"/>
+          </a:fillRef>
+          <a:effectRef idx="2">
+            <a:schemeClr val="accent1"/>
+          </a:effectRef>
+          <a:fontRef idx="minor">
+            <a:schemeClr val="lt1"/>
+          </a:fontRef>
+        </p:style>
+        <p:txBody>
+          <a:bodyPr rtlCol="0" anchor="ctr"/>
+          <a:lstStyle/>
+          <a:p>
+            <a:pPr algn="ctr"/>
+          </a:p>
+        </p:txBody>
+      </p:sp>
+      <p:sp>
+        <p:nvSpPr>
+          <p:cNvPr id="27" name="TextBox 26"/>
+          <p:cNvSpPr txBox="1"/>
+          <p:nvPr/>
+        </p:nvSpPr>
+        <p:spPr>
+          <a:xfrm>
+            <a:off x="502920" y="5294376"/>
+            <a:ext cx="1005840" cy="365760"/>
+          </a:xfrm>
+          <a:prstGeom prst="rect">
+            <a:avLst/>
+          </a:prstGeom>
+          <a:noFill/>
+        </p:spPr>
+        <p:txBody>
+          <a:bodyPr wrap="square" lIns="36576" rIns="36576" tIns="18288" bIns="18288" anchor="t">
+            <a:spAutoFit/>
+          </a:bodyPr>
+          <a:lstStyle/>
+          <a:p>
+            <a:pPr algn="ctr">
+              <a:lnSpc>
+                <a:spcPct val="115000"/>
+              </a:lnSpc>
+            </a:pPr>
+            <a:r>
+              <a:rPr sz="1500" b="1" i="0">
+                <a:solidFill>
+                  <a:srgbClr val="FFFFFF"/>
+                </a:solidFill>
+                <a:latin typeface="Helvetica"/>
+              </a:rPr>
+              <a:t>CC-5</a:t>
+            </a:r>
+          </a:p>
+        </p:txBody>
+      </p:sp>
+      <p:sp>
+        <p:nvSpPr>
+          <p:cNvPr id="28" name="TextBox 27"/>
+          <p:cNvSpPr txBox="1"/>
+          <p:nvPr/>
+        </p:nvSpPr>
+        <p:spPr>
+          <a:xfrm>
+            <a:off x="502920" y="5660136"/>
+            <a:ext cx="1005840" cy="457200"/>
+          </a:xfrm>
+          <a:prstGeom prst="rect">
+            <a:avLst/>
+          </a:prstGeom>
+          <a:noFill/>
+        </p:spPr>
+        <p:txBody>
+          <a:bodyPr wrap="square" lIns="36576" rIns="36576" tIns="18288" bIns="18288" anchor="t">
+            <a:spAutoFit/>
+          </a:bodyPr>
+          <a:lstStyle/>
+          <a:p>
+            <a:pPr algn="ctr">
+              <a:lnSpc>
+                <a:spcPct val="115000"/>
+              </a:lnSpc>
+            </a:pPr>
+            <a:r>
+              <a:rPr sz="800" b="0" i="1">
+                <a:solidFill>
+                  <a:srgbClr val="FFFFFF"/>
+                </a:solidFill>
+                <a:latin typeface="Georgia"/>
+              </a:rPr>
+              <a:t>interlock</a:t>
+            </a:r>
+          </a:p>
+        </p:txBody>
+      </p:sp>
+      <p:sp>
+        <p:nvSpPr>
+          <p:cNvPr id="29" name="TextBox 28"/>
+          <p:cNvSpPr txBox="1"/>
+          <p:nvPr/>
+        </p:nvSpPr>
+        <p:spPr>
+          <a:xfrm>
+            <a:off x="1691640" y="5266944"/>
+            <a:ext cx="10012680" cy="365760"/>
+          </a:xfrm>
+          <a:prstGeom prst="rect">
+            <a:avLst/>
+          </a:prstGeom>
+          <a:noFill/>
+        </p:spPr>
+        <p:txBody>
+          <a:bodyPr wrap="square" lIns="36576" rIns="36576" tIns="18288" bIns="18288" anchor="t">
+            <a:spAutoFit/>
+          </a:bodyPr>
+          <a:lstStyle/>
+          <a:p>
+            <a:pPr algn="l">
+              <a:lnSpc>
+                <a:spcPct val="115000"/>
+              </a:lnSpc>
+            </a:pPr>
+            <a:r>
+              <a:rPr sz="1400" b="1" i="0">
+                <a:solidFill>
+                  <a:srgbClr val="1A3A6B"/>
+                </a:solidFill>
+                <a:latin typeface="Helvetica"/>
+              </a:rPr>
+              <a:t>Aging/ADRD — no WG owns it cleanly</a:t>
+            </a:r>
+          </a:p>
+        </p:txBody>
+      </p:sp>
+      <p:sp>
+        <p:nvSpPr>
+          <p:cNvPr id="30" name="TextBox 29"/>
+          <p:cNvSpPr txBox="1"/>
+          <p:nvPr/>
+        </p:nvSpPr>
+        <p:spPr>
+          <a:xfrm>
+            <a:off x="1691640" y="5632704"/>
+            <a:ext cx="10012680" cy="548640"/>
+          </a:xfrm>
+          <a:prstGeom prst="rect">
+            <a:avLst/>
+          </a:prstGeom>
+          <a:noFill/>
+        </p:spPr>
+        <p:txBody>
+          <a:bodyPr wrap="square" lIns="36576" rIns="36576" tIns="18288" bIns="18288" anchor="t">
+            <a:spAutoFit/>
+          </a:bodyPr>
+          <a:lstStyle/>
+          <a:p>
+            <a:pPr algn="l">
+              <a:lnSpc>
+                <a:spcPct val="125000"/>
+              </a:lnSpc>
+            </a:pPr>
+            <a:r>
+              <a:rPr sz="1150" b="0" i="0">
+                <a:solidFill>
+                  <a:srgbClr val="333333"/>
+                </a:solidFill>
+                <a:latin typeface="Georgia"/>
+              </a:rPr>
+              <a:t>Narrowing peer gap (AoU 6.0% post-2023, ~peer median 0.84×, trend +4.7 vs UKB +6.9 / MVP +5.4 / CKB +5.1). FLAG for WG leads; consider Tier-2 priority + WG-5 patient story.</a:t>
+            </a:r>
+          </a:p>
+        </p:txBody>
+      </p:sp>
+      <p:sp>
+        <p:nvSpPr>
+          <p:cNvPr id="31" name="TextBox 30"/>
           <p:cNvSpPr txBox="1"/>
           <p:nvPr/>
         </p:nvSpPr>
@@ -13310,7 +13914,7 @@
       </p:sp>
       <p:sp>
         <p:nvSpPr>
-          <p:cNvPr id="16" name="TextBox 15"/>
+          <p:cNvPr id="32" name="TextBox 31"/>
           <p:cNvSpPr txBox="1"/>
           <p:nvPr/>
         </p:nvSpPr>
@@ -13342,7 +13946,7 @@
                 </a:solidFill>
                 <a:latin typeface="Georgia"/>
               </a:rPr>
-              <a:t>18 / 19</a:t>
+              <a:t>18 / 20</a:t>
             </a:r>
           </a:p>
         </p:txBody>
@@ -13443,7 +14047,7 @@
                 </a:solidFill>
                 <a:latin typeface="Helvetica"/>
               </a:rPr>
-              <a:t>What we ask the Science Committee to decide</a:t>
+              <a:t>Caveats — three things the Sci Com should know before acting</a:t>
             </a:r>
           </a:p>
         </p:txBody>
@@ -13482,7 +14086,7 @@
                 </a:solidFill>
                 <a:latin typeface="Georgia"/>
               </a:rPr>
-              <a:t>Four concrete decisions today; one calendar commitment for the cross-WG hierarchy.</a:t>
+              <a:t>Each caveat is a reason to be careful, not a reason to discount the analysis.</a:t>
             </a:r>
           </a:p>
         </p:txBody>
@@ -13533,25 +14137,26 @@
       </p:sp>
       <p:sp>
         <p:nvSpPr>
-          <p:cNvPr id="6" name="Rectangle 5"/>
+          <p:cNvPr id="6" name="Oval 5"/>
           <p:cNvSpPr/>
           <p:nvPr/>
         </p:nvSpPr>
         <p:spPr>
           <a:xfrm>
-            <a:off x="502920" y="1280160"/>
-            <a:ext cx="1920240" cy="960120"/>
-          </a:xfrm>
-          <a:prstGeom prst="rect">
+            <a:off x="548640" y="1280160"/>
+            <a:ext cx="713232" cy="713232"/>
+          </a:xfrm>
+          <a:prstGeom prst="ellipse">
             <a:avLst/>
           </a:prstGeom>
           <a:solidFill>
-            <a:srgbClr val="216BB3"/>
+            <a:srgbClr val="B35900"/>
           </a:solidFill>
           <a:ln>
-            <a:noFill/>
+            <a:solidFill>
+              <a:srgbClr val="B35900"/>
+            </a:solidFill>
           </a:ln>
-          <a:effectLst/>
         </p:spPr>
         <p:style>
           <a:lnRef idx="1">
@@ -13568,10 +14173,19 @@
           </a:fontRef>
         </p:style>
         <p:txBody>
-          <a:bodyPr rtlCol="0" anchor="ctr"/>
+          <a:bodyPr rtlCol="0" anchor="ctr" lIns="0" rIns="0"/>
           <a:lstStyle/>
           <a:p>
             <a:pPr algn="ctr"/>
+            <a:r>
+              <a:rPr b="1" sz="2000">
+                <a:solidFill>
+                  <a:srgbClr val="FFFFFF"/>
+                </a:solidFill>
+                <a:latin typeface="Helvetica"/>
+              </a:rPr>
+              <a:t>1</a:t>
+            </a:r>
           </a:p>
         </p:txBody>
       </p:sp>
@@ -13583,8 +14197,8 @@
         </p:nvSpPr>
         <p:spPr>
           <a:xfrm>
-            <a:off x="502920" y="1508760"/>
-            <a:ext cx="1920240" cy="502920"/>
+            <a:off x="1463040" y="1298448"/>
+            <a:ext cx="10241280" cy="384048"/>
           </a:xfrm>
           <a:prstGeom prst="rect">
             <a:avLst/>
@@ -13597,19 +14211,19 @@
           </a:bodyPr>
           <a:lstStyle/>
           <a:p>
-            <a:pPr algn="ctr">
-              <a:lnSpc>
-                <a:spcPct val="115000"/>
-              </a:lnSpc>
-            </a:pPr>
-            <a:r>
-              <a:rPr sz="1800" b="1" i="0">
-                <a:solidFill>
-                  <a:srgbClr val="FFFFFF"/>
+            <a:pPr algn="l">
+              <a:lnSpc>
+                <a:spcPct val="110000"/>
+              </a:lnSpc>
+            </a:pPr>
+            <a:r>
+              <a:rPr sz="1550" b="1" i="0">
+                <a:solidFill>
+                  <a:srgbClr val="B35900"/>
                 </a:solidFill>
                 <a:latin typeface="Helvetica"/>
               </a:rPr>
-              <a:t>ENDORSE</a:t>
+              <a:t>Dermatology over-representation is an ARTIFACT</a:t>
             </a:r>
           </a:p>
         </p:txBody>
@@ -13622,8 +14236,8 @@
         </p:nvSpPr>
         <p:spPr>
           <a:xfrm>
-            <a:off x="2606040" y="1325880"/>
-            <a:ext cx="9098280" cy="457200"/>
+            <a:off x="1463040" y="1691640"/>
+            <a:ext cx="10241280" cy="1188720"/>
           </a:xfrm>
           <a:prstGeom prst="rect">
             <a:avLst/>
@@ -13638,81 +14252,43 @@
           <a:p>
             <a:pPr algn="l">
               <a:lnSpc>
-                <a:spcPct val="112000"/>
-              </a:lnSpc>
-            </a:pPr>
-            <a:r>
-              <a:rPr sz="1400" b="1" i="0">
-                <a:solidFill>
-                  <a:srgbClr val="1A3A6B"/>
-                </a:solidFill>
-                <a:latin typeface="Helvetica"/>
-              </a:rPr>
-              <a:t>the addition of a 9th focus area: "Data, AI &amp; Methods"</a:t>
-            </a:r>
-          </a:p>
-        </p:txBody>
-      </p:sp>
-      <p:sp>
-        <p:nvSpPr>
-          <p:cNvPr id="9" name="TextBox 8"/>
-          <p:cNvSpPr txBox="1"/>
-          <p:nvPr/>
-        </p:nvSpPr>
-        <p:spPr>
-          <a:xfrm>
-            <a:off x="2606040" y="1783080"/>
-            <a:ext cx="9098280" cy="502920"/>
-          </a:xfrm>
-          <a:prstGeom prst="rect">
-            <a:avLst/>
-          </a:prstGeom>
-          <a:noFill/>
-        </p:spPr>
-        <p:txBody>
-          <a:bodyPr wrap="square" lIns="36576" rIns="36576" tIns="18288" bIns="18288" anchor="t">
-            <a:spAutoFit/>
-          </a:bodyPr>
-          <a:lstStyle/>
-          <a:p>
-            <a:pPr algn="l">
-              <a:lnSpc>
-                <a:spcPct val="125000"/>
-              </a:lnSpc>
-            </a:pPr>
-            <a:r>
-              <a:rPr sz="1150" b="0" i="1">
+                <a:spcPct val="130000"/>
+              </a:lnSpc>
+            </a:pPr>
+            <a:r>
+              <a:rPr sz="1150" b="0" i="0">
                 <a:solidFill>
                   <a:srgbClr val="333333"/>
                 </a:solidFill>
                 <a:latin typeface="Georgia"/>
               </a:rPr>
-              <a:t>Frame-defining for WG-3 (Imaging) and WG-4 (AI). Without it, downstream WG work is permanently orphaned.</a:t>
-            </a:r>
-          </a:p>
-        </p:txBody>
-      </p:sp>
-      <p:sp>
-        <p:nvSpPr>
-          <p:cNvPr id="10" name="Rectangle 9"/>
+              <a:t>Dermatology is 13.9% of the corpus and 6.9× the peer median — but driven by 1–2 prolific groups, not a strategic priority. Trend score −4.4 (declining share). Do NOT elevate dermatology in the Refresh even though the share index suggests it. WG-5 ambassador toolkit must have the artifact answer rehearsed.</a:t>
+            </a:r>
+          </a:p>
+        </p:txBody>
+      </p:sp>
+      <p:sp>
+        <p:nvSpPr>
+          <p:cNvPr id="9" name="Oval 8"/>
           <p:cNvSpPr/>
           <p:nvPr/>
         </p:nvSpPr>
         <p:spPr>
           <a:xfrm>
-            <a:off x="502920" y="2377440"/>
-            <a:ext cx="1920240" cy="960120"/>
-          </a:xfrm>
-          <a:prstGeom prst="rect">
+            <a:off x="548640" y="2907792"/>
+            <a:ext cx="713232" cy="713232"/>
+          </a:xfrm>
+          <a:prstGeom prst="ellipse">
             <a:avLst/>
           </a:prstGeom>
           <a:solidFill>
-            <a:srgbClr val="216BB3"/>
+            <a:srgbClr val="B35900"/>
           </a:solidFill>
           <a:ln>
-            <a:noFill/>
+            <a:solidFill>
+              <a:srgbClr val="B35900"/>
+            </a:solidFill>
           </a:ln>
-          <a:effectLst/>
         </p:spPr>
         <p:style>
           <a:lnRef idx="1">
@@ -13729,10 +14305,58 @@
           </a:fontRef>
         </p:style>
         <p:txBody>
-          <a:bodyPr rtlCol="0" anchor="ctr"/>
+          <a:bodyPr rtlCol="0" anchor="ctr" lIns="0" rIns="0"/>
           <a:lstStyle/>
           <a:p>
             <a:pPr algn="ctr"/>
+            <a:r>
+              <a:rPr b="1" sz="2000">
+                <a:solidFill>
+                  <a:srgbClr val="FFFFFF"/>
+                </a:solidFill>
+                <a:latin typeface="Helvetica"/>
+              </a:rPr>
+              <a:t>2</a:t>
+            </a:r>
+          </a:p>
+        </p:txBody>
+      </p:sp>
+      <p:sp>
+        <p:nvSpPr>
+          <p:cNvPr id="10" name="TextBox 9"/>
+          <p:cNvSpPr txBox="1"/>
+          <p:nvPr/>
+        </p:nvSpPr>
+        <p:spPr>
+          <a:xfrm>
+            <a:off x="1463040" y="2926080"/>
+            <a:ext cx="10241280" cy="384048"/>
+          </a:xfrm>
+          <a:prstGeom prst="rect">
+            <a:avLst/>
+          </a:prstGeom>
+          <a:noFill/>
+        </p:spPr>
+        <p:txBody>
+          <a:bodyPr wrap="square" lIns="36576" rIns="36576" tIns="18288" bIns="18288" anchor="t">
+            <a:spAutoFit/>
+          </a:bodyPr>
+          <a:lstStyle/>
+          <a:p>
+            <a:pPr algn="l">
+              <a:lnSpc>
+                <a:spcPct val="110000"/>
+              </a:lnSpc>
+            </a:pPr>
+            <a:r>
+              <a:rPr sz="1550" b="1" i="0">
+                <a:solidFill>
+                  <a:srgbClr val="B35900"/>
+                </a:solidFill>
+                <a:latin typeface="Helvetica"/>
+              </a:rPr>
+              <a:t>Peer-biobank counts use PubMed name-search fallback</a:t>
+            </a:r>
           </a:p>
         </p:txBody>
       </p:sp>
@@ -13744,8 +14368,8 @@
         </p:nvSpPr>
         <p:spPr>
           <a:xfrm>
-            <a:off x="502920" y="2606040"/>
-            <a:ext cx="1920240" cy="502920"/>
+            <a:off x="1463040" y="3319272"/>
+            <a:ext cx="10241280" cy="1188720"/>
           </a:xfrm>
           <a:prstGeom prst="rect">
             <a:avLst/>
@@ -13758,122 +14382,45 @@
           </a:bodyPr>
           <a:lstStyle/>
           <a:p>
-            <a:pPr algn="ctr">
-              <a:lnSpc>
-                <a:spcPct val="115000"/>
-              </a:lnSpc>
-            </a:pPr>
-            <a:r>
-              <a:rPr sz="1800" b="1" i="0">
-                <a:solidFill>
-                  <a:srgbClr val="FFFFFF"/>
-                </a:solidFill>
-                <a:latin typeface="Helvetica"/>
-              </a:rPr>
-              <a:t>ENDORSE</a:t>
-            </a:r>
-          </a:p>
-        </p:txBody>
-      </p:sp>
-      <p:sp>
-        <p:nvSpPr>
-          <p:cNvPr id="12" name="TextBox 11"/>
-          <p:cNvSpPr txBox="1"/>
-          <p:nvPr/>
-        </p:nvSpPr>
-        <p:spPr>
-          <a:xfrm>
-            <a:off x="2606040" y="2423160"/>
-            <a:ext cx="9098280" cy="457200"/>
-          </a:xfrm>
-          <a:prstGeom prst="rect">
-            <a:avLst/>
-          </a:prstGeom>
-          <a:noFill/>
-        </p:spPr>
-        <p:txBody>
-          <a:bodyPr wrap="square" lIns="36576" rIns="36576" tIns="18288" bIns="18288" anchor="t">
-            <a:spAutoFit/>
-          </a:bodyPr>
-          <a:lstStyle/>
-          <a:p>
             <a:pPr algn="l">
               <a:lnSpc>
-                <a:spcPct val="112000"/>
-              </a:lnSpc>
-            </a:pPr>
-            <a:r>
-              <a:rPr sz="1400" b="1" i="0">
-                <a:solidFill>
-                  <a:srgbClr val="1A3A6B"/>
-                </a:solidFill>
-                <a:latin typeface="Helvetica"/>
-              </a:rPr>
-              <a:t>the FA8 rename to "Genetics, Multi-omics &amp; Biology" + commission the proteomics-release roadmap</a:t>
-            </a:r>
-          </a:p>
-        </p:txBody>
-      </p:sp>
-      <p:sp>
-        <p:nvSpPr>
-          <p:cNvPr id="13" name="TextBox 12"/>
-          <p:cNvSpPr txBox="1"/>
-          <p:nvPr/>
-        </p:nvSpPr>
-        <p:spPr>
-          <a:xfrm>
-            <a:off x="2606040" y="2880360"/>
-            <a:ext cx="9098280" cy="502920"/>
-          </a:xfrm>
-          <a:prstGeom prst="rect">
-            <a:avLst/>
-          </a:prstGeom>
-          <a:noFill/>
-        </p:spPr>
-        <p:txBody>
-          <a:bodyPr wrap="square" lIns="36576" rIns="36576" tIns="18288" bIns="18288" anchor="t">
-            <a:spAutoFit/>
-          </a:bodyPr>
-          <a:lstStyle/>
-          <a:p>
-            <a:pPr algn="l">
-              <a:lnSpc>
-                <a:spcPct val="125000"/>
-              </a:lnSpc>
-            </a:pPr>
-            <a:r>
-              <a:rPr sz="1150" b="0" i="1">
+                <a:spcPct val="130000"/>
+              </a:lnSpc>
+            </a:pPr>
+            <a:r>
+              <a:rPr sz="1150" b="0" i="0">
                 <a:solidFill>
                   <a:srgbClr val="333333"/>
                 </a:solidFill>
                 <a:latin typeface="Georgia"/>
               </a:rPr>
-              <a:t>Signals to the field that the 2026 omics releases have a home. Pair the rename with the data investment.</a:t>
-            </a:r>
-          </a:p>
-        </p:txBody>
-      </p:sp>
-      <p:sp>
-        <p:nvSpPr>
-          <p:cNvPr id="14" name="Rectangle 13"/>
+              <a:t>UKB, FinnGen, MVP, and CKB corpora come from PubMed name-search with same-tagger keyword tagging — now full PubMed censuses (UKB 11,868; FinnGen 3,152; MVP 438; CKB 558). Internally consistent across peers but absolute counts under- and over-count differently. USE THE STATIC SHARE INDEX, not trend differentials, for action-relevant comparisons. MVP corpus is small (438); single-MVP signals need a second-peer corroboration.</a:t>
+            </a:r>
+          </a:p>
+        </p:txBody>
+      </p:sp>
+      <p:sp>
+        <p:nvSpPr>
+          <p:cNvPr id="12" name="Oval 11"/>
           <p:cNvSpPr/>
           <p:nvPr/>
         </p:nvSpPr>
         <p:spPr>
           <a:xfrm>
-            <a:off x="502920" y="3474720"/>
-            <a:ext cx="1920240" cy="960120"/>
-          </a:xfrm>
-          <a:prstGeom prst="rect">
+            <a:off x="548640" y="4535424"/>
+            <a:ext cx="713232" cy="713232"/>
+          </a:xfrm>
+          <a:prstGeom prst="ellipse">
             <a:avLst/>
           </a:prstGeom>
           <a:solidFill>
-            <a:srgbClr val="1A3A6B"/>
+            <a:srgbClr val="B35900"/>
           </a:solidFill>
           <a:ln>
-            <a:noFill/>
+            <a:solidFill>
+              <a:srgbClr val="B35900"/>
+            </a:solidFill>
           </a:ln>
-          <a:effectLst/>
         </p:spPr>
         <p:style>
           <a:lnRef idx="1">
@@ -13890,377 +14437,103 @@
           </a:fontRef>
         </p:style>
         <p:txBody>
-          <a:bodyPr rtlCol="0" anchor="ctr"/>
+          <a:bodyPr rtlCol="0" anchor="ctr" lIns="0" rIns="0"/>
           <a:lstStyle/>
           <a:p>
             <a:pPr algn="ctr"/>
+            <a:r>
+              <a:rPr b="1" sz="2000">
+                <a:solidFill>
+                  <a:srgbClr val="FFFFFF"/>
+                </a:solidFill>
+                <a:latin typeface="Helvetica"/>
+              </a:rPr>
+              <a:t>3</a:t>
+            </a:r>
+          </a:p>
+        </p:txBody>
+      </p:sp>
+      <p:sp>
+        <p:nvSpPr>
+          <p:cNvPr id="13" name="TextBox 12"/>
+          <p:cNvSpPr txBox="1"/>
+          <p:nvPr/>
+        </p:nvSpPr>
+        <p:spPr>
+          <a:xfrm>
+            <a:off x="1463040" y="4553712"/>
+            <a:ext cx="10241280" cy="384048"/>
+          </a:xfrm>
+          <a:prstGeom prst="rect">
+            <a:avLst/>
+          </a:prstGeom>
+          <a:noFill/>
+        </p:spPr>
+        <p:txBody>
+          <a:bodyPr wrap="square" lIns="36576" rIns="36576" tIns="18288" bIns="18288" anchor="t">
+            <a:spAutoFit/>
+          </a:bodyPr>
+          <a:lstStyle/>
+          <a:p>
+            <a:pPr algn="l">
+              <a:lnSpc>
+                <a:spcPct val="110000"/>
+              </a:lnSpc>
+            </a:pPr>
+            <a:r>
+              <a:rPr sz="1550" b="1" i="0">
+                <a:solidFill>
+                  <a:srgbClr val="B35900"/>
+                </a:solidFill>
+                <a:latin typeface="Helvetica"/>
+              </a:rPr>
+              <a:t>AoU pre-2023 baseline is tiny (157 pubs)</a:t>
+            </a:r>
+          </a:p>
+        </p:txBody>
+      </p:sp>
+      <p:sp>
+        <p:nvSpPr>
+          <p:cNvPr id="14" name="TextBox 13"/>
+          <p:cNvSpPr txBox="1"/>
+          <p:nvPr/>
+        </p:nvSpPr>
+        <p:spPr>
+          <a:xfrm>
+            <a:off x="1463040" y="4946904"/>
+            <a:ext cx="10241280" cy="1188720"/>
+          </a:xfrm>
+          <a:prstGeom prst="rect">
+            <a:avLst/>
+          </a:prstGeom>
+          <a:noFill/>
+        </p:spPr>
+        <p:txBody>
+          <a:bodyPr wrap="square" lIns="36576" rIns="36576" tIns="18288" bIns="18288" anchor="t">
+            <a:spAutoFit/>
+          </a:bodyPr>
+          <a:lstStyle/>
+          <a:p>
+            <a:pPr algn="l">
+              <a:lnSpc>
+                <a:spcPct val="130000"/>
+              </a:lnSpc>
+            </a:pPr>
+            <a:r>
+              <a:rPr sz="1150" b="0" i="0">
+                <a:solidFill>
+                  <a:srgbClr val="333333"/>
+                </a:solidFill>
+                <a:latin typeface="Georgia"/>
+              </a:rPr>
+              <a:t>Any active post-2023 theme will trend positive in AoU's split simply because the corpus grew ~8.1× from pre- to post-2023. Apparent 'growth' on cardiometabolic, mental health, and cancer is largely a small-baseline artifact — read as 'AoU has built a presence here,' not 'AoU is uniquely outpacing the field.' True growth signals come from the peer-comparison panel, not from the AoU-internal pre/post split.</a:t>
+            </a:r>
           </a:p>
         </p:txBody>
       </p:sp>
       <p:sp>
         <p:nvSpPr>
           <p:cNvPr id="15" name="TextBox 14"/>
-          <p:cNvSpPr txBox="1"/>
-          <p:nvPr/>
-        </p:nvSpPr>
-        <p:spPr>
-          <a:xfrm>
-            <a:off x="502920" y="3703320"/>
-            <a:ext cx="1920240" cy="502920"/>
-          </a:xfrm>
-          <a:prstGeom prst="rect">
-            <a:avLst/>
-          </a:prstGeom>
-          <a:noFill/>
-        </p:spPr>
-        <p:txBody>
-          <a:bodyPr wrap="square" lIns="36576" rIns="36576" tIns="18288" bIns="18288" anchor="t">
-            <a:spAutoFit/>
-          </a:bodyPr>
-          <a:lstStyle/>
-          <a:p>
-            <a:pPr algn="ctr">
-              <a:lnSpc>
-                <a:spcPct val="115000"/>
-              </a:lnSpc>
-            </a:pPr>
-            <a:r>
-              <a:rPr sz="1800" b="1" i="0">
-                <a:solidFill>
-                  <a:srgbClr val="FFFFFF"/>
-                </a:solidFill>
-                <a:latin typeface="Helvetica"/>
-              </a:rPr>
-              <a:t>COMMISSION</a:t>
-            </a:r>
-          </a:p>
-        </p:txBody>
-      </p:sp>
-      <p:sp>
-        <p:nvSpPr>
-          <p:cNvPr id="16" name="TextBox 15"/>
-          <p:cNvSpPr txBox="1"/>
-          <p:nvPr/>
-        </p:nvSpPr>
-        <p:spPr>
-          <a:xfrm>
-            <a:off x="2606040" y="3520440"/>
-            <a:ext cx="9098280" cy="457200"/>
-          </a:xfrm>
-          <a:prstGeom prst="rect">
-            <a:avLst/>
-          </a:prstGeom>
-          <a:noFill/>
-        </p:spPr>
-        <p:txBody>
-          <a:bodyPr wrap="square" lIns="36576" rIns="36576" tIns="18288" bIns="18288" anchor="t">
-            <a:spAutoFit/>
-          </a:bodyPr>
-          <a:lstStyle/>
-          <a:p>
-            <a:pPr algn="l">
-              <a:lnSpc>
-                <a:spcPct val="112000"/>
-              </a:lnSpc>
-            </a:pPr>
-            <a:r>
-              <a:rPr sz="1400" b="1" i="0">
-                <a:solidFill>
-                  <a:srgbClr val="1A3A6B"/>
-                </a:solidFill>
-                <a:latin typeface="Helvetica"/>
-              </a:rPr>
-              <a:t>the cross-WG bias-in-translation framework hierarchy (WG-2 normative → WG-3 imaging → WG-4 AI)</a:t>
-            </a:r>
-          </a:p>
-        </p:txBody>
-      </p:sp>
-      <p:sp>
-        <p:nvSpPr>
-          <p:cNvPr id="17" name="TextBox 16"/>
-          <p:cNvSpPr txBox="1"/>
-          <p:nvPr/>
-        </p:nvSpPr>
-        <p:spPr>
-          <a:xfrm>
-            <a:off x="2606040" y="3977640"/>
-            <a:ext cx="9098280" cy="502920"/>
-          </a:xfrm>
-          <a:prstGeom prst="rect">
-            <a:avLst/>
-          </a:prstGeom>
-          <a:noFill/>
-        </p:spPr>
-        <p:txBody>
-          <a:bodyPr wrap="square" lIns="36576" rIns="36576" tIns="18288" bIns="18288" anchor="t">
-            <a:spAutoFit/>
-          </a:bodyPr>
-          <a:lstStyle/>
-          <a:p>
-            <a:pPr algn="l">
-              <a:lnSpc>
-                <a:spcPct val="125000"/>
-              </a:lnSpc>
-            </a:pPr>
-            <a:r>
-              <a:rPr sz="1150" b="0" i="1">
-                <a:solidFill>
-                  <a:srgbClr val="333333"/>
-                </a:solidFill>
-                <a:latin typeface="Georgia"/>
-              </a:rPr>
-              <a:t>Single AoU bias-reporting standard rather than three semi-aligned frameworks. WG-2 (Sanchez &amp; Cohn) convenes.</a:t>
-            </a:r>
-          </a:p>
-        </p:txBody>
-      </p:sp>
-      <p:sp>
-        <p:nvSpPr>
-          <p:cNvPr id="18" name="Rectangle 17"/>
-          <p:cNvSpPr/>
-          <p:nvPr/>
-        </p:nvSpPr>
-        <p:spPr>
-          <a:xfrm>
-            <a:off x="502920" y="4572000"/>
-            <a:ext cx="1920240" cy="960120"/>
-          </a:xfrm>
-          <a:prstGeom prst="rect">
-            <a:avLst/>
-          </a:prstGeom>
-          <a:solidFill>
-            <a:srgbClr val="1A3A6B"/>
-          </a:solidFill>
-          <a:ln>
-            <a:noFill/>
-          </a:ln>
-          <a:effectLst/>
-        </p:spPr>
-        <p:style>
-          <a:lnRef idx="1">
-            <a:schemeClr val="accent1"/>
-          </a:lnRef>
-          <a:fillRef idx="3">
-            <a:schemeClr val="accent1"/>
-          </a:fillRef>
-          <a:effectRef idx="2">
-            <a:schemeClr val="accent1"/>
-          </a:effectRef>
-          <a:fontRef idx="minor">
-            <a:schemeClr val="lt1"/>
-          </a:fontRef>
-        </p:style>
-        <p:txBody>
-          <a:bodyPr rtlCol="0" anchor="ctr"/>
-          <a:lstStyle/>
-          <a:p>
-            <a:pPr algn="ctr"/>
-          </a:p>
-        </p:txBody>
-      </p:sp>
-      <p:sp>
-        <p:nvSpPr>
-          <p:cNvPr id="19" name="TextBox 18"/>
-          <p:cNvSpPr txBox="1"/>
-          <p:nvPr/>
-        </p:nvSpPr>
-        <p:spPr>
-          <a:xfrm>
-            <a:off x="502920" y="4800600"/>
-            <a:ext cx="1920240" cy="502920"/>
-          </a:xfrm>
-          <a:prstGeom prst="rect">
-            <a:avLst/>
-          </a:prstGeom>
-          <a:noFill/>
-        </p:spPr>
-        <p:txBody>
-          <a:bodyPr wrap="square" lIns="36576" rIns="36576" tIns="18288" bIns="18288" anchor="t">
-            <a:spAutoFit/>
-          </a:bodyPr>
-          <a:lstStyle/>
-          <a:p>
-            <a:pPr algn="ctr">
-              <a:lnSpc>
-                <a:spcPct val="115000"/>
-              </a:lnSpc>
-            </a:pPr>
-            <a:r>
-              <a:rPr sz="1800" b="1" i="0">
-                <a:solidFill>
-                  <a:srgbClr val="FFFFFF"/>
-                </a:solidFill>
-                <a:latin typeface="Helvetica"/>
-              </a:rPr>
-              <a:t>ALLOCATE</a:t>
-            </a:r>
-          </a:p>
-        </p:txBody>
-      </p:sp>
-      <p:sp>
-        <p:nvSpPr>
-          <p:cNvPr id="20" name="TextBox 19"/>
-          <p:cNvSpPr txBox="1"/>
-          <p:nvPr/>
-        </p:nvSpPr>
-        <p:spPr>
-          <a:xfrm>
-            <a:off x="2606040" y="4617720"/>
-            <a:ext cx="9098280" cy="457200"/>
-          </a:xfrm>
-          <a:prstGeom prst="rect">
-            <a:avLst/>
-          </a:prstGeom>
-          <a:noFill/>
-        </p:spPr>
-        <p:txBody>
-          <a:bodyPr wrap="square" lIns="36576" rIns="36576" tIns="18288" bIns="18288" anchor="t">
-            <a:spAutoFit/>
-          </a:bodyPr>
-          <a:lstStyle/>
-          <a:p>
-            <a:pPr algn="l">
-              <a:lnSpc>
-                <a:spcPct val="112000"/>
-              </a:lnSpc>
-            </a:pPr>
-            <a:r>
-              <a:rPr sz="1400" b="1" i="0">
-                <a:solidFill>
-                  <a:srgbClr val="1A3A6B"/>
-                </a:solidFill>
-                <a:latin typeface="Helvetica"/>
-              </a:rPr>
-              <a:t>time at the next Science Committee for the structural-framework vote (FA9 + FA8 rename + FA reframes)</a:t>
-            </a:r>
-          </a:p>
-        </p:txBody>
-      </p:sp>
-      <p:sp>
-        <p:nvSpPr>
-          <p:cNvPr id="21" name="TextBox 20"/>
-          <p:cNvSpPr txBox="1"/>
-          <p:nvPr/>
-        </p:nvSpPr>
-        <p:spPr>
-          <a:xfrm>
-            <a:off x="2606040" y="5074920"/>
-            <a:ext cx="9098280" cy="502920"/>
-          </a:xfrm>
-          <a:prstGeom prst="rect">
-            <a:avLst/>
-          </a:prstGeom>
-          <a:noFill/>
-        </p:spPr>
-        <p:txBody>
-          <a:bodyPr wrap="square" lIns="36576" rIns="36576" tIns="18288" bIns="18288" anchor="t">
-            <a:spAutoFit/>
-          </a:bodyPr>
-          <a:lstStyle/>
-          <a:p>
-            <a:pPr algn="l">
-              <a:lnSpc>
-                <a:spcPct val="125000"/>
-              </a:lnSpc>
-            </a:pPr>
-            <a:r>
-              <a:rPr sz="1150" b="0" i="1">
-                <a:solidFill>
-                  <a:srgbClr val="333333"/>
-                </a:solidFill>
-                <a:latin typeface="Georgia"/>
-              </a:rPr>
-              <a:t>These three structural decisions are the WG-1 deliverable; they should be settled before the other four WGs' Top-3 are finalized.</a:t>
-            </a:r>
-          </a:p>
-        </p:txBody>
-      </p:sp>
-      <p:sp>
-        <p:nvSpPr>
-          <p:cNvPr id="22" name="Rectangle 21"/>
-          <p:cNvSpPr/>
-          <p:nvPr/>
-        </p:nvSpPr>
-        <p:spPr>
-          <a:xfrm>
-            <a:off x="502920" y="5760720"/>
-            <a:ext cx="11201400" cy="594360"/>
-          </a:xfrm>
-          <a:prstGeom prst="rect">
-            <a:avLst/>
-          </a:prstGeom>
-          <a:solidFill>
-            <a:srgbClr val="1A3A6B"/>
-          </a:solidFill>
-          <a:ln>
-            <a:noFill/>
-          </a:ln>
-          <a:effectLst/>
-        </p:spPr>
-        <p:style>
-          <a:lnRef idx="1">
-            <a:schemeClr val="accent1"/>
-          </a:lnRef>
-          <a:fillRef idx="3">
-            <a:schemeClr val="accent1"/>
-          </a:fillRef>
-          <a:effectRef idx="2">
-            <a:schemeClr val="accent1"/>
-          </a:effectRef>
-          <a:fontRef idx="minor">
-            <a:schemeClr val="lt1"/>
-          </a:fontRef>
-        </p:style>
-        <p:txBody>
-          <a:bodyPr rtlCol="0" anchor="ctr"/>
-          <a:lstStyle/>
-          <a:p>
-            <a:pPr algn="ctr"/>
-          </a:p>
-        </p:txBody>
-      </p:sp>
-      <p:sp>
-        <p:nvSpPr>
-          <p:cNvPr id="23" name="TextBox 22"/>
-          <p:cNvSpPr txBox="1"/>
-          <p:nvPr/>
-        </p:nvSpPr>
-        <p:spPr>
-          <a:xfrm>
-            <a:off x="685800" y="5815584"/>
-            <a:ext cx="10835640" cy="502920"/>
-          </a:xfrm>
-          <a:prstGeom prst="rect">
-            <a:avLst/>
-          </a:prstGeom>
-          <a:noFill/>
-        </p:spPr>
-        <p:txBody>
-          <a:bodyPr wrap="square" lIns="36576" rIns="36576" tIns="18288" bIns="18288" anchor="t">
-            <a:spAutoFit/>
-          </a:bodyPr>
-          <a:lstStyle/>
-          <a:p>
-            <a:pPr algn="ctr">
-              <a:lnSpc>
-                <a:spcPct val="115000"/>
-              </a:lnSpc>
-            </a:pPr>
-            <a:r>
-              <a:rPr sz="1250" b="1" i="1">
-                <a:solidFill>
-                  <a:srgbClr val="FFFFFF"/>
-                </a:solidFill>
-                <a:latin typeface="Helvetica"/>
-              </a:rPr>
-              <a:t>Thank you. We look forward to the Committee's discussion.   —  Jordan Smoller &amp; Melissa Haendel, WG-1 Co-leads</a:t>
-            </a:r>
-          </a:p>
-        </p:txBody>
-      </p:sp>
-      <p:sp>
-        <p:nvSpPr>
-          <p:cNvPr id="24" name="TextBox 23"/>
           <p:cNvSpPr txBox="1"/>
           <p:nvPr/>
         </p:nvSpPr>
@@ -14299,7 +14572,7 @@
       </p:sp>
       <p:sp>
         <p:nvSpPr>
-          <p:cNvPr id="25" name="TextBox 24"/>
+          <p:cNvPr id="16" name="TextBox 15"/>
           <p:cNvSpPr txBox="1"/>
           <p:nvPr/>
         </p:nvSpPr>
@@ -14331,7 +14604,7 @@
                 </a:solidFill>
                 <a:latin typeface="Georgia"/>
               </a:rPr>
-              <a:t>19 / 19</a:t>
+              <a:t>19 / 20</a:t>
             </a:r>
           </a:p>
         </p:txBody>
@@ -14923,7 +15196,996 @@
                 </a:solidFill>
                 <a:latin typeface="Georgia"/>
               </a:rPr>
-              <a:t>2 / 19</a:t>
+              <a:t>2 / 20</a:t>
+            </a:r>
+          </a:p>
+        </p:txBody>
+      </p:sp>
+    </p:spTree>
+  </p:cSld>
+  <p:clrMapOvr>
+    <a:masterClrMapping/>
+  </p:clrMapOvr>
+</p:sld>
+</file>
+
+<file path=ppt/slides/slide20.xml><?xml version="1.0" encoding="utf-8"?>
+<p:sld xmlns:a="http://schemas.openxmlformats.org/drawingml/2006/main" xmlns:p="http://schemas.openxmlformats.org/presentationml/2006/main" xmlns:r="http://schemas.openxmlformats.org/officeDocument/2006/relationships">
+  <p:cSld>
+    <p:spTree>
+      <p:nvGrpSpPr>
+        <p:cNvPr id="1" name=""/>
+        <p:cNvGrpSpPr/>
+        <p:nvPr/>
+      </p:nvGrpSpPr>
+      <p:grpSpPr/>
+      <p:sp>
+        <p:nvSpPr>
+          <p:cNvPr id="2" name="Rectangle 1"/>
+          <p:cNvSpPr/>
+          <p:nvPr/>
+        </p:nvSpPr>
+        <p:spPr>
+          <a:xfrm>
+            <a:off x="0" y="0"/>
+            <a:ext cx="12191695" cy="73152"/>
+          </a:xfrm>
+          <a:prstGeom prst="rect">
+            <a:avLst/>
+          </a:prstGeom>
+          <a:solidFill>
+            <a:srgbClr val="1A3A6B"/>
+          </a:solidFill>
+          <a:ln>
+            <a:noFill/>
+          </a:ln>
+          <a:effectLst/>
+        </p:spPr>
+        <p:style>
+          <a:lnRef idx="1">
+            <a:schemeClr val="accent1"/>
+          </a:lnRef>
+          <a:fillRef idx="3">
+            <a:schemeClr val="accent1"/>
+          </a:fillRef>
+          <a:effectRef idx="2">
+            <a:schemeClr val="accent1"/>
+          </a:effectRef>
+          <a:fontRef idx="minor">
+            <a:schemeClr val="lt1"/>
+          </a:fontRef>
+        </p:style>
+        <p:txBody>
+          <a:bodyPr rtlCol="0" anchor="ctr"/>
+          <a:lstStyle/>
+          <a:p>
+            <a:pPr algn="ctr"/>
+          </a:p>
+        </p:txBody>
+      </p:sp>
+      <p:sp>
+        <p:nvSpPr>
+          <p:cNvPr id="3" name="TextBox 2"/>
+          <p:cNvSpPr txBox="1"/>
+          <p:nvPr/>
+        </p:nvSpPr>
+        <p:spPr>
+          <a:xfrm>
+            <a:off x="457200" y="164592"/>
+            <a:ext cx="11247120" cy="502920"/>
+          </a:xfrm>
+          <a:prstGeom prst="rect">
+            <a:avLst/>
+          </a:prstGeom>
+          <a:noFill/>
+        </p:spPr>
+        <p:txBody>
+          <a:bodyPr wrap="square" lIns="36576" rIns="36576" tIns="18288" bIns="18288" anchor="t">
+            <a:spAutoFit/>
+          </a:bodyPr>
+          <a:lstStyle/>
+          <a:p>
+            <a:pPr algn="l">
+              <a:lnSpc>
+                <a:spcPct val="105000"/>
+              </a:lnSpc>
+            </a:pPr>
+            <a:r>
+              <a:rPr sz="2200" b="1" i="0">
+                <a:solidFill>
+                  <a:srgbClr val="1A3A6B"/>
+                </a:solidFill>
+                <a:latin typeface="Helvetica"/>
+              </a:rPr>
+              <a:t>What we ask the Science Committee to decide</a:t>
+            </a:r>
+          </a:p>
+        </p:txBody>
+      </p:sp>
+      <p:sp>
+        <p:nvSpPr>
+          <p:cNvPr id="4" name="TextBox 3"/>
+          <p:cNvSpPr txBox="1"/>
+          <p:nvPr/>
+        </p:nvSpPr>
+        <p:spPr>
+          <a:xfrm>
+            <a:off x="457200" y="685800"/>
+            <a:ext cx="11247120" cy="292608"/>
+          </a:xfrm>
+          <a:prstGeom prst="rect">
+            <a:avLst/>
+          </a:prstGeom>
+          <a:noFill/>
+        </p:spPr>
+        <p:txBody>
+          <a:bodyPr wrap="square" lIns="36576" rIns="36576" tIns="18288" bIns="18288" anchor="t">
+            <a:spAutoFit/>
+          </a:bodyPr>
+          <a:lstStyle/>
+          <a:p>
+            <a:pPr algn="l">
+              <a:lnSpc>
+                <a:spcPct val="110000"/>
+              </a:lnSpc>
+            </a:pPr>
+            <a:r>
+              <a:rPr sz="1200" b="0" i="1">
+                <a:solidFill>
+                  <a:srgbClr val="666666"/>
+                </a:solidFill>
+                <a:latin typeface="Georgia"/>
+              </a:rPr>
+              <a:t>Four concrete decisions today; one calendar commitment for the cross-WG hierarchy.</a:t>
+            </a:r>
+          </a:p>
+        </p:txBody>
+      </p:sp>
+      <p:sp>
+        <p:nvSpPr>
+          <p:cNvPr id="5" name="Rectangle 4"/>
+          <p:cNvSpPr/>
+          <p:nvPr/>
+        </p:nvSpPr>
+        <p:spPr>
+          <a:xfrm>
+            <a:off x="457200" y="1005840"/>
+            <a:ext cx="11247120" cy="9525"/>
+          </a:xfrm>
+          <a:prstGeom prst="rect">
+            <a:avLst/>
+          </a:prstGeom>
+          <a:solidFill>
+            <a:srgbClr val="C8C8C8"/>
+          </a:solidFill>
+          <a:ln>
+            <a:noFill/>
+          </a:ln>
+          <a:effectLst/>
+        </p:spPr>
+        <p:style>
+          <a:lnRef idx="1">
+            <a:schemeClr val="accent1"/>
+          </a:lnRef>
+          <a:fillRef idx="3">
+            <a:schemeClr val="accent1"/>
+          </a:fillRef>
+          <a:effectRef idx="2">
+            <a:schemeClr val="accent1"/>
+          </a:effectRef>
+          <a:fontRef idx="minor">
+            <a:schemeClr val="lt1"/>
+          </a:fontRef>
+        </p:style>
+        <p:txBody>
+          <a:bodyPr rtlCol="0" anchor="ctr"/>
+          <a:lstStyle/>
+          <a:p>
+            <a:pPr algn="ctr"/>
+          </a:p>
+        </p:txBody>
+      </p:sp>
+      <p:sp>
+        <p:nvSpPr>
+          <p:cNvPr id="6" name="Rectangle 5"/>
+          <p:cNvSpPr/>
+          <p:nvPr/>
+        </p:nvSpPr>
+        <p:spPr>
+          <a:xfrm>
+            <a:off x="502920" y="1280160"/>
+            <a:ext cx="1920240" cy="960120"/>
+          </a:xfrm>
+          <a:prstGeom prst="rect">
+            <a:avLst/>
+          </a:prstGeom>
+          <a:solidFill>
+            <a:srgbClr val="216BB3"/>
+          </a:solidFill>
+          <a:ln>
+            <a:noFill/>
+          </a:ln>
+          <a:effectLst/>
+        </p:spPr>
+        <p:style>
+          <a:lnRef idx="1">
+            <a:schemeClr val="accent1"/>
+          </a:lnRef>
+          <a:fillRef idx="3">
+            <a:schemeClr val="accent1"/>
+          </a:fillRef>
+          <a:effectRef idx="2">
+            <a:schemeClr val="accent1"/>
+          </a:effectRef>
+          <a:fontRef idx="minor">
+            <a:schemeClr val="lt1"/>
+          </a:fontRef>
+        </p:style>
+        <p:txBody>
+          <a:bodyPr rtlCol="0" anchor="ctr"/>
+          <a:lstStyle/>
+          <a:p>
+            <a:pPr algn="ctr"/>
+          </a:p>
+        </p:txBody>
+      </p:sp>
+      <p:sp>
+        <p:nvSpPr>
+          <p:cNvPr id="7" name="TextBox 6"/>
+          <p:cNvSpPr txBox="1"/>
+          <p:nvPr/>
+        </p:nvSpPr>
+        <p:spPr>
+          <a:xfrm>
+            <a:off x="502920" y="1508760"/>
+            <a:ext cx="1920240" cy="502920"/>
+          </a:xfrm>
+          <a:prstGeom prst="rect">
+            <a:avLst/>
+          </a:prstGeom>
+          <a:noFill/>
+        </p:spPr>
+        <p:txBody>
+          <a:bodyPr wrap="square" lIns="36576" rIns="36576" tIns="18288" bIns="18288" anchor="t">
+            <a:spAutoFit/>
+          </a:bodyPr>
+          <a:lstStyle/>
+          <a:p>
+            <a:pPr algn="ctr">
+              <a:lnSpc>
+                <a:spcPct val="115000"/>
+              </a:lnSpc>
+            </a:pPr>
+            <a:r>
+              <a:rPr sz="1800" b="1" i="0">
+                <a:solidFill>
+                  <a:srgbClr val="FFFFFF"/>
+                </a:solidFill>
+                <a:latin typeface="Helvetica"/>
+              </a:rPr>
+              <a:t>ENDORSE</a:t>
+            </a:r>
+          </a:p>
+        </p:txBody>
+      </p:sp>
+      <p:sp>
+        <p:nvSpPr>
+          <p:cNvPr id="8" name="TextBox 7"/>
+          <p:cNvSpPr txBox="1"/>
+          <p:nvPr/>
+        </p:nvSpPr>
+        <p:spPr>
+          <a:xfrm>
+            <a:off x="2606040" y="1325880"/>
+            <a:ext cx="9098280" cy="457200"/>
+          </a:xfrm>
+          <a:prstGeom prst="rect">
+            <a:avLst/>
+          </a:prstGeom>
+          <a:noFill/>
+        </p:spPr>
+        <p:txBody>
+          <a:bodyPr wrap="square" lIns="36576" rIns="36576" tIns="18288" bIns="18288" anchor="t">
+            <a:spAutoFit/>
+          </a:bodyPr>
+          <a:lstStyle/>
+          <a:p>
+            <a:pPr algn="l">
+              <a:lnSpc>
+                <a:spcPct val="112000"/>
+              </a:lnSpc>
+            </a:pPr>
+            <a:r>
+              <a:rPr sz="1400" b="1" i="0">
+                <a:solidFill>
+                  <a:srgbClr val="1A3A6B"/>
+                </a:solidFill>
+                <a:latin typeface="Helvetica"/>
+              </a:rPr>
+              <a:t>the addition of a 9th focus area: "Data, AI &amp; Methods"</a:t>
+            </a:r>
+          </a:p>
+        </p:txBody>
+      </p:sp>
+      <p:sp>
+        <p:nvSpPr>
+          <p:cNvPr id="9" name="TextBox 8"/>
+          <p:cNvSpPr txBox="1"/>
+          <p:nvPr/>
+        </p:nvSpPr>
+        <p:spPr>
+          <a:xfrm>
+            <a:off x="2606040" y="1783080"/>
+            <a:ext cx="9098280" cy="502920"/>
+          </a:xfrm>
+          <a:prstGeom prst="rect">
+            <a:avLst/>
+          </a:prstGeom>
+          <a:noFill/>
+        </p:spPr>
+        <p:txBody>
+          <a:bodyPr wrap="square" lIns="36576" rIns="36576" tIns="18288" bIns="18288" anchor="t">
+            <a:spAutoFit/>
+          </a:bodyPr>
+          <a:lstStyle/>
+          <a:p>
+            <a:pPr algn="l">
+              <a:lnSpc>
+                <a:spcPct val="125000"/>
+              </a:lnSpc>
+            </a:pPr>
+            <a:r>
+              <a:rPr sz="1150" b="0" i="1">
+                <a:solidFill>
+                  <a:srgbClr val="333333"/>
+                </a:solidFill>
+                <a:latin typeface="Georgia"/>
+              </a:rPr>
+              <a:t>Frame-defining for WG-3 (Imaging) and WG-4 (AI). Without it, downstream WG work is permanently orphaned.</a:t>
+            </a:r>
+          </a:p>
+        </p:txBody>
+      </p:sp>
+      <p:sp>
+        <p:nvSpPr>
+          <p:cNvPr id="10" name="Rectangle 9"/>
+          <p:cNvSpPr/>
+          <p:nvPr/>
+        </p:nvSpPr>
+        <p:spPr>
+          <a:xfrm>
+            <a:off x="502920" y="2377440"/>
+            <a:ext cx="1920240" cy="960120"/>
+          </a:xfrm>
+          <a:prstGeom prst="rect">
+            <a:avLst/>
+          </a:prstGeom>
+          <a:solidFill>
+            <a:srgbClr val="216BB3"/>
+          </a:solidFill>
+          <a:ln>
+            <a:noFill/>
+          </a:ln>
+          <a:effectLst/>
+        </p:spPr>
+        <p:style>
+          <a:lnRef idx="1">
+            <a:schemeClr val="accent1"/>
+          </a:lnRef>
+          <a:fillRef idx="3">
+            <a:schemeClr val="accent1"/>
+          </a:fillRef>
+          <a:effectRef idx="2">
+            <a:schemeClr val="accent1"/>
+          </a:effectRef>
+          <a:fontRef idx="minor">
+            <a:schemeClr val="lt1"/>
+          </a:fontRef>
+        </p:style>
+        <p:txBody>
+          <a:bodyPr rtlCol="0" anchor="ctr"/>
+          <a:lstStyle/>
+          <a:p>
+            <a:pPr algn="ctr"/>
+          </a:p>
+        </p:txBody>
+      </p:sp>
+      <p:sp>
+        <p:nvSpPr>
+          <p:cNvPr id="11" name="TextBox 10"/>
+          <p:cNvSpPr txBox="1"/>
+          <p:nvPr/>
+        </p:nvSpPr>
+        <p:spPr>
+          <a:xfrm>
+            <a:off x="502920" y="2606040"/>
+            <a:ext cx="1920240" cy="502920"/>
+          </a:xfrm>
+          <a:prstGeom prst="rect">
+            <a:avLst/>
+          </a:prstGeom>
+          <a:noFill/>
+        </p:spPr>
+        <p:txBody>
+          <a:bodyPr wrap="square" lIns="36576" rIns="36576" tIns="18288" bIns="18288" anchor="t">
+            <a:spAutoFit/>
+          </a:bodyPr>
+          <a:lstStyle/>
+          <a:p>
+            <a:pPr algn="ctr">
+              <a:lnSpc>
+                <a:spcPct val="115000"/>
+              </a:lnSpc>
+            </a:pPr>
+            <a:r>
+              <a:rPr sz="1800" b="1" i="0">
+                <a:solidFill>
+                  <a:srgbClr val="FFFFFF"/>
+                </a:solidFill>
+                <a:latin typeface="Helvetica"/>
+              </a:rPr>
+              <a:t>ENDORSE</a:t>
+            </a:r>
+          </a:p>
+        </p:txBody>
+      </p:sp>
+      <p:sp>
+        <p:nvSpPr>
+          <p:cNvPr id="12" name="TextBox 11"/>
+          <p:cNvSpPr txBox="1"/>
+          <p:nvPr/>
+        </p:nvSpPr>
+        <p:spPr>
+          <a:xfrm>
+            <a:off x="2606040" y="2423160"/>
+            <a:ext cx="9098280" cy="457200"/>
+          </a:xfrm>
+          <a:prstGeom prst="rect">
+            <a:avLst/>
+          </a:prstGeom>
+          <a:noFill/>
+        </p:spPr>
+        <p:txBody>
+          <a:bodyPr wrap="square" lIns="36576" rIns="36576" tIns="18288" bIns="18288" anchor="t">
+            <a:spAutoFit/>
+          </a:bodyPr>
+          <a:lstStyle/>
+          <a:p>
+            <a:pPr algn="l">
+              <a:lnSpc>
+                <a:spcPct val="112000"/>
+              </a:lnSpc>
+            </a:pPr>
+            <a:r>
+              <a:rPr sz="1400" b="1" i="0">
+                <a:solidFill>
+                  <a:srgbClr val="1A3A6B"/>
+                </a:solidFill>
+                <a:latin typeface="Helvetica"/>
+              </a:rPr>
+              <a:t>the FA8 rename to "Genetics, Multi-omics &amp; Biology" + commission the proteomics-release roadmap</a:t>
+            </a:r>
+          </a:p>
+        </p:txBody>
+      </p:sp>
+      <p:sp>
+        <p:nvSpPr>
+          <p:cNvPr id="13" name="TextBox 12"/>
+          <p:cNvSpPr txBox="1"/>
+          <p:nvPr/>
+        </p:nvSpPr>
+        <p:spPr>
+          <a:xfrm>
+            <a:off x="2606040" y="2880360"/>
+            <a:ext cx="9098280" cy="502920"/>
+          </a:xfrm>
+          <a:prstGeom prst="rect">
+            <a:avLst/>
+          </a:prstGeom>
+          <a:noFill/>
+        </p:spPr>
+        <p:txBody>
+          <a:bodyPr wrap="square" lIns="36576" rIns="36576" tIns="18288" bIns="18288" anchor="t">
+            <a:spAutoFit/>
+          </a:bodyPr>
+          <a:lstStyle/>
+          <a:p>
+            <a:pPr algn="l">
+              <a:lnSpc>
+                <a:spcPct val="125000"/>
+              </a:lnSpc>
+            </a:pPr>
+            <a:r>
+              <a:rPr sz="1150" b="0" i="1">
+                <a:solidFill>
+                  <a:srgbClr val="333333"/>
+                </a:solidFill>
+                <a:latin typeface="Georgia"/>
+              </a:rPr>
+              <a:t>Signals to the field that the 2026 omics releases have a home. Pair the rename with the data investment.</a:t>
+            </a:r>
+          </a:p>
+        </p:txBody>
+      </p:sp>
+      <p:sp>
+        <p:nvSpPr>
+          <p:cNvPr id="14" name="Rectangle 13"/>
+          <p:cNvSpPr/>
+          <p:nvPr/>
+        </p:nvSpPr>
+        <p:spPr>
+          <a:xfrm>
+            <a:off x="502920" y="3474720"/>
+            <a:ext cx="1920240" cy="960120"/>
+          </a:xfrm>
+          <a:prstGeom prst="rect">
+            <a:avLst/>
+          </a:prstGeom>
+          <a:solidFill>
+            <a:srgbClr val="1A3A6B"/>
+          </a:solidFill>
+          <a:ln>
+            <a:noFill/>
+          </a:ln>
+          <a:effectLst/>
+        </p:spPr>
+        <p:style>
+          <a:lnRef idx="1">
+            <a:schemeClr val="accent1"/>
+          </a:lnRef>
+          <a:fillRef idx="3">
+            <a:schemeClr val="accent1"/>
+          </a:fillRef>
+          <a:effectRef idx="2">
+            <a:schemeClr val="accent1"/>
+          </a:effectRef>
+          <a:fontRef idx="minor">
+            <a:schemeClr val="lt1"/>
+          </a:fontRef>
+        </p:style>
+        <p:txBody>
+          <a:bodyPr rtlCol="0" anchor="ctr"/>
+          <a:lstStyle/>
+          <a:p>
+            <a:pPr algn="ctr"/>
+          </a:p>
+        </p:txBody>
+      </p:sp>
+      <p:sp>
+        <p:nvSpPr>
+          <p:cNvPr id="15" name="TextBox 14"/>
+          <p:cNvSpPr txBox="1"/>
+          <p:nvPr/>
+        </p:nvSpPr>
+        <p:spPr>
+          <a:xfrm>
+            <a:off x="502920" y="3703320"/>
+            <a:ext cx="1920240" cy="502920"/>
+          </a:xfrm>
+          <a:prstGeom prst="rect">
+            <a:avLst/>
+          </a:prstGeom>
+          <a:noFill/>
+        </p:spPr>
+        <p:txBody>
+          <a:bodyPr wrap="square" lIns="36576" rIns="36576" tIns="18288" bIns="18288" anchor="t">
+            <a:spAutoFit/>
+          </a:bodyPr>
+          <a:lstStyle/>
+          <a:p>
+            <a:pPr algn="ctr">
+              <a:lnSpc>
+                <a:spcPct val="115000"/>
+              </a:lnSpc>
+            </a:pPr>
+            <a:r>
+              <a:rPr sz="1800" b="1" i="0">
+                <a:solidFill>
+                  <a:srgbClr val="FFFFFF"/>
+                </a:solidFill>
+                <a:latin typeface="Helvetica"/>
+              </a:rPr>
+              <a:t>COMMISSION</a:t>
+            </a:r>
+          </a:p>
+        </p:txBody>
+      </p:sp>
+      <p:sp>
+        <p:nvSpPr>
+          <p:cNvPr id="16" name="TextBox 15"/>
+          <p:cNvSpPr txBox="1"/>
+          <p:nvPr/>
+        </p:nvSpPr>
+        <p:spPr>
+          <a:xfrm>
+            <a:off x="2606040" y="3520440"/>
+            <a:ext cx="9098280" cy="457200"/>
+          </a:xfrm>
+          <a:prstGeom prst="rect">
+            <a:avLst/>
+          </a:prstGeom>
+          <a:noFill/>
+        </p:spPr>
+        <p:txBody>
+          <a:bodyPr wrap="square" lIns="36576" rIns="36576" tIns="18288" bIns="18288" anchor="t">
+            <a:spAutoFit/>
+          </a:bodyPr>
+          <a:lstStyle/>
+          <a:p>
+            <a:pPr algn="l">
+              <a:lnSpc>
+                <a:spcPct val="112000"/>
+              </a:lnSpc>
+            </a:pPr>
+            <a:r>
+              <a:rPr sz="1400" b="1" i="0">
+                <a:solidFill>
+                  <a:srgbClr val="1A3A6B"/>
+                </a:solidFill>
+                <a:latin typeface="Helvetica"/>
+              </a:rPr>
+              <a:t>the cross-WG bias-in-translation framework hierarchy (WG-2 normative → WG-3 imaging → WG-4 AI)</a:t>
+            </a:r>
+          </a:p>
+        </p:txBody>
+      </p:sp>
+      <p:sp>
+        <p:nvSpPr>
+          <p:cNvPr id="17" name="TextBox 16"/>
+          <p:cNvSpPr txBox="1"/>
+          <p:nvPr/>
+        </p:nvSpPr>
+        <p:spPr>
+          <a:xfrm>
+            <a:off x="2606040" y="3977640"/>
+            <a:ext cx="9098280" cy="502920"/>
+          </a:xfrm>
+          <a:prstGeom prst="rect">
+            <a:avLst/>
+          </a:prstGeom>
+          <a:noFill/>
+        </p:spPr>
+        <p:txBody>
+          <a:bodyPr wrap="square" lIns="36576" rIns="36576" tIns="18288" bIns="18288" anchor="t">
+            <a:spAutoFit/>
+          </a:bodyPr>
+          <a:lstStyle/>
+          <a:p>
+            <a:pPr algn="l">
+              <a:lnSpc>
+                <a:spcPct val="125000"/>
+              </a:lnSpc>
+            </a:pPr>
+            <a:r>
+              <a:rPr sz="1150" b="0" i="1">
+                <a:solidFill>
+                  <a:srgbClr val="333333"/>
+                </a:solidFill>
+                <a:latin typeface="Georgia"/>
+              </a:rPr>
+              <a:t>Single AoU bias-reporting standard rather than three semi-aligned frameworks. WG-2 (Sanchez &amp; Cohn) convenes.</a:t>
+            </a:r>
+          </a:p>
+        </p:txBody>
+      </p:sp>
+      <p:sp>
+        <p:nvSpPr>
+          <p:cNvPr id="18" name="Rectangle 17"/>
+          <p:cNvSpPr/>
+          <p:nvPr/>
+        </p:nvSpPr>
+        <p:spPr>
+          <a:xfrm>
+            <a:off x="502920" y="4572000"/>
+            <a:ext cx="1920240" cy="960120"/>
+          </a:xfrm>
+          <a:prstGeom prst="rect">
+            <a:avLst/>
+          </a:prstGeom>
+          <a:solidFill>
+            <a:srgbClr val="1A3A6B"/>
+          </a:solidFill>
+          <a:ln>
+            <a:noFill/>
+          </a:ln>
+          <a:effectLst/>
+        </p:spPr>
+        <p:style>
+          <a:lnRef idx="1">
+            <a:schemeClr val="accent1"/>
+          </a:lnRef>
+          <a:fillRef idx="3">
+            <a:schemeClr val="accent1"/>
+          </a:fillRef>
+          <a:effectRef idx="2">
+            <a:schemeClr val="accent1"/>
+          </a:effectRef>
+          <a:fontRef idx="minor">
+            <a:schemeClr val="lt1"/>
+          </a:fontRef>
+        </p:style>
+        <p:txBody>
+          <a:bodyPr rtlCol="0" anchor="ctr"/>
+          <a:lstStyle/>
+          <a:p>
+            <a:pPr algn="ctr"/>
+          </a:p>
+        </p:txBody>
+      </p:sp>
+      <p:sp>
+        <p:nvSpPr>
+          <p:cNvPr id="19" name="TextBox 18"/>
+          <p:cNvSpPr txBox="1"/>
+          <p:nvPr/>
+        </p:nvSpPr>
+        <p:spPr>
+          <a:xfrm>
+            <a:off x="502920" y="4800600"/>
+            <a:ext cx="1920240" cy="502920"/>
+          </a:xfrm>
+          <a:prstGeom prst="rect">
+            <a:avLst/>
+          </a:prstGeom>
+          <a:noFill/>
+        </p:spPr>
+        <p:txBody>
+          <a:bodyPr wrap="square" lIns="36576" rIns="36576" tIns="18288" bIns="18288" anchor="t">
+            <a:spAutoFit/>
+          </a:bodyPr>
+          <a:lstStyle/>
+          <a:p>
+            <a:pPr algn="ctr">
+              <a:lnSpc>
+                <a:spcPct val="115000"/>
+              </a:lnSpc>
+            </a:pPr>
+            <a:r>
+              <a:rPr sz="1800" b="1" i="0">
+                <a:solidFill>
+                  <a:srgbClr val="FFFFFF"/>
+                </a:solidFill>
+                <a:latin typeface="Helvetica"/>
+              </a:rPr>
+              <a:t>ALLOCATE</a:t>
+            </a:r>
+          </a:p>
+        </p:txBody>
+      </p:sp>
+      <p:sp>
+        <p:nvSpPr>
+          <p:cNvPr id="20" name="TextBox 19"/>
+          <p:cNvSpPr txBox="1"/>
+          <p:nvPr/>
+        </p:nvSpPr>
+        <p:spPr>
+          <a:xfrm>
+            <a:off x="2606040" y="4617720"/>
+            <a:ext cx="9098280" cy="457200"/>
+          </a:xfrm>
+          <a:prstGeom prst="rect">
+            <a:avLst/>
+          </a:prstGeom>
+          <a:noFill/>
+        </p:spPr>
+        <p:txBody>
+          <a:bodyPr wrap="square" lIns="36576" rIns="36576" tIns="18288" bIns="18288" anchor="t">
+            <a:spAutoFit/>
+          </a:bodyPr>
+          <a:lstStyle/>
+          <a:p>
+            <a:pPr algn="l">
+              <a:lnSpc>
+                <a:spcPct val="112000"/>
+              </a:lnSpc>
+            </a:pPr>
+            <a:r>
+              <a:rPr sz="1400" b="1" i="0">
+                <a:solidFill>
+                  <a:srgbClr val="1A3A6B"/>
+                </a:solidFill>
+                <a:latin typeface="Helvetica"/>
+              </a:rPr>
+              <a:t>time at the next Science Committee for the structural-framework vote (FA9 + FA8 rename + FA reframes)</a:t>
+            </a:r>
+          </a:p>
+        </p:txBody>
+      </p:sp>
+      <p:sp>
+        <p:nvSpPr>
+          <p:cNvPr id="21" name="TextBox 20"/>
+          <p:cNvSpPr txBox="1"/>
+          <p:nvPr/>
+        </p:nvSpPr>
+        <p:spPr>
+          <a:xfrm>
+            <a:off x="2606040" y="5074920"/>
+            <a:ext cx="9098280" cy="502920"/>
+          </a:xfrm>
+          <a:prstGeom prst="rect">
+            <a:avLst/>
+          </a:prstGeom>
+          <a:noFill/>
+        </p:spPr>
+        <p:txBody>
+          <a:bodyPr wrap="square" lIns="36576" rIns="36576" tIns="18288" bIns="18288" anchor="t">
+            <a:spAutoFit/>
+          </a:bodyPr>
+          <a:lstStyle/>
+          <a:p>
+            <a:pPr algn="l">
+              <a:lnSpc>
+                <a:spcPct val="125000"/>
+              </a:lnSpc>
+            </a:pPr>
+            <a:r>
+              <a:rPr sz="1150" b="0" i="1">
+                <a:solidFill>
+                  <a:srgbClr val="333333"/>
+                </a:solidFill>
+                <a:latin typeface="Georgia"/>
+              </a:rPr>
+              <a:t>These three structural decisions are the WG-1 deliverable; they should be settled before the other four WGs' Top-3 are finalized.</a:t>
+            </a:r>
+          </a:p>
+        </p:txBody>
+      </p:sp>
+      <p:sp>
+        <p:nvSpPr>
+          <p:cNvPr id="22" name="Rectangle 21"/>
+          <p:cNvSpPr/>
+          <p:nvPr/>
+        </p:nvSpPr>
+        <p:spPr>
+          <a:xfrm>
+            <a:off x="502920" y="5760720"/>
+            <a:ext cx="11201400" cy="594360"/>
+          </a:xfrm>
+          <a:prstGeom prst="rect">
+            <a:avLst/>
+          </a:prstGeom>
+          <a:solidFill>
+            <a:srgbClr val="1A3A6B"/>
+          </a:solidFill>
+          <a:ln>
+            <a:noFill/>
+          </a:ln>
+          <a:effectLst/>
+        </p:spPr>
+        <p:style>
+          <a:lnRef idx="1">
+            <a:schemeClr val="accent1"/>
+          </a:lnRef>
+          <a:fillRef idx="3">
+            <a:schemeClr val="accent1"/>
+          </a:fillRef>
+          <a:effectRef idx="2">
+            <a:schemeClr val="accent1"/>
+          </a:effectRef>
+          <a:fontRef idx="minor">
+            <a:schemeClr val="lt1"/>
+          </a:fontRef>
+        </p:style>
+        <p:txBody>
+          <a:bodyPr rtlCol="0" anchor="ctr"/>
+          <a:lstStyle/>
+          <a:p>
+            <a:pPr algn="ctr"/>
+          </a:p>
+        </p:txBody>
+      </p:sp>
+      <p:sp>
+        <p:nvSpPr>
+          <p:cNvPr id="23" name="TextBox 22"/>
+          <p:cNvSpPr txBox="1"/>
+          <p:nvPr/>
+        </p:nvSpPr>
+        <p:spPr>
+          <a:xfrm>
+            <a:off x="685800" y="5815584"/>
+            <a:ext cx="10835640" cy="502920"/>
+          </a:xfrm>
+          <a:prstGeom prst="rect">
+            <a:avLst/>
+          </a:prstGeom>
+          <a:noFill/>
+        </p:spPr>
+        <p:txBody>
+          <a:bodyPr wrap="square" lIns="36576" rIns="36576" tIns="18288" bIns="18288" anchor="t">
+            <a:spAutoFit/>
+          </a:bodyPr>
+          <a:lstStyle/>
+          <a:p>
+            <a:pPr algn="ctr">
+              <a:lnSpc>
+                <a:spcPct val="115000"/>
+              </a:lnSpc>
+            </a:pPr>
+            <a:r>
+              <a:rPr sz="1250" b="1" i="1">
+                <a:solidFill>
+                  <a:srgbClr val="FFFFFF"/>
+                </a:solidFill>
+                <a:latin typeface="Helvetica"/>
+              </a:rPr>
+              <a:t>Thank you. We look forward to the Committee's discussion.   —  Jordan Smoller &amp; Melissa Haendel, WG-1 Co-leads</a:t>
+            </a:r>
+          </a:p>
+        </p:txBody>
+      </p:sp>
+      <p:sp>
+        <p:nvSpPr>
+          <p:cNvPr id="24" name="TextBox 23"/>
+          <p:cNvSpPr txBox="1"/>
+          <p:nvPr/>
+        </p:nvSpPr>
+        <p:spPr>
+          <a:xfrm>
+            <a:off x="457200" y="6492240"/>
+            <a:ext cx="7315200" cy="274320"/>
+          </a:xfrm>
+          <a:prstGeom prst="rect">
+            <a:avLst/>
+          </a:prstGeom>
+          <a:noFill/>
+        </p:spPr>
+        <p:txBody>
+          <a:bodyPr wrap="square" lIns="36576" rIns="36576" tIns="18288" bIns="18288" anchor="t">
+            <a:spAutoFit/>
+          </a:bodyPr>
+          <a:lstStyle/>
+          <a:p>
+            <a:pPr algn="l">
+              <a:lnSpc>
+                <a:spcPct val="115000"/>
+              </a:lnSpc>
+            </a:pPr>
+            <a:r>
+              <a:rPr sz="850" b="0" i="1">
+                <a:solidFill>
+                  <a:srgbClr val="666666"/>
+                </a:solidFill>
+                <a:latin typeface="Georgia"/>
+              </a:rPr>
+              <a:t>All of Us Scientific Roadmap Refresh  •  WG-1 Draft  •  Smoller &amp; Haendel  •  2026-06-02</a:t>
+            </a:r>
+          </a:p>
+        </p:txBody>
+      </p:sp>
+      <p:sp>
+        <p:nvSpPr>
+          <p:cNvPr id="25" name="TextBox 24"/>
+          <p:cNvSpPr txBox="1"/>
+          <p:nvPr/>
+        </p:nvSpPr>
+        <p:spPr>
+          <a:xfrm>
+            <a:off x="10515600" y="6492240"/>
+            <a:ext cx="1188720" cy="274320"/>
+          </a:xfrm>
+          <a:prstGeom prst="rect">
+            <a:avLst/>
+          </a:prstGeom>
+          <a:noFill/>
+        </p:spPr>
+        <p:txBody>
+          <a:bodyPr wrap="square" lIns="36576" rIns="36576" tIns="18288" bIns="18288" anchor="t">
+            <a:spAutoFit/>
+          </a:bodyPr>
+          <a:lstStyle/>
+          <a:p>
+            <a:pPr algn="r">
+              <a:lnSpc>
+                <a:spcPct val="115000"/>
+              </a:lnSpc>
+            </a:pPr>
+            <a:r>
+              <a:rPr sz="850" b="0" i="1">
+                <a:solidFill>
+                  <a:srgbClr val="666666"/>
+                </a:solidFill>
+                <a:latin typeface="Georgia"/>
+              </a:rPr>
+              <a:t>20 / 20</a:t>
             </a:r>
           </a:p>
         </p:txBody>
@@ -15635,7 +16897,7 @@
                 </a:solidFill>
                 <a:latin typeface="Georgia"/>
               </a:rPr>
-              <a:t>structural framework gaps, emerging research themes, and demand-supply mismatches across the 8 focus areas.</a:t>
+              <a:t>structural framework gaps and demand-supply mismatches — plus an open-discovery horizon scan of 294k preprints + 423k NIH grants to surface emerging white-space AoU hasn't yet claimed (slide 12).</a:t>
             </a:r>
           </a:p>
         </p:txBody>
@@ -15845,7 +17107,7 @@
                 </a:solidFill>
                 <a:latin typeface="Georgia"/>
               </a:rPr>
-              <a:t>3 / 19</a:t>
+              <a:t>3 / 20</a:t>
             </a:r>
           </a:p>
         </p:txBody>
@@ -17579,7 +18841,7 @@
                 </a:solidFill>
                 <a:latin typeface="Georgia"/>
               </a:rPr>
-              <a:t>4 / 19</a:t>
+              <a:t>4 / 20</a:t>
             </a:r>
           </a:p>
         </p:txBody>
@@ -21056,7 +22318,7 @@
                 </a:solidFill>
                 <a:latin typeface="Georgia"/>
               </a:rPr>
-              <a:t>5 / 19</a:t>
+              <a:t>5 / 20</a:t>
             </a:r>
           </a:p>
         </p:txBody>
@@ -22267,7 +23529,7 @@
                 </a:solidFill>
                 <a:latin typeface="Georgia"/>
               </a:rPr>
-              <a:t>6 / 19</a:t>
+              <a:t>6 / 20</a:t>
             </a:r>
           </a:p>
         </p:txBody>
@@ -23513,7 +24775,7 @@
                 </a:solidFill>
                 <a:latin typeface="Georgia"/>
               </a:rPr>
-              <a:t>7 / 19</a:t>
+              <a:t>7 / 20</a:t>
             </a:r>
           </a:p>
         </p:txBody>
@@ -24759,7 +26021,7 @@
                 </a:solidFill>
                 <a:latin typeface="Georgia"/>
               </a:rPr>
-              <a:t>8 / 19</a:t>
+              <a:t>8 / 20</a:t>
             </a:r>
           </a:p>
         </p:txBody>
@@ -25417,7 +26679,7 @@
                 </a:solidFill>
                 <a:latin typeface="Georgia"/>
               </a:rPr>
-              <a:t>9 / 19</a:t>
+              <a:t>9 / 20</a:t>
             </a:r>
           </a:p>
         </p:txBody>

--- a/resources/deliverables/AoU_Roadmap_Refresh_Draft_Deck.pptx
+++ b/resources/deliverables/AoU_Roadmap_Refresh_Draft_Deck.pptx
@@ -25,6 +25,7 @@
     <p:sldId id="273" r:id="rId25"/>
     <p:sldId id="274" r:id="rId26"/>
     <p:sldId id="275" r:id="rId27"/>
+    <p:sldId id="276" r:id="rId28"/>
   </p:sldIdLst>
   <p:sldSz cx="12191695" cy="6858000" type="screen4x3"/>
   <p:notesSz cx="6858000" cy="9144000"/>
@@ -1303,7 +1304,7 @@
               <a:rPr sz="1000">
                 <a:latin typeface="Helvetica"/>
               </a:rPr>
-              <a:t>Source: phase4-recommendations/wg5_communications.md.</a:t>
+              <a:t>Source: rw-analysis/ (part1_capability_gaps.md, part2_trending_methods.md, part3_recommended_tools.md, baa_llm_egress_evidence.md).</a:t>
             </a:r>
           </a:p>
           <a:p>
@@ -1311,7 +1312,7 @@
               <a:rPr sz="1000">
                 <a:latin typeface="Helvetica"/>
               </a:rPr>
-              <a:t>Rec 1 (3.57): Impact Report v1 within 12 months. WG-2 defines metrics; WG-5 produces the report. NIH precedent: BD2K, BRAIN Initiative, Cancer Moonshot all publish annual impact products.</a:t>
+              <a:t>METHOD + CITATION INTEGRITY: AoU RW benchmarked across 8 dimensions vs N3C, Terra/AnVIL, BioData Catalyst, UKB-RAP, Kids First. Every claim carries a URL + verbatim quote that was re-fetched and confirmed on-page; 87/87 citations verified (audit trail in citations_verified.csv). Unverifiable claims were dropped.</a:t>
             </a:r>
           </a:p>
           <a:p>
@@ -1319,7 +1320,7 @@
               <a:rPr sz="1000">
                 <a:latin typeface="Helvetica"/>
               </a:rPr>
-              <a:t>Rec 2 (3.60): the four-strength narrative is the MOST EVIDENCE-DRIVEN recommendation in any WG — peer-index numbers are precise from the corpus analysis. Distinctive ≠ growing; the headline rests on these four genuine over-indexes. Dermatology 6.9× over-index is an artifact (rehearsed answer required).</a:t>
+              <a:t>GAPS (verified): (1) reuse registry — AoU has workspace sharing only; Dockstore (Terra/AnVIL), BDC public apps, Cavatica publish-your-own, N3C branching/GitHub export all exceed it; corroborated by Part 2 workspace data (85.8% solo, 3.7% multi-institution, ~20% duplicate-title clones). (2) governed LLM — RW 2.0 ships Claude Code + Gemini CLI but BYO-key, so not usable on participant data; LLM/RAG/agentic ~0% in workspaces. (3) portability — no CWL/WDL/DRS analysis packaging.</a:t>
             </a:r>
           </a:p>
           <a:p>
@@ -1327,7 +1328,15 @@
               <a:rPr sz="1000">
                 <a:latin typeface="Helvetica"/>
               </a:rPr>
-              <a:t>Rec 3 (3.60): the 21 per-IC briefs in aou-ic-alignment/per_ic_briefs/ are mostly drafted. Productize them rather than rebuilding.</a:t>
+              <a:t>KEY BAA POINT: the constraint on an in-environment LLM is NOT a missing BAA — Google Cloud's BAA already covers Vertex AI/Gemini, so an in-VPC model keeps data in-boundary. The gap is that AoU hasn't provisioned a governed in-VPC model; the BYO-key CLIs run under the user's own terms. See baa_llm_egress_evidence.md.</a:t>
+            </a:r>
+          </a:p>
+          <a:p>
+            <a:r>
+              <a:rPr sz="1000">
+                <a:latin typeface="Helvetica"/>
+              </a:rPr>
+              <a:t>AoU STRENGTHS (so the gaps are credible): data assets and GPU/AI compute are best-in-set; notebooks, OMOP, closed-tier security at parity. The deficiencies are platform-capability, not data.</a:t>
             </a:r>
           </a:p>
         </p:txBody>
@@ -1400,7 +1409,7 @@
               <a:rPr sz="1000">
                 <a:latin typeface="Helvetica"/>
               </a:rPr>
-              <a:t>Source: phase4-recommendations/cross_cutting_synthesis.md §1.</a:t>
+              <a:t>Source: phase4-recommendations/wg5_communications.md.</a:t>
             </a:r>
           </a:p>
           <a:p>
@@ -1408,7 +1417,7 @@
               <a:rPr sz="1000">
                 <a:latin typeface="Helvetica"/>
               </a:rPr>
-              <a:t>The five interlocks should be in the Sci Com's awareness because they determine whether the WGs ship semi-aligned outputs that compete or genuinely-aligned outputs that compound.</a:t>
+              <a:t>Rec 1 (3.57): Impact Report v1 within 12 months. WG-2 defines metrics; WG-5 produces the report. NIH precedent: BD2K, BRAIN Initiative, Cancer Moonshot all publish annual impact products.</a:t>
             </a:r>
           </a:p>
           <a:p>
@@ -1416,7 +1425,15 @@
               <a:rPr sz="1000">
                 <a:latin typeface="Helvetica"/>
               </a:rPr>
-              <a:t>CC-5 (Aging/ADRD) is a flag because no Top-3 currently owns it. AoU is at 6.0% post-2023 (≈peer median, index 0.84×) and growing (+4.7), but still trailing UKB's +6.9 surge in the lecanemab/donanemab era. Structural advantage (EHR + UBR diversity); the gap is narrowing rather than flat, so this is now a weaker-evidence flag than in the prior draft. NIA engagement workstream is the natural answer; outside any current Top-3.</a:t>
+              <a:t>Rec 2 (3.60): the four-strength narrative is the MOST EVIDENCE-DRIVEN recommendation in any WG — peer-index numbers are precise from the corpus analysis. Distinctive ≠ growing; the headline rests on these four genuine over-indexes. Dermatology 6.9× over-index is an artifact (rehearsed answer required).</a:t>
+            </a:r>
+          </a:p>
+          <a:p>
+            <a:r>
+              <a:rPr sz="1000">
+                <a:latin typeface="Helvetica"/>
+              </a:rPr>
+              <a:t>Rec 3 (3.60): the 21 per-IC briefs in aou-ic-alignment/per_ic_briefs/ are mostly drafted. Productize them rather than rebuilding.</a:t>
             </a:r>
           </a:p>
         </p:txBody>
@@ -1489,7 +1506,7 @@
               <a:rPr sz="1000">
                 <a:latin typeface="Helvetica"/>
               </a:rPr>
-              <a:t>Source: aou-research-landscape/README.md; peer-biobanks/emerging_themes.md §caveats; phase4-recommendations/README.md.</a:t>
+              <a:t>Source: phase4-recommendations/cross_cutting_synthesis.md §1.</a:t>
             </a:r>
           </a:p>
           <a:p>
@@ -1497,7 +1514,7 @@
               <a:rPr sz="1000">
                 <a:latin typeface="Helvetica"/>
               </a:rPr>
-              <a:t>The dermatology caveat is NON-NEGOTIABLE to include — if Sci Com or external audiences see 'dermatology peer-index 6.9×' without context, they may push to elevate dermatology, which would mislead the Roadmap. Phase 1 README flagged the 1-2-prolific-groups origin; Phase 3b temporal trends show declining share.</a:t>
+              <a:t>The five interlocks should be in the Sci Com's awareness because they determine whether the WGs ship semi-aligned outputs that compete or genuinely-aligned outputs that compound.</a:t>
             </a:r>
           </a:p>
           <a:p>
@@ -1505,15 +1522,7 @@
               <a:rPr sz="1000">
                 <a:latin typeface="Helvetica"/>
               </a:rPr>
-              <a:t>The peer-biobank fallback caveat protects against over-reading single-peer trend differentials. The static share index is what we ranked recommendations on.</a:t>
-            </a:r>
-          </a:p>
-          <a:p>
-            <a:r>
-              <a:rPr sz="1000">
-                <a:latin typeface="Helvetica"/>
-              </a:rPr>
-              <a:t>The pre-2023 baseline caveat is why we don't use AoU-internal pre/post trends as the headline growth metric — we use the peer-comparative gap analysis instead.</a:t>
+              <a:t>CC-5 (Aging/ADRD) is a flag because no Top-3 currently owns it. AoU is at 6.0% post-2023 (≈peer median, index 0.84×) and growing (+4.7), but still trailing UKB's +6.9 surge in the lecanemab/donanemab era. Structural advantage (EHR + UBR diversity); the gap is narrowing rather than flat, so this is now a weaker-evidence flag than in the prior draft. NIA engagement workstream is the natural answer; outside any current Top-3.</a:t>
             </a:r>
           </a:p>
         </p:txBody>
@@ -1628,6 +1637,103 @@
 </file>
 
 <file path=ppt/notesSlides/notesSlide20.xml><?xml version="1.0" encoding="utf-8"?>
+<p:notes xmlns:a="http://schemas.openxmlformats.org/drawingml/2006/main" xmlns:p="http://schemas.openxmlformats.org/presentationml/2006/main" xmlns:r="http://schemas.openxmlformats.org/officeDocument/2006/relationships">
+  <p:cSld>
+    <p:spTree>
+      <p:nvGrpSpPr>
+        <p:cNvPr id="1" name=""/>
+        <p:cNvGrpSpPr/>
+        <p:nvPr/>
+      </p:nvGrpSpPr>
+      <p:grpSpPr>
+        <a:xfrm>
+          <a:off x="0" y="0"/>
+          <a:ext cx="0" cy="0"/>
+          <a:chOff x="0" y="0"/>
+          <a:chExt cx="0" cy="0"/>
+        </a:xfrm>
+      </p:grpSpPr>
+      <p:sp>
+        <p:nvSpPr>
+          <p:cNvPr id="2" name="Slide Image Placeholder 1"/>
+          <p:cNvSpPr>
+            <a:spLocks noGrp="1"/>
+          </p:cNvSpPr>
+          <p:nvPr>
+            <p:ph type="sldImg" idx="2"/>
+          </p:nvPr>
+        </p:nvSpPr>
+        <p:spPr/>
+      </p:sp>
+      <p:sp>
+        <p:nvSpPr>
+          <p:cNvPr id="3" name="Notes Placeholder 2"/>
+          <p:cNvSpPr>
+            <a:spLocks noGrp="1"/>
+          </p:cNvSpPr>
+          <p:nvPr>
+            <p:ph type="body" idx="3" sz="quarter"/>
+          </p:nvPr>
+        </p:nvSpPr>
+        <p:spPr/>
+        <p:txBody>
+          <a:bodyPr/>
+          <a:lstStyle/>
+          <a:p>
+            <a:r>
+              <a:rPr sz="1000">
+                <a:latin typeface="Helvetica"/>
+              </a:rPr>
+              <a:t>Source: aou-research-landscape/README.md; peer-biobanks/emerging_themes.md §caveats; phase4-recommendations/README.md.</a:t>
+            </a:r>
+          </a:p>
+          <a:p>
+            <a:r>
+              <a:rPr sz="1000">
+                <a:latin typeface="Helvetica"/>
+              </a:rPr>
+              <a:t>The dermatology caveat is NON-NEGOTIABLE to include — if Sci Com or external audiences see 'dermatology peer-index 6.9×' without context, they may push to elevate dermatology, which would mislead the Roadmap. Phase 1 README flagged the 1-2-prolific-groups origin; Phase 3b temporal trends show declining share.</a:t>
+            </a:r>
+          </a:p>
+          <a:p>
+            <a:r>
+              <a:rPr sz="1000">
+                <a:latin typeface="Helvetica"/>
+              </a:rPr>
+              <a:t>The peer-biobank fallback caveat protects against over-reading single-peer trend differentials. The static share index is what we ranked recommendations on.</a:t>
+            </a:r>
+          </a:p>
+          <a:p>
+            <a:r>
+              <a:rPr sz="1000">
+                <a:latin typeface="Helvetica"/>
+              </a:rPr>
+              <a:t>The pre-2023 baseline caveat is why we don't use AoU-internal pre/post trends as the headline growth metric — we use the peer-comparative gap analysis instead.</a:t>
+            </a:r>
+          </a:p>
+        </p:txBody>
+      </p:sp>
+      <p:sp>
+        <p:nvSpPr>
+          <p:cNvPr id="4" name="Slide Number Placeholder 3"/>
+          <p:cNvSpPr>
+            <a:spLocks noGrp="1"/>
+          </p:cNvSpPr>
+          <p:nvPr>
+            <p:ph type="sldNum" idx="5" sz="quarter"/>
+          </p:nvPr>
+        </p:nvSpPr>
+        <p:spPr/>
+      </p:sp>
+    </p:spTree>
+  </p:cSld>
+  <p:clrMapOvr>
+    <a:masterClrMapping/>
+  </p:clrMapOvr>
+</p:notes>
+</file>
+
+<file path=ppt/notesSlides/notesSlide21.xml><?xml version="1.0" encoding="utf-8"?>
 <p:notes xmlns:a="http://schemas.openxmlformats.org/drawingml/2006/main" xmlns:p="http://schemas.openxmlformats.org/presentationml/2006/main" xmlns:r="http://schemas.openxmlformats.org/officeDocument/2006/relationships">
   <p:cSld>
     <p:spTree>
@@ -7129,7 +7235,7 @@
                 </a:solidFill>
                 <a:latin typeface="Georgia"/>
               </a:rPr>
-              <a:t>10 / 20</a:t>
+              <a:t>10 / 21</a:t>
             </a:r>
           </a:p>
         </p:txBody>
@@ -7641,7 +7747,7 @@
                 </a:solidFill>
                 <a:latin typeface="Georgia"/>
               </a:rPr>
-              <a:t>11 / 20</a:t>
+              <a:t>11 / 21</a:t>
             </a:r>
           </a:p>
         </p:txBody>
@@ -8797,7 +8903,7 @@
                 </a:solidFill>
                 <a:latin typeface="Georgia"/>
               </a:rPr>
-              <a:t>12 / 20</a:t>
+              <a:t>12 / 21</a:t>
             </a:r>
           </a:p>
         </p:txBody>
@@ -9680,7 +9786,7 @@
                 </a:solidFill>
                 <a:latin typeface="Georgia"/>
               </a:rPr>
-              <a:t>13 / 20</a:t>
+              <a:t>13 / 21</a:t>
             </a:r>
           </a:p>
         </p:txBody>
@@ -10431,7 +10537,7 @@
                 </a:solidFill>
                 <a:latin typeface="Georgia"/>
               </a:rPr>
-              <a:t>14 / 20</a:t>
+              <a:t>14 / 21</a:t>
             </a:r>
           </a:p>
         </p:txBody>
@@ -11182,7 +11288,7 @@
                 </a:solidFill>
                 <a:latin typeface="Georgia"/>
               </a:rPr>
-              <a:t>15 / 20</a:t>
+              <a:t>15 / 21</a:t>
             </a:r>
           </a:p>
         </p:txBody>
@@ -11933,7 +12039,7 @@
                 </a:solidFill>
                 <a:latin typeface="Georgia"/>
               </a:rPr>
-              <a:t>16 / 20</a:t>
+              <a:t>16 / 21</a:t>
             </a:r>
           </a:p>
         </p:txBody>
@@ -11947,6 +12053,1129 @@
 </file>
 
 <file path=ppt/slides/slide17.xml><?xml version="1.0" encoding="utf-8"?>
+<p:sld xmlns:a="http://schemas.openxmlformats.org/drawingml/2006/main" xmlns:p="http://schemas.openxmlformats.org/presentationml/2006/main" xmlns:r="http://schemas.openxmlformats.org/officeDocument/2006/relationships">
+  <p:cSld>
+    <p:spTree>
+      <p:nvGrpSpPr>
+        <p:cNvPr id="1" name=""/>
+        <p:cNvGrpSpPr/>
+        <p:nvPr/>
+      </p:nvGrpSpPr>
+      <p:grpSpPr/>
+      <p:sp>
+        <p:nvSpPr>
+          <p:cNvPr id="2" name="Rectangle 1"/>
+          <p:cNvSpPr/>
+          <p:nvPr/>
+        </p:nvSpPr>
+        <p:spPr>
+          <a:xfrm>
+            <a:off x="0" y="0"/>
+            <a:ext cx="12191695" cy="73152"/>
+          </a:xfrm>
+          <a:prstGeom prst="rect">
+            <a:avLst/>
+          </a:prstGeom>
+          <a:solidFill>
+            <a:srgbClr val="1A3A6B"/>
+          </a:solidFill>
+          <a:ln>
+            <a:noFill/>
+          </a:ln>
+          <a:effectLst/>
+        </p:spPr>
+        <p:style>
+          <a:lnRef idx="1">
+            <a:schemeClr val="accent1"/>
+          </a:lnRef>
+          <a:fillRef idx="3">
+            <a:schemeClr val="accent1"/>
+          </a:fillRef>
+          <a:effectRef idx="2">
+            <a:schemeClr val="accent1"/>
+          </a:effectRef>
+          <a:fontRef idx="minor">
+            <a:schemeClr val="lt1"/>
+          </a:fontRef>
+        </p:style>
+        <p:txBody>
+          <a:bodyPr rtlCol="0" anchor="ctr"/>
+          <a:lstStyle/>
+          <a:p>
+            <a:pPr algn="ctr"/>
+          </a:p>
+        </p:txBody>
+      </p:sp>
+      <p:sp>
+        <p:nvSpPr>
+          <p:cNvPr id="3" name="TextBox 2"/>
+          <p:cNvSpPr txBox="1"/>
+          <p:nvPr/>
+        </p:nvSpPr>
+        <p:spPr>
+          <a:xfrm>
+            <a:off x="457200" y="164592"/>
+            <a:ext cx="11247120" cy="502920"/>
+          </a:xfrm>
+          <a:prstGeom prst="rect">
+            <a:avLst/>
+          </a:prstGeom>
+          <a:noFill/>
+        </p:spPr>
+        <p:txBody>
+          <a:bodyPr wrap="square" lIns="36576" rIns="36576" tIns="18288" bIns="18288" anchor="t">
+            <a:spAutoFit/>
+          </a:bodyPr>
+          <a:lstStyle/>
+          <a:p>
+            <a:pPr algn="l">
+              <a:lnSpc>
+                <a:spcPct val="105000"/>
+              </a:lnSpc>
+            </a:pPr>
+            <a:r>
+              <a:rPr sz="2200" b="1" i="0">
+                <a:solidFill>
+                  <a:srgbClr val="1A3A6B"/>
+                </a:solidFill>
+                <a:latin typeface="Helvetica"/>
+              </a:rPr>
+              <a:t>Researcher Workbench: capability gaps vs comparators, and what to build</a:t>
+            </a:r>
+          </a:p>
+        </p:txBody>
+      </p:sp>
+      <p:sp>
+        <p:nvSpPr>
+          <p:cNvPr id="4" name="TextBox 3"/>
+          <p:cNvSpPr txBox="1"/>
+          <p:nvPr/>
+        </p:nvSpPr>
+        <p:spPr>
+          <a:xfrm>
+            <a:off x="457200" y="685800"/>
+            <a:ext cx="11247120" cy="292608"/>
+          </a:xfrm>
+          <a:prstGeom prst="rect">
+            <a:avLst/>
+          </a:prstGeom>
+          <a:noFill/>
+        </p:spPr>
+        <p:txBody>
+          <a:bodyPr wrap="square" lIns="36576" rIns="36576" tIns="18288" bIns="18288" anchor="t">
+            <a:spAutoFit/>
+          </a:bodyPr>
+          <a:lstStyle/>
+          <a:p>
+            <a:pPr algn="l">
+              <a:lnSpc>
+                <a:spcPct val="110000"/>
+              </a:lnSpc>
+            </a:pPr>
+            <a:r>
+              <a:rPr sz="1200" b="0" i="1">
+                <a:solidFill>
+                  <a:srgbClr val="666666"/>
+                </a:solidFill>
+                <a:latin typeface="Georgia"/>
+              </a:rPr>
+              <a:t>Benchmarked vs N3C, Terra/AnVIL, BioData Catalyst, UKB-RAP, Kids First. AoU leads on data &amp; GPU; gaps are in reuse, governed AI, and portability. 87/87 citations source-verified.</a:t>
+            </a:r>
+          </a:p>
+        </p:txBody>
+      </p:sp>
+      <p:sp>
+        <p:nvSpPr>
+          <p:cNvPr id="5" name="Rectangle 4"/>
+          <p:cNvSpPr/>
+          <p:nvPr/>
+        </p:nvSpPr>
+        <p:spPr>
+          <a:xfrm>
+            <a:off x="457200" y="1005840"/>
+            <a:ext cx="11247120" cy="9525"/>
+          </a:xfrm>
+          <a:prstGeom prst="rect">
+            <a:avLst/>
+          </a:prstGeom>
+          <a:solidFill>
+            <a:srgbClr val="C8C8C8"/>
+          </a:solidFill>
+          <a:ln>
+            <a:noFill/>
+          </a:ln>
+          <a:effectLst/>
+        </p:spPr>
+        <p:style>
+          <a:lnRef idx="1">
+            <a:schemeClr val="accent1"/>
+          </a:lnRef>
+          <a:fillRef idx="3">
+            <a:schemeClr val="accent1"/>
+          </a:fillRef>
+          <a:effectRef idx="2">
+            <a:schemeClr val="accent1"/>
+          </a:effectRef>
+          <a:fontRef idx="minor">
+            <a:schemeClr val="lt1"/>
+          </a:fontRef>
+        </p:style>
+        <p:txBody>
+          <a:bodyPr rtlCol="0" anchor="ctr"/>
+          <a:lstStyle/>
+          <a:p>
+            <a:pPr algn="ctr"/>
+          </a:p>
+        </p:txBody>
+      </p:sp>
+      <p:sp>
+        <p:nvSpPr>
+          <p:cNvPr id="6" name="TextBox 5"/>
+          <p:cNvSpPr txBox="1"/>
+          <p:nvPr/>
+        </p:nvSpPr>
+        <p:spPr>
+          <a:xfrm>
+            <a:off x="502920" y="1188720"/>
+            <a:ext cx="5486400" cy="320040"/>
+          </a:xfrm>
+          <a:prstGeom prst="rect">
+            <a:avLst/>
+          </a:prstGeom>
+          <a:noFill/>
+        </p:spPr>
+        <p:txBody>
+          <a:bodyPr wrap="square" lIns="36576" rIns="36576" tIns="18288" bIns="18288" anchor="t">
+            <a:spAutoFit/>
+          </a:bodyPr>
+          <a:lstStyle/>
+          <a:p>
+            <a:pPr algn="l">
+              <a:lnSpc>
+                <a:spcPct val="115000"/>
+              </a:lnSpc>
+            </a:pPr>
+            <a:r>
+              <a:rPr sz="1300" b="1" i="0">
+                <a:solidFill>
+                  <a:srgbClr val="1A3A6B"/>
+                </a:solidFill>
+                <a:latin typeface="Helvetica"/>
+              </a:rPr>
+              <a:t>Verified gaps (where every comparator exceeds AoU)</a:t>
+            </a:r>
+          </a:p>
+        </p:txBody>
+      </p:sp>
+      <p:sp>
+        <p:nvSpPr>
+          <p:cNvPr id="7" name="Rectangle 6"/>
+          <p:cNvSpPr/>
+          <p:nvPr/>
+        </p:nvSpPr>
+        <p:spPr>
+          <a:xfrm>
+            <a:off x="502920" y="1554480"/>
+            <a:ext cx="5486400" cy="1325880"/>
+          </a:xfrm>
+          <a:prstGeom prst="rect">
+            <a:avLst/>
+          </a:prstGeom>
+          <a:solidFill>
+            <a:srgbClr val="EAF0FA"/>
+          </a:solidFill>
+          <a:ln w="6350">
+            <a:solidFill>
+              <a:srgbClr val="666666"/>
+            </a:solidFill>
+          </a:ln>
+          <a:effectLst/>
+        </p:spPr>
+        <p:style>
+          <a:lnRef idx="1">
+            <a:schemeClr val="accent1"/>
+          </a:lnRef>
+          <a:fillRef idx="3">
+            <a:schemeClr val="accent1"/>
+          </a:fillRef>
+          <a:effectRef idx="2">
+            <a:schemeClr val="accent1"/>
+          </a:effectRef>
+          <a:fontRef idx="minor">
+            <a:schemeClr val="lt1"/>
+          </a:fontRef>
+        </p:style>
+        <p:txBody>
+          <a:bodyPr rtlCol="0" anchor="ctr"/>
+          <a:lstStyle/>
+          <a:p>
+            <a:pPr algn="ctr"/>
+          </a:p>
+        </p:txBody>
+      </p:sp>
+      <p:sp>
+        <p:nvSpPr>
+          <p:cNvPr id="8" name="TextBox 7"/>
+          <p:cNvSpPr txBox="1"/>
+          <p:nvPr/>
+        </p:nvSpPr>
+        <p:spPr>
+          <a:xfrm>
+            <a:off x="640080" y="1627632"/>
+            <a:ext cx="5212080" cy="320040"/>
+          </a:xfrm>
+          <a:prstGeom prst="rect">
+            <a:avLst/>
+          </a:prstGeom>
+          <a:noFill/>
+        </p:spPr>
+        <p:txBody>
+          <a:bodyPr wrap="square" lIns="36576" rIns="36576" tIns="18288" bIns="18288" anchor="t">
+            <a:spAutoFit/>
+          </a:bodyPr>
+          <a:lstStyle/>
+          <a:p>
+            <a:pPr algn="l">
+              <a:lnSpc>
+                <a:spcPct val="115000"/>
+              </a:lnSpc>
+            </a:pPr>
+            <a:r>
+              <a:rPr sz="1150" b="1" i="0">
+                <a:solidFill>
+                  <a:srgbClr val="333333"/>
+                </a:solidFill>
+                <a:latin typeface="Helvetica"/>
+              </a:rPr>
+              <a:t>No shared tool/workflow reuse registry</a:t>
+            </a:r>
+          </a:p>
+        </p:txBody>
+      </p:sp>
+      <p:sp>
+        <p:nvSpPr>
+          <p:cNvPr id="9" name="TextBox 8"/>
+          <p:cNvSpPr txBox="1"/>
+          <p:nvPr/>
+        </p:nvSpPr>
+        <p:spPr>
+          <a:xfrm>
+            <a:off x="640080" y="1965960"/>
+            <a:ext cx="5212080" cy="868680"/>
+          </a:xfrm>
+          <a:prstGeom prst="rect">
+            <a:avLst/>
+          </a:prstGeom>
+          <a:noFill/>
+        </p:spPr>
+        <p:txBody>
+          <a:bodyPr wrap="square" lIns="36576" rIns="36576" tIns="18288" bIns="18288" anchor="t">
+            <a:spAutoFit/>
+          </a:bodyPr>
+          <a:lstStyle/>
+          <a:p>
+            <a:pPr algn="l">
+              <a:lnSpc>
+                <a:spcPct val="112000"/>
+              </a:lnSpc>
+            </a:pPr>
+            <a:r>
+              <a:rPr sz="1000" b="0" i="0">
+                <a:solidFill>
+                  <a:srgbClr val="333333"/>
+                </a:solidFill>
+                <a:latin typeface="Georgia"/>
+              </a:rPr>
+              <a:t>AoU documents workspace sharing only; N3C, Terra (Dockstore), BDC &amp; Kids First all publish reusable apps/workflows. Corroborated: 86% of AoU workspaces are solo, ~20% are tutorial clones.</a:t>
+            </a:r>
+          </a:p>
+        </p:txBody>
+      </p:sp>
+      <p:sp>
+        <p:nvSpPr>
+          <p:cNvPr id="10" name="Rectangle 9"/>
+          <p:cNvSpPr/>
+          <p:nvPr/>
+        </p:nvSpPr>
+        <p:spPr>
+          <a:xfrm>
+            <a:off x="502920" y="2999232"/>
+            <a:ext cx="5486400" cy="1325880"/>
+          </a:xfrm>
+          <a:prstGeom prst="rect">
+            <a:avLst/>
+          </a:prstGeom>
+          <a:solidFill>
+            <a:srgbClr val="EAF0FA"/>
+          </a:solidFill>
+          <a:ln w="6350">
+            <a:solidFill>
+              <a:srgbClr val="666666"/>
+            </a:solidFill>
+          </a:ln>
+          <a:effectLst/>
+        </p:spPr>
+        <p:style>
+          <a:lnRef idx="1">
+            <a:schemeClr val="accent1"/>
+          </a:lnRef>
+          <a:fillRef idx="3">
+            <a:schemeClr val="accent1"/>
+          </a:fillRef>
+          <a:effectRef idx="2">
+            <a:schemeClr val="accent1"/>
+          </a:effectRef>
+          <a:fontRef idx="minor">
+            <a:schemeClr val="lt1"/>
+          </a:fontRef>
+        </p:style>
+        <p:txBody>
+          <a:bodyPr rtlCol="0" anchor="ctr"/>
+          <a:lstStyle/>
+          <a:p>
+            <a:pPr algn="ctr"/>
+          </a:p>
+        </p:txBody>
+      </p:sp>
+      <p:sp>
+        <p:nvSpPr>
+          <p:cNvPr id="11" name="TextBox 10"/>
+          <p:cNvSpPr txBox="1"/>
+          <p:nvPr/>
+        </p:nvSpPr>
+        <p:spPr>
+          <a:xfrm>
+            <a:off x="640080" y="3072384"/>
+            <a:ext cx="5212080" cy="320040"/>
+          </a:xfrm>
+          <a:prstGeom prst="rect">
+            <a:avLst/>
+          </a:prstGeom>
+          <a:noFill/>
+        </p:spPr>
+        <p:txBody>
+          <a:bodyPr wrap="square" lIns="36576" rIns="36576" tIns="18288" bIns="18288" anchor="t">
+            <a:spAutoFit/>
+          </a:bodyPr>
+          <a:lstStyle/>
+          <a:p>
+            <a:pPr algn="l">
+              <a:lnSpc>
+                <a:spcPct val="115000"/>
+              </a:lnSpc>
+            </a:pPr>
+            <a:r>
+              <a:rPr sz="1150" b="1" i="0">
+                <a:solidFill>
+                  <a:srgbClr val="333333"/>
+                </a:solidFill>
+                <a:latin typeface="Helvetica"/>
+              </a:rPr>
+              <a:t>No governed in-environment LLM</a:t>
+            </a:r>
+          </a:p>
+        </p:txBody>
+      </p:sp>
+      <p:sp>
+        <p:nvSpPr>
+          <p:cNvPr id="12" name="TextBox 11"/>
+          <p:cNvSpPr txBox="1"/>
+          <p:nvPr/>
+        </p:nvSpPr>
+        <p:spPr>
+          <a:xfrm>
+            <a:off x="640080" y="3410712"/>
+            <a:ext cx="5212080" cy="868680"/>
+          </a:xfrm>
+          <a:prstGeom prst="rect">
+            <a:avLst/>
+          </a:prstGeom>
+          <a:noFill/>
+        </p:spPr>
+        <p:txBody>
+          <a:bodyPr wrap="square" lIns="36576" rIns="36576" tIns="18288" bIns="18288" anchor="t">
+            <a:spAutoFit/>
+          </a:bodyPr>
+          <a:lstStyle/>
+          <a:p>
+            <a:pPr algn="l">
+              <a:lnSpc>
+                <a:spcPct val="112000"/>
+              </a:lnSpc>
+            </a:pPr>
+            <a:r>
+              <a:rPr sz="1000" b="0" i="0">
+                <a:solidFill>
+                  <a:srgbClr val="333333"/>
+                </a:solidFill>
+                <a:latin typeface="Georgia"/>
+              </a:rPr>
+              <a:t>Only bring-your-own-key Claude Code/Gemini CLI — can't touch participant data. LLM/RAG/agentic use is ~0% in workspaces.</a:t>
+            </a:r>
+          </a:p>
+        </p:txBody>
+      </p:sp>
+      <p:sp>
+        <p:nvSpPr>
+          <p:cNvPr id="13" name="Rectangle 12"/>
+          <p:cNvSpPr/>
+          <p:nvPr/>
+        </p:nvSpPr>
+        <p:spPr>
+          <a:xfrm>
+            <a:off x="502920" y="4443984"/>
+            <a:ext cx="5486400" cy="1325880"/>
+          </a:xfrm>
+          <a:prstGeom prst="rect">
+            <a:avLst/>
+          </a:prstGeom>
+          <a:solidFill>
+            <a:srgbClr val="EAF0FA"/>
+          </a:solidFill>
+          <a:ln w="6350">
+            <a:solidFill>
+              <a:srgbClr val="666666"/>
+            </a:solidFill>
+          </a:ln>
+          <a:effectLst/>
+        </p:spPr>
+        <p:style>
+          <a:lnRef idx="1">
+            <a:schemeClr val="accent1"/>
+          </a:lnRef>
+          <a:fillRef idx="3">
+            <a:schemeClr val="accent1"/>
+          </a:fillRef>
+          <a:effectRef idx="2">
+            <a:schemeClr val="accent1"/>
+          </a:effectRef>
+          <a:fontRef idx="minor">
+            <a:schemeClr val="lt1"/>
+          </a:fontRef>
+        </p:style>
+        <p:txBody>
+          <a:bodyPr rtlCol="0" anchor="ctr"/>
+          <a:lstStyle/>
+          <a:p>
+            <a:pPr algn="ctr"/>
+          </a:p>
+        </p:txBody>
+      </p:sp>
+      <p:sp>
+        <p:nvSpPr>
+          <p:cNvPr id="14" name="TextBox 13"/>
+          <p:cNvSpPr txBox="1"/>
+          <p:nvPr/>
+        </p:nvSpPr>
+        <p:spPr>
+          <a:xfrm>
+            <a:off x="640080" y="4517136"/>
+            <a:ext cx="5212080" cy="320040"/>
+          </a:xfrm>
+          <a:prstGeom prst="rect">
+            <a:avLst/>
+          </a:prstGeom>
+          <a:noFill/>
+        </p:spPr>
+        <p:txBody>
+          <a:bodyPr wrap="square" lIns="36576" rIns="36576" tIns="18288" bIns="18288" anchor="t">
+            <a:spAutoFit/>
+          </a:bodyPr>
+          <a:lstStyle/>
+          <a:p>
+            <a:pPr algn="l">
+              <a:lnSpc>
+                <a:spcPct val="115000"/>
+              </a:lnSpc>
+            </a:pPr>
+            <a:r>
+              <a:rPr sz="1150" b="1" i="0">
+                <a:solidFill>
+                  <a:srgbClr val="333333"/>
+                </a:solidFill>
+                <a:latin typeface="Helvetica"/>
+              </a:rPr>
+              <a:t>No portable-workflow / GA4GH interop</a:t>
+            </a:r>
+          </a:p>
+        </p:txBody>
+      </p:sp>
+      <p:sp>
+        <p:nvSpPr>
+          <p:cNvPr id="15" name="TextBox 14"/>
+          <p:cNvSpPr txBox="1"/>
+          <p:nvPr/>
+        </p:nvSpPr>
+        <p:spPr>
+          <a:xfrm>
+            <a:off x="640080" y="4855464"/>
+            <a:ext cx="5212080" cy="868680"/>
+          </a:xfrm>
+          <a:prstGeom prst="rect">
+            <a:avLst/>
+          </a:prstGeom>
+          <a:noFill/>
+        </p:spPr>
+        <p:txBody>
+          <a:bodyPr wrap="square" lIns="36576" rIns="36576" tIns="18288" bIns="18288" anchor="t">
+            <a:spAutoFit/>
+          </a:bodyPr>
+          <a:lstStyle/>
+          <a:p>
+            <a:pPr algn="l">
+              <a:lnSpc>
+                <a:spcPct val="112000"/>
+              </a:lnSpc>
+            </a:pPr>
+            <a:r>
+              <a:rPr sz="1000" b="0" i="0">
+                <a:solidFill>
+                  <a:srgbClr val="333333"/>
+                </a:solidFill>
+                <a:latin typeface="Georgia"/>
+              </a:rPr>
+              <a:t>Comparators package analyses (CWL/WDL/Nextflow) and exchange via GA4GH DRS; AoU standardizes data (OMOP) but not analyses.</a:t>
+            </a:r>
+          </a:p>
+        </p:txBody>
+      </p:sp>
+      <p:sp>
+        <p:nvSpPr>
+          <p:cNvPr id="16" name="TextBox 15"/>
+          <p:cNvSpPr txBox="1"/>
+          <p:nvPr/>
+        </p:nvSpPr>
+        <p:spPr>
+          <a:xfrm>
+            <a:off x="6263640" y="1188720"/>
+            <a:ext cx="5486400" cy="320040"/>
+          </a:xfrm>
+          <a:prstGeom prst="rect">
+            <a:avLst/>
+          </a:prstGeom>
+          <a:noFill/>
+        </p:spPr>
+        <p:txBody>
+          <a:bodyPr wrap="square" lIns="36576" rIns="36576" tIns="18288" bIns="18288" anchor="t">
+            <a:spAutoFit/>
+          </a:bodyPr>
+          <a:lstStyle/>
+          <a:p>
+            <a:pPr algn="l">
+              <a:lnSpc>
+                <a:spcPct val="115000"/>
+              </a:lnSpc>
+            </a:pPr>
+            <a:r>
+              <a:rPr sz="1300" b="1" i="0">
+                <a:solidFill>
+                  <a:srgbClr val="B35900"/>
+                </a:solidFill>
+                <a:latin typeface="Helvetica"/>
+              </a:rPr>
+              <a:t>Build priorities (“Now” tier)</a:t>
+            </a:r>
+          </a:p>
+        </p:txBody>
+      </p:sp>
+      <p:sp>
+        <p:nvSpPr>
+          <p:cNvPr id="17" name="Rectangle 16"/>
+          <p:cNvSpPr/>
+          <p:nvPr/>
+        </p:nvSpPr>
+        <p:spPr>
+          <a:xfrm>
+            <a:off x="6263640" y="1554480"/>
+            <a:ext cx="5486400" cy="1325880"/>
+          </a:xfrm>
+          <a:prstGeom prst="rect">
+            <a:avLst/>
+          </a:prstGeom>
+          <a:solidFill>
+            <a:srgbClr val="FFF7E8"/>
+          </a:solidFill>
+          <a:ln w="6350">
+            <a:solidFill>
+              <a:srgbClr val="B35900"/>
+            </a:solidFill>
+          </a:ln>
+          <a:effectLst/>
+        </p:spPr>
+        <p:style>
+          <a:lnRef idx="1">
+            <a:schemeClr val="accent1"/>
+          </a:lnRef>
+          <a:fillRef idx="3">
+            <a:schemeClr val="accent1"/>
+          </a:fillRef>
+          <a:effectRef idx="2">
+            <a:schemeClr val="accent1"/>
+          </a:effectRef>
+          <a:fontRef idx="minor">
+            <a:schemeClr val="lt1"/>
+          </a:fontRef>
+        </p:style>
+        <p:txBody>
+          <a:bodyPr rtlCol="0" anchor="ctr"/>
+          <a:lstStyle/>
+          <a:p>
+            <a:pPr algn="ctr"/>
+          </a:p>
+        </p:txBody>
+      </p:sp>
+      <p:sp>
+        <p:nvSpPr>
+          <p:cNvPr id="18" name="TextBox 17"/>
+          <p:cNvSpPr txBox="1"/>
+          <p:nvPr/>
+        </p:nvSpPr>
+        <p:spPr>
+          <a:xfrm>
+            <a:off x="6400800" y="1627632"/>
+            <a:ext cx="5212080" cy="320040"/>
+          </a:xfrm>
+          <a:prstGeom prst="rect">
+            <a:avLst/>
+          </a:prstGeom>
+          <a:noFill/>
+        </p:spPr>
+        <p:txBody>
+          <a:bodyPr wrap="square" lIns="36576" rIns="36576" tIns="18288" bIns="18288" anchor="t">
+            <a:spAutoFit/>
+          </a:bodyPr>
+          <a:lstStyle/>
+          <a:p>
+            <a:pPr algn="l">
+              <a:lnSpc>
+                <a:spcPct val="115000"/>
+              </a:lnSpc>
+            </a:pPr>
+            <a:r>
+              <a:rPr sz="1150" b="1" i="0">
+                <a:solidFill>
+                  <a:srgbClr val="B35900"/>
+                </a:solidFill>
+                <a:latin typeface="Helvetica"/>
+              </a:rPr>
+              <a:t>1. Governed in-VPC AI co-scientist</a:t>
+            </a:r>
+          </a:p>
+        </p:txBody>
+      </p:sp>
+      <p:sp>
+        <p:nvSpPr>
+          <p:cNvPr id="19" name="TextBox 18"/>
+          <p:cNvSpPr txBox="1"/>
+          <p:nvPr/>
+        </p:nvSpPr>
+        <p:spPr>
+          <a:xfrm>
+            <a:off x="6400800" y="1965960"/>
+            <a:ext cx="5212080" cy="868680"/>
+          </a:xfrm>
+          <a:prstGeom prst="rect">
+            <a:avLst/>
+          </a:prstGeom>
+          <a:noFill/>
+        </p:spPr>
+        <p:txBody>
+          <a:bodyPr wrap="square" lIns="36576" rIns="36576" tIns="18288" bIns="18288" anchor="t">
+            <a:spAutoFit/>
+          </a:bodyPr>
+          <a:lstStyle/>
+          <a:p>
+            <a:pPr algn="l">
+              <a:lnSpc>
+                <a:spcPct val="112000"/>
+              </a:lnSpc>
+            </a:pPr>
+            <a:r>
+              <a:rPr sz="1000" b="0" i="0">
+                <a:solidFill>
+                  <a:srgbClr val="333333"/>
+                </a:solidFill>
+                <a:latin typeface="Georgia"/>
+              </a:rPr>
+              <a:t>Vertex/Gemini (or Claude-on-Vertex) under the existing Google Cloud BAA + RAG over the data dictionary. Legal blocker is governance, not the BAA. Powers WG-4 Rec 1.</a:t>
+            </a:r>
+          </a:p>
+        </p:txBody>
+      </p:sp>
+      <p:sp>
+        <p:nvSpPr>
+          <p:cNvPr id="20" name="Rectangle 19"/>
+          <p:cNvSpPr/>
+          <p:nvPr/>
+        </p:nvSpPr>
+        <p:spPr>
+          <a:xfrm>
+            <a:off x="6263640" y="2999232"/>
+            <a:ext cx="5486400" cy="1325880"/>
+          </a:xfrm>
+          <a:prstGeom prst="rect">
+            <a:avLst/>
+          </a:prstGeom>
+          <a:solidFill>
+            <a:srgbClr val="FFF7E8"/>
+          </a:solidFill>
+          <a:ln w="6350">
+            <a:solidFill>
+              <a:srgbClr val="B35900"/>
+            </a:solidFill>
+          </a:ln>
+          <a:effectLst/>
+        </p:spPr>
+        <p:style>
+          <a:lnRef idx="1">
+            <a:schemeClr val="accent1"/>
+          </a:lnRef>
+          <a:fillRef idx="3">
+            <a:schemeClr val="accent1"/>
+          </a:fillRef>
+          <a:effectRef idx="2">
+            <a:schemeClr val="accent1"/>
+          </a:effectRef>
+          <a:fontRef idx="minor">
+            <a:schemeClr val="lt1"/>
+          </a:fontRef>
+        </p:style>
+        <p:txBody>
+          <a:bodyPr rtlCol="0" anchor="ctr"/>
+          <a:lstStyle/>
+          <a:p>
+            <a:pPr algn="ctr"/>
+          </a:p>
+        </p:txBody>
+      </p:sp>
+      <p:sp>
+        <p:nvSpPr>
+          <p:cNvPr id="21" name="TextBox 20"/>
+          <p:cNvSpPr txBox="1"/>
+          <p:nvPr/>
+        </p:nvSpPr>
+        <p:spPr>
+          <a:xfrm>
+            <a:off x="6400800" y="3072384"/>
+            <a:ext cx="5212080" cy="320040"/>
+          </a:xfrm>
+          <a:prstGeom prst="rect">
+            <a:avLst/>
+          </a:prstGeom>
+          <a:noFill/>
+        </p:spPr>
+        <p:txBody>
+          <a:bodyPr wrap="square" lIns="36576" rIns="36576" tIns="18288" bIns="18288" anchor="t">
+            <a:spAutoFit/>
+          </a:bodyPr>
+          <a:lstStyle/>
+          <a:p>
+            <a:pPr algn="l">
+              <a:lnSpc>
+                <a:spcPct val="115000"/>
+              </a:lnSpc>
+            </a:pPr>
+            <a:r>
+              <a:rPr sz="1150" b="1" i="0">
+                <a:solidFill>
+                  <a:srgbClr val="B35900"/>
+                </a:solidFill>
+                <a:latin typeface="Helvetica"/>
+              </a:rPr>
+              <a:t>2. Reusable tool/workflow registry + apps gallery</a:t>
+            </a:r>
+          </a:p>
+        </p:txBody>
+      </p:sp>
+      <p:sp>
+        <p:nvSpPr>
+          <p:cNvPr id="22" name="TextBox 21"/>
+          <p:cNvSpPr txBox="1"/>
+          <p:nvPr/>
+        </p:nvSpPr>
+        <p:spPr>
+          <a:xfrm>
+            <a:off x="6400800" y="3410712"/>
+            <a:ext cx="5212080" cy="868680"/>
+          </a:xfrm>
+          <a:prstGeom prst="rect">
+            <a:avLst/>
+          </a:prstGeom>
+          <a:noFill/>
+        </p:spPr>
+        <p:txBody>
+          <a:bodyPr wrap="square" lIns="36576" rIns="36576" tIns="18288" bIns="18288" anchor="t">
+            <a:spAutoFit/>
+          </a:bodyPr>
+          <a:lstStyle/>
+          <a:p>
+            <a:pPr algn="l">
+              <a:lnSpc>
+                <a:spcPct val="112000"/>
+              </a:lnSpc>
+            </a:pPr>
+            <a:r>
+              <a:rPr sz="1000" b="0" i="0">
+                <a:solidFill>
+                  <a:srgbClr val="333333"/>
+                </a:solidFill>
+                <a:latin typeface="Georgia"/>
+              </a:rPr>
+              <a:t>Dockstore-style registry + “publish your analysis” gallery + featured workspaces, to convert clones into shared, reusable artifacts.</a:t>
+            </a:r>
+          </a:p>
+        </p:txBody>
+      </p:sp>
+      <p:sp>
+        <p:nvSpPr>
+          <p:cNvPr id="23" name="Rectangle 22"/>
+          <p:cNvSpPr/>
+          <p:nvPr/>
+        </p:nvSpPr>
+        <p:spPr>
+          <a:xfrm>
+            <a:off x="6263640" y="4443984"/>
+            <a:ext cx="5486400" cy="1325880"/>
+          </a:xfrm>
+          <a:prstGeom prst="rect">
+            <a:avLst/>
+          </a:prstGeom>
+          <a:solidFill>
+            <a:srgbClr val="FFF7E8"/>
+          </a:solidFill>
+          <a:ln w="6350">
+            <a:solidFill>
+              <a:srgbClr val="B35900"/>
+            </a:solidFill>
+          </a:ln>
+          <a:effectLst/>
+        </p:spPr>
+        <p:style>
+          <a:lnRef idx="1">
+            <a:schemeClr val="accent1"/>
+          </a:lnRef>
+          <a:fillRef idx="3">
+            <a:schemeClr val="accent1"/>
+          </a:fillRef>
+          <a:effectRef idx="2">
+            <a:schemeClr val="accent1"/>
+          </a:effectRef>
+          <a:fontRef idx="minor">
+            <a:schemeClr val="lt1"/>
+          </a:fontRef>
+        </p:style>
+        <p:txBody>
+          <a:bodyPr rtlCol="0" anchor="ctr"/>
+          <a:lstStyle/>
+          <a:p>
+            <a:pPr algn="ctr"/>
+          </a:p>
+        </p:txBody>
+      </p:sp>
+      <p:sp>
+        <p:nvSpPr>
+          <p:cNvPr id="24" name="TextBox 23"/>
+          <p:cNvSpPr txBox="1"/>
+          <p:nvPr/>
+        </p:nvSpPr>
+        <p:spPr>
+          <a:xfrm>
+            <a:off x="6400800" y="4517136"/>
+            <a:ext cx="5212080" cy="320040"/>
+          </a:xfrm>
+          <a:prstGeom prst="rect">
+            <a:avLst/>
+          </a:prstGeom>
+          <a:noFill/>
+        </p:spPr>
+        <p:txBody>
+          <a:bodyPr wrap="square" lIns="36576" rIns="36576" tIns="18288" bIns="18288" anchor="t">
+            <a:spAutoFit/>
+          </a:bodyPr>
+          <a:lstStyle/>
+          <a:p>
+            <a:pPr algn="l">
+              <a:lnSpc>
+                <a:spcPct val="115000"/>
+              </a:lnSpc>
+            </a:pPr>
+            <a:r>
+              <a:rPr sz="1150" b="1" i="0">
+                <a:solidFill>
+                  <a:srgbClr val="B35900"/>
+                </a:solidFill>
+                <a:latin typeface="Helvetica"/>
+              </a:rPr>
+              <a:t>3. Multimodal integration templates</a:t>
+            </a:r>
+          </a:p>
+        </p:txBody>
+      </p:sp>
+      <p:sp>
+        <p:nvSpPr>
+          <p:cNvPr id="25" name="TextBox 24"/>
+          <p:cNvSpPr txBox="1"/>
+          <p:nvPr/>
+        </p:nvSpPr>
+        <p:spPr>
+          <a:xfrm>
+            <a:off x="6400800" y="4855464"/>
+            <a:ext cx="5212080" cy="868680"/>
+          </a:xfrm>
+          <a:prstGeom prst="rect">
+            <a:avLst/>
+          </a:prstGeom>
+          <a:noFill/>
+        </p:spPr>
+        <p:txBody>
+          <a:bodyPr wrap="square" lIns="36576" rIns="36576" tIns="18288" bIns="18288" anchor="t">
+            <a:spAutoFit/>
+          </a:bodyPr>
+          <a:lstStyle/>
+          <a:p>
+            <a:pPr algn="l">
+              <a:lnSpc>
+                <a:spcPct val="112000"/>
+              </a:lnSpc>
+            </a:pPr>
+            <a:r>
+              <a:rPr sz="1000" b="0" i="0">
+                <a:solidFill>
+                  <a:srgbClr val="333333"/>
+                </a:solidFill>
+                <a:latin typeface="Georgia"/>
+              </a:rPr>
+              <a:t>Templates + feature store joining WGS + EHR + surveys + wearables — AoU is the only platform co-locating these; fastest-rising method, ~1.6% adoption.</a:t>
+            </a:r>
+          </a:p>
+        </p:txBody>
+      </p:sp>
+      <p:sp>
+        <p:nvSpPr>
+          <p:cNvPr id="26" name="TextBox 25"/>
+          <p:cNvSpPr txBox="1"/>
+          <p:nvPr/>
+        </p:nvSpPr>
+        <p:spPr>
+          <a:xfrm>
+            <a:off x="502920" y="6053328"/>
+            <a:ext cx="11201400" cy="411480"/>
+          </a:xfrm>
+          <a:prstGeom prst="rect">
+            <a:avLst/>
+          </a:prstGeom>
+          <a:noFill/>
+        </p:spPr>
+        <p:txBody>
+          <a:bodyPr wrap="square" lIns="36576" rIns="36576" tIns="18288" bIns="18288" anchor="t">
+            <a:spAutoFit/>
+          </a:bodyPr>
+          <a:lstStyle/>
+          <a:p>
+            <a:pPr algn="l">
+              <a:lnSpc>
+                <a:spcPct val="115000"/>
+              </a:lnSpc>
+            </a:pPr>
+            <a:r>
+              <a:rPr sz="1050" b="0" i="1">
+                <a:solidFill>
+                  <a:srgbClr val="1A3A6B"/>
+                </a:solidFill>
+                <a:latin typeface="Georgia"/>
+              </a:rPr>
+              <a:t>AoU leads on data assets (linked WGS+EHR+surveys+wearables) and GPU/AI compute (H100/H200/B200+NeMo) — the deficiencies are in turning that into shared, AI-enabled, reusable science. Operationalizes the proposed 9th focus area + Workbench AI co-scientist.</a:t>
+            </a:r>
+          </a:p>
+        </p:txBody>
+      </p:sp>
+      <p:sp>
+        <p:nvSpPr>
+          <p:cNvPr id="27" name="TextBox 26"/>
+          <p:cNvSpPr txBox="1"/>
+          <p:nvPr/>
+        </p:nvSpPr>
+        <p:spPr>
+          <a:xfrm>
+            <a:off x="457200" y="6492240"/>
+            <a:ext cx="7315200" cy="274320"/>
+          </a:xfrm>
+          <a:prstGeom prst="rect">
+            <a:avLst/>
+          </a:prstGeom>
+          <a:noFill/>
+        </p:spPr>
+        <p:txBody>
+          <a:bodyPr wrap="square" lIns="36576" rIns="36576" tIns="18288" bIns="18288" anchor="t">
+            <a:spAutoFit/>
+          </a:bodyPr>
+          <a:lstStyle/>
+          <a:p>
+            <a:pPr algn="l">
+              <a:lnSpc>
+                <a:spcPct val="115000"/>
+              </a:lnSpc>
+            </a:pPr>
+            <a:r>
+              <a:rPr sz="850" b="0" i="1">
+                <a:solidFill>
+                  <a:srgbClr val="666666"/>
+                </a:solidFill>
+                <a:latin typeface="Georgia"/>
+              </a:rPr>
+              <a:t>All of Us Scientific Roadmap Refresh  •  WG-1 Draft  •  Smoller &amp; Haendel  •  2026-06-02</a:t>
+            </a:r>
+          </a:p>
+        </p:txBody>
+      </p:sp>
+      <p:sp>
+        <p:nvSpPr>
+          <p:cNvPr id="28" name="TextBox 27"/>
+          <p:cNvSpPr txBox="1"/>
+          <p:nvPr/>
+        </p:nvSpPr>
+        <p:spPr>
+          <a:xfrm>
+            <a:off x="10515600" y="6492240"/>
+            <a:ext cx="1188720" cy="274320"/>
+          </a:xfrm>
+          <a:prstGeom prst="rect">
+            <a:avLst/>
+          </a:prstGeom>
+          <a:noFill/>
+        </p:spPr>
+        <p:txBody>
+          <a:bodyPr wrap="square" lIns="36576" rIns="36576" tIns="18288" bIns="18288" anchor="t">
+            <a:spAutoFit/>
+          </a:bodyPr>
+          <a:lstStyle/>
+          <a:p>
+            <a:pPr algn="r">
+              <a:lnSpc>
+                <a:spcPct val="115000"/>
+              </a:lnSpc>
+            </a:pPr>
+            <a:r>
+              <a:rPr sz="850" b="0" i="1">
+                <a:solidFill>
+                  <a:srgbClr val="666666"/>
+                </a:solidFill>
+                <a:latin typeface="Georgia"/>
+              </a:rPr>
+              <a:t>17 / 21</a:t>
+            </a:r>
+          </a:p>
+        </p:txBody>
+      </p:sp>
+    </p:spTree>
+  </p:cSld>
+  <p:clrMapOvr>
+    <a:masterClrMapping/>
+  </p:clrMapOvr>
+</p:sld>
+</file>
+
+<file path=ppt/slides/slide18.xml><?xml version="1.0" encoding="utf-8"?>
 <p:sld xmlns:a="http://schemas.openxmlformats.org/drawingml/2006/main" xmlns:p="http://schemas.openxmlformats.org/presentationml/2006/main" xmlns:r="http://schemas.openxmlformats.org/officeDocument/2006/relationships">
   <p:cSld>
     <p:spTree>
@@ -12684,1269 +13913,7 @@
                 </a:solidFill>
                 <a:latin typeface="Georgia"/>
               </a:rPr>
-              <a:t>17 / 20</a:t>
-            </a:r>
-          </a:p>
-        </p:txBody>
-      </p:sp>
-    </p:spTree>
-  </p:cSld>
-  <p:clrMapOvr>
-    <a:masterClrMapping/>
-  </p:clrMapOvr>
-</p:sld>
-</file>
-
-<file path=ppt/slides/slide18.xml><?xml version="1.0" encoding="utf-8"?>
-<p:sld xmlns:a="http://schemas.openxmlformats.org/drawingml/2006/main" xmlns:p="http://schemas.openxmlformats.org/presentationml/2006/main" xmlns:r="http://schemas.openxmlformats.org/officeDocument/2006/relationships">
-  <p:cSld>
-    <p:spTree>
-      <p:nvGrpSpPr>
-        <p:cNvPr id="1" name=""/>
-        <p:cNvGrpSpPr/>
-        <p:nvPr/>
-      </p:nvGrpSpPr>
-      <p:grpSpPr/>
-      <p:sp>
-        <p:nvSpPr>
-          <p:cNvPr id="2" name="Rectangle 1"/>
-          <p:cNvSpPr/>
-          <p:nvPr/>
-        </p:nvSpPr>
-        <p:spPr>
-          <a:xfrm>
-            <a:off x="0" y="0"/>
-            <a:ext cx="12191695" cy="73152"/>
-          </a:xfrm>
-          <a:prstGeom prst="rect">
-            <a:avLst/>
-          </a:prstGeom>
-          <a:solidFill>
-            <a:srgbClr val="1A3A6B"/>
-          </a:solidFill>
-          <a:ln>
-            <a:noFill/>
-          </a:ln>
-          <a:effectLst/>
-        </p:spPr>
-        <p:style>
-          <a:lnRef idx="1">
-            <a:schemeClr val="accent1"/>
-          </a:lnRef>
-          <a:fillRef idx="3">
-            <a:schemeClr val="accent1"/>
-          </a:fillRef>
-          <a:effectRef idx="2">
-            <a:schemeClr val="accent1"/>
-          </a:effectRef>
-          <a:fontRef idx="minor">
-            <a:schemeClr val="lt1"/>
-          </a:fontRef>
-        </p:style>
-        <p:txBody>
-          <a:bodyPr rtlCol="0" anchor="ctr"/>
-          <a:lstStyle/>
-          <a:p>
-            <a:pPr algn="ctr"/>
-          </a:p>
-        </p:txBody>
-      </p:sp>
-      <p:sp>
-        <p:nvSpPr>
-          <p:cNvPr id="3" name="TextBox 2"/>
-          <p:cNvSpPr txBox="1"/>
-          <p:nvPr/>
-        </p:nvSpPr>
-        <p:spPr>
-          <a:xfrm>
-            <a:off x="457200" y="164592"/>
-            <a:ext cx="11247120" cy="502920"/>
-          </a:xfrm>
-          <a:prstGeom prst="rect">
-            <a:avLst/>
-          </a:prstGeom>
-          <a:noFill/>
-        </p:spPr>
-        <p:txBody>
-          <a:bodyPr wrap="square" lIns="36576" rIns="36576" tIns="18288" bIns="18288" anchor="t">
-            <a:spAutoFit/>
-          </a:bodyPr>
-          <a:lstStyle/>
-          <a:p>
-            <a:pPr algn="l">
-              <a:lnSpc>
-                <a:spcPct val="105000"/>
-              </a:lnSpc>
-            </a:pPr>
-            <a:r>
-              <a:rPr sz="2200" b="1" i="0">
-                <a:solidFill>
-                  <a:srgbClr val="1A3A6B"/>
-                </a:solidFill>
-                <a:latin typeface="Helvetica"/>
-              </a:rPr>
-              <a:t>Five cross-WG dependencies the Sci Com should coordinate</a:t>
-            </a:r>
-          </a:p>
-        </p:txBody>
-      </p:sp>
-      <p:sp>
-        <p:nvSpPr>
-          <p:cNvPr id="4" name="TextBox 3"/>
-          <p:cNvSpPr txBox="1"/>
-          <p:nvPr/>
-        </p:nvSpPr>
-        <p:spPr>
-          <a:xfrm>
-            <a:off x="457200" y="685800"/>
-            <a:ext cx="11247120" cy="292608"/>
-          </a:xfrm>
-          <a:prstGeom prst="rect">
-            <a:avLst/>
-          </a:prstGeom>
-          <a:noFill/>
-        </p:spPr>
-        <p:txBody>
-          <a:bodyPr wrap="square" lIns="36576" rIns="36576" tIns="18288" bIns="18288" anchor="t">
-            <a:spAutoFit/>
-          </a:bodyPr>
-          <a:lstStyle/>
-          <a:p>
-            <a:pPr algn="l">
-              <a:lnSpc>
-                <a:spcPct val="110000"/>
-              </a:lnSpc>
-            </a:pPr>
-            <a:r>
-              <a:rPr sz="1200" b="0" i="1">
-                <a:solidFill>
-                  <a:srgbClr val="666666"/>
-                </a:solidFill>
-                <a:latin typeface="Georgia"/>
-              </a:rPr>
-              <a:t>Without these handshakes the WGs ship semi-aligned outputs that compete instead of compounding.</a:t>
-            </a:r>
-          </a:p>
-        </p:txBody>
-      </p:sp>
-      <p:sp>
-        <p:nvSpPr>
-          <p:cNvPr id="5" name="Rectangle 4"/>
-          <p:cNvSpPr/>
-          <p:nvPr/>
-        </p:nvSpPr>
-        <p:spPr>
-          <a:xfrm>
-            <a:off x="457200" y="1005840"/>
-            <a:ext cx="11247120" cy="9525"/>
-          </a:xfrm>
-          <a:prstGeom prst="rect">
-            <a:avLst/>
-          </a:prstGeom>
-          <a:solidFill>
-            <a:srgbClr val="C8C8C8"/>
-          </a:solidFill>
-          <a:ln>
-            <a:noFill/>
-          </a:ln>
-          <a:effectLst/>
-        </p:spPr>
-        <p:style>
-          <a:lnRef idx="1">
-            <a:schemeClr val="accent1"/>
-          </a:lnRef>
-          <a:fillRef idx="3">
-            <a:schemeClr val="accent1"/>
-          </a:fillRef>
-          <a:effectRef idx="2">
-            <a:schemeClr val="accent1"/>
-          </a:effectRef>
-          <a:fontRef idx="minor">
-            <a:schemeClr val="lt1"/>
-          </a:fontRef>
-        </p:style>
-        <p:txBody>
-          <a:bodyPr rtlCol="0" anchor="ctr"/>
-          <a:lstStyle/>
-          <a:p>
-            <a:pPr algn="ctr"/>
-          </a:p>
-        </p:txBody>
-      </p:sp>
-      <p:sp>
-        <p:nvSpPr>
-          <p:cNvPr id="6" name="Rectangle 5"/>
-          <p:cNvSpPr/>
-          <p:nvPr/>
-        </p:nvSpPr>
-        <p:spPr>
-          <a:xfrm>
-            <a:off x="502920" y="1298448"/>
-            <a:ext cx="1005840" cy="868680"/>
-          </a:xfrm>
-          <a:prstGeom prst="rect">
-            <a:avLst/>
-          </a:prstGeom>
-          <a:solidFill>
-            <a:srgbClr val="1A3A6B"/>
-          </a:solidFill>
-          <a:ln>
-            <a:noFill/>
-          </a:ln>
-          <a:effectLst/>
-        </p:spPr>
-        <p:style>
-          <a:lnRef idx="1">
-            <a:schemeClr val="accent1"/>
-          </a:lnRef>
-          <a:fillRef idx="3">
-            <a:schemeClr val="accent1"/>
-          </a:fillRef>
-          <a:effectRef idx="2">
-            <a:schemeClr val="accent1"/>
-          </a:effectRef>
-          <a:fontRef idx="minor">
-            <a:schemeClr val="lt1"/>
-          </a:fontRef>
-        </p:style>
-        <p:txBody>
-          <a:bodyPr rtlCol="0" anchor="ctr"/>
-          <a:lstStyle/>
-          <a:p>
-            <a:pPr algn="ctr"/>
-          </a:p>
-        </p:txBody>
-      </p:sp>
-      <p:sp>
-        <p:nvSpPr>
-          <p:cNvPr id="7" name="TextBox 6"/>
-          <p:cNvSpPr txBox="1"/>
-          <p:nvPr/>
-        </p:nvSpPr>
-        <p:spPr>
-          <a:xfrm>
-            <a:off x="502920" y="1344168"/>
-            <a:ext cx="1005840" cy="365760"/>
-          </a:xfrm>
-          <a:prstGeom prst="rect">
-            <a:avLst/>
-          </a:prstGeom>
-          <a:noFill/>
-        </p:spPr>
-        <p:txBody>
-          <a:bodyPr wrap="square" lIns="36576" rIns="36576" tIns="18288" bIns="18288" anchor="t">
-            <a:spAutoFit/>
-          </a:bodyPr>
-          <a:lstStyle/>
-          <a:p>
-            <a:pPr algn="ctr">
-              <a:lnSpc>
-                <a:spcPct val="115000"/>
-              </a:lnSpc>
-            </a:pPr>
-            <a:r>
-              <a:rPr sz="1500" b="1" i="0">
-                <a:solidFill>
-                  <a:srgbClr val="FFFFFF"/>
-                </a:solidFill>
-                <a:latin typeface="Helvetica"/>
-              </a:rPr>
-              <a:t>CC-1</a:t>
-            </a:r>
-          </a:p>
-        </p:txBody>
-      </p:sp>
-      <p:sp>
-        <p:nvSpPr>
-          <p:cNvPr id="8" name="TextBox 7"/>
-          <p:cNvSpPr txBox="1"/>
-          <p:nvPr/>
-        </p:nvSpPr>
-        <p:spPr>
-          <a:xfrm>
-            <a:off x="502920" y="1709928"/>
-            <a:ext cx="1005840" cy="457200"/>
-          </a:xfrm>
-          <a:prstGeom prst="rect">
-            <a:avLst/>
-          </a:prstGeom>
-          <a:noFill/>
-        </p:spPr>
-        <p:txBody>
-          <a:bodyPr wrap="square" lIns="36576" rIns="36576" tIns="18288" bIns="18288" anchor="t">
-            <a:spAutoFit/>
-          </a:bodyPr>
-          <a:lstStyle/>
-          <a:p>
-            <a:pPr algn="ctr">
-              <a:lnSpc>
-                <a:spcPct val="115000"/>
-              </a:lnSpc>
-            </a:pPr>
-            <a:r>
-              <a:rPr sz="800" b="0" i="1">
-                <a:solidFill>
-                  <a:srgbClr val="FFFFFF"/>
-                </a:solidFill>
-                <a:latin typeface="Georgia"/>
-              </a:rPr>
-              <a:t>interlock</a:t>
-            </a:r>
-          </a:p>
-        </p:txBody>
-      </p:sp>
-      <p:sp>
-        <p:nvSpPr>
-          <p:cNvPr id="9" name="TextBox 8"/>
-          <p:cNvSpPr txBox="1"/>
-          <p:nvPr/>
-        </p:nvSpPr>
-        <p:spPr>
-          <a:xfrm>
-            <a:off x="1691640" y="1316736"/>
-            <a:ext cx="10012680" cy="365760"/>
-          </a:xfrm>
-          <a:prstGeom prst="rect">
-            <a:avLst/>
-          </a:prstGeom>
-          <a:noFill/>
-        </p:spPr>
-        <p:txBody>
-          <a:bodyPr wrap="square" lIns="36576" rIns="36576" tIns="18288" bIns="18288" anchor="t">
-            <a:spAutoFit/>
-          </a:bodyPr>
-          <a:lstStyle/>
-          <a:p>
-            <a:pPr algn="l">
-              <a:lnSpc>
-                <a:spcPct val="115000"/>
-              </a:lnSpc>
-            </a:pPr>
-            <a:r>
-              <a:rPr sz="1400" b="1" i="0">
-                <a:solidFill>
-                  <a:srgbClr val="1A3A6B"/>
-                </a:solidFill>
-                <a:latin typeface="Helvetica"/>
-              </a:rPr>
-              <a:t>9th focus area enables WG-3 + WG-4</a:t>
-            </a:r>
-          </a:p>
-        </p:txBody>
-      </p:sp>
-      <p:sp>
-        <p:nvSpPr>
-          <p:cNvPr id="10" name="TextBox 9"/>
-          <p:cNvSpPr txBox="1"/>
-          <p:nvPr/>
-        </p:nvSpPr>
-        <p:spPr>
-          <a:xfrm>
-            <a:off x="1691640" y="1682496"/>
-            <a:ext cx="10012680" cy="548640"/>
-          </a:xfrm>
-          <a:prstGeom prst="rect">
-            <a:avLst/>
-          </a:prstGeom>
-          <a:noFill/>
-        </p:spPr>
-        <p:txBody>
-          <a:bodyPr wrap="square" lIns="36576" rIns="36576" tIns="18288" bIns="18288" anchor="t">
-            <a:spAutoFit/>
-          </a:bodyPr>
-          <a:lstStyle/>
-          <a:p>
-            <a:pPr algn="l">
-              <a:lnSpc>
-                <a:spcPct val="125000"/>
-              </a:lnSpc>
-            </a:pPr>
-            <a:r>
-              <a:rPr sz="1150" b="0" i="0">
-                <a:solidFill>
-                  <a:srgbClr val="333333"/>
-                </a:solidFill>
-                <a:latin typeface="Georgia"/>
-              </a:rPr>
-              <a:t>WG-1's framework change is the structural prerequisite for both Imaging and AI work to have a coherent home.</a:t>
-            </a:r>
-          </a:p>
-        </p:txBody>
-      </p:sp>
-      <p:sp>
-        <p:nvSpPr>
-          <p:cNvPr id="11" name="Rectangle 10"/>
-          <p:cNvSpPr/>
-          <p:nvPr/>
-        </p:nvSpPr>
-        <p:spPr>
-          <a:xfrm>
-            <a:off x="502920" y="2286000"/>
-            <a:ext cx="1005840" cy="868680"/>
-          </a:xfrm>
-          <a:prstGeom prst="rect">
-            <a:avLst/>
-          </a:prstGeom>
-          <a:solidFill>
-            <a:srgbClr val="1A3A6B"/>
-          </a:solidFill>
-          <a:ln>
-            <a:noFill/>
-          </a:ln>
-          <a:effectLst/>
-        </p:spPr>
-        <p:style>
-          <a:lnRef idx="1">
-            <a:schemeClr val="accent1"/>
-          </a:lnRef>
-          <a:fillRef idx="3">
-            <a:schemeClr val="accent1"/>
-          </a:fillRef>
-          <a:effectRef idx="2">
-            <a:schemeClr val="accent1"/>
-          </a:effectRef>
-          <a:fontRef idx="minor">
-            <a:schemeClr val="lt1"/>
-          </a:fontRef>
-        </p:style>
-        <p:txBody>
-          <a:bodyPr rtlCol="0" anchor="ctr"/>
-          <a:lstStyle/>
-          <a:p>
-            <a:pPr algn="ctr"/>
-          </a:p>
-        </p:txBody>
-      </p:sp>
-      <p:sp>
-        <p:nvSpPr>
-          <p:cNvPr id="12" name="TextBox 11"/>
-          <p:cNvSpPr txBox="1"/>
-          <p:nvPr/>
-        </p:nvSpPr>
-        <p:spPr>
-          <a:xfrm>
-            <a:off x="502920" y="2331720"/>
-            <a:ext cx="1005840" cy="365760"/>
-          </a:xfrm>
-          <a:prstGeom prst="rect">
-            <a:avLst/>
-          </a:prstGeom>
-          <a:noFill/>
-        </p:spPr>
-        <p:txBody>
-          <a:bodyPr wrap="square" lIns="36576" rIns="36576" tIns="18288" bIns="18288" anchor="t">
-            <a:spAutoFit/>
-          </a:bodyPr>
-          <a:lstStyle/>
-          <a:p>
-            <a:pPr algn="ctr">
-              <a:lnSpc>
-                <a:spcPct val="115000"/>
-              </a:lnSpc>
-            </a:pPr>
-            <a:r>
-              <a:rPr sz="1500" b="1" i="0">
-                <a:solidFill>
-                  <a:srgbClr val="FFFFFF"/>
-                </a:solidFill>
-                <a:latin typeface="Helvetica"/>
-              </a:rPr>
-              <a:t>CC-2</a:t>
-            </a:r>
-          </a:p>
-        </p:txBody>
-      </p:sp>
-      <p:sp>
-        <p:nvSpPr>
-          <p:cNvPr id="13" name="TextBox 12"/>
-          <p:cNvSpPr txBox="1"/>
-          <p:nvPr/>
-        </p:nvSpPr>
-        <p:spPr>
-          <a:xfrm>
-            <a:off x="502920" y="2697480"/>
-            <a:ext cx="1005840" cy="457200"/>
-          </a:xfrm>
-          <a:prstGeom prst="rect">
-            <a:avLst/>
-          </a:prstGeom>
-          <a:noFill/>
-        </p:spPr>
-        <p:txBody>
-          <a:bodyPr wrap="square" lIns="36576" rIns="36576" tIns="18288" bIns="18288" anchor="t">
-            <a:spAutoFit/>
-          </a:bodyPr>
-          <a:lstStyle/>
-          <a:p>
-            <a:pPr algn="ctr">
-              <a:lnSpc>
-                <a:spcPct val="115000"/>
-              </a:lnSpc>
-            </a:pPr>
-            <a:r>
-              <a:rPr sz="800" b="0" i="1">
-                <a:solidFill>
-                  <a:srgbClr val="FFFFFF"/>
-                </a:solidFill>
-                <a:latin typeface="Georgia"/>
-              </a:rPr>
-              <a:t>interlock</a:t>
-            </a:r>
-          </a:p>
-        </p:txBody>
-      </p:sp>
-      <p:sp>
-        <p:nvSpPr>
-          <p:cNvPr id="14" name="TextBox 13"/>
-          <p:cNvSpPr txBox="1"/>
-          <p:nvPr/>
-        </p:nvSpPr>
-        <p:spPr>
-          <a:xfrm>
-            <a:off x="1691640" y="2304288"/>
-            <a:ext cx="10012680" cy="365760"/>
-          </a:xfrm>
-          <a:prstGeom prst="rect">
-            <a:avLst/>
-          </a:prstGeom>
-          <a:noFill/>
-        </p:spPr>
-        <p:txBody>
-          <a:bodyPr wrap="square" lIns="36576" rIns="36576" tIns="18288" bIns="18288" anchor="t">
-            <a:spAutoFit/>
-          </a:bodyPr>
-          <a:lstStyle/>
-          <a:p>
-            <a:pPr algn="l">
-              <a:lnSpc>
-                <a:spcPct val="115000"/>
-              </a:lnSpc>
-            </a:pPr>
-            <a:r>
-              <a:rPr sz="1400" b="1" i="0">
-                <a:solidFill>
-                  <a:srgbClr val="1A3A6B"/>
-                </a:solidFill>
-                <a:latin typeface="Helvetica"/>
-              </a:rPr>
-              <a:t>Bias-framework hierarchy across WG-2 / WG-3 / WG-4</a:t>
-            </a:r>
-          </a:p>
-        </p:txBody>
-      </p:sp>
-      <p:sp>
-        <p:nvSpPr>
-          <p:cNvPr id="15" name="TextBox 14"/>
-          <p:cNvSpPr txBox="1"/>
-          <p:nvPr/>
-        </p:nvSpPr>
-        <p:spPr>
-          <a:xfrm>
-            <a:off x="1691640" y="2670048"/>
-            <a:ext cx="10012680" cy="548640"/>
-          </a:xfrm>
-          <a:prstGeom prst="rect">
-            <a:avLst/>
-          </a:prstGeom>
-          <a:noFill/>
-        </p:spPr>
-        <p:txBody>
-          <a:bodyPr wrap="square" lIns="36576" rIns="36576" tIns="18288" bIns="18288" anchor="t">
-            <a:spAutoFit/>
-          </a:bodyPr>
-          <a:lstStyle/>
-          <a:p>
-            <a:pPr algn="l">
-              <a:lnSpc>
-                <a:spcPct val="125000"/>
-              </a:lnSpc>
-            </a:pPr>
-            <a:r>
-              <a:rPr sz="1150" b="0" i="0">
-                <a:solidFill>
-                  <a:srgbClr val="333333"/>
-                </a:solidFill>
-                <a:latin typeface="Georgia"/>
-              </a:rPr>
-              <a:t>WG-2 normative framework → WG-3 imaging audit → WG-4 AI audit. Three WGs should align on a SINGLE AoU bias-reporting standard.</a:t>
-            </a:r>
-          </a:p>
-        </p:txBody>
-      </p:sp>
-      <p:sp>
-        <p:nvSpPr>
-          <p:cNvPr id="16" name="Rectangle 15"/>
-          <p:cNvSpPr/>
-          <p:nvPr/>
-        </p:nvSpPr>
-        <p:spPr>
-          <a:xfrm>
-            <a:off x="502920" y="3273552"/>
-            <a:ext cx="1005840" cy="868680"/>
-          </a:xfrm>
-          <a:prstGeom prst="rect">
-            <a:avLst/>
-          </a:prstGeom>
-          <a:solidFill>
-            <a:srgbClr val="1A3A6B"/>
-          </a:solidFill>
-          <a:ln>
-            <a:noFill/>
-          </a:ln>
-          <a:effectLst/>
-        </p:spPr>
-        <p:style>
-          <a:lnRef idx="1">
-            <a:schemeClr val="accent1"/>
-          </a:lnRef>
-          <a:fillRef idx="3">
-            <a:schemeClr val="accent1"/>
-          </a:fillRef>
-          <a:effectRef idx="2">
-            <a:schemeClr val="accent1"/>
-          </a:effectRef>
-          <a:fontRef idx="minor">
-            <a:schemeClr val="lt1"/>
-          </a:fontRef>
-        </p:style>
-        <p:txBody>
-          <a:bodyPr rtlCol="0" anchor="ctr"/>
-          <a:lstStyle/>
-          <a:p>
-            <a:pPr algn="ctr"/>
-          </a:p>
-        </p:txBody>
-      </p:sp>
-      <p:sp>
-        <p:nvSpPr>
-          <p:cNvPr id="17" name="TextBox 16"/>
-          <p:cNvSpPr txBox="1"/>
-          <p:nvPr/>
-        </p:nvSpPr>
-        <p:spPr>
-          <a:xfrm>
-            <a:off x="502920" y="3319272"/>
-            <a:ext cx="1005840" cy="365760"/>
-          </a:xfrm>
-          <a:prstGeom prst="rect">
-            <a:avLst/>
-          </a:prstGeom>
-          <a:noFill/>
-        </p:spPr>
-        <p:txBody>
-          <a:bodyPr wrap="square" lIns="36576" rIns="36576" tIns="18288" bIns="18288" anchor="t">
-            <a:spAutoFit/>
-          </a:bodyPr>
-          <a:lstStyle/>
-          <a:p>
-            <a:pPr algn="ctr">
-              <a:lnSpc>
-                <a:spcPct val="115000"/>
-              </a:lnSpc>
-            </a:pPr>
-            <a:r>
-              <a:rPr sz="1500" b="1" i="0">
-                <a:solidFill>
-                  <a:srgbClr val="FFFFFF"/>
-                </a:solidFill>
-                <a:latin typeface="Helvetica"/>
-              </a:rPr>
-              <a:t>CC-3</a:t>
-            </a:r>
-          </a:p>
-        </p:txBody>
-      </p:sp>
-      <p:sp>
-        <p:nvSpPr>
-          <p:cNvPr id="18" name="TextBox 17"/>
-          <p:cNvSpPr txBox="1"/>
-          <p:nvPr/>
-        </p:nvSpPr>
-        <p:spPr>
-          <a:xfrm>
-            <a:off x="502920" y="3685032"/>
-            <a:ext cx="1005840" cy="457200"/>
-          </a:xfrm>
-          <a:prstGeom prst="rect">
-            <a:avLst/>
-          </a:prstGeom>
-          <a:noFill/>
-        </p:spPr>
-        <p:txBody>
-          <a:bodyPr wrap="square" lIns="36576" rIns="36576" tIns="18288" bIns="18288" anchor="t">
-            <a:spAutoFit/>
-          </a:bodyPr>
-          <a:lstStyle/>
-          <a:p>
-            <a:pPr algn="ctr">
-              <a:lnSpc>
-                <a:spcPct val="115000"/>
-              </a:lnSpc>
-            </a:pPr>
-            <a:r>
-              <a:rPr sz="800" b="0" i="1">
-                <a:solidFill>
-                  <a:srgbClr val="FFFFFF"/>
-                </a:solidFill>
-                <a:latin typeface="Georgia"/>
-              </a:rPr>
-              <a:t>interlock</a:t>
-            </a:r>
-          </a:p>
-        </p:txBody>
-      </p:sp>
-      <p:sp>
-        <p:nvSpPr>
-          <p:cNvPr id="19" name="TextBox 18"/>
-          <p:cNvSpPr txBox="1"/>
-          <p:nvPr/>
-        </p:nvSpPr>
-        <p:spPr>
-          <a:xfrm>
-            <a:off x="1691640" y="3291840"/>
-            <a:ext cx="10012680" cy="365760"/>
-          </a:xfrm>
-          <a:prstGeom prst="rect">
-            <a:avLst/>
-          </a:prstGeom>
-          <a:noFill/>
-        </p:spPr>
-        <p:txBody>
-          <a:bodyPr wrap="square" lIns="36576" rIns="36576" tIns="18288" bIns="18288" anchor="t">
-            <a:spAutoFit/>
-          </a:bodyPr>
-          <a:lstStyle/>
-          <a:p>
-            <a:pPr algn="l">
-              <a:lnSpc>
-                <a:spcPct val="115000"/>
-              </a:lnSpc>
-            </a:pPr>
-            <a:r>
-              <a:rPr sz="1400" b="1" i="0">
-                <a:solidFill>
-                  <a:srgbClr val="1A3A6B"/>
-                </a:solidFill>
-                <a:latin typeface="Helvetica"/>
-              </a:rPr>
-              <a:t>WG-2 metrics feed WG-5 Impact Report</a:t>
-            </a:r>
-          </a:p>
-        </p:txBody>
-      </p:sp>
-      <p:sp>
-        <p:nvSpPr>
-          <p:cNvPr id="20" name="TextBox 19"/>
-          <p:cNvSpPr txBox="1"/>
-          <p:nvPr/>
-        </p:nvSpPr>
-        <p:spPr>
-          <a:xfrm>
-            <a:off x="1691640" y="3657600"/>
-            <a:ext cx="10012680" cy="548640"/>
-          </a:xfrm>
-          <a:prstGeom prst="rect">
-            <a:avLst/>
-          </a:prstGeom>
-          <a:noFill/>
-        </p:spPr>
-        <p:txBody>
-          <a:bodyPr wrap="square" lIns="36576" rIns="36576" tIns="18288" bIns="18288" anchor="t">
-            <a:spAutoFit/>
-          </a:bodyPr>
-          <a:lstStyle/>
-          <a:p>
-            <a:pPr algn="l">
-              <a:lnSpc>
-                <a:spcPct val="125000"/>
-              </a:lnSpc>
-            </a:pPr>
-            <a:r>
-              <a:rPr sz="1150" b="0" i="0">
-                <a:solidFill>
-                  <a:srgbClr val="333333"/>
-                </a:solidFill>
-                <a:latin typeface="Georgia"/>
-              </a:rPr>
-              <a:t>WG-2 defines TSBM metrics; WG-5 produces the annual Report. Coordinate cadence so Report v1 ships within 12 months.</a:t>
-            </a:r>
-          </a:p>
-        </p:txBody>
-      </p:sp>
-      <p:sp>
-        <p:nvSpPr>
-          <p:cNvPr id="21" name="Rectangle 20"/>
-          <p:cNvSpPr/>
-          <p:nvPr/>
-        </p:nvSpPr>
-        <p:spPr>
-          <a:xfrm>
-            <a:off x="502920" y="4261104"/>
-            <a:ext cx="1005840" cy="868680"/>
-          </a:xfrm>
-          <a:prstGeom prst="rect">
-            <a:avLst/>
-          </a:prstGeom>
-          <a:solidFill>
-            <a:srgbClr val="1A3A6B"/>
-          </a:solidFill>
-          <a:ln>
-            <a:noFill/>
-          </a:ln>
-          <a:effectLst/>
-        </p:spPr>
-        <p:style>
-          <a:lnRef idx="1">
-            <a:schemeClr val="accent1"/>
-          </a:lnRef>
-          <a:fillRef idx="3">
-            <a:schemeClr val="accent1"/>
-          </a:fillRef>
-          <a:effectRef idx="2">
-            <a:schemeClr val="accent1"/>
-          </a:effectRef>
-          <a:fontRef idx="minor">
-            <a:schemeClr val="lt1"/>
-          </a:fontRef>
-        </p:style>
-        <p:txBody>
-          <a:bodyPr rtlCol="0" anchor="ctr"/>
-          <a:lstStyle/>
-          <a:p>
-            <a:pPr algn="ctr"/>
-          </a:p>
-        </p:txBody>
-      </p:sp>
-      <p:sp>
-        <p:nvSpPr>
-          <p:cNvPr id="22" name="TextBox 21"/>
-          <p:cNvSpPr txBox="1"/>
-          <p:nvPr/>
-        </p:nvSpPr>
-        <p:spPr>
-          <a:xfrm>
-            <a:off x="502920" y="4306824"/>
-            <a:ext cx="1005840" cy="365760"/>
-          </a:xfrm>
-          <a:prstGeom prst="rect">
-            <a:avLst/>
-          </a:prstGeom>
-          <a:noFill/>
-        </p:spPr>
-        <p:txBody>
-          <a:bodyPr wrap="square" lIns="36576" rIns="36576" tIns="18288" bIns="18288" anchor="t">
-            <a:spAutoFit/>
-          </a:bodyPr>
-          <a:lstStyle/>
-          <a:p>
-            <a:pPr algn="ctr">
-              <a:lnSpc>
-                <a:spcPct val="115000"/>
-              </a:lnSpc>
-            </a:pPr>
-            <a:r>
-              <a:rPr sz="1500" b="1" i="0">
-                <a:solidFill>
-                  <a:srgbClr val="FFFFFF"/>
-                </a:solidFill>
-                <a:latin typeface="Helvetica"/>
-              </a:rPr>
-              <a:t>CC-4</a:t>
-            </a:r>
-          </a:p>
-        </p:txBody>
-      </p:sp>
-      <p:sp>
-        <p:nvSpPr>
-          <p:cNvPr id="23" name="TextBox 22"/>
-          <p:cNvSpPr txBox="1"/>
-          <p:nvPr/>
-        </p:nvSpPr>
-        <p:spPr>
-          <a:xfrm>
-            <a:off x="502920" y="4672584"/>
-            <a:ext cx="1005840" cy="457200"/>
-          </a:xfrm>
-          <a:prstGeom prst="rect">
-            <a:avLst/>
-          </a:prstGeom>
-          <a:noFill/>
-        </p:spPr>
-        <p:txBody>
-          <a:bodyPr wrap="square" lIns="36576" rIns="36576" tIns="18288" bIns="18288" anchor="t">
-            <a:spAutoFit/>
-          </a:bodyPr>
-          <a:lstStyle/>
-          <a:p>
-            <a:pPr algn="ctr">
-              <a:lnSpc>
-                <a:spcPct val="115000"/>
-              </a:lnSpc>
-            </a:pPr>
-            <a:r>
-              <a:rPr sz="800" b="0" i="1">
-                <a:solidFill>
-                  <a:srgbClr val="FFFFFF"/>
-                </a:solidFill>
-                <a:latin typeface="Georgia"/>
-              </a:rPr>
-              <a:t>interlock</a:t>
-            </a:r>
-          </a:p>
-        </p:txBody>
-      </p:sp>
-      <p:sp>
-        <p:nvSpPr>
-          <p:cNvPr id="24" name="TextBox 23"/>
-          <p:cNvSpPr txBox="1"/>
-          <p:nvPr/>
-        </p:nvSpPr>
-        <p:spPr>
-          <a:xfrm>
-            <a:off x="1691640" y="4279392"/>
-            <a:ext cx="10012680" cy="365760"/>
-          </a:xfrm>
-          <a:prstGeom prst="rect">
-            <a:avLst/>
-          </a:prstGeom>
-          <a:noFill/>
-        </p:spPr>
-        <p:txBody>
-          <a:bodyPr wrap="square" lIns="36576" rIns="36576" tIns="18288" bIns="18288" anchor="t">
-            <a:spAutoFit/>
-          </a:bodyPr>
-          <a:lstStyle/>
-          <a:p>
-            <a:pPr algn="l">
-              <a:lnSpc>
-                <a:spcPct val="115000"/>
-              </a:lnSpc>
-            </a:pPr>
-            <a:r>
-              <a:rPr sz="1400" b="1" i="0">
-                <a:solidFill>
-                  <a:srgbClr val="1A3A6B"/>
-                </a:solidFill>
-                <a:latin typeface="Helvetica"/>
-              </a:rPr>
-              <a:t>WG-5 narrative requires WG-1 framework</a:t>
-            </a:r>
-          </a:p>
-        </p:txBody>
-      </p:sp>
-      <p:sp>
-        <p:nvSpPr>
-          <p:cNvPr id="25" name="TextBox 24"/>
-          <p:cNvSpPr txBox="1"/>
-          <p:nvPr/>
-        </p:nvSpPr>
-        <p:spPr>
-          <a:xfrm>
-            <a:off x="1691640" y="4645152"/>
-            <a:ext cx="10012680" cy="548640"/>
-          </a:xfrm>
-          <a:prstGeom prst="rect">
-            <a:avLst/>
-          </a:prstGeom>
-          <a:noFill/>
-        </p:spPr>
-        <p:txBody>
-          <a:bodyPr wrap="square" lIns="36576" rIns="36576" tIns="18288" bIns="18288" anchor="t">
-            <a:spAutoFit/>
-          </a:bodyPr>
-          <a:lstStyle/>
-          <a:p>
-            <a:pPr algn="l">
-              <a:lnSpc>
-                <a:spcPct val="125000"/>
-              </a:lnSpc>
-            </a:pPr>
-            <a:r>
-              <a:rPr sz="1150" b="0" i="0">
-                <a:solidFill>
-                  <a:srgbClr val="333333"/>
-                </a:solidFill>
-                <a:latin typeface="Georgia"/>
-              </a:rPr>
-              <a:t>The distinctive-evidence narrative depends on framework being settled. Pre-Sci Com circulation should sequence WG-1 → WG-5.</a:t>
-            </a:r>
-          </a:p>
-        </p:txBody>
-      </p:sp>
-      <p:sp>
-        <p:nvSpPr>
-          <p:cNvPr id="26" name="Rectangle 25"/>
-          <p:cNvSpPr/>
-          <p:nvPr/>
-        </p:nvSpPr>
-        <p:spPr>
-          <a:xfrm>
-            <a:off x="502920" y="5248656"/>
-            <a:ext cx="1005840" cy="868680"/>
-          </a:xfrm>
-          <a:prstGeom prst="rect">
-            <a:avLst/>
-          </a:prstGeom>
-          <a:solidFill>
-            <a:srgbClr val="1A3A6B"/>
-          </a:solidFill>
-          <a:ln>
-            <a:noFill/>
-          </a:ln>
-          <a:effectLst/>
-        </p:spPr>
-        <p:style>
-          <a:lnRef idx="1">
-            <a:schemeClr val="accent1"/>
-          </a:lnRef>
-          <a:fillRef idx="3">
-            <a:schemeClr val="accent1"/>
-          </a:fillRef>
-          <a:effectRef idx="2">
-            <a:schemeClr val="accent1"/>
-          </a:effectRef>
-          <a:fontRef idx="minor">
-            <a:schemeClr val="lt1"/>
-          </a:fontRef>
-        </p:style>
-        <p:txBody>
-          <a:bodyPr rtlCol="0" anchor="ctr"/>
-          <a:lstStyle/>
-          <a:p>
-            <a:pPr algn="ctr"/>
-          </a:p>
-        </p:txBody>
-      </p:sp>
-      <p:sp>
-        <p:nvSpPr>
-          <p:cNvPr id="27" name="TextBox 26"/>
-          <p:cNvSpPr txBox="1"/>
-          <p:nvPr/>
-        </p:nvSpPr>
-        <p:spPr>
-          <a:xfrm>
-            <a:off x="502920" y="5294376"/>
-            <a:ext cx="1005840" cy="365760"/>
-          </a:xfrm>
-          <a:prstGeom prst="rect">
-            <a:avLst/>
-          </a:prstGeom>
-          <a:noFill/>
-        </p:spPr>
-        <p:txBody>
-          <a:bodyPr wrap="square" lIns="36576" rIns="36576" tIns="18288" bIns="18288" anchor="t">
-            <a:spAutoFit/>
-          </a:bodyPr>
-          <a:lstStyle/>
-          <a:p>
-            <a:pPr algn="ctr">
-              <a:lnSpc>
-                <a:spcPct val="115000"/>
-              </a:lnSpc>
-            </a:pPr>
-            <a:r>
-              <a:rPr sz="1500" b="1" i="0">
-                <a:solidFill>
-                  <a:srgbClr val="FFFFFF"/>
-                </a:solidFill>
-                <a:latin typeface="Helvetica"/>
-              </a:rPr>
-              <a:t>CC-5</a:t>
-            </a:r>
-          </a:p>
-        </p:txBody>
-      </p:sp>
-      <p:sp>
-        <p:nvSpPr>
-          <p:cNvPr id="28" name="TextBox 27"/>
-          <p:cNvSpPr txBox="1"/>
-          <p:nvPr/>
-        </p:nvSpPr>
-        <p:spPr>
-          <a:xfrm>
-            <a:off x="502920" y="5660136"/>
-            <a:ext cx="1005840" cy="457200"/>
-          </a:xfrm>
-          <a:prstGeom prst="rect">
-            <a:avLst/>
-          </a:prstGeom>
-          <a:noFill/>
-        </p:spPr>
-        <p:txBody>
-          <a:bodyPr wrap="square" lIns="36576" rIns="36576" tIns="18288" bIns="18288" anchor="t">
-            <a:spAutoFit/>
-          </a:bodyPr>
-          <a:lstStyle/>
-          <a:p>
-            <a:pPr algn="ctr">
-              <a:lnSpc>
-                <a:spcPct val="115000"/>
-              </a:lnSpc>
-            </a:pPr>
-            <a:r>
-              <a:rPr sz="800" b="0" i="1">
-                <a:solidFill>
-                  <a:srgbClr val="FFFFFF"/>
-                </a:solidFill>
-                <a:latin typeface="Georgia"/>
-              </a:rPr>
-              <a:t>interlock</a:t>
-            </a:r>
-          </a:p>
-        </p:txBody>
-      </p:sp>
-      <p:sp>
-        <p:nvSpPr>
-          <p:cNvPr id="29" name="TextBox 28"/>
-          <p:cNvSpPr txBox="1"/>
-          <p:nvPr/>
-        </p:nvSpPr>
-        <p:spPr>
-          <a:xfrm>
-            <a:off x="1691640" y="5266944"/>
-            <a:ext cx="10012680" cy="365760"/>
-          </a:xfrm>
-          <a:prstGeom prst="rect">
-            <a:avLst/>
-          </a:prstGeom>
-          <a:noFill/>
-        </p:spPr>
-        <p:txBody>
-          <a:bodyPr wrap="square" lIns="36576" rIns="36576" tIns="18288" bIns="18288" anchor="t">
-            <a:spAutoFit/>
-          </a:bodyPr>
-          <a:lstStyle/>
-          <a:p>
-            <a:pPr algn="l">
-              <a:lnSpc>
-                <a:spcPct val="115000"/>
-              </a:lnSpc>
-            </a:pPr>
-            <a:r>
-              <a:rPr sz="1400" b="1" i="0">
-                <a:solidFill>
-                  <a:srgbClr val="1A3A6B"/>
-                </a:solidFill>
-                <a:latin typeface="Helvetica"/>
-              </a:rPr>
-              <a:t>Aging/ADRD — no WG owns it cleanly</a:t>
-            </a:r>
-          </a:p>
-        </p:txBody>
-      </p:sp>
-      <p:sp>
-        <p:nvSpPr>
-          <p:cNvPr id="30" name="TextBox 29"/>
-          <p:cNvSpPr txBox="1"/>
-          <p:nvPr/>
-        </p:nvSpPr>
-        <p:spPr>
-          <a:xfrm>
-            <a:off x="1691640" y="5632704"/>
-            <a:ext cx="10012680" cy="548640"/>
-          </a:xfrm>
-          <a:prstGeom prst="rect">
-            <a:avLst/>
-          </a:prstGeom>
-          <a:noFill/>
-        </p:spPr>
-        <p:txBody>
-          <a:bodyPr wrap="square" lIns="36576" rIns="36576" tIns="18288" bIns="18288" anchor="t">
-            <a:spAutoFit/>
-          </a:bodyPr>
-          <a:lstStyle/>
-          <a:p>
-            <a:pPr algn="l">
-              <a:lnSpc>
-                <a:spcPct val="125000"/>
-              </a:lnSpc>
-            </a:pPr>
-            <a:r>
-              <a:rPr sz="1150" b="0" i="0">
-                <a:solidFill>
-                  <a:srgbClr val="333333"/>
-                </a:solidFill>
-                <a:latin typeface="Georgia"/>
-              </a:rPr>
-              <a:t>Narrowing peer gap (AoU 6.0% post-2023, ~peer median 0.84×, trend +4.7 vs UKB +6.9 / MVP +5.4 / CKB +5.1). FLAG for WG leads; consider Tier-2 priority + WG-5 patient story.</a:t>
-            </a:r>
-          </a:p>
-        </p:txBody>
-      </p:sp>
-      <p:sp>
-        <p:nvSpPr>
-          <p:cNvPr id="31" name="TextBox 30"/>
-          <p:cNvSpPr txBox="1"/>
-          <p:nvPr/>
-        </p:nvSpPr>
-        <p:spPr>
-          <a:xfrm>
-            <a:off x="457200" y="6492240"/>
-            <a:ext cx="7315200" cy="274320"/>
-          </a:xfrm>
-          <a:prstGeom prst="rect">
-            <a:avLst/>
-          </a:prstGeom>
-          <a:noFill/>
-        </p:spPr>
-        <p:txBody>
-          <a:bodyPr wrap="square" lIns="36576" rIns="36576" tIns="18288" bIns="18288" anchor="t">
-            <a:spAutoFit/>
-          </a:bodyPr>
-          <a:lstStyle/>
-          <a:p>
-            <a:pPr algn="l">
-              <a:lnSpc>
-                <a:spcPct val="115000"/>
-              </a:lnSpc>
-            </a:pPr>
-            <a:r>
-              <a:rPr sz="850" b="0" i="1">
-                <a:solidFill>
-                  <a:srgbClr val="666666"/>
-                </a:solidFill>
-                <a:latin typeface="Georgia"/>
-              </a:rPr>
-              <a:t>All of Us Scientific Roadmap Refresh  •  WG-1 Draft  •  Smoller &amp; Haendel  •  2026-06-02</a:t>
-            </a:r>
-          </a:p>
-        </p:txBody>
-      </p:sp>
-      <p:sp>
-        <p:nvSpPr>
-          <p:cNvPr id="32" name="TextBox 31"/>
-          <p:cNvSpPr txBox="1"/>
-          <p:nvPr/>
-        </p:nvSpPr>
-        <p:spPr>
-          <a:xfrm>
-            <a:off x="10515600" y="6492240"/>
-            <a:ext cx="1188720" cy="274320"/>
-          </a:xfrm>
-          <a:prstGeom prst="rect">
-            <a:avLst/>
-          </a:prstGeom>
-          <a:noFill/>
-        </p:spPr>
-        <p:txBody>
-          <a:bodyPr wrap="square" lIns="36576" rIns="36576" tIns="18288" bIns="18288" anchor="t">
-            <a:spAutoFit/>
-          </a:bodyPr>
-          <a:lstStyle/>
-          <a:p>
-            <a:pPr algn="r">
-              <a:lnSpc>
-                <a:spcPct val="115000"/>
-              </a:lnSpc>
-            </a:pPr>
-            <a:r>
-              <a:rPr sz="850" b="0" i="1">
-                <a:solidFill>
-                  <a:srgbClr val="666666"/>
-                </a:solidFill>
-                <a:latin typeface="Georgia"/>
-              </a:rPr>
-              <a:t>18 / 20</a:t>
+              <a:t>18 / 21</a:t>
             </a:r>
           </a:p>
         </p:txBody>
@@ -14047,7 +14014,7 @@
                 </a:solidFill>
                 <a:latin typeface="Helvetica"/>
               </a:rPr>
-              <a:t>Caveats — three things the Sci Com should know before acting</a:t>
+              <a:t>Five cross-WG dependencies the Sci Com should coordinate</a:t>
             </a:r>
           </a:p>
         </p:txBody>
@@ -14086,7 +14053,7 @@
                 </a:solidFill>
                 <a:latin typeface="Georgia"/>
               </a:rPr>
-              <a:t>Each caveat is a reason to be careful, not a reason to discount the analysis.</a:t>
+              <a:t>Without these handshakes the WGs ship semi-aligned outputs that compete instead of compounding.</a:t>
             </a:r>
           </a:p>
         </p:txBody>
@@ -14137,26 +14104,25 @@
       </p:sp>
       <p:sp>
         <p:nvSpPr>
-          <p:cNvPr id="6" name="Oval 5"/>
+          <p:cNvPr id="6" name="Rectangle 5"/>
           <p:cNvSpPr/>
           <p:nvPr/>
         </p:nvSpPr>
         <p:spPr>
           <a:xfrm>
-            <a:off x="548640" y="1280160"/>
-            <a:ext cx="713232" cy="713232"/>
-          </a:xfrm>
-          <a:prstGeom prst="ellipse">
+            <a:off x="502920" y="1298448"/>
+            <a:ext cx="1005840" cy="868680"/>
+          </a:xfrm>
+          <a:prstGeom prst="rect">
             <a:avLst/>
           </a:prstGeom>
           <a:solidFill>
-            <a:srgbClr val="B35900"/>
+            <a:srgbClr val="1A3A6B"/>
           </a:solidFill>
           <a:ln>
-            <a:solidFill>
-              <a:srgbClr val="B35900"/>
-            </a:solidFill>
+            <a:noFill/>
           </a:ln>
+          <a:effectLst/>
         </p:spPr>
         <p:style>
           <a:lnRef idx="1">
@@ -14173,32 +14139,62 @@
           </a:fontRef>
         </p:style>
         <p:txBody>
-          <a:bodyPr rtlCol="0" anchor="ctr" lIns="0" rIns="0"/>
+          <a:bodyPr rtlCol="0" anchor="ctr"/>
           <a:lstStyle/>
           <a:p>
             <a:pPr algn="ctr"/>
-            <a:r>
-              <a:rPr b="1" sz="2000">
+          </a:p>
+        </p:txBody>
+      </p:sp>
+      <p:sp>
+        <p:nvSpPr>
+          <p:cNvPr id="7" name="TextBox 6"/>
+          <p:cNvSpPr txBox="1"/>
+          <p:nvPr/>
+        </p:nvSpPr>
+        <p:spPr>
+          <a:xfrm>
+            <a:off x="502920" y="1344168"/>
+            <a:ext cx="1005840" cy="365760"/>
+          </a:xfrm>
+          <a:prstGeom prst="rect">
+            <a:avLst/>
+          </a:prstGeom>
+          <a:noFill/>
+        </p:spPr>
+        <p:txBody>
+          <a:bodyPr wrap="square" lIns="36576" rIns="36576" tIns="18288" bIns="18288" anchor="t">
+            <a:spAutoFit/>
+          </a:bodyPr>
+          <a:lstStyle/>
+          <a:p>
+            <a:pPr algn="ctr">
+              <a:lnSpc>
+                <a:spcPct val="115000"/>
+              </a:lnSpc>
+            </a:pPr>
+            <a:r>
+              <a:rPr sz="1500" b="1" i="0">
                 <a:solidFill>
                   <a:srgbClr val="FFFFFF"/>
                 </a:solidFill>
                 <a:latin typeface="Helvetica"/>
               </a:rPr>
-              <a:t>1</a:t>
-            </a:r>
-          </a:p>
-        </p:txBody>
-      </p:sp>
-      <p:sp>
-        <p:nvSpPr>
-          <p:cNvPr id="7" name="TextBox 6"/>
-          <p:cNvSpPr txBox="1"/>
-          <p:nvPr/>
-        </p:nvSpPr>
-        <p:spPr>
-          <a:xfrm>
-            <a:off x="1463040" y="1298448"/>
-            <a:ext cx="10241280" cy="384048"/>
+              <a:t>CC-1</a:t>
+            </a:r>
+          </a:p>
+        </p:txBody>
+      </p:sp>
+      <p:sp>
+        <p:nvSpPr>
+          <p:cNvPr id="8" name="TextBox 7"/>
+          <p:cNvSpPr txBox="1"/>
+          <p:nvPr/>
+        </p:nvSpPr>
+        <p:spPr>
+          <a:xfrm>
+            <a:off x="502920" y="1709928"/>
+            <a:ext cx="1005840" cy="457200"/>
           </a:xfrm>
           <a:prstGeom prst="rect">
             <a:avLst/>
@@ -14211,33 +14207,72 @@
           </a:bodyPr>
           <a:lstStyle/>
           <a:p>
+            <a:pPr algn="ctr">
+              <a:lnSpc>
+                <a:spcPct val="115000"/>
+              </a:lnSpc>
+            </a:pPr>
+            <a:r>
+              <a:rPr sz="800" b="0" i="1">
+                <a:solidFill>
+                  <a:srgbClr val="FFFFFF"/>
+                </a:solidFill>
+                <a:latin typeface="Georgia"/>
+              </a:rPr>
+              <a:t>interlock</a:t>
+            </a:r>
+          </a:p>
+        </p:txBody>
+      </p:sp>
+      <p:sp>
+        <p:nvSpPr>
+          <p:cNvPr id="9" name="TextBox 8"/>
+          <p:cNvSpPr txBox="1"/>
+          <p:nvPr/>
+        </p:nvSpPr>
+        <p:spPr>
+          <a:xfrm>
+            <a:off x="1691640" y="1316736"/>
+            <a:ext cx="10012680" cy="365760"/>
+          </a:xfrm>
+          <a:prstGeom prst="rect">
+            <a:avLst/>
+          </a:prstGeom>
+          <a:noFill/>
+        </p:spPr>
+        <p:txBody>
+          <a:bodyPr wrap="square" lIns="36576" rIns="36576" tIns="18288" bIns="18288" anchor="t">
+            <a:spAutoFit/>
+          </a:bodyPr>
+          <a:lstStyle/>
+          <a:p>
             <a:pPr algn="l">
               <a:lnSpc>
-                <a:spcPct val="110000"/>
-              </a:lnSpc>
-            </a:pPr>
-            <a:r>
-              <a:rPr sz="1550" b="1" i="0">
-                <a:solidFill>
-                  <a:srgbClr val="B35900"/>
+                <a:spcPct val="115000"/>
+              </a:lnSpc>
+            </a:pPr>
+            <a:r>
+              <a:rPr sz="1400" b="1" i="0">
+                <a:solidFill>
+                  <a:srgbClr val="1A3A6B"/>
                 </a:solidFill>
                 <a:latin typeface="Helvetica"/>
               </a:rPr>
-              <a:t>Dermatology over-representation is an ARTIFACT</a:t>
-            </a:r>
-          </a:p>
-        </p:txBody>
-      </p:sp>
-      <p:sp>
-        <p:nvSpPr>
-          <p:cNvPr id="8" name="TextBox 7"/>
-          <p:cNvSpPr txBox="1"/>
-          <p:nvPr/>
-        </p:nvSpPr>
-        <p:spPr>
-          <a:xfrm>
-            <a:off x="1463040" y="1691640"/>
-            <a:ext cx="10241280" cy="1188720"/>
+              <a:t>9th focus area enables WG-3 + WG-4</a:t>
+            </a:r>
+          </a:p>
+        </p:txBody>
+      </p:sp>
+      <p:sp>
+        <p:nvSpPr>
+          <p:cNvPr id="10" name="TextBox 9"/>
+          <p:cNvSpPr txBox="1"/>
+          <p:nvPr/>
+        </p:nvSpPr>
+        <p:spPr>
+          <a:xfrm>
+            <a:off x="1691640" y="1682496"/>
+            <a:ext cx="10012680" cy="548640"/>
           </a:xfrm>
           <a:prstGeom prst="rect">
             <a:avLst/>
@@ -14252,7 +14287,7 @@
           <a:p>
             <a:pPr algn="l">
               <a:lnSpc>
-                <a:spcPct val="130000"/>
+                <a:spcPct val="125000"/>
               </a:lnSpc>
             </a:pPr>
             <a:r>
@@ -14262,33 +14297,32 @@
                 </a:solidFill>
                 <a:latin typeface="Georgia"/>
               </a:rPr>
-              <a:t>Dermatology is 13.9% of the corpus and 6.9× the peer median — but driven by 1–2 prolific groups, not a strategic priority. Trend score −4.4 (declining share). Do NOT elevate dermatology in the Refresh even though the share index suggests it. WG-5 ambassador toolkit must have the artifact answer rehearsed.</a:t>
-            </a:r>
-          </a:p>
-        </p:txBody>
-      </p:sp>
-      <p:sp>
-        <p:nvSpPr>
-          <p:cNvPr id="9" name="Oval 8"/>
+              <a:t>WG-1's framework change is the structural prerequisite for both Imaging and AI work to have a coherent home.</a:t>
+            </a:r>
+          </a:p>
+        </p:txBody>
+      </p:sp>
+      <p:sp>
+        <p:nvSpPr>
+          <p:cNvPr id="11" name="Rectangle 10"/>
           <p:cNvSpPr/>
           <p:nvPr/>
         </p:nvSpPr>
         <p:spPr>
           <a:xfrm>
-            <a:off x="548640" y="2907792"/>
-            <a:ext cx="713232" cy="713232"/>
-          </a:xfrm>
-          <a:prstGeom prst="ellipse">
+            <a:off x="502920" y="2286000"/>
+            <a:ext cx="1005840" cy="868680"/>
+          </a:xfrm>
+          <a:prstGeom prst="rect">
             <a:avLst/>
           </a:prstGeom>
           <a:solidFill>
-            <a:srgbClr val="B35900"/>
+            <a:srgbClr val="1A3A6B"/>
           </a:solidFill>
           <a:ln>
-            <a:solidFill>
-              <a:srgbClr val="B35900"/>
-            </a:solidFill>
+            <a:noFill/>
           </a:ln>
+          <a:effectLst/>
         </p:spPr>
         <p:style>
           <a:lnRef idx="1">
@@ -14305,32 +14339,62 @@
           </a:fontRef>
         </p:style>
         <p:txBody>
-          <a:bodyPr rtlCol="0" anchor="ctr" lIns="0" rIns="0"/>
+          <a:bodyPr rtlCol="0" anchor="ctr"/>
           <a:lstStyle/>
           <a:p>
             <a:pPr algn="ctr"/>
-            <a:r>
-              <a:rPr b="1" sz="2000">
+          </a:p>
+        </p:txBody>
+      </p:sp>
+      <p:sp>
+        <p:nvSpPr>
+          <p:cNvPr id="12" name="TextBox 11"/>
+          <p:cNvSpPr txBox="1"/>
+          <p:nvPr/>
+        </p:nvSpPr>
+        <p:spPr>
+          <a:xfrm>
+            <a:off x="502920" y="2331720"/>
+            <a:ext cx="1005840" cy="365760"/>
+          </a:xfrm>
+          <a:prstGeom prst="rect">
+            <a:avLst/>
+          </a:prstGeom>
+          <a:noFill/>
+        </p:spPr>
+        <p:txBody>
+          <a:bodyPr wrap="square" lIns="36576" rIns="36576" tIns="18288" bIns="18288" anchor="t">
+            <a:spAutoFit/>
+          </a:bodyPr>
+          <a:lstStyle/>
+          <a:p>
+            <a:pPr algn="ctr">
+              <a:lnSpc>
+                <a:spcPct val="115000"/>
+              </a:lnSpc>
+            </a:pPr>
+            <a:r>
+              <a:rPr sz="1500" b="1" i="0">
                 <a:solidFill>
                   <a:srgbClr val="FFFFFF"/>
                 </a:solidFill>
                 <a:latin typeface="Helvetica"/>
               </a:rPr>
-              <a:t>2</a:t>
-            </a:r>
-          </a:p>
-        </p:txBody>
-      </p:sp>
-      <p:sp>
-        <p:nvSpPr>
-          <p:cNvPr id="10" name="TextBox 9"/>
-          <p:cNvSpPr txBox="1"/>
-          <p:nvPr/>
-        </p:nvSpPr>
-        <p:spPr>
-          <a:xfrm>
-            <a:off x="1463040" y="2926080"/>
-            <a:ext cx="10241280" cy="384048"/>
+              <a:t>CC-2</a:t>
+            </a:r>
+          </a:p>
+        </p:txBody>
+      </p:sp>
+      <p:sp>
+        <p:nvSpPr>
+          <p:cNvPr id="13" name="TextBox 12"/>
+          <p:cNvSpPr txBox="1"/>
+          <p:nvPr/>
+        </p:nvSpPr>
+        <p:spPr>
+          <a:xfrm>
+            <a:off x="502920" y="2697480"/>
+            <a:ext cx="1005840" cy="457200"/>
           </a:xfrm>
           <a:prstGeom prst="rect">
             <a:avLst/>
@@ -14343,33 +14407,72 @@
           </a:bodyPr>
           <a:lstStyle/>
           <a:p>
+            <a:pPr algn="ctr">
+              <a:lnSpc>
+                <a:spcPct val="115000"/>
+              </a:lnSpc>
+            </a:pPr>
+            <a:r>
+              <a:rPr sz="800" b="0" i="1">
+                <a:solidFill>
+                  <a:srgbClr val="FFFFFF"/>
+                </a:solidFill>
+                <a:latin typeface="Georgia"/>
+              </a:rPr>
+              <a:t>interlock</a:t>
+            </a:r>
+          </a:p>
+        </p:txBody>
+      </p:sp>
+      <p:sp>
+        <p:nvSpPr>
+          <p:cNvPr id="14" name="TextBox 13"/>
+          <p:cNvSpPr txBox="1"/>
+          <p:nvPr/>
+        </p:nvSpPr>
+        <p:spPr>
+          <a:xfrm>
+            <a:off x="1691640" y="2304288"/>
+            <a:ext cx="10012680" cy="365760"/>
+          </a:xfrm>
+          <a:prstGeom prst="rect">
+            <a:avLst/>
+          </a:prstGeom>
+          <a:noFill/>
+        </p:spPr>
+        <p:txBody>
+          <a:bodyPr wrap="square" lIns="36576" rIns="36576" tIns="18288" bIns="18288" anchor="t">
+            <a:spAutoFit/>
+          </a:bodyPr>
+          <a:lstStyle/>
+          <a:p>
             <a:pPr algn="l">
               <a:lnSpc>
-                <a:spcPct val="110000"/>
-              </a:lnSpc>
-            </a:pPr>
-            <a:r>
-              <a:rPr sz="1550" b="1" i="0">
-                <a:solidFill>
-                  <a:srgbClr val="B35900"/>
+                <a:spcPct val="115000"/>
+              </a:lnSpc>
+            </a:pPr>
+            <a:r>
+              <a:rPr sz="1400" b="1" i="0">
+                <a:solidFill>
+                  <a:srgbClr val="1A3A6B"/>
                 </a:solidFill>
                 <a:latin typeface="Helvetica"/>
               </a:rPr>
-              <a:t>Peer-biobank counts use PubMed name-search fallback</a:t>
-            </a:r>
-          </a:p>
-        </p:txBody>
-      </p:sp>
-      <p:sp>
-        <p:nvSpPr>
-          <p:cNvPr id="11" name="TextBox 10"/>
-          <p:cNvSpPr txBox="1"/>
-          <p:nvPr/>
-        </p:nvSpPr>
-        <p:spPr>
-          <a:xfrm>
-            <a:off x="1463040" y="3319272"/>
-            <a:ext cx="10241280" cy="1188720"/>
+              <a:t>Bias-framework hierarchy across WG-2 / WG-3 / WG-4</a:t>
+            </a:r>
+          </a:p>
+        </p:txBody>
+      </p:sp>
+      <p:sp>
+        <p:nvSpPr>
+          <p:cNvPr id="15" name="TextBox 14"/>
+          <p:cNvSpPr txBox="1"/>
+          <p:nvPr/>
+        </p:nvSpPr>
+        <p:spPr>
+          <a:xfrm>
+            <a:off x="1691640" y="2670048"/>
+            <a:ext cx="10012680" cy="548640"/>
           </a:xfrm>
           <a:prstGeom prst="rect">
             <a:avLst/>
@@ -14384,7 +14487,7 @@
           <a:p>
             <a:pPr algn="l">
               <a:lnSpc>
-                <a:spcPct val="130000"/>
+                <a:spcPct val="125000"/>
               </a:lnSpc>
             </a:pPr>
             <a:r>
@@ -14394,33 +14497,32 @@
                 </a:solidFill>
                 <a:latin typeface="Georgia"/>
               </a:rPr>
-              <a:t>UKB, FinnGen, MVP, and CKB corpora come from PubMed name-search with same-tagger keyword tagging — now full PubMed censuses (UKB 11,868; FinnGen 3,152; MVP 438; CKB 558). Internally consistent across peers but absolute counts under- and over-count differently. USE THE STATIC SHARE INDEX, not trend differentials, for action-relevant comparisons. MVP corpus is small (438); single-MVP signals need a second-peer corroboration.</a:t>
-            </a:r>
-          </a:p>
-        </p:txBody>
-      </p:sp>
-      <p:sp>
-        <p:nvSpPr>
-          <p:cNvPr id="12" name="Oval 11"/>
+              <a:t>WG-2 normative framework → WG-3 imaging audit → WG-4 AI audit. Three WGs should align on a SINGLE AoU bias-reporting standard.</a:t>
+            </a:r>
+          </a:p>
+        </p:txBody>
+      </p:sp>
+      <p:sp>
+        <p:nvSpPr>
+          <p:cNvPr id="16" name="Rectangle 15"/>
           <p:cNvSpPr/>
           <p:nvPr/>
         </p:nvSpPr>
         <p:spPr>
           <a:xfrm>
-            <a:off x="548640" y="4535424"/>
-            <a:ext cx="713232" cy="713232"/>
-          </a:xfrm>
-          <a:prstGeom prst="ellipse">
+            <a:off x="502920" y="3273552"/>
+            <a:ext cx="1005840" cy="868680"/>
+          </a:xfrm>
+          <a:prstGeom prst="rect">
             <a:avLst/>
           </a:prstGeom>
           <a:solidFill>
-            <a:srgbClr val="B35900"/>
+            <a:srgbClr val="1A3A6B"/>
           </a:solidFill>
           <a:ln>
-            <a:solidFill>
-              <a:srgbClr val="B35900"/>
-            </a:solidFill>
+            <a:noFill/>
           </a:ln>
+          <a:effectLst/>
         </p:spPr>
         <p:style>
           <a:lnRef idx="1">
@@ -14437,32 +14539,62 @@
           </a:fontRef>
         </p:style>
         <p:txBody>
-          <a:bodyPr rtlCol="0" anchor="ctr" lIns="0" rIns="0"/>
+          <a:bodyPr rtlCol="0" anchor="ctr"/>
           <a:lstStyle/>
           <a:p>
             <a:pPr algn="ctr"/>
-            <a:r>
-              <a:rPr b="1" sz="2000">
+          </a:p>
+        </p:txBody>
+      </p:sp>
+      <p:sp>
+        <p:nvSpPr>
+          <p:cNvPr id="17" name="TextBox 16"/>
+          <p:cNvSpPr txBox="1"/>
+          <p:nvPr/>
+        </p:nvSpPr>
+        <p:spPr>
+          <a:xfrm>
+            <a:off x="502920" y="3319272"/>
+            <a:ext cx="1005840" cy="365760"/>
+          </a:xfrm>
+          <a:prstGeom prst="rect">
+            <a:avLst/>
+          </a:prstGeom>
+          <a:noFill/>
+        </p:spPr>
+        <p:txBody>
+          <a:bodyPr wrap="square" lIns="36576" rIns="36576" tIns="18288" bIns="18288" anchor="t">
+            <a:spAutoFit/>
+          </a:bodyPr>
+          <a:lstStyle/>
+          <a:p>
+            <a:pPr algn="ctr">
+              <a:lnSpc>
+                <a:spcPct val="115000"/>
+              </a:lnSpc>
+            </a:pPr>
+            <a:r>
+              <a:rPr sz="1500" b="1" i="0">
                 <a:solidFill>
                   <a:srgbClr val="FFFFFF"/>
                 </a:solidFill>
                 <a:latin typeface="Helvetica"/>
               </a:rPr>
-              <a:t>3</a:t>
-            </a:r>
-          </a:p>
-        </p:txBody>
-      </p:sp>
-      <p:sp>
-        <p:nvSpPr>
-          <p:cNvPr id="13" name="TextBox 12"/>
-          <p:cNvSpPr txBox="1"/>
-          <p:nvPr/>
-        </p:nvSpPr>
-        <p:spPr>
-          <a:xfrm>
-            <a:off x="1463040" y="4553712"/>
-            <a:ext cx="10241280" cy="384048"/>
+              <a:t>CC-3</a:t>
+            </a:r>
+          </a:p>
+        </p:txBody>
+      </p:sp>
+      <p:sp>
+        <p:nvSpPr>
+          <p:cNvPr id="18" name="TextBox 17"/>
+          <p:cNvSpPr txBox="1"/>
+          <p:nvPr/>
+        </p:nvSpPr>
+        <p:spPr>
+          <a:xfrm>
+            <a:off x="502920" y="3685032"/>
+            <a:ext cx="1005840" cy="457200"/>
           </a:xfrm>
           <a:prstGeom prst="rect">
             <a:avLst/>
@@ -14475,33 +14607,72 @@
           </a:bodyPr>
           <a:lstStyle/>
           <a:p>
+            <a:pPr algn="ctr">
+              <a:lnSpc>
+                <a:spcPct val="115000"/>
+              </a:lnSpc>
+            </a:pPr>
+            <a:r>
+              <a:rPr sz="800" b="0" i="1">
+                <a:solidFill>
+                  <a:srgbClr val="FFFFFF"/>
+                </a:solidFill>
+                <a:latin typeface="Georgia"/>
+              </a:rPr>
+              <a:t>interlock</a:t>
+            </a:r>
+          </a:p>
+        </p:txBody>
+      </p:sp>
+      <p:sp>
+        <p:nvSpPr>
+          <p:cNvPr id="19" name="TextBox 18"/>
+          <p:cNvSpPr txBox="1"/>
+          <p:nvPr/>
+        </p:nvSpPr>
+        <p:spPr>
+          <a:xfrm>
+            <a:off x="1691640" y="3291840"/>
+            <a:ext cx="10012680" cy="365760"/>
+          </a:xfrm>
+          <a:prstGeom prst="rect">
+            <a:avLst/>
+          </a:prstGeom>
+          <a:noFill/>
+        </p:spPr>
+        <p:txBody>
+          <a:bodyPr wrap="square" lIns="36576" rIns="36576" tIns="18288" bIns="18288" anchor="t">
+            <a:spAutoFit/>
+          </a:bodyPr>
+          <a:lstStyle/>
+          <a:p>
             <a:pPr algn="l">
               <a:lnSpc>
-                <a:spcPct val="110000"/>
-              </a:lnSpc>
-            </a:pPr>
-            <a:r>
-              <a:rPr sz="1550" b="1" i="0">
-                <a:solidFill>
-                  <a:srgbClr val="B35900"/>
+                <a:spcPct val="115000"/>
+              </a:lnSpc>
+            </a:pPr>
+            <a:r>
+              <a:rPr sz="1400" b="1" i="0">
+                <a:solidFill>
+                  <a:srgbClr val="1A3A6B"/>
                 </a:solidFill>
                 <a:latin typeface="Helvetica"/>
               </a:rPr>
-              <a:t>AoU pre-2023 baseline is tiny (157 pubs)</a:t>
-            </a:r>
-          </a:p>
-        </p:txBody>
-      </p:sp>
-      <p:sp>
-        <p:nvSpPr>
-          <p:cNvPr id="14" name="TextBox 13"/>
-          <p:cNvSpPr txBox="1"/>
-          <p:nvPr/>
-        </p:nvSpPr>
-        <p:spPr>
-          <a:xfrm>
-            <a:off x="1463040" y="4946904"/>
-            <a:ext cx="10241280" cy="1188720"/>
+              <a:t>WG-2 metrics feed WG-5 Impact Report</a:t>
+            </a:r>
+          </a:p>
+        </p:txBody>
+      </p:sp>
+      <p:sp>
+        <p:nvSpPr>
+          <p:cNvPr id="20" name="TextBox 19"/>
+          <p:cNvSpPr txBox="1"/>
+          <p:nvPr/>
+        </p:nvSpPr>
+        <p:spPr>
+          <a:xfrm>
+            <a:off x="1691640" y="3657600"/>
+            <a:ext cx="10012680" cy="548640"/>
           </a:xfrm>
           <a:prstGeom prst="rect">
             <a:avLst/>
@@ -14516,7 +14687,7 @@
           <a:p>
             <a:pPr algn="l">
               <a:lnSpc>
-                <a:spcPct val="130000"/>
+                <a:spcPct val="125000"/>
               </a:lnSpc>
             </a:pPr>
             <a:r>
@@ -14526,14 +14697,414 @@
                 </a:solidFill>
                 <a:latin typeface="Georgia"/>
               </a:rPr>
-              <a:t>Any active post-2023 theme will trend positive in AoU's split simply because the corpus grew ~8.1× from pre- to post-2023. Apparent 'growth' on cardiometabolic, mental health, and cancer is largely a small-baseline artifact — read as 'AoU has built a presence here,' not 'AoU is uniquely outpacing the field.' True growth signals come from the peer-comparison panel, not from the AoU-internal pre/post split.</a:t>
-            </a:r>
-          </a:p>
-        </p:txBody>
-      </p:sp>
-      <p:sp>
-        <p:nvSpPr>
-          <p:cNvPr id="15" name="TextBox 14"/>
+              <a:t>WG-2 defines TSBM metrics; WG-5 produces the annual Report. Coordinate cadence so Report v1 ships within 12 months.</a:t>
+            </a:r>
+          </a:p>
+        </p:txBody>
+      </p:sp>
+      <p:sp>
+        <p:nvSpPr>
+          <p:cNvPr id="21" name="Rectangle 20"/>
+          <p:cNvSpPr/>
+          <p:nvPr/>
+        </p:nvSpPr>
+        <p:spPr>
+          <a:xfrm>
+            <a:off x="502920" y="4261104"/>
+            <a:ext cx="1005840" cy="868680"/>
+          </a:xfrm>
+          <a:prstGeom prst="rect">
+            <a:avLst/>
+          </a:prstGeom>
+          <a:solidFill>
+            <a:srgbClr val="1A3A6B"/>
+          </a:solidFill>
+          <a:ln>
+            <a:noFill/>
+          </a:ln>
+          <a:effectLst/>
+        </p:spPr>
+        <p:style>
+          <a:lnRef idx="1">
+            <a:schemeClr val="accent1"/>
+          </a:lnRef>
+          <a:fillRef idx="3">
+            <a:schemeClr val="accent1"/>
+          </a:fillRef>
+          <a:effectRef idx="2">
+            <a:schemeClr val="accent1"/>
+          </a:effectRef>
+          <a:fontRef idx="minor">
+            <a:schemeClr val="lt1"/>
+          </a:fontRef>
+        </p:style>
+        <p:txBody>
+          <a:bodyPr rtlCol="0" anchor="ctr"/>
+          <a:lstStyle/>
+          <a:p>
+            <a:pPr algn="ctr"/>
+          </a:p>
+        </p:txBody>
+      </p:sp>
+      <p:sp>
+        <p:nvSpPr>
+          <p:cNvPr id="22" name="TextBox 21"/>
+          <p:cNvSpPr txBox="1"/>
+          <p:nvPr/>
+        </p:nvSpPr>
+        <p:spPr>
+          <a:xfrm>
+            <a:off x="502920" y="4306824"/>
+            <a:ext cx="1005840" cy="365760"/>
+          </a:xfrm>
+          <a:prstGeom prst="rect">
+            <a:avLst/>
+          </a:prstGeom>
+          <a:noFill/>
+        </p:spPr>
+        <p:txBody>
+          <a:bodyPr wrap="square" lIns="36576" rIns="36576" tIns="18288" bIns="18288" anchor="t">
+            <a:spAutoFit/>
+          </a:bodyPr>
+          <a:lstStyle/>
+          <a:p>
+            <a:pPr algn="ctr">
+              <a:lnSpc>
+                <a:spcPct val="115000"/>
+              </a:lnSpc>
+            </a:pPr>
+            <a:r>
+              <a:rPr sz="1500" b="1" i="0">
+                <a:solidFill>
+                  <a:srgbClr val="FFFFFF"/>
+                </a:solidFill>
+                <a:latin typeface="Helvetica"/>
+              </a:rPr>
+              <a:t>CC-4</a:t>
+            </a:r>
+          </a:p>
+        </p:txBody>
+      </p:sp>
+      <p:sp>
+        <p:nvSpPr>
+          <p:cNvPr id="23" name="TextBox 22"/>
+          <p:cNvSpPr txBox="1"/>
+          <p:nvPr/>
+        </p:nvSpPr>
+        <p:spPr>
+          <a:xfrm>
+            <a:off x="502920" y="4672584"/>
+            <a:ext cx="1005840" cy="457200"/>
+          </a:xfrm>
+          <a:prstGeom prst="rect">
+            <a:avLst/>
+          </a:prstGeom>
+          <a:noFill/>
+        </p:spPr>
+        <p:txBody>
+          <a:bodyPr wrap="square" lIns="36576" rIns="36576" tIns="18288" bIns="18288" anchor="t">
+            <a:spAutoFit/>
+          </a:bodyPr>
+          <a:lstStyle/>
+          <a:p>
+            <a:pPr algn="ctr">
+              <a:lnSpc>
+                <a:spcPct val="115000"/>
+              </a:lnSpc>
+            </a:pPr>
+            <a:r>
+              <a:rPr sz="800" b="0" i="1">
+                <a:solidFill>
+                  <a:srgbClr val="FFFFFF"/>
+                </a:solidFill>
+                <a:latin typeface="Georgia"/>
+              </a:rPr>
+              <a:t>interlock</a:t>
+            </a:r>
+          </a:p>
+        </p:txBody>
+      </p:sp>
+      <p:sp>
+        <p:nvSpPr>
+          <p:cNvPr id="24" name="TextBox 23"/>
+          <p:cNvSpPr txBox="1"/>
+          <p:nvPr/>
+        </p:nvSpPr>
+        <p:spPr>
+          <a:xfrm>
+            <a:off x="1691640" y="4279392"/>
+            <a:ext cx="10012680" cy="365760"/>
+          </a:xfrm>
+          <a:prstGeom prst="rect">
+            <a:avLst/>
+          </a:prstGeom>
+          <a:noFill/>
+        </p:spPr>
+        <p:txBody>
+          <a:bodyPr wrap="square" lIns="36576" rIns="36576" tIns="18288" bIns="18288" anchor="t">
+            <a:spAutoFit/>
+          </a:bodyPr>
+          <a:lstStyle/>
+          <a:p>
+            <a:pPr algn="l">
+              <a:lnSpc>
+                <a:spcPct val="115000"/>
+              </a:lnSpc>
+            </a:pPr>
+            <a:r>
+              <a:rPr sz="1400" b="1" i="0">
+                <a:solidFill>
+                  <a:srgbClr val="1A3A6B"/>
+                </a:solidFill>
+                <a:latin typeface="Helvetica"/>
+              </a:rPr>
+              <a:t>WG-5 narrative requires WG-1 framework</a:t>
+            </a:r>
+          </a:p>
+        </p:txBody>
+      </p:sp>
+      <p:sp>
+        <p:nvSpPr>
+          <p:cNvPr id="25" name="TextBox 24"/>
+          <p:cNvSpPr txBox="1"/>
+          <p:nvPr/>
+        </p:nvSpPr>
+        <p:spPr>
+          <a:xfrm>
+            <a:off x="1691640" y="4645152"/>
+            <a:ext cx="10012680" cy="548640"/>
+          </a:xfrm>
+          <a:prstGeom prst="rect">
+            <a:avLst/>
+          </a:prstGeom>
+          <a:noFill/>
+        </p:spPr>
+        <p:txBody>
+          <a:bodyPr wrap="square" lIns="36576" rIns="36576" tIns="18288" bIns="18288" anchor="t">
+            <a:spAutoFit/>
+          </a:bodyPr>
+          <a:lstStyle/>
+          <a:p>
+            <a:pPr algn="l">
+              <a:lnSpc>
+                <a:spcPct val="125000"/>
+              </a:lnSpc>
+            </a:pPr>
+            <a:r>
+              <a:rPr sz="1150" b="0" i="0">
+                <a:solidFill>
+                  <a:srgbClr val="333333"/>
+                </a:solidFill>
+                <a:latin typeface="Georgia"/>
+              </a:rPr>
+              <a:t>The distinctive-evidence narrative depends on framework being settled. Pre-Sci Com circulation should sequence WG-1 → WG-5.</a:t>
+            </a:r>
+          </a:p>
+        </p:txBody>
+      </p:sp>
+      <p:sp>
+        <p:nvSpPr>
+          <p:cNvPr id="26" name="Rectangle 25"/>
+          <p:cNvSpPr/>
+          <p:nvPr/>
+        </p:nvSpPr>
+        <p:spPr>
+          <a:xfrm>
+            <a:off x="502920" y="5248656"/>
+            <a:ext cx="1005840" cy="868680"/>
+          </a:xfrm>
+          <a:prstGeom prst="rect">
+            <a:avLst/>
+          </a:prstGeom>
+          <a:solidFill>
+            <a:srgbClr val="1A3A6B"/>
+          </a:solidFill>
+          <a:ln>
+            <a:noFill/>
+          </a:ln>
+          <a:effectLst/>
+        </p:spPr>
+        <p:style>
+          <a:lnRef idx="1">
+            <a:schemeClr val="accent1"/>
+          </a:lnRef>
+          <a:fillRef idx="3">
+            <a:schemeClr val="accent1"/>
+          </a:fillRef>
+          <a:effectRef idx="2">
+            <a:schemeClr val="accent1"/>
+          </a:effectRef>
+          <a:fontRef idx="minor">
+            <a:schemeClr val="lt1"/>
+          </a:fontRef>
+        </p:style>
+        <p:txBody>
+          <a:bodyPr rtlCol="0" anchor="ctr"/>
+          <a:lstStyle/>
+          <a:p>
+            <a:pPr algn="ctr"/>
+          </a:p>
+        </p:txBody>
+      </p:sp>
+      <p:sp>
+        <p:nvSpPr>
+          <p:cNvPr id="27" name="TextBox 26"/>
+          <p:cNvSpPr txBox="1"/>
+          <p:nvPr/>
+        </p:nvSpPr>
+        <p:spPr>
+          <a:xfrm>
+            <a:off x="502920" y="5294376"/>
+            <a:ext cx="1005840" cy="365760"/>
+          </a:xfrm>
+          <a:prstGeom prst="rect">
+            <a:avLst/>
+          </a:prstGeom>
+          <a:noFill/>
+        </p:spPr>
+        <p:txBody>
+          <a:bodyPr wrap="square" lIns="36576" rIns="36576" tIns="18288" bIns="18288" anchor="t">
+            <a:spAutoFit/>
+          </a:bodyPr>
+          <a:lstStyle/>
+          <a:p>
+            <a:pPr algn="ctr">
+              <a:lnSpc>
+                <a:spcPct val="115000"/>
+              </a:lnSpc>
+            </a:pPr>
+            <a:r>
+              <a:rPr sz="1500" b="1" i="0">
+                <a:solidFill>
+                  <a:srgbClr val="FFFFFF"/>
+                </a:solidFill>
+                <a:latin typeface="Helvetica"/>
+              </a:rPr>
+              <a:t>CC-5</a:t>
+            </a:r>
+          </a:p>
+        </p:txBody>
+      </p:sp>
+      <p:sp>
+        <p:nvSpPr>
+          <p:cNvPr id="28" name="TextBox 27"/>
+          <p:cNvSpPr txBox="1"/>
+          <p:nvPr/>
+        </p:nvSpPr>
+        <p:spPr>
+          <a:xfrm>
+            <a:off x="502920" y="5660136"/>
+            <a:ext cx="1005840" cy="457200"/>
+          </a:xfrm>
+          <a:prstGeom prst="rect">
+            <a:avLst/>
+          </a:prstGeom>
+          <a:noFill/>
+        </p:spPr>
+        <p:txBody>
+          <a:bodyPr wrap="square" lIns="36576" rIns="36576" tIns="18288" bIns="18288" anchor="t">
+            <a:spAutoFit/>
+          </a:bodyPr>
+          <a:lstStyle/>
+          <a:p>
+            <a:pPr algn="ctr">
+              <a:lnSpc>
+                <a:spcPct val="115000"/>
+              </a:lnSpc>
+            </a:pPr>
+            <a:r>
+              <a:rPr sz="800" b="0" i="1">
+                <a:solidFill>
+                  <a:srgbClr val="FFFFFF"/>
+                </a:solidFill>
+                <a:latin typeface="Georgia"/>
+              </a:rPr>
+              <a:t>interlock</a:t>
+            </a:r>
+          </a:p>
+        </p:txBody>
+      </p:sp>
+      <p:sp>
+        <p:nvSpPr>
+          <p:cNvPr id="29" name="TextBox 28"/>
+          <p:cNvSpPr txBox="1"/>
+          <p:nvPr/>
+        </p:nvSpPr>
+        <p:spPr>
+          <a:xfrm>
+            <a:off x="1691640" y="5266944"/>
+            <a:ext cx="10012680" cy="365760"/>
+          </a:xfrm>
+          <a:prstGeom prst="rect">
+            <a:avLst/>
+          </a:prstGeom>
+          <a:noFill/>
+        </p:spPr>
+        <p:txBody>
+          <a:bodyPr wrap="square" lIns="36576" rIns="36576" tIns="18288" bIns="18288" anchor="t">
+            <a:spAutoFit/>
+          </a:bodyPr>
+          <a:lstStyle/>
+          <a:p>
+            <a:pPr algn="l">
+              <a:lnSpc>
+                <a:spcPct val="115000"/>
+              </a:lnSpc>
+            </a:pPr>
+            <a:r>
+              <a:rPr sz="1400" b="1" i="0">
+                <a:solidFill>
+                  <a:srgbClr val="1A3A6B"/>
+                </a:solidFill>
+                <a:latin typeface="Helvetica"/>
+              </a:rPr>
+              <a:t>Aging/ADRD — no WG owns it cleanly</a:t>
+            </a:r>
+          </a:p>
+        </p:txBody>
+      </p:sp>
+      <p:sp>
+        <p:nvSpPr>
+          <p:cNvPr id="30" name="TextBox 29"/>
+          <p:cNvSpPr txBox="1"/>
+          <p:nvPr/>
+        </p:nvSpPr>
+        <p:spPr>
+          <a:xfrm>
+            <a:off x="1691640" y="5632704"/>
+            <a:ext cx="10012680" cy="548640"/>
+          </a:xfrm>
+          <a:prstGeom prst="rect">
+            <a:avLst/>
+          </a:prstGeom>
+          <a:noFill/>
+        </p:spPr>
+        <p:txBody>
+          <a:bodyPr wrap="square" lIns="36576" rIns="36576" tIns="18288" bIns="18288" anchor="t">
+            <a:spAutoFit/>
+          </a:bodyPr>
+          <a:lstStyle/>
+          <a:p>
+            <a:pPr algn="l">
+              <a:lnSpc>
+                <a:spcPct val="125000"/>
+              </a:lnSpc>
+            </a:pPr>
+            <a:r>
+              <a:rPr sz="1150" b="0" i="0">
+                <a:solidFill>
+                  <a:srgbClr val="333333"/>
+                </a:solidFill>
+                <a:latin typeface="Georgia"/>
+              </a:rPr>
+              <a:t>Narrowing peer gap (AoU 6.0% post-2023, ~peer median 0.84×, trend +4.7 vs UKB +6.9 / MVP +5.4 / CKB +5.1). FLAG for WG leads; consider Tier-2 priority + WG-5 patient story.</a:t>
+            </a:r>
+          </a:p>
+        </p:txBody>
+      </p:sp>
+      <p:sp>
+        <p:nvSpPr>
+          <p:cNvPr id="31" name="TextBox 30"/>
           <p:cNvSpPr txBox="1"/>
           <p:nvPr/>
         </p:nvSpPr>
@@ -14572,7 +15143,7 @@
       </p:sp>
       <p:sp>
         <p:nvSpPr>
-          <p:cNvPr id="16" name="TextBox 15"/>
+          <p:cNvPr id="32" name="TextBox 31"/>
           <p:cNvSpPr txBox="1"/>
           <p:nvPr/>
         </p:nvSpPr>
@@ -14604,7 +15175,7 @@
                 </a:solidFill>
                 <a:latin typeface="Georgia"/>
               </a:rPr>
-              <a:t>19 / 20</a:t>
+              <a:t>19 / 21</a:t>
             </a:r>
           </a:p>
         </p:txBody>
@@ -15196,7 +15767,7 @@
                 </a:solidFill>
                 <a:latin typeface="Georgia"/>
               </a:rPr>
-              <a:t>2 / 20</a:t>
+              <a:t>2 / 21</a:t>
             </a:r>
           </a:p>
         </p:txBody>
@@ -15297,7 +15868,7 @@
                 </a:solidFill>
                 <a:latin typeface="Helvetica"/>
               </a:rPr>
-              <a:t>What we ask the Science Committee to decide</a:t>
+              <a:t>Caveats — three things the Sci Com should know before acting</a:t>
             </a:r>
           </a:p>
         </p:txBody>
@@ -15336,7 +15907,7 @@
                 </a:solidFill>
                 <a:latin typeface="Georgia"/>
               </a:rPr>
-              <a:t>Four concrete decisions today; one calendar commitment for the cross-WG hierarchy.</a:t>
+              <a:t>Each caveat is a reason to be careful, not a reason to discount the analysis.</a:t>
             </a:r>
           </a:p>
         </p:txBody>
@@ -15387,14 +15958,672 @@
       </p:sp>
       <p:sp>
         <p:nvSpPr>
+          <p:cNvPr id="6" name="Oval 5"/>
+          <p:cNvSpPr/>
+          <p:nvPr/>
+        </p:nvSpPr>
+        <p:spPr>
+          <a:xfrm>
+            <a:off x="548640" y="1280160"/>
+            <a:ext cx="713232" cy="713232"/>
+          </a:xfrm>
+          <a:prstGeom prst="ellipse">
+            <a:avLst/>
+          </a:prstGeom>
+          <a:solidFill>
+            <a:srgbClr val="B35900"/>
+          </a:solidFill>
+          <a:ln>
+            <a:solidFill>
+              <a:srgbClr val="B35900"/>
+            </a:solidFill>
+          </a:ln>
+        </p:spPr>
+        <p:style>
+          <a:lnRef idx="1">
+            <a:schemeClr val="accent1"/>
+          </a:lnRef>
+          <a:fillRef idx="3">
+            <a:schemeClr val="accent1"/>
+          </a:fillRef>
+          <a:effectRef idx="2">
+            <a:schemeClr val="accent1"/>
+          </a:effectRef>
+          <a:fontRef idx="minor">
+            <a:schemeClr val="lt1"/>
+          </a:fontRef>
+        </p:style>
+        <p:txBody>
+          <a:bodyPr rtlCol="0" anchor="ctr" lIns="0" rIns="0"/>
+          <a:lstStyle/>
+          <a:p>
+            <a:pPr algn="ctr"/>
+            <a:r>
+              <a:rPr b="1" sz="2000">
+                <a:solidFill>
+                  <a:srgbClr val="FFFFFF"/>
+                </a:solidFill>
+                <a:latin typeface="Helvetica"/>
+              </a:rPr>
+              <a:t>1</a:t>
+            </a:r>
+          </a:p>
+        </p:txBody>
+      </p:sp>
+      <p:sp>
+        <p:nvSpPr>
+          <p:cNvPr id="7" name="TextBox 6"/>
+          <p:cNvSpPr txBox="1"/>
+          <p:nvPr/>
+        </p:nvSpPr>
+        <p:spPr>
+          <a:xfrm>
+            <a:off x="1463040" y="1298448"/>
+            <a:ext cx="10241280" cy="384048"/>
+          </a:xfrm>
+          <a:prstGeom prst="rect">
+            <a:avLst/>
+          </a:prstGeom>
+          <a:noFill/>
+        </p:spPr>
+        <p:txBody>
+          <a:bodyPr wrap="square" lIns="36576" rIns="36576" tIns="18288" bIns="18288" anchor="t">
+            <a:spAutoFit/>
+          </a:bodyPr>
+          <a:lstStyle/>
+          <a:p>
+            <a:pPr algn="l">
+              <a:lnSpc>
+                <a:spcPct val="110000"/>
+              </a:lnSpc>
+            </a:pPr>
+            <a:r>
+              <a:rPr sz="1550" b="1" i="0">
+                <a:solidFill>
+                  <a:srgbClr val="B35900"/>
+                </a:solidFill>
+                <a:latin typeface="Helvetica"/>
+              </a:rPr>
+              <a:t>Dermatology over-representation is an ARTIFACT</a:t>
+            </a:r>
+          </a:p>
+        </p:txBody>
+      </p:sp>
+      <p:sp>
+        <p:nvSpPr>
+          <p:cNvPr id="8" name="TextBox 7"/>
+          <p:cNvSpPr txBox="1"/>
+          <p:nvPr/>
+        </p:nvSpPr>
+        <p:spPr>
+          <a:xfrm>
+            <a:off x="1463040" y="1691640"/>
+            <a:ext cx="10241280" cy="1188720"/>
+          </a:xfrm>
+          <a:prstGeom prst="rect">
+            <a:avLst/>
+          </a:prstGeom>
+          <a:noFill/>
+        </p:spPr>
+        <p:txBody>
+          <a:bodyPr wrap="square" lIns="36576" rIns="36576" tIns="18288" bIns="18288" anchor="t">
+            <a:spAutoFit/>
+          </a:bodyPr>
+          <a:lstStyle/>
+          <a:p>
+            <a:pPr algn="l">
+              <a:lnSpc>
+                <a:spcPct val="130000"/>
+              </a:lnSpc>
+            </a:pPr>
+            <a:r>
+              <a:rPr sz="1150" b="0" i="0">
+                <a:solidFill>
+                  <a:srgbClr val="333333"/>
+                </a:solidFill>
+                <a:latin typeface="Georgia"/>
+              </a:rPr>
+              <a:t>Dermatology is 13.9% of the corpus and 6.9× the peer median — but driven by 1–2 prolific groups, not a strategic priority. Trend score −4.4 (declining share). Do NOT elevate dermatology in the Refresh even though the share index suggests it. WG-5 ambassador toolkit must have the artifact answer rehearsed.</a:t>
+            </a:r>
+          </a:p>
+        </p:txBody>
+      </p:sp>
+      <p:sp>
+        <p:nvSpPr>
+          <p:cNvPr id="9" name="Oval 8"/>
+          <p:cNvSpPr/>
+          <p:nvPr/>
+        </p:nvSpPr>
+        <p:spPr>
+          <a:xfrm>
+            <a:off x="548640" y="2907792"/>
+            <a:ext cx="713232" cy="713232"/>
+          </a:xfrm>
+          <a:prstGeom prst="ellipse">
+            <a:avLst/>
+          </a:prstGeom>
+          <a:solidFill>
+            <a:srgbClr val="B35900"/>
+          </a:solidFill>
+          <a:ln>
+            <a:solidFill>
+              <a:srgbClr val="B35900"/>
+            </a:solidFill>
+          </a:ln>
+        </p:spPr>
+        <p:style>
+          <a:lnRef idx="1">
+            <a:schemeClr val="accent1"/>
+          </a:lnRef>
+          <a:fillRef idx="3">
+            <a:schemeClr val="accent1"/>
+          </a:fillRef>
+          <a:effectRef idx="2">
+            <a:schemeClr val="accent1"/>
+          </a:effectRef>
+          <a:fontRef idx="minor">
+            <a:schemeClr val="lt1"/>
+          </a:fontRef>
+        </p:style>
+        <p:txBody>
+          <a:bodyPr rtlCol="0" anchor="ctr" lIns="0" rIns="0"/>
+          <a:lstStyle/>
+          <a:p>
+            <a:pPr algn="ctr"/>
+            <a:r>
+              <a:rPr b="1" sz="2000">
+                <a:solidFill>
+                  <a:srgbClr val="FFFFFF"/>
+                </a:solidFill>
+                <a:latin typeface="Helvetica"/>
+              </a:rPr>
+              <a:t>2</a:t>
+            </a:r>
+          </a:p>
+        </p:txBody>
+      </p:sp>
+      <p:sp>
+        <p:nvSpPr>
+          <p:cNvPr id="10" name="TextBox 9"/>
+          <p:cNvSpPr txBox="1"/>
+          <p:nvPr/>
+        </p:nvSpPr>
+        <p:spPr>
+          <a:xfrm>
+            <a:off x="1463040" y="2926080"/>
+            <a:ext cx="10241280" cy="384048"/>
+          </a:xfrm>
+          <a:prstGeom prst="rect">
+            <a:avLst/>
+          </a:prstGeom>
+          <a:noFill/>
+        </p:spPr>
+        <p:txBody>
+          <a:bodyPr wrap="square" lIns="36576" rIns="36576" tIns="18288" bIns="18288" anchor="t">
+            <a:spAutoFit/>
+          </a:bodyPr>
+          <a:lstStyle/>
+          <a:p>
+            <a:pPr algn="l">
+              <a:lnSpc>
+                <a:spcPct val="110000"/>
+              </a:lnSpc>
+            </a:pPr>
+            <a:r>
+              <a:rPr sz="1550" b="1" i="0">
+                <a:solidFill>
+                  <a:srgbClr val="B35900"/>
+                </a:solidFill>
+                <a:latin typeface="Helvetica"/>
+              </a:rPr>
+              <a:t>Peer-biobank counts use PubMed name-search fallback</a:t>
+            </a:r>
+          </a:p>
+        </p:txBody>
+      </p:sp>
+      <p:sp>
+        <p:nvSpPr>
+          <p:cNvPr id="11" name="TextBox 10"/>
+          <p:cNvSpPr txBox="1"/>
+          <p:nvPr/>
+        </p:nvSpPr>
+        <p:spPr>
+          <a:xfrm>
+            <a:off x="1463040" y="3319272"/>
+            <a:ext cx="10241280" cy="1188720"/>
+          </a:xfrm>
+          <a:prstGeom prst="rect">
+            <a:avLst/>
+          </a:prstGeom>
+          <a:noFill/>
+        </p:spPr>
+        <p:txBody>
+          <a:bodyPr wrap="square" lIns="36576" rIns="36576" tIns="18288" bIns="18288" anchor="t">
+            <a:spAutoFit/>
+          </a:bodyPr>
+          <a:lstStyle/>
+          <a:p>
+            <a:pPr algn="l">
+              <a:lnSpc>
+                <a:spcPct val="130000"/>
+              </a:lnSpc>
+            </a:pPr>
+            <a:r>
+              <a:rPr sz="1150" b="0" i="0">
+                <a:solidFill>
+                  <a:srgbClr val="333333"/>
+                </a:solidFill>
+                <a:latin typeface="Georgia"/>
+              </a:rPr>
+              <a:t>UKB, FinnGen, MVP, and CKB corpora come from PubMed name-search with same-tagger keyword tagging — now full PubMed censuses (UKB 11,868; FinnGen 3,152; MVP 438; CKB 558). Internally consistent across peers but absolute counts under- and over-count differently. USE THE STATIC SHARE INDEX, not trend differentials, for action-relevant comparisons. MVP corpus is small (438); single-MVP signals need a second-peer corroboration.</a:t>
+            </a:r>
+          </a:p>
+        </p:txBody>
+      </p:sp>
+      <p:sp>
+        <p:nvSpPr>
+          <p:cNvPr id="12" name="Oval 11"/>
+          <p:cNvSpPr/>
+          <p:nvPr/>
+        </p:nvSpPr>
+        <p:spPr>
+          <a:xfrm>
+            <a:off x="548640" y="4535424"/>
+            <a:ext cx="713232" cy="713232"/>
+          </a:xfrm>
+          <a:prstGeom prst="ellipse">
+            <a:avLst/>
+          </a:prstGeom>
+          <a:solidFill>
+            <a:srgbClr val="B35900"/>
+          </a:solidFill>
+          <a:ln>
+            <a:solidFill>
+              <a:srgbClr val="B35900"/>
+            </a:solidFill>
+          </a:ln>
+        </p:spPr>
+        <p:style>
+          <a:lnRef idx="1">
+            <a:schemeClr val="accent1"/>
+          </a:lnRef>
+          <a:fillRef idx="3">
+            <a:schemeClr val="accent1"/>
+          </a:fillRef>
+          <a:effectRef idx="2">
+            <a:schemeClr val="accent1"/>
+          </a:effectRef>
+          <a:fontRef idx="minor">
+            <a:schemeClr val="lt1"/>
+          </a:fontRef>
+        </p:style>
+        <p:txBody>
+          <a:bodyPr rtlCol="0" anchor="ctr" lIns="0" rIns="0"/>
+          <a:lstStyle/>
+          <a:p>
+            <a:pPr algn="ctr"/>
+            <a:r>
+              <a:rPr b="1" sz="2000">
+                <a:solidFill>
+                  <a:srgbClr val="FFFFFF"/>
+                </a:solidFill>
+                <a:latin typeface="Helvetica"/>
+              </a:rPr>
+              <a:t>3</a:t>
+            </a:r>
+          </a:p>
+        </p:txBody>
+      </p:sp>
+      <p:sp>
+        <p:nvSpPr>
+          <p:cNvPr id="13" name="TextBox 12"/>
+          <p:cNvSpPr txBox="1"/>
+          <p:nvPr/>
+        </p:nvSpPr>
+        <p:spPr>
+          <a:xfrm>
+            <a:off x="1463040" y="4553712"/>
+            <a:ext cx="10241280" cy="384048"/>
+          </a:xfrm>
+          <a:prstGeom prst="rect">
+            <a:avLst/>
+          </a:prstGeom>
+          <a:noFill/>
+        </p:spPr>
+        <p:txBody>
+          <a:bodyPr wrap="square" lIns="36576" rIns="36576" tIns="18288" bIns="18288" anchor="t">
+            <a:spAutoFit/>
+          </a:bodyPr>
+          <a:lstStyle/>
+          <a:p>
+            <a:pPr algn="l">
+              <a:lnSpc>
+                <a:spcPct val="110000"/>
+              </a:lnSpc>
+            </a:pPr>
+            <a:r>
+              <a:rPr sz="1550" b="1" i="0">
+                <a:solidFill>
+                  <a:srgbClr val="B35900"/>
+                </a:solidFill>
+                <a:latin typeface="Helvetica"/>
+              </a:rPr>
+              <a:t>AoU pre-2023 baseline is tiny (157 pubs)</a:t>
+            </a:r>
+          </a:p>
+        </p:txBody>
+      </p:sp>
+      <p:sp>
+        <p:nvSpPr>
+          <p:cNvPr id="14" name="TextBox 13"/>
+          <p:cNvSpPr txBox="1"/>
+          <p:nvPr/>
+        </p:nvSpPr>
+        <p:spPr>
+          <a:xfrm>
+            <a:off x="1463040" y="4946904"/>
+            <a:ext cx="10241280" cy="1188720"/>
+          </a:xfrm>
+          <a:prstGeom prst="rect">
+            <a:avLst/>
+          </a:prstGeom>
+          <a:noFill/>
+        </p:spPr>
+        <p:txBody>
+          <a:bodyPr wrap="square" lIns="36576" rIns="36576" tIns="18288" bIns="18288" anchor="t">
+            <a:spAutoFit/>
+          </a:bodyPr>
+          <a:lstStyle/>
+          <a:p>
+            <a:pPr algn="l">
+              <a:lnSpc>
+                <a:spcPct val="130000"/>
+              </a:lnSpc>
+            </a:pPr>
+            <a:r>
+              <a:rPr sz="1150" b="0" i="0">
+                <a:solidFill>
+                  <a:srgbClr val="333333"/>
+                </a:solidFill>
+                <a:latin typeface="Georgia"/>
+              </a:rPr>
+              <a:t>Any active post-2023 theme will trend positive in AoU's split simply because the corpus grew ~8.1× from pre- to post-2023. Apparent 'growth' on cardiometabolic, mental health, and cancer is largely a small-baseline artifact — read as 'AoU has built a presence here,' not 'AoU is uniquely outpacing the field.' True growth signals come from the peer-comparison panel, not from the AoU-internal pre/post split.</a:t>
+            </a:r>
+          </a:p>
+        </p:txBody>
+      </p:sp>
+      <p:sp>
+        <p:nvSpPr>
+          <p:cNvPr id="15" name="TextBox 14"/>
+          <p:cNvSpPr txBox="1"/>
+          <p:nvPr/>
+        </p:nvSpPr>
+        <p:spPr>
+          <a:xfrm>
+            <a:off x="457200" y="6492240"/>
+            <a:ext cx="7315200" cy="274320"/>
+          </a:xfrm>
+          <a:prstGeom prst="rect">
+            <a:avLst/>
+          </a:prstGeom>
+          <a:noFill/>
+        </p:spPr>
+        <p:txBody>
+          <a:bodyPr wrap="square" lIns="36576" rIns="36576" tIns="18288" bIns="18288" anchor="t">
+            <a:spAutoFit/>
+          </a:bodyPr>
+          <a:lstStyle/>
+          <a:p>
+            <a:pPr algn="l">
+              <a:lnSpc>
+                <a:spcPct val="115000"/>
+              </a:lnSpc>
+            </a:pPr>
+            <a:r>
+              <a:rPr sz="850" b="0" i="1">
+                <a:solidFill>
+                  <a:srgbClr val="666666"/>
+                </a:solidFill>
+                <a:latin typeface="Georgia"/>
+              </a:rPr>
+              <a:t>All of Us Scientific Roadmap Refresh  •  WG-1 Draft  •  Smoller &amp; Haendel  •  2026-06-02</a:t>
+            </a:r>
+          </a:p>
+        </p:txBody>
+      </p:sp>
+      <p:sp>
+        <p:nvSpPr>
+          <p:cNvPr id="16" name="TextBox 15"/>
+          <p:cNvSpPr txBox="1"/>
+          <p:nvPr/>
+        </p:nvSpPr>
+        <p:spPr>
+          <a:xfrm>
+            <a:off x="10515600" y="6492240"/>
+            <a:ext cx="1188720" cy="274320"/>
+          </a:xfrm>
+          <a:prstGeom prst="rect">
+            <a:avLst/>
+          </a:prstGeom>
+          <a:noFill/>
+        </p:spPr>
+        <p:txBody>
+          <a:bodyPr wrap="square" lIns="36576" rIns="36576" tIns="18288" bIns="18288" anchor="t">
+            <a:spAutoFit/>
+          </a:bodyPr>
+          <a:lstStyle/>
+          <a:p>
+            <a:pPr algn="r">
+              <a:lnSpc>
+                <a:spcPct val="115000"/>
+              </a:lnSpc>
+            </a:pPr>
+            <a:r>
+              <a:rPr sz="850" b="0" i="1">
+                <a:solidFill>
+                  <a:srgbClr val="666666"/>
+                </a:solidFill>
+                <a:latin typeface="Georgia"/>
+              </a:rPr>
+              <a:t>20 / 21</a:t>
+            </a:r>
+          </a:p>
+        </p:txBody>
+      </p:sp>
+    </p:spTree>
+  </p:cSld>
+  <p:clrMapOvr>
+    <a:masterClrMapping/>
+  </p:clrMapOvr>
+</p:sld>
+</file>
+
+<file path=ppt/slides/slide21.xml><?xml version="1.0" encoding="utf-8"?>
+<p:sld xmlns:a="http://schemas.openxmlformats.org/drawingml/2006/main" xmlns:p="http://schemas.openxmlformats.org/presentationml/2006/main" xmlns:r="http://schemas.openxmlformats.org/officeDocument/2006/relationships">
+  <p:cSld>
+    <p:spTree>
+      <p:nvGrpSpPr>
+        <p:cNvPr id="1" name=""/>
+        <p:cNvGrpSpPr/>
+        <p:nvPr/>
+      </p:nvGrpSpPr>
+      <p:grpSpPr/>
+      <p:sp>
+        <p:nvSpPr>
+          <p:cNvPr id="2" name="Rectangle 1"/>
+          <p:cNvSpPr/>
+          <p:nvPr/>
+        </p:nvSpPr>
+        <p:spPr>
+          <a:xfrm>
+            <a:off x="0" y="0"/>
+            <a:ext cx="12191695" cy="73152"/>
+          </a:xfrm>
+          <a:prstGeom prst="rect">
+            <a:avLst/>
+          </a:prstGeom>
+          <a:solidFill>
+            <a:srgbClr val="1A3A6B"/>
+          </a:solidFill>
+          <a:ln>
+            <a:noFill/>
+          </a:ln>
+          <a:effectLst/>
+        </p:spPr>
+        <p:style>
+          <a:lnRef idx="1">
+            <a:schemeClr val="accent1"/>
+          </a:lnRef>
+          <a:fillRef idx="3">
+            <a:schemeClr val="accent1"/>
+          </a:fillRef>
+          <a:effectRef idx="2">
+            <a:schemeClr val="accent1"/>
+          </a:effectRef>
+          <a:fontRef idx="minor">
+            <a:schemeClr val="lt1"/>
+          </a:fontRef>
+        </p:style>
+        <p:txBody>
+          <a:bodyPr rtlCol="0" anchor="ctr"/>
+          <a:lstStyle/>
+          <a:p>
+            <a:pPr algn="ctr"/>
+          </a:p>
+        </p:txBody>
+      </p:sp>
+      <p:sp>
+        <p:nvSpPr>
+          <p:cNvPr id="3" name="TextBox 2"/>
+          <p:cNvSpPr txBox="1"/>
+          <p:nvPr/>
+        </p:nvSpPr>
+        <p:spPr>
+          <a:xfrm>
+            <a:off x="457200" y="164592"/>
+            <a:ext cx="11247120" cy="502920"/>
+          </a:xfrm>
+          <a:prstGeom prst="rect">
+            <a:avLst/>
+          </a:prstGeom>
+          <a:noFill/>
+        </p:spPr>
+        <p:txBody>
+          <a:bodyPr wrap="square" lIns="36576" rIns="36576" tIns="18288" bIns="18288" anchor="t">
+            <a:spAutoFit/>
+          </a:bodyPr>
+          <a:lstStyle/>
+          <a:p>
+            <a:pPr algn="l">
+              <a:lnSpc>
+                <a:spcPct val="105000"/>
+              </a:lnSpc>
+            </a:pPr>
+            <a:r>
+              <a:rPr sz="2200" b="1" i="0">
+                <a:solidFill>
+                  <a:srgbClr val="1A3A6B"/>
+                </a:solidFill>
+                <a:latin typeface="Helvetica"/>
+              </a:rPr>
+              <a:t>What we ask the Science Committee to decide</a:t>
+            </a:r>
+          </a:p>
+        </p:txBody>
+      </p:sp>
+      <p:sp>
+        <p:nvSpPr>
+          <p:cNvPr id="4" name="TextBox 3"/>
+          <p:cNvSpPr txBox="1"/>
+          <p:nvPr/>
+        </p:nvSpPr>
+        <p:spPr>
+          <a:xfrm>
+            <a:off x="457200" y="685800"/>
+            <a:ext cx="11247120" cy="292608"/>
+          </a:xfrm>
+          <a:prstGeom prst="rect">
+            <a:avLst/>
+          </a:prstGeom>
+          <a:noFill/>
+        </p:spPr>
+        <p:txBody>
+          <a:bodyPr wrap="square" lIns="36576" rIns="36576" tIns="18288" bIns="18288" anchor="t">
+            <a:spAutoFit/>
+          </a:bodyPr>
+          <a:lstStyle/>
+          <a:p>
+            <a:pPr algn="l">
+              <a:lnSpc>
+                <a:spcPct val="110000"/>
+              </a:lnSpc>
+            </a:pPr>
+            <a:r>
+              <a:rPr sz="1200" b="0" i="1">
+                <a:solidFill>
+                  <a:srgbClr val="666666"/>
+                </a:solidFill>
+                <a:latin typeface="Georgia"/>
+              </a:rPr>
+              <a:t>Five concrete decisions today; one calendar commitment for the cross-WG hierarchy.</a:t>
+            </a:r>
+          </a:p>
+        </p:txBody>
+      </p:sp>
+      <p:sp>
+        <p:nvSpPr>
+          <p:cNvPr id="5" name="Rectangle 4"/>
+          <p:cNvSpPr/>
+          <p:nvPr/>
+        </p:nvSpPr>
+        <p:spPr>
+          <a:xfrm>
+            <a:off x="457200" y="1005840"/>
+            <a:ext cx="11247120" cy="9525"/>
+          </a:xfrm>
+          <a:prstGeom prst="rect">
+            <a:avLst/>
+          </a:prstGeom>
+          <a:solidFill>
+            <a:srgbClr val="C8C8C8"/>
+          </a:solidFill>
+          <a:ln>
+            <a:noFill/>
+          </a:ln>
+          <a:effectLst/>
+        </p:spPr>
+        <p:style>
+          <a:lnRef idx="1">
+            <a:schemeClr val="accent1"/>
+          </a:lnRef>
+          <a:fillRef idx="3">
+            <a:schemeClr val="accent1"/>
+          </a:fillRef>
+          <a:effectRef idx="2">
+            <a:schemeClr val="accent1"/>
+          </a:effectRef>
+          <a:fontRef idx="minor">
+            <a:schemeClr val="lt1"/>
+          </a:fontRef>
+        </p:style>
+        <p:txBody>
+          <a:bodyPr rtlCol="0" anchor="ctr"/>
+          <a:lstStyle/>
+          <a:p>
+            <a:pPr algn="ctr"/>
+          </a:p>
+        </p:txBody>
+      </p:sp>
+      <p:sp>
+        <p:nvSpPr>
           <p:cNvPr id="6" name="Rectangle 5"/>
           <p:cNvSpPr/>
           <p:nvPr/>
         </p:nvSpPr>
         <p:spPr>
           <a:xfrm>
-            <a:off x="502920" y="1280160"/>
-            <a:ext cx="1920240" cy="960120"/>
+            <a:off x="502920" y="1143000"/>
+            <a:ext cx="1920240" cy="822960"/>
           </a:xfrm>
           <a:prstGeom prst="rect">
             <a:avLst/>
@@ -15437,8 +16666,8 @@
         </p:nvSpPr>
         <p:spPr>
           <a:xfrm>
-            <a:off x="502920" y="1508760"/>
-            <a:ext cx="1920240" cy="502920"/>
+            <a:off x="502920" y="1325880"/>
+            <a:ext cx="1920240" cy="457200"/>
           </a:xfrm>
           <a:prstGeom prst="rect">
             <a:avLst/>
@@ -15457,7 +16686,7 @@
               </a:lnSpc>
             </a:pPr>
             <a:r>
-              <a:rPr sz="1800" b="1" i="0">
+              <a:rPr sz="1600" b="1" i="0">
                 <a:solidFill>
                   <a:srgbClr val="FFFFFF"/>
                 </a:solidFill>
@@ -15476,7 +16705,7 @@
         </p:nvSpPr>
         <p:spPr>
           <a:xfrm>
-            <a:off x="2606040" y="1325880"/>
+            <a:off x="2606040" y="1161288"/>
             <a:ext cx="9098280" cy="457200"/>
           </a:xfrm>
           <a:prstGeom prst="rect">
@@ -15492,11 +16721,11 @@
           <a:p>
             <a:pPr algn="l">
               <a:lnSpc>
-                <a:spcPct val="112000"/>
-              </a:lnSpc>
-            </a:pPr>
-            <a:r>
-              <a:rPr sz="1400" b="1" i="0">
+                <a:spcPct val="108000"/>
+              </a:lnSpc>
+            </a:pPr>
+            <a:r>
+              <a:rPr sz="1300" b="1" i="0">
                 <a:solidFill>
                   <a:srgbClr val="1A3A6B"/>
                 </a:solidFill>
@@ -15515,8 +16744,8 @@
         </p:nvSpPr>
         <p:spPr>
           <a:xfrm>
-            <a:off x="2606040" y="1783080"/>
-            <a:ext cx="9098280" cy="502920"/>
+            <a:off x="2606040" y="1581912"/>
+            <a:ext cx="9098280" cy="457200"/>
           </a:xfrm>
           <a:prstGeom prst="rect">
             <a:avLst/>
@@ -15531,11 +16760,11 @@
           <a:p>
             <a:pPr algn="l">
               <a:lnSpc>
-                <a:spcPct val="125000"/>
-              </a:lnSpc>
-            </a:pPr>
-            <a:r>
-              <a:rPr sz="1150" b="0" i="1">
+                <a:spcPct val="115000"/>
+              </a:lnSpc>
+            </a:pPr>
+            <a:r>
+              <a:rPr sz="1050" b="0" i="1">
                 <a:solidFill>
                   <a:srgbClr val="333333"/>
                 </a:solidFill>
@@ -15554,8 +16783,8 @@
         </p:nvSpPr>
         <p:spPr>
           <a:xfrm>
-            <a:off x="502920" y="2377440"/>
-            <a:ext cx="1920240" cy="960120"/>
+            <a:off x="502920" y="2057400"/>
+            <a:ext cx="1920240" cy="822960"/>
           </a:xfrm>
           <a:prstGeom prst="rect">
             <a:avLst/>
@@ -15598,8 +16827,8 @@
         </p:nvSpPr>
         <p:spPr>
           <a:xfrm>
-            <a:off x="502920" y="2606040"/>
-            <a:ext cx="1920240" cy="502920"/>
+            <a:off x="502920" y="2240280"/>
+            <a:ext cx="1920240" cy="457200"/>
           </a:xfrm>
           <a:prstGeom prst="rect">
             <a:avLst/>
@@ -15618,7 +16847,7 @@
               </a:lnSpc>
             </a:pPr>
             <a:r>
-              <a:rPr sz="1800" b="1" i="0">
+              <a:rPr sz="1600" b="1" i="0">
                 <a:solidFill>
                   <a:srgbClr val="FFFFFF"/>
                 </a:solidFill>
@@ -15637,7 +16866,7 @@
         </p:nvSpPr>
         <p:spPr>
           <a:xfrm>
-            <a:off x="2606040" y="2423160"/>
+            <a:off x="2606040" y="2075688"/>
             <a:ext cx="9098280" cy="457200"/>
           </a:xfrm>
           <a:prstGeom prst="rect">
@@ -15653,11 +16882,11 @@
           <a:p>
             <a:pPr algn="l">
               <a:lnSpc>
-                <a:spcPct val="112000"/>
-              </a:lnSpc>
-            </a:pPr>
-            <a:r>
-              <a:rPr sz="1400" b="1" i="0">
+                <a:spcPct val="108000"/>
+              </a:lnSpc>
+            </a:pPr>
+            <a:r>
+              <a:rPr sz="1300" b="1" i="0">
                 <a:solidFill>
                   <a:srgbClr val="1A3A6B"/>
                 </a:solidFill>
@@ -15676,8 +16905,8 @@
         </p:nvSpPr>
         <p:spPr>
           <a:xfrm>
-            <a:off x="2606040" y="2880360"/>
-            <a:ext cx="9098280" cy="502920"/>
+            <a:off x="2606040" y="2496312"/>
+            <a:ext cx="9098280" cy="457200"/>
           </a:xfrm>
           <a:prstGeom prst="rect">
             <a:avLst/>
@@ -15692,11 +16921,11 @@
           <a:p>
             <a:pPr algn="l">
               <a:lnSpc>
-                <a:spcPct val="125000"/>
-              </a:lnSpc>
-            </a:pPr>
-            <a:r>
-              <a:rPr sz="1150" b="0" i="1">
+                <a:spcPct val="115000"/>
+              </a:lnSpc>
+            </a:pPr>
+            <a:r>
+              <a:rPr sz="1050" b="0" i="1">
                 <a:solidFill>
                   <a:srgbClr val="333333"/>
                 </a:solidFill>
@@ -15715,8 +16944,8 @@
         </p:nvSpPr>
         <p:spPr>
           <a:xfrm>
-            <a:off x="502920" y="3474720"/>
-            <a:ext cx="1920240" cy="960120"/>
+            <a:off x="502920" y="2971800"/>
+            <a:ext cx="1920240" cy="822960"/>
           </a:xfrm>
           <a:prstGeom prst="rect">
             <a:avLst/>
@@ -15759,8 +16988,8 @@
         </p:nvSpPr>
         <p:spPr>
           <a:xfrm>
-            <a:off x="502920" y="3703320"/>
-            <a:ext cx="1920240" cy="502920"/>
+            <a:off x="502920" y="3154680"/>
+            <a:ext cx="1920240" cy="457200"/>
           </a:xfrm>
           <a:prstGeom prst="rect">
             <a:avLst/>
@@ -15779,7 +17008,7 @@
               </a:lnSpc>
             </a:pPr>
             <a:r>
-              <a:rPr sz="1800" b="1" i="0">
+              <a:rPr sz="1600" b="1" i="0">
                 <a:solidFill>
                   <a:srgbClr val="FFFFFF"/>
                 </a:solidFill>
@@ -15798,7 +17027,7 @@
         </p:nvSpPr>
         <p:spPr>
           <a:xfrm>
-            <a:off x="2606040" y="3520440"/>
+            <a:off x="2606040" y="2990088"/>
             <a:ext cx="9098280" cy="457200"/>
           </a:xfrm>
           <a:prstGeom prst="rect">
@@ -15814,11 +17043,11 @@
           <a:p>
             <a:pPr algn="l">
               <a:lnSpc>
-                <a:spcPct val="112000"/>
-              </a:lnSpc>
-            </a:pPr>
-            <a:r>
-              <a:rPr sz="1400" b="1" i="0">
+                <a:spcPct val="108000"/>
+              </a:lnSpc>
+            </a:pPr>
+            <a:r>
+              <a:rPr sz="1300" b="1" i="0">
                 <a:solidFill>
                   <a:srgbClr val="1A3A6B"/>
                 </a:solidFill>
@@ -15837,8 +17066,8 @@
         </p:nvSpPr>
         <p:spPr>
           <a:xfrm>
-            <a:off x="2606040" y="3977640"/>
-            <a:ext cx="9098280" cy="502920"/>
+            <a:off x="2606040" y="3410712"/>
+            <a:ext cx="9098280" cy="457200"/>
           </a:xfrm>
           <a:prstGeom prst="rect">
             <a:avLst/>
@@ -15853,11 +17082,11 @@
           <a:p>
             <a:pPr algn="l">
               <a:lnSpc>
-                <a:spcPct val="125000"/>
-              </a:lnSpc>
-            </a:pPr>
-            <a:r>
-              <a:rPr sz="1150" b="0" i="1">
+                <a:spcPct val="115000"/>
+              </a:lnSpc>
+            </a:pPr>
+            <a:r>
+              <a:rPr sz="1050" b="0" i="1">
                 <a:solidFill>
                   <a:srgbClr val="333333"/>
                 </a:solidFill>
@@ -15876,8 +17105,8 @@
         </p:nvSpPr>
         <p:spPr>
           <a:xfrm>
-            <a:off x="502920" y="4572000"/>
-            <a:ext cx="1920240" cy="960120"/>
+            <a:off x="502920" y="3886200"/>
+            <a:ext cx="1920240" cy="822960"/>
           </a:xfrm>
           <a:prstGeom prst="rect">
             <a:avLst/>
@@ -15920,8 +17149,8 @@
         </p:nvSpPr>
         <p:spPr>
           <a:xfrm>
-            <a:off x="502920" y="4800600"/>
-            <a:ext cx="1920240" cy="502920"/>
+            <a:off x="502920" y="4069080"/>
+            <a:ext cx="1920240" cy="457200"/>
           </a:xfrm>
           <a:prstGeom prst="rect">
             <a:avLst/>
@@ -15940,7 +17169,7 @@
               </a:lnSpc>
             </a:pPr>
             <a:r>
-              <a:rPr sz="1800" b="1" i="0">
+              <a:rPr sz="1600" b="1" i="0">
                 <a:solidFill>
                   <a:srgbClr val="FFFFFF"/>
                 </a:solidFill>
@@ -15959,7 +17188,7 @@
         </p:nvSpPr>
         <p:spPr>
           <a:xfrm>
-            <a:off x="2606040" y="4617720"/>
+            <a:off x="2606040" y="3904488"/>
             <a:ext cx="9098280" cy="457200"/>
           </a:xfrm>
           <a:prstGeom prst="rect">
@@ -15975,11 +17204,11 @@
           <a:p>
             <a:pPr algn="l">
               <a:lnSpc>
-                <a:spcPct val="112000"/>
-              </a:lnSpc>
-            </a:pPr>
-            <a:r>
-              <a:rPr sz="1400" b="1" i="0">
+                <a:spcPct val="108000"/>
+              </a:lnSpc>
+            </a:pPr>
+            <a:r>
+              <a:rPr sz="1300" b="1" i="0">
                 <a:solidFill>
                   <a:srgbClr val="1A3A6B"/>
                 </a:solidFill>
@@ -15998,8 +17227,8 @@
         </p:nvSpPr>
         <p:spPr>
           <a:xfrm>
-            <a:off x="2606040" y="5074920"/>
-            <a:ext cx="9098280" cy="502920"/>
+            <a:off x="2606040" y="4325112"/>
+            <a:ext cx="9098280" cy="457200"/>
           </a:xfrm>
           <a:prstGeom prst="rect">
             <a:avLst/>
@@ -16014,11 +17243,11 @@
           <a:p>
             <a:pPr algn="l">
               <a:lnSpc>
-                <a:spcPct val="125000"/>
-              </a:lnSpc>
-            </a:pPr>
-            <a:r>
-              <a:rPr sz="1150" b="0" i="1">
+                <a:spcPct val="115000"/>
+              </a:lnSpc>
+            </a:pPr>
+            <a:r>
+              <a:rPr sz="1050" b="0" i="1">
                 <a:solidFill>
                   <a:srgbClr val="333333"/>
                 </a:solidFill>
@@ -16037,8 +17266,8 @@
         </p:nvSpPr>
         <p:spPr>
           <a:xfrm>
-            <a:off x="502920" y="5760720"/>
-            <a:ext cx="11201400" cy="594360"/>
+            <a:off x="502920" y="4800600"/>
+            <a:ext cx="1920240" cy="822960"/>
           </a:xfrm>
           <a:prstGeom prst="rect">
             <a:avLst/>
@@ -16081,6 +17310,167 @@
         </p:nvSpPr>
         <p:spPr>
           <a:xfrm>
+            <a:off x="502920" y="4983480"/>
+            <a:ext cx="1920240" cy="457200"/>
+          </a:xfrm>
+          <a:prstGeom prst="rect">
+            <a:avLst/>
+          </a:prstGeom>
+          <a:noFill/>
+        </p:spPr>
+        <p:txBody>
+          <a:bodyPr wrap="square" lIns="36576" rIns="36576" tIns="18288" bIns="18288" anchor="t">
+            <a:spAutoFit/>
+          </a:bodyPr>
+          <a:lstStyle/>
+          <a:p>
+            <a:pPr algn="ctr">
+              <a:lnSpc>
+                <a:spcPct val="115000"/>
+              </a:lnSpc>
+            </a:pPr>
+            <a:r>
+              <a:rPr sz="1600" b="1" i="0">
+                <a:solidFill>
+                  <a:srgbClr val="FFFFFF"/>
+                </a:solidFill>
+                <a:latin typeface="Helvetica"/>
+              </a:rPr>
+              <a:t>COMMISSION</a:t>
+            </a:r>
+          </a:p>
+        </p:txBody>
+      </p:sp>
+      <p:sp>
+        <p:nvSpPr>
+          <p:cNvPr id="24" name="TextBox 23"/>
+          <p:cNvSpPr txBox="1"/>
+          <p:nvPr/>
+        </p:nvSpPr>
+        <p:spPr>
+          <a:xfrm>
+            <a:off x="2606040" y="4818888"/>
+            <a:ext cx="9098280" cy="457200"/>
+          </a:xfrm>
+          <a:prstGeom prst="rect">
+            <a:avLst/>
+          </a:prstGeom>
+          <a:noFill/>
+        </p:spPr>
+        <p:txBody>
+          <a:bodyPr wrap="square" lIns="36576" rIns="36576" tIns="18288" bIns="18288" anchor="t">
+            <a:spAutoFit/>
+          </a:bodyPr>
+          <a:lstStyle/>
+          <a:p>
+            <a:pPr algn="l">
+              <a:lnSpc>
+                <a:spcPct val="108000"/>
+              </a:lnSpc>
+            </a:pPr>
+            <a:r>
+              <a:rPr sz="1300" b="1" i="0">
+                <a:solidFill>
+                  <a:srgbClr val="1A3A6B"/>
+                </a:solidFill>
+                <a:latin typeface="Helvetica"/>
+              </a:rPr>
+              <a:t>the Researcher Workbench build priorities: a governed in-VPC AI co-scientist, a reusable-apps/workflow registry, and multimodal-integration templates</a:t>
+            </a:r>
+          </a:p>
+        </p:txBody>
+      </p:sp>
+      <p:sp>
+        <p:nvSpPr>
+          <p:cNvPr id="25" name="TextBox 24"/>
+          <p:cNvSpPr txBox="1"/>
+          <p:nvPr/>
+        </p:nvSpPr>
+        <p:spPr>
+          <a:xfrm>
+            <a:off x="2606040" y="5239512"/>
+            <a:ext cx="9098280" cy="457200"/>
+          </a:xfrm>
+          <a:prstGeom prst="rect">
+            <a:avLst/>
+          </a:prstGeom>
+          <a:noFill/>
+        </p:spPr>
+        <p:txBody>
+          <a:bodyPr wrap="square" lIns="36576" rIns="36576" tIns="18288" bIns="18288" anchor="t">
+            <a:spAutoFit/>
+          </a:bodyPr>
+          <a:lstStyle/>
+          <a:p>
+            <a:pPr algn="l">
+              <a:lnSpc>
+                <a:spcPct val="115000"/>
+              </a:lnSpc>
+            </a:pPr>
+            <a:r>
+              <a:rPr sz="1050" b="0" i="1">
+                <a:solidFill>
+                  <a:srgbClr val="333333"/>
+                </a:solidFill>
+                <a:latin typeface="Georgia"/>
+              </a:rPr>
+              <a:t>Evidence-verified gaps vs N3C, Terra, BDC, UKB-RAP &amp; Kids First (slide 17). The in-VPC LLM is legal under the existing Google Cloud BAA. Operationalizes FA9 + the AI co-scientist.</a:t>
+            </a:r>
+          </a:p>
+        </p:txBody>
+      </p:sp>
+      <p:sp>
+        <p:nvSpPr>
+          <p:cNvPr id="26" name="Rectangle 25"/>
+          <p:cNvSpPr/>
+          <p:nvPr/>
+        </p:nvSpPr>
+        <p:spPr>
+          <a:xfrm>
+            <a:off x="502920" y="5760720"/>
+            <a:ext cx="11201400" cy="594360"/>
+          </a:xfrm>
+          <a:prstGeom prst="rect">
+            <a:avLst/>
+          </a:prstGeom>
+          <a:solidFill>
+            <a:srgbClr val="1A3A6B"/>
+          </a:solidFill>
+          <a:ln>
+            <a:noFill/>
+          </a:ln>
+          <a:effectLst/>
+        </p:spPr>
+        <p:style>
+          <a:lnRef idx="1">
+            <a:schemeClr val="accent1"/>
+          </a:lnRef>
+          <a:fillRef idx="3">
+            <a:schemeClr val="accent1"/>
+          </a:fillRef>
+          <a:effectRef idx="2">
+            <a:schemeClr val="accent1"/>
+          </a:effectRef>
+          <a:fontRef idx="minor">
+            <a:schemeClr val="lt1"/>
+          </a:fontRef>
+        </p:style>
+        <p:txBody>
+          <a:bodyPr rtlCol="0" anchor="ctr"/>
+          <a:lstStyle/>
+          <a:p>
+            <a:pPr algn="ctr"/>
+          </a:p>
+        </p:txBody>
+      </p:sp>
+      <p:sp>
+        <p:nvSpPr>
+          <p:cNvPr id="27" name="TextBox 26"/>
+          <p:cNvSpPr txBox="1"/>
+          <p:nvPr/>
+        </p:nvSpPr>
+        <p:spPr>
+          <a:xfrm>
             <a:off x="685800" y="5815584"/>
             <a:ext cx="10835640" cy="502920"/>
           </a:xfrm>
@@ -16114,7 +17504,7 @@
       </p:sp>
       <p:sp>
         <p:nvSpPr>
-          <p:cNvPr id="24" name="TextBox 23"/>
+          <p:cNvPr id="28" name="TextBox 27"/>
           <p:cNvSpPr txBox="1"/>
           <p:nvPr/>
         </p:nvSpPr>
@@ -16153,7 +17543,7 @@
       </p:sp>
       <p:sp>
         <p:nvSpPr>
-          <p:cNvPr id="25" name="TextBox 24"/>
+          <p:cNvPr id="29" name="TextBox 28"/>
           <p:cNvSpPr txBox="1"/>
           <p:nvPr/>
         </p:nvSpPr>
@@ -16185,7 +17575,7 @@
                 </a:solidFill>
                 <a:latin typeface="Georgia"/>
               </a:rPr>
-              <a:t>20 / 20</a:t>
+              <a:t>21 / 21</a:t>
             </a:r>
           </a:p>
         </p:txBody>
@@ -17107,7 +18497,7 @@
                 </a:solidFill>
                 <a:latin typeface="Georgia"/>
               </a:rPr>
-              <a:t>3 / 20</a:t>
+              <a:t>3 / 21</a:t>
             </a:r>
           </a:p>
         </p:txBody>
@@ -18841,7 +20231,7 @@
                 </a:solidFill>
                 <a:latin typeface="Georgia"/>
               </a:rPr>
-              <a:t>4 / 20</a:t>
+              <a:t>4 / 21</a:t>
             </a:r>
           </a:p>
         </p:txBody>
@@ -22318,7 +23708,7 @@
                 </a:solidFill>
                 <a:latin typeface="Georgia"/>
               </a:rPr>
-              <a:t>5 / 20</a:t>
+              <a:t>5 / 21</a:t>
             </a:r>
           </a:p>
         </p:txBody>
@@ -23529,7 +24919,7 @@
                 </a:solidFill>
                 <a:latin typeface="Georgia"/>
               </a:rPr>
-              <a:t>6 / 20</a:t>
+              <a:t>6 / 21</a:t>
             </a:r>
           </a:p>
         </p:txBody>
@@ -24775,7 +26165,7 @@
                 </a:solidFill>
                 <a:latin typeface="Georgia"/>
               </a:rPr>
-              <a:t>7 / 20</a:t>
+              <a:t>7 / 21</a:t>
             </a:r>
           </a:p>
         </p:txBody>
@@ -26021,7 +27411,7 @@
                 </a:solidFill>
                 <a:latin typeface="Georgia"/>
               </a:rPr>
-              <a:t>8 / 20</a:t>
+              <a:t>8 / 21</a:t>
             </a:r>
           </a:p>
         </p:txBody>
@@ -26679,7 +28069,7 @@
                 </a:solidFill>
                 <a:latin typeface="Georgia"/>
               </a:rPr>
-              <a:t>9 / 20</a:t>
+              <a:t>9 / 21</a:t>
             </a:r>
           </a:p>
         </p:txBody>

--- a/resources/deliverables/AoU_Roadmap_Refresh_Draft_Deck.pptx
+++ b/resources/deliverables/AoU_Roadmap_Refresh_Draft_Deck.pptx
@@ -541,7 +541,7 @@
               <a:rPr sz="1000">
                 <a:latin typeface="Helvetica"/>
               </a:rPr>
-              <a:t>Audience: Science Committee, AoU program leadership (Schully, Roden, Lin), NIH program staff observers, and the other four 2026 WG leads who will fit their recommendations into whatever framework this WG endorses.</a:t>
+              <a:t>Audience: Science Committee, AoU program leadership (Schully, Roden, Lin), NIH program staff observers, and the other four 2026 need-area groups whose recommendations align with the refreshed framework.</a:t>
             </a:r>
           </a:p>
           <a:p>
@@ -1021,7 +1021,7 @@
               <a:rPr sz="1000">
                 <a:latin typeface="Helvetica"/>
               </a:rPr>
-              <a:t>Rec 2 (3.38): the named portfolio is the canonical translational-WG deliverable. PGx is the highest peer-index AoU-distinctive use case (4.6×); cardiometabolic+SDOH is the largest combined volume (382 disease pubs + 458 SDOH).</a:t>
+              <a:t>Rec 2 (3.38): the named portfolio is the canonical translational need-area set. PGx is the highest peer-index AoU-distinctive use case (4.6×); cardiometabolic+SDOH is the largest combined volume (382 disease pubs + 458 SDOH).</a:t>
             </a:r>
           </a:p>
           <a:p>
@@ -1781,7 +1781,7 @@
               <a:rPr sz="1000">
                 <a:latin typeface="Helvetica"/>
               </a:rPr>
-              <a:t>The four explicit asks the Sci Com should take action on:</a:t>
+              <a:t>Summary of the priority recommendations (not decisions assigned to any group — the working groups are recognized need areas whose topics overlap and coordinate):</a:t>
             </a:r>
           </a:p>
           <a:p>
@@ -1789,10 +1789,11 @@
               <a:rPr sz="1000">
                 <a:latin typeface="Helvetica"/>
               </a:rPr>
-              <a:t>(1) ENDORSE the 9th focus area — frame-defining; can only be done by this WG.
-(2) ENDORSE the FA8 rename + commission the proteomics roadmap — pair the structural signal with the data investment.
-(3) COMMISSION the cross-WG bias framework hierarchy — WG-2 (Sanchez &amp; Cohn) convenes WG-3 + WG-4.
-(4) ALLOCATE time at the next Sci Com for the structural-framework vote — sequence WG-1 decisions BEFORE the other four WGs' Top-3 are finalized.</a:t>
+              <a:t>(1) A 9th focus area, Data, AI &amp; Methods — frame-defining; gives the fastest-rising work a home.
+(2) Rename FA8 + a proteomics-release roadmap — pair the structural signal with the data investment.
+(3) A single shared bias-in-translation standard — coordinated across the Translational, Imaging, and AI need areas rather than three semi-aligned ones.
+(4) Sequencing: the structural framework is the foundation the other need areas align to.
+(5) Researcher Workbench build priorities — governed in-VPC AI assistant, reusable-tools registry, multimodal templates.</a:t>
             </a:r>
           </a:p>
           <a:p>
@@ -1800,15 +1801,7 @@
               <a:rPr sz="1000">
                 <a:latin typeface="Helvetica"/>
               </a:rPr>
-              <a:t>Smaller asks tucked in: surface Aging/ADRD as a Tier-2 priority for WG-5 patient-facing story.</a:t>
-            </a:r>
-          </a:p>
-          <a:p>
-            <a:r>
-              <a:rPr sz="1000">
-                <a:latin typeface="Helvetica"/>
-              </a:rPr>
-              <a:t>If Sci Com only takes one action: endorse the 9th focus area. It's the structural prerequisite for everything else.</a:t>
+              <a:t>If one recommendation rises above the rest: the 9th focus area — it is the structural prerequisite for everything else.</a:t>
             </a:r>
           </a:p>
         </p:txBody>
@@ -2162,7 +2155,7 @@
               <a:rPr sz="1000">
                 <a:latin typeface="Helvetica"/>
               </a:rPr>
-              <a:t>The crosswalk's Q6 answer in one paragraph: the 8 areas hold for disease anchoring (FA1 74%, FA8 54%, FA7 50%) but three structural problems exist — (a) theme 3 methods/AI orphan, (b) wearables orphan despite being a slide-7 priority, (c) multi-omics + imaging + AI buried in FA8 / theme 3.</a:t>
+              <a:t>The crosswalk's Q6 answer in one paragraph: the 8 areas hold for disease anchoring (FA1 74%, FA8 54%, FA7 50%) but three structural problems exist — (a) theme 3 methods/AI orphan, (b) wearables with no home despite being a 2023 Roadmap priority, (c) multi-omics + imaging + AI buried in FA8 / theme 3.</a:t>
             </a:r>
           </a:p>
           <a:p>
@@ -2170,7 +2163,7 @@
               <a:rPr sz="1000">
                 <a:latin typeface="Helvetica"/>
               </a:rPr>
-              <a:t>The 9th focus area is the single most important recommendation in the entire WG package — it's the one change ONLY this WG can make, and three downstream WGs (Imaging, AI, Communications) depend on it.</a:t>
+              <a:t>The 9th focus area is the single most important recommendation — the structural change the Imaging, AI, and Communications need areas all build on.</a:t>
             </a:r>
           </a:p>
         </p:txBody>
@@ -9004,7 +8997,7 @@
                 </a:solidFill>
                 <a:latin typeface="Helvetica"/>
               </a:rPr>
-              <a:t>WG-1 Top-3: the framework changes only this WG can make</a:t>
+              <a:t>Scientific Roadmap: the structural framework recommendations</a:t>
             </a:r>
           </a:p>
         </p:txBody>
@@ -9043,7 +9036,7 @@
                 </a:solidFill>
                 <a:latin typeface="Georgia"/>
               </a:rPr>
-              <a:t>Rubric scores in parentheses. Each row includes the concrete decision we ask the Sci Com to make.</a:t>
+              <a:t>Priority scores in parentheses. Recommendations for the Committee's consideration; the related need areas overlap and coordinate.</a:t>
             </a:r>
           </a:p>
         </p:txBody>
@@ -9111,11 +9104,10 @@
                 <a:tableStyleId>{5C22544A-7EE6-4342-B048-85BDC9FD1C3A}</a:tableStyleId>
               </a:tblPr>
               <a:tblGrid>
-                <a:gridCol w="448056"/>
-                <a:gridCol w="3360420"/>
-                <a:gridCol w="4368546"/>
-                <a:gridCol w="1008126"/>
-                <a:gridCol w="2016252"/>
+                <a:gridCol w="560070"/>
+                <a:gridCol w="4704588"/>
+                <a:gridCol w="4816602"/>
+                <a:gridCol w="1120140"/>
               </a:tblGrid>
               <a:tr h="384048">
                 <a:tc>
@@ -9200,30 +9192,7 @@
                           </a:solidFill>
                           <a:latin typeface="Helvetica"/>
                         </a:rPr>
-                        <a:t>Rubric</a:t>
-                      </a:r>
-                    </a:p>
-                  </a:txBody>
-                  <a:tcPr>
-                    <a:solidFill>
-                      <a:srgbClr val="1A3A6B"/>
-                    </a:solidFill>
-                  </a:tcPr>
-                </a:tc>
-                <a:tc>
-                  <a:txBody>
-                    <a:bodyPr lIns="54864" rIns="54864" tIns="36576" bIns="36576"/>
-                    <a:lstStyle/>
-                    <a:p>
-                      <a:pPr algn="l"/>
-                      <a:r>
-                        <a:rPr sz="1200" b="1">
-                          <a:solidFill>
-                            <a:srgbClr val="FFFFFF"/>
-                          </a:solidFill>
-                          <a:latin typeface="Helvetica"/>
-                        </a:rPr>
-                        <a:t>Action requested</a:t>
+                        <a:t>Score</a:t>
                       </a:r>
                     </a:p>
                   </a:txBody>
@@ -9294,30 +9263,7 @@
                           </a:solidFill>
                           <a:latin typeface="Georgia"/>
                         </a:rPr>
-                        <a:t>Absorbs theme 3 (18% orphan), wearables (HA2 75 pubs), AI/foundation models (HA4 33 pubs), and imaging-as-data once it flows.</a:t>
-                      </a:r>
-                    </a:p>
-                  </a:txBody>
-                  <a:tcPr>
-                    <a:solidFill>
-                      <a:srgbClr val="EAF0FA"/>
-                    </a:solidFill>
-                  </a:tcPr>
-                </a:tc>
-                <a:tc>
-                  <a:txBody>
-                    <a:bodyPr wrap="square" lIns="54864" rIns="54864" tIns="27432" bIns="27432"/>
-                    <a:lstStyle/>
-                    <a:p>
-                      <a:pPr algn="l"/>
-                      <a:r>
-                        <a:rPr sz="1100">
-                          <a:solidFill>
-                            <a:srgbClr val="333333"/>
-                          </a:solidFill>
-                          <a:latin typeface="Georgia"/>
-                        </a:rPr>
-                        <a:t>3.71</a:t>
+                        <a:t>Consolidates theme 3 (18% of output with no home), wearables (75 pubs), AI/foundation models (33 pubs), and imaging-as-data once it flows.</a:t>
                       </a:r>
                     </a:p>
                   </a:txBody>
@@ -9336,11 +9282,11 @@
                       <a:r>
                         <a:rPr sz="1100" b="1">
                           <a:solidFill>
-                            <a:srgbClr val="B35900"/>
+                            <a:srgbClr val="216BB3"/>
                           </a:solidFill>
                           <a:latin typeface="Georgia"/>
                         </a:rPr>
-                        <a:t>ENDORSE the framework addition</a:t>
+                        <a:t>3.71</a:t>
                       </a:r>
                     </a:p>
                   </a:txBody>
@@ -9388,7 +9334,7 @@
                           </a:solidFill>
                           <a:latin typeface="Georgia"/>
                         </a:rPr>
-                        <a:t>Rename FA8 → "Genetics, Multi-omics &amp; Biology" + commit to proteomics roadmap</a:t>
+                        <a:t>Rename FA8 → "Genetics, Multi-omics &amp; Biology" + a proteomics-release roadmap</a:t>
                       </a:r>
                     </a:p>
                   </a:txBody>
@@ -9426,38 +9372,15 @@
                     <a:bodyPr wrap="square" lIns="54864" rIns="54864" tIns="27432" bIns="27432"/>
                     <a:lstStyle/>
                     <a:p>
-                      <a:pPr algn="l"/>
+                      <a:pPr algn="ctr"/>
                       <a:r>
-                        <a:rPr sz="1100">
+                        <a:rPr sz="1100" b="1">
                           <a:solidFill>
-                            <a:srgbClr val="333333"/>
+                            <a:srgbClr val="216BB3"/>
                           </a:solidFill>
                           <a:latin typeface="Georgia"/>
                         </a:rPr>
                         <a:t>3.38</a:t>
-                      </a:r>
-                    </a:p>
-                  </a:txBody>
-                  <a:tcPr>
-                    <a:solidFill>
-                      <a:srgbClr val="FFFFFF"/>
-                    </a:solidFill>
-                  </a:tcPr>
-                </a:tc>
-                <a:tc>
-                  <a:txBody>
-                    <a:bodyPr wrap="square" lIns="54864" rIns="54864" tIns="27432" bIns="27432"/>
-                    <a:lstStyle/>
-                    <a:p>
-                      <a:pPr algn="ctr"/>
-                      <a:r>
-                        <a:rPr sz="1100" b="1">
-                          <a:solidFill>
-                            <a:srgbClr val="B35900"/>
-                          </a:solidFill>
-                          <a:latin typeface="Georgia"/>
-                        </a:rPr>
-                        <a:t>ENDORSE rename + AUTHORIZE release roadmap</a:t>
                       </a:r>
                     </a:p>
                   </a:txBody>
@@ -9505,7 +9428,7 @@
                           </a:solidFill>
                           <a:latin typeface="Georgia"/>
                         </a:rPr>
-                        <a:t>Bundle FA reframes: FA4 toward ROR implementation; FA2 → "Maternal Health"; FA6 environmental-exposure linkage commitment</a:t>
+                        <a:t>Bundle focus-area reframes: FA4 toward ROR implementation; FA2 → "Maternal Health"; FA6 environmental-exposure linkage</a:t>
                       </a:r>
                     </a:p>
                   </a:txBody>
@@ -9543,38 +9466,15 @@
                     <a:bodyPr wrap="square" lIns="54864" rIns="54864" tIns="27432" bIns="27432"/>
                     <a:lstStyle/>
                     <a:p>
-                      <a:pPr algn="l"/>
+                      <a:pPr algn="ctr"/>
                       <a:r>
-                        <a:rPr sz="1100">
+                        <a:rPr sz="1100" b="1">
                           <a:solidFill>
-                            <a:srgbClr val="333333"/>
+                            <a:srgbClr val="216BB3"/>
                           </a:solidFill>
                           <a:latin typeface="Georgia"/>
                         </a:rPr>
                         <a:t>3.00</a:t>
-                      </a:r>
-                    </a:p>
-                  </a:txBody>
-                  <a:tcPr>
-                    <a:solidFill>
-                      <a:srgbClr val="EAF0FA"/>
-                    </a:solidFill>
-                  </a:tcPr>
-                </a:tc>
-                <a:tc>
-                  <a:txBody>
-                    <a:bodyPr wrap="square" lIns="54864" rIns="54864" tIns="27432" bIns="27432"/>
-                    <a:lstStyle/>
-                    <a:p>
-                      <a:pPr algn="ctr"/>
-                      <a:r>
-                        <a:rPr sz="1100" b="1">
-                          <a:solidFill>
-                            <a:srgbClr val="B35900"/>
-                          </a:solidFill>
-                          <a:latin typeface="Georgia"/>
-                        </a:rPr>
-                        <a:t>DISCUSS + vote on the three sub-items</a:t>
                       </a:r>
                     </a:p>
                   </a:txBody>
@@ -9669,7 +9569,7 @@
                 </a:solidFill>
                 <a:latin typeface="Helvetica"/>
               </a:rPr>
-              <a:t>Why these and not more?  The Sci Com rubric format limits us to three. Each here is structural; each is uniquely WG-1.</a:t>
+              <a:t>Why these?  They are the structural framework changes — the prerequisite the other recognized need areas build on.</a:t>
             </a:r>
           </a:p>
         </p:txBody>
@@ -15604,7 +15504,7 @@
                 </a:solidFill>
                 <a:latin typeface="Georgia"/>
               </a:rPr>
-              <a:t>— structural review of the framework. ONLY this WG can change it.</a:t>
+              <a:t>— structural review of the framework, the foundation the other 2026 need areas build on.</a:t>
             </a:r>
           </a:p>
         </p:txBody>
@@ -15868,7 +15768,7 @@
                 </a:solidFill>
                 <a:latin typeface="Helvetica"/>
               </a:rPr>
-              <a:t>Caveats — three things the Sci Com should know before acting</a:t>
+              <a:t>Caveats — three things to keep in mind when reading these findings</a:t>
             </a:r>
           </a:p>
         </p:txBody>
@@ -16526,7 +16426,7 @@
                 </a:solidFill>
                 <a:latin typeface="Helvetica"/>
               </a:rPr>
-              <a:t>What we ask the Science Committee to decide</a:t>
+              <a:t>Priority recommendations, for the Committee's consideration</a:t>
             </a:r>
           </a:p>
         </p:txBody>
@@ -16565,7 +16465,7 @@
                 </a:solidFill>
                 <a:latin typeface="Georgia"/>
               </a:rPr>
-              <a:t>Five concrete decisions today; one calendar commitment for the cross-WG hierarchy.</a:t>
+              <a:t>Grouped by recognized need area; the areas overlap and are meant to be coordinated, not actioned by any single group.</a:t>
             </a:r>
           </a:p>
         </p:txBody>
@@ -16692,7 +16592,7 @@
                 </a:solidFill>
                 <a:latin typeface="Helvetica"/>
               </a:rPr>
-              <a:t>ENDORSE</a:t>
+              <a:t>ROADMAP</a:t>
             </a:r>
           </a:p>
         </p:txBody>
@@ -16731,7 +16631,7 @@
                 </a:solidFill>
                 <a:latin typeface="Helvetica"/>
               </a:rPr>
-              <a:t>the addition of a 9th focus area: "Data, AI &amp; Methods"</a:t>
+              <a:t>A 9th focus area: "Data, AI &amp; Methods"</a:t>
             </a:r>
           </a:p>
         </p:txBody>
@@ -16770,7 +16670,7 @@
                 </a:solidFill>
                 <a:latin typeface="Georgia"/>
               </a:rPr>
-              <a:t>Frame-defining for WG-3 (Imaging) and WG-4 (AI). Without it, downstream WG work is permanently orphaned.</a:t>
+              <a:t>Frame-defining for the Imaging and AI need areas; gives the field's fastest-rising work a coherent home in the framework.</a:t>
             </a:r>
           </a:p>
         </p:txBody>
@@ -16853,7 +16753,7 @@
                 </a:solidFill>
                 <a:latin typeface="Helvetica"/>
               </a:rPr>
-              <a:t>ENDORSE</a:t>
+              <a:t>ROADMAP</a:t>
             </a:r>
           </a:p>
         </p:txBody>
@@ -16892,7 +16792,7 @@
                 </a:solidFill>
                 <a:latin typeface="Helvetica"/>
               </a:rPr>
-              <a:t>the FA8 rename to "Genetics, Multi-omics &amp; Biology" + commission the proteomics-release roadmap</a:t>
+              <a:t>Rename FA8 to "Genetics, Multi-omics &amp; Biology" + a proteomics-release roadmap</a:t>
             </a:r>
           </a:p>
         </p:txBody>
@@ -16931,7 +16831,7 @@
                 </a:solidFill>
                 <a:latin typeface="Georgia"/>
               </a:rPr>
-              <a:t>Signals to the field that the 2026 omics releases have a home. Pair the rename with the data investment.</a:t>
+              <a:t>Signals that the 2026 omics releases have a home. Pair the rename with the data investment.</a:t>
             </a:r>
           </a:p>
         </p:txBody>
@@ -17014,7 +16914,7 @@
                 </a:solidFill>
                 <a:latin typeface="Helvetica"/>
               </a:rPr>
-              <a:t>COMMISSION</a:t>
+              <a:t>CROSS-CUT</a:t>
             </a:r>
           </a:p>
         </p:txBody>
@@ -17053,7 +16953,7 @@
                 </a:solidFill>
                 <a:latin typeface="Helvetica"/>
               </a:rPr>
-              <a:t>the cross-WG bias-in-translation framework hierarchy (WG-2 normative → WG-3 imaging → WG-4 AI)</a:t>
+              <a:t>A single shared bias-in-translation standard (normative + imaging + AI)</a:t>
             </a:r>
           </a:p>
         </p:txBody>
@@ -17092,7 +16992,7 @@
                 </a:solidFill>
                 <a:latin typeface="Georgia"/>
               </a:rPr>
-              <a:t>Single AoU bias-reporting standard rather than three semi-aligned frameworks. WG-2 (Sanchez &amp; Cohn) convenes.</a:t>
+              <a:t>One All of Us bias-reporting standard rather than three semi-aligned ones — coordinated across the Translational, Imaging, and AI need areas.</a:t>
             </a:r>
           </a:p>
         </p:txBody>
@@ -17175,7 +17075,7 @@
                 </a:solidFill>
                 <a:latin typeface="Helvetica"/>
               </a:rPr>
-              <a:t>ALLOCATE</a:t>
+              <a:t>SEQUENCE</a:t>
             </a:r>
           </a:p>
         </p:txBody>
@@ -17214,7 +17114,7 @@
                 </a:solidFill>
                 <a:latin typeface="Helvetica"/>
               </a:rPr>
-              <a:t>time at the next Science Committee for the structural-framework vote (FA9 + FA8 rename + FA reframes)</a:t>
+              <a:t>Settle the structural framework first</a:t>
             </a:r>
           </a:p>
         </p:txBody>
@@ -17253,7 +17153,7 @@
                 </a:solidFill>
                 <a:latin typeface="Georgia"/>
               </a:rPr>
-              <a:t>These three structural decisions are the WG-1 deliverable; they should be settled before the other four WGs' Top-3 are finalized.</a:t>
+              <a:t>The framework changes are the foundation; aligning the other need areas to them works best once the framework is set.</a:t>
             </a:r>
           </a:p>
         </p:txBody>
@@ -17336,7 +17236,7 @@
                 </a:solidFill>
                 <a:latin typeface="Helvetica"/>
               </a:rPr>
-              <a:t>COMMISSION</a:t>
+              <a:t>WORKBENCH</a:t>
             </a:r>
           </a:p>
         </p:txBody>
@@ -17375,7 +17275,7 @@
                 </a:solidFill>
                 <a:latin typeface="Helvetica"/>
               </a:rPr>
-              <a:t>the Researcher Workbench build priorities: a governed in-VPC AI co-scientist, a reusable-apps/workflow registry, and multimodal-integration templates</a:t>
+              <a:t>Researcher Workbench build priorities: a governed in-VPC AI assistant, a reusable-tools registry, and multimodal templates</a:t>
             </a:r>
           </a:p>
         </p:txBody>
@@ -17414,7 +17314,7 @@
                 </a:solidFill>
                 <a:latin typeface="Georgia"/>
               </a:rPr>
-              <a:t>Evidence-verified gaps vs N3C, Terra, BDC, UKB-RAP &amp; Kids First (slide 17). The in-VPC LLM is legal under the existing Google Cloud BAA. Operationalizes FA9 + the AI co-scientist.</a:t>
+              <a:t>Evidence-verified gaps vs N3C, Terra, BDC, UKB-RAP &amp; Kids First (slide 17). The in-VPC LLM is permissible under the existing Google Cloud BAA.</a:t>
             </a:r>
           </a:p>
         </p:txBody>
@@ -23848,7 +23748,7 @@
                 </a:solidFill>
                 <a:latin typeface="Georgia"/>
               </a:rPr>
-              <a:t>Q6 answer: yes at the top level, with three named exceptions only WG-1 can address.</a:t>
+              <a:t>Q6 answer: yes at the top level, with three named exceptions to address in the Roadmap framework.</a:t>
             </a:r>
           </a:p>
         </p:txBody>
@@ -23906,7 +23806,7 @@
         <p:spPr>
           <a:xfrm>
             <a:off x="502920" y="1280160"/>
-            <a:ext cx="3721608" cy="3931920"/>
+            <a:ext cx="3721608" cy="3520440"/>
           </a:xfrm>
           <a:prstGeom prst="rect">
             <a:avLst/>
@@ -24074,7 +23974,7 @@
         <p:spPr>
           <a:xfrm>
             <a:off x="594360" y="2651760"/>
-            <a:ext cx="3538728" cy="2560320"/>
+            <a:ext cx="3538728" cy="2148840"/>
           </a:xfrm>
           <a:prstGeom prst="rect">
             <a:avLst/>
@@ -24181,7 +24081,7 @@
         <p:spPr>
           <a:xfrm>
             <a:off x="4334256" y="1280160"/>
-            <a:ext cx="3721608" cy="3931920"/>
+            <a:ext cx="3721608" cy="3520440"/>
           </a:xfrm>
           <a:prstGeom prst="rect">
             <a:avLst/>
@@ -24349,7 +24249,7 @@
         <p:spPr>
           <a:xfrm>
             <a:off x="4425696" y="2651760"/>
-            <a:ext cx="3538728" cy="2560320"/>
+            <a:ext cx="3538728" cy="2148840"/>
           </a:xfrm>
           <a:prstGeom prst="rect">
             <a:avLst/>
@@ -24386,7 +24286,7 @@
                 </a:solidFill>
                 <a:latin typeface="Georgia"/>
               </a:rPr>
-              <a:t>75 pubs (5.4% share) — slide-7 priority that has nowhere to live in the 8 areas.</a:t>
+              <a:t>75 pubs (5.4% share) — a 2023 Roadmap priority that has nowhere to live in the 8 areas.</a:t>
             </a:r>
           </a:p>
           <a:p>
@@ -24456,7 +24356,7 @@
         <p:spPr>
           <a:xfrm>
             <a:off x="8165592" y="1280160"/>
-            <a:ext cx="3721608" cy="3931920"/>
+            <a:ext cx="3721608" cy="3520440"/>
           </a:xfrm>
           <a:prstGeom prst="rect">
             <a:avLst/>
@@ -24624,7 +24524,7 @@
         <p:spPr>
           <a:xfrm>
             <a:off x="8257032" y="2651760"/>
-            <a:ext cx="3538728" cy="2560320"/>
+            <a:ext cx="3538728" cy="2148840"/>
           </a:xfrm>
           <a:prstGeom prst="rect">
             <a:avLst/>
@@ -24661,7 +24561,7 @@
                 </a:solidFill>
                 <a:latin typeface="Georgia"/>
               </a:rPr>
-              <a:t>Multi-omics is a slide-7 2023+ priority that is buried inside FA8.</a:t>
+              <a:t>Multi-omics is a 2023 Roadmap priority that is buried inside FA8.</a:t>
             </a:r>
           </a:p>
           <a:p>
@@ -24724,7 +24624,46 @@
       </p:sp>
       <p:sp>
         <p:nvSpPr>
-          <p:cNvPr id="21" name="Rectangle 20"/>
+          <p:cNvPr id="21" name="TextBox 20"/>
+          <p:cNvSpPr txBox="1"/>
+          <p:nvPr/>
+        </p:nvSpPr>
+        <p:spPr>
+          <a:xfrm>
+            <a:off x="502920" y="4956048"/>
+            <a:ext cx="11201400" cy="384048"/>
+          </a:xfrm>
+          <a:prstGeom prst="rect">
+            <a:avLst/>
+          </a:prstGeom>
+          <a:noFill/>
+        </p:spPr>
+        <p:txBody>
+          <a:bodyPr wrap="square" lIns="36576" rIns="36576" tIns="18288" bIns="18288" anchor="t">
+            <a:spAutoFit/>
+          </a:bodyPr>
+          <a:lstStyle/>
+          <a:p>
+            <a:pPr algn="l">
+              <a:lnSpc>
+                <a:spcPct val="112000"/>
+              </a:lnSpc>
+            </a:pPr>
+            <a:r>
+              <a:rPr sz="900" b="0" i="1">
+                <a:solidFill>
+                  <a:srgbClr val="666666"/>
+                </a:solidFill>
+                <a:latin typeface="Georgia"/>
+              </a:rPr>
+              <a:t>For reference — the current 8 focus areas:  (1) Prevalent Common &amp; Rare Conditions · (2) Maternal &amp; Child Health · (3) Healthy Aging &amp; Resilience · (4) Return of Results on Individual &amp; Population Health · (5) Lifestyle, Substance &amp; Behavioral Health · (6) Environment · (7) Health Equity · (8) Genetics &amp; Biology</a:t>
+            </a:r>
+          </a:p>
+        </p:txBody>
+      </p:sp>
+      <p:sp>
+        <p:nvSpPr>
+          <p:cNvPr id="22" name="Rectangle 21"/>
           <p:cNvSpPr/>
           <p:nvPr/>
         </p:nvSpPr>
@@ -24770,7 +24709,7 @@
       </p:sp>
       <p:sp>
         <p:nvSpPr>
-          <p:cNvPr id="22" name="TextBox 21"/>
+          <p:cNvPr id="23" name="TextBox 22"/>
           <p:cNvSpPr txBox="1"/>
           <p:nvPr/>
         </p:nvSpPr>
@@ -24802,14 +24741,14 @@
                 </a:solidFill>
                 <a:latin typeface="Helvetica"/>
               </a:rPr>
-              <a:t>WG-1 recommendation (Rec 1): add a 9th focus area — "Data, AI &amp; Methods"</a:t>
-            </a:r>
-          </a:p>
-        </p:txBody>
-      </p:sp>
-      <p:sp>
-        <p:nvSpPr>
-          <p:cNvPr id="23" name="TextBox 22"/>
+              <a:t>Recommendation 1: add a 9th focus area — "Data, AI &amp; Methods"</a:t>
+            </a:r>
+          </a:p>
+        </p:txBody>
+      </p:sp>
+      <p:sp>
+        <p:nvSpPr>
+          <p:cNvPr id="24" name="TextBox 23"/>
           <p:cNvSpPr txBox="1"/>
           <p:nvPr/>
         </p:nvSpPr>
@@ -24841,14 +24780,14 @@
                 </a:solidFill>
                 <a:latin typeface="Georgia"/>
               </a:rPr>
-              <a:t>Absorbs theme 3 (the 18% orphan), wearables, AI/foundation models, and imaging-as-data once it flows. Without it, WG-3 (Imaging) and WG-4 (AI) recommendations have no coherent home in the Roadmap.</a:t>
-            </a:r>
-          </a:p>
-        </p:txBody>
-      </p:sp>
-      <p:sp>
-        <p:nvSpPr>
-          <p:cNvPr id="24" name="TextBox 23"/>
+              <a:t>Consolidates theme 3 (the 18% with no home), wearables, AI/foundation models, and imaging-as-data once it flows. Without it, the Imaging and AI need areas have no coherent home in the Roadmap.</a:t>
+            </a:r>
+          </a:p>
+        </p:txBody>
+      </p:sp>
+      <p:sp>
+        <p:nvSpPr>
+          <p:cNvPr id="25" name="TextBox 24"/>
           <p:cNvSpPr txBox="1"/>
           <p:nvPr/>
         </p:nvSpPr>
@@ -24887,7 +24826,7 @@
       </p:sp>
       <p:sp>
         <p:nvSpPr>
-          <p:cNvPr id="25" name="TextBox 24"/>
+          <p:cNvPr id="26" name="TextBox 25"/>
           <p:cNvSpPr txBox="1"/>
           <p:nvPr/>
         </p:nvSpPr>
@@ -25020,7 +24959,7 @@
                 </a:solidFill>
                 <a:latin typeface="Helvetica"/>
               </a:rPr>
-              <a:t>Four slide-7 priorities are already realized in the corpus</a:t>
+              <a:t>Four 2023 Roadmap priorities are already realized in the corpus</a:t>
             </a:r>
           </a:p>
         </p:txBody>
@@ -26266,7 +26205,7 @@
                 </a:solidFill>
                 <a:latin typeface="Helvetica"/>
               </a:rPr>
-              <a:t>Four slide-7 priorities are aspirational — pending upstream investment</a:t>
+              <a:t>Four 2023 Roadmap priorities are aspirational — pending upstream investment</a:t>
             </a:r>
           </a:p>
         </p:txBody>

--- a/resources/deliverables/AoU_Roadmap_Refresh_Draft_Deck.pptx
+++ b/resources/deliverables/AoU_Roadmap_Refresh_Draft_Deck.pptx
@@ -932,7 +932,7 @@
               <a:rPr sz="1000">
                 <a:latin typeface="Helvetica"/>
               </a:rPr>
-              <a:t>Rec 3 (3.00 mean): three small structural fixes bundled. FA4 toward ROR implementation (well-evidenced; theme 17 ELSI −12.3); FA2 → 'Maternal Health' (judgment about naming accuracy; politically sensitive — frame as accuracy not deprioritization); FA6 environmental linkage (largest demand-supply gap; engineering not data acquisition).</a:t>
+              <a:t>Rec 3 (3.00 mean): three small structural fixes bundled. FA4 toward ROR implementation (well-evidenced; theme 17 ELSI −12.4); FA2 → 'Maternal Health' (judgment about naming accuracy; politically sensitive — frame as accuracy not deprioritization); FA6 environmental linkage (largest demand-supply gap; engineering not data acquisition).</a:t>
             </a:r>
           </a:p>
         </p:txBody>
@@ -9451,7 +9451,7 @@
                           </a:solidFill>
                           <a:latin typeface="Georgia"/>
                         </a:rPr>
-                        <a:t>FA4 trend −9.6 (ELSI work maturing out, ROR implementation continues); FA2 has no Child content; FA6 is the largest demand-supply gap.</a:t>
+                        <a:t>FA4 trend −9.8 (ELSI work maturing out, ROR implementation continues); FA2 has no Child content; FA6 is the largest demand-supply gap.</a:t>
                       </a:r>
                     </a:p>
                   </a:txBody>
